--- a/Task 9/Presentation/DoVeSo_BaoCao_Lab3.pptx
+++ b/Task 9/Presentation/DoVeSo_BaoCao_Lab3.pptx
@@ -11,26 +11,26 @@
     <p:sldId id="259" r:id="rId5"/>
     <p:sldId id="260" r:id="rId6"/>
     <p:sldId id="261" r:id="rId7"/>
-    <p:sldId id="263" r:id="rId8"/>
-    <p:sldId id="264" r:id="rId9"/>
-    <p:sldId id="265" r:id="rId10"/>
-    <p:sldId id="266" r:id="rId11"/>
-    <p:sldId id="267" r:id="rId12"/>
-    <p:sldId id="268" r:id="rId13"/>
-    <p:sldId id="269" r:id="rId14"/>
-    <p:sldId id="270" r:id="rId15"/>
-    <p:sldId id="271" r:id="rId16"/>
-    <p:sldId id="272" r:id="rId17"/>
-    <p:sldId id="273" r:id="rId18"/>
-    <p:sldId id="274" r:id="rId19"/>
-    <p:sldId id="275" r:id="rId20"/>
-    <p:sldId id="276" r:id="rId21"/>
-    <p:sldId id="277" r:id="rId22"/>
-    <p:sldId id="278" r:id="rId23"/>
-    <p:sldId id="279" r:id="rId24"/>
-    <p:sldId id="280" r:id="rId25"/>
-    <p:sldId id="281" r:id="rId26"/>
-    <p:sldId id="282" r:id="rId27"/>
+    <p:sldId id="262" r:id="rId8"/>
+    <p:sldId id="263" r:id="rId9"/>
+    <p:sldId id="264" r:id="rId10"/>
+    <p:sldId id="265" r:id="rId11"/>
+    <p:sldId id="266" r:id="rId12"/>
+    <p:sldId id="267" r:id="rId13"/>
+    <p:sldId id="268" r:id="rId14"/>
+    <p:sldId id="269" r:id="rId15"/>
+    <p:sldId id="270" r:id="rId16"/>
+    <p:sldId id="271" r:id="rId17"/>
+    <p:sldId id="272" r:id="rId18"/>
+    <p:sldId id="273" r:id="rId19"/>
+    <p:sldId id="274" r:id="rId20"/>
+    <p:sldId id="275" r:id="rId21"/>
+    <p:sldId id="276" r:id="rId22"/>
+    <p:sldId id="277" r:id="rId23"/>
+    <p:sldId id="278" r:id="rId24"/>
+    <p:sldId id="279" r:id="rId25"/>
+    <p:sldId id="280" r:id="rId26"/>
+    <p:sldId id="281" r:id="rId27"/>
   </p:sldIdLst>
   <p:sldSz cx="12192000" cy="6858000"/>
   <p:notesSz cx="6858000" cy="9144000"/>
@@ -327,7 +327,7 @@
           <a:p>
             <a:fld id="{5BCAD085-E8A6-8845-BD4E-CB4CCA059FC4}" type="datetimeFigureOut">
               <a:rPr lang="en-US" smtClean="0"/>
-              <a:t>7/31/2026</a:t>
+              <a:t>8/1/2026</a:t>
             </a:fld>
             <a:endParaRPr lang="en-US"/>
           </a:p>
@@ -495,7 +495,7 @@
           <a:p>
             <a:fld id="{5BCAD085-E8A6-8845-BD4E-CB4CCA059FC4}" type="datetimeFigureOut">
               <a:rPr lang="en-US" smtClean="0"/>
-              <a:t>7/31/2026</a:t>
+              <a:t>8/1/2026</a:t>
             </a:fld>
             <a:endParaRPr lang="en-US"/>
           </a:p>
@@ -673,7 +673,7 @@
           <a:p>
             <a:fld id="{5BCAD085-E8A6-8845-BD4E-CB4CCA059FC4}" type="datetimeFigureOut">
               <a:rPr lang="en-US" smtClean="0"/>
-              <a:t>7/31/2026</a:t>
+              <a:t>8/1/2026</a:t>
             </a:fld>
             <a:endParaRPr lang="en-US"/>
           </a:p>
@@ -841,7 +841,7 @@
           <a:p>
             <a:fld id="{5BCAD085-E8A6-8845-BD4E-CB4CCA059FC4}" type="datetimeFigureOut">
               <a:rPr lang="en-US" smtClean="0"/>
-              <a:t>7/31/2026</a:t>
+              <a:t>8/1/2026</a:t>
             </a:fld>
             <a:endParaRPr lang="en-US"/>
           </a:p>
@@ -1086,7 +1086,7 @@
           <a:p>
             <a:fld id="{5BCAD085-E8A6-8845-BD4E-CB4CCA059FC4}" type="datetimeFigureOut">
               <a:rPr lang="en-US" smtClean="0"/>
-              <a:t>7/31/2026</a:t>
+              <a:t>8/1/2026</a:t>
             </a:fld>
             <a:endParaRPr lang="en-US"/>
           </a:p>
@@ -1371,7 +1371,7 @@
           <a:p>
             <a:fld id="{5BCAD085-E8A6-8845-BD4E-CB4CCA059FC4}" type="datetimeFigureOut">
               <a:rPr lang="en-US" smtClean="0"/>
-              <a:t>7/31/2026</a:t>
+              <a:t>8/1/2026</a:t>
             </a:fld>
             <a:endParaRPr lang="en-US"/>
           </a:p>
@@ -1790,7 +1790,7 @@
           <a:p>
             <a:fld id="{5BCAD085-E8A6-8845-BD4E-CB4CCA059FC4}" type="datetimeFigureOut">
               <a:rPr lang="en-US" smtClean="0"/>
-              <a:t>7/31/2026</a:t>
+              <a:t>8/1/2026</a:t>
             </a:fld>
             <a:endParaRPr lang="en-US"/>
           </a:p>
@@ -1907,7 +1907,7 @@
           <a:p>
             <a:fld id="{5BCAD085-E8A6-8845-BD4E-CB4CCA059FC4}" type="datetimeFigureOut">
               <a:rPr lang="en-US" smtClean="0"/>
-              <a:t>7/31/2026</a:t>
+              <a:t>8/1/2026</a:t>
             </a:fld>
             <a:endParaRPr lang="en-US"/>
           </a:p>
@@ -2002,7 +2002,7 @@
           <a:p>
             <a:fld id="{5BCAD085-E8A6-8845-BD4E-CB4CCA059FC4}" type="datetimeFigureOut">
               <a:rPr lang="en-US" smtClean="0"/>
-              <a:t>7/31/2026</a:t>
+              <a:t>8/1/2026</a:t>
             </a:fld>
             <a:endParaRPr lang="en-US"/>
           </a:p>
@@ -2277,7 +2277,7 @@
           <a:p>
             <a:fld id="{5BCAD085-E8A6-8845-BD4E-CB4CCA059FC4}" type="datetimeFigureOut">
               <a:rPr lang="en-US" smtClean="0"/>
-              <a:t>7/31/2026</a:t>
+              <a:t>8/1/2026</a:t>
             </a:fld>
             <a:endParaRPr lang="en-US"/>
           </a:p>
@@ -2529,7 +2529,7 @@
           <a:p>
             <a:fld id="{5BCAD085-E8A6-8845-BD4E-CB4CCA059FC4}" type="datetimeFigureOut">
               <a:rPr lang="en-US" smtClean="0"/>
-              <a:t>7/31/2026</a:t>
+              <a:t>8/1/2026</a:t>
             </a:fld>
             <a:endParaRPr lang="en-US"/>
           </a:p>
@@ -2740,7 +2740,7 @@
           <a:p>
             <a:fld id="{5BCAD085-E8A6-8845-BD4E-CB4CCA059FC4}" type="datetimeFigureOut">
               <a:rPr lang="en-US" smtClean="0"/>
-              <a:t>7/31/2026</a:t>
+              <a:t>8/1/2026</a:t>
             </a:fld>
             <a:endParaRPr lang="en-US"/>
           </a:p>
@@ -3363,7 +3363,7 @@
         <p:spPr>
           <a:xfrm>
             <a:off x="914400" y="2971800"/>
-            <a:ext cx="8961120" cy="345864"/>
+            <a:ext cx="8961120" cy="731520"/>
           </a:xfrm>
           <a:prstGeom prst="rect">
             <a:avLst/>
@@ -3391,209 +3391,14 @@
               </a:defRPr>
             </a:pPr>
             <a:r>
-              <a:rPr sz="2300" b="0" dirty="0" err="1">
+              <a:rPr sz="2300" b="0">
                 <a:solidFill>
                   <a:srgbClr val="E5E7EB"/>
                 </a:solidFill>
                 <a:latin typeface="Arial"/>
               </a:rPr>
-              <a:t>Hệ</a:t>
-            </a:r>
-            <a:r>
-              <a:rPr sz="2300" b="0" dirty="0">
-                <a:solidFill>
-                  <a:srgbClr val="E5E7EB"/>
-                </a:solidFill>
-                <a:latin typeface="Arial"/>
-              </a:rPr>
-              <a:t> </a:t>
-            </a:r>
-            <a:r>
-              <a:rPr sz="2300" b="0" dirty="0" err="1">
-                <a:solidFill>
-                  <a:srgbClr val="E5E7EB"/>
-                </a:solidFill>
-                <a:latin typeface="Arial"/>
-              </a:rPr>
-              <a:t>thống</a:t>
-            </a:r>
-            <a:r>
-              <a:rPr sz="2300" b="0" dirty="0">
-                <a:solidFill>
-                  <a:srgbClr val="E5E7EB"/>
-                </a:solidFill>
-                <a:latin typeface="Arial"/>
-              </a:rPr>
-              <a:t> </a:t>
-            </a:r>
-            <a:r>
-              <a:rPr sz="2300" b="0" dirty="0" err="1">
-                <a:solidFill>
-                  <a:srgbClr val="E5E7EB"/>
-                </a:solidFill>
-                <a:latin typeface="Arial"/>
-              </a:rPr>
-              <a:t>tra</a:t>
-            </a:r>
-            <a:r>
-              <a:rPr sz="2300" b="0" dirty="0">
-                <a:solidFill>
-                  <a:srgbClr val="E5E7EB"/>
-                </a:solidFill>
-                <a:latin typeface="Arial"/>
-              </a:rPr>
-              <a:t> </a:t>
-            </a:r>
-            <a:r>
-              <a:rPr sz="2300" b="0" dirty="0" err="1">
-                <a:solidFill>
-                  <a:srgbClr val="E5E7EB"/>
-                </a:solidFill>
-                <a:latin typeface="Arial"/>
-              </a:rPr>
-              <a:t>cứu</a:t>
-            </a:r>
-            <a:r>
-              <a:rPr sz="2300" b="0" dirty="0">
-                <a:solidFill>
-                  <a:srgbClr val="E5E7EB"/>
-                </a:solidFill>
-                <a:latin typeface="Arial"/>
-              </a:rPr>
-              <a:t> </a:t>
-            </a:r>
-            <a:r>
-              <a:rPr sz="2300" b="0" dirty="0" err="1">
-                <a:solidFill>
-                  <a:srgbClr val="E5E7EB"/>
-                </a:solidFill>
-                <a:latin typeface="Arial"/>
-              </a:rPr>
-              <a:t>và</a:t>
-            </a:r>
-            <a:r>
-              <a:rPr sz="2300" b="0" dirty="0">
-                <a:solidFill>
-                  <a:srgbClr val="E5E7EB"/>
-                </a:solidFill>
-                <a:latin typeface="Arial"/>
-              </a:rPr>
-              <a:t> </a:t>
-            </a:r>
-            <a:r>
-              <a:rPr sz="2300" b="0" dirty="0" err="1">
-                <a:solidFill>
-                  <a:srgbClr val="E5E7EB"/>
-                </a:solidFill>
-                <a:latin typeface="Arial"/>
-              </a:rPr>
-              <a:t>quản</a:t>
-            </a:r>
-            <a:r>
-              <a:rPr sz="2300" b="0" dirty="0">
-                <a:solidFill>
-                  <a:srgbClr val="E5E7EB"/>
-                </a:solidFill>
-                <a:latin typeface="Arial"/>
-              </a:rPr>
-              <a:t> </a:t>
-            </a:r>
-            <a:r>
-              <a:rPr sz="2300" b="0" dirty="0" err="1">
-                <a:solidFill>
-                  <a:srgbClr val="E5E7EB"/>
-                </a:solidFill>
-                <a:latin typeface="Arial"/>
-              </a:rPr>
-              <a:t>lý</a:t>
-            </a:r>
-            <a:r>
-              <a:rPr sz="2300" b="0" dirty="0">
-                <a:solidFill>
-                  <a:srgbClr val="E5E7EB"/>
-                </a:solidFill>
-                <a:latin typeface="Arial"/>
-              </a:rPr>
-              <a:t> </a:t>
-            </a:r>
-            <a:r>
-              <a:rPr sz="2300" b="0" dirty="0" err="1">
-                <a:solidFill>
-                  <a:srgbClr val="E5E7EB"/>
-                </a:solidFill>
-                <a:latin typeface="Arial"/>
-              </a:rPr>
-              <a:t>kết</a:t>
-            </a:r>
-            <a:r>
-              <a:rPr sz="2300" b="0" dirty="0">
-                <a:solidFill>
-                  <a:srgbClr val="E5E7EB"/>
-                </a:solidFill>
-                <a:latin typeface="Arial"/>
-              </a:rPr>
-              <a:t> </a:t>
-            </a:r>
-            <a:r>
-              <a:rPr sz="2300" b="0" dirty="0" err="1">
-                <a:solidFill>
-                  <a:srgbClr val="E5E7EB"/>
-                </a:solidFill>
-                <a:latin typeface="Arial"/>
-              </a:rPr>
-              <a:t>quả</a:t>
-            </a:r>
-            <a:r>
-              <a:rPr sz="2300" b="0" dirty="0">
-                <a:solidFill>
-                  <a:srgbClr val="E5E7EB"/>
-                </a:solidFill>
-                <a:latin typeface="Arial"/>
-              </a:rPr>
-              <a:t> </a:t>
-            </a:r>
-            <a:r>
-              <a:rPr sz="2300" b="0" dirty="0" err="1">
-                <a:solidFill>
-                  <a:srgbClr val="E5E7EB"/>
-                </a:solidFill>
-                <a:latin typeface="Arial"/>
-              </a:rPr>
-              <a:t>xổ</a:t>
-            </a:r>
-            <a:r>
-              <a:rPr sz="2300" b="0" dirty="0">
-                <a:solidFill>
-                  <a:srgbClr val="E5E7EB"/>
-                </a:solidFill>
-                <a:latin typeface="Arial"/>
-              </a:rPr>
-              <a:t> </a:t>
-            </a:r>
-            <a:r>
-              <a:rPr sz="2300" b="0" dirty="0" err="1">
-                <a:solidFill>
-                  <a:srgbClr val="E5E7EB"/>
-                </a:solidFill>
-                <a:latin typeface="Arial"/>
-              </a:rPr>
-              <a:t>s</a:t>
-            </a:r>
-            <a:r>
-              <a:rPr lang="en-US" sz="2300" b="0" dirty="0" err="1">
-                <a:solidFill>
-                  <a:srgbClr val="E5E7EB"/>
-                </a:solidFill>
-                <a:latin typeface="Arial"/>
-              </a:rPr>
-              <a:t>ố</a:t>
-            </a:r>
-            <a:endParaRPr sz="2300" b="0" dirty="0">
-              <a:solidFill>
-                <a:srgbClr val="E5E7EB"/>
-              </a:solidFill>
-              <a:latin typeface="Arial"/>
-            </a:endParaRPr>
+              <a:t>Hệ thống tra cứu và quản lý kết quả xổ số kiến thiết</a:t>
+            </a:r>
           </a:p>
         </p:txBody>
       </p:sp>
@@ -4075,7 +3880,7 @@
                 </a:solidFill>
                 <a:latin typeface="Arial"/>
               </a:rPr>
-              <a:t>11</a:t>
+              <a:t>10</a:t>
             </a:r>
           </a:p>
         </p:txBody>
@@ -4097,11 +3902,11 @@
             </a:avLst>
           </a:prstGeom>
           <a:solidFill>
-            <a:srgbClr val="FFFFFF"/>
+            <a:srgbClr val="E8EDF4"/>
           </a:solidFill>
-          <a:ln w="12700">
+          <a:ln w="17780">
             <a:solidFill>
-              <a:srgbClr val="D9E2EC"/>
+              <a:srgbClr val="B0BEC5"/>
             </a:solidFill>
           </a:ln>
           <a:effectLst/>
@@ -4581,7 +4386,7 @@
                 </a:solidFill>
                 <a:latin typeface="Arial"/>
               </a:rPr>
-              <a:t>12</a:t>
+              <a:t>11</a:t>
             </a:r>
           </a:p>
         </p:txBody>
@@ -4603,11 +4408,11 @@
             </a:avLst>
           </a:prstGeom>
           <a:solidFill>
-            <a:srgbClr val="FFFFFF"/>
+            <a:srgbClr val="E8EDF4"/>
           </a:solidFill>
-          <a:ln w="12700">
+          <a:ln w="17780">
             <a:solidFill>
-              <a:srgbClr val="D9E2EC"/>
+              <a:srgbClr val="B0BEC5"/>
             </a:solidFill>
           </a:ln>
           <a:effectLst/>
@@ -5087,7 +4892,7 @@
                 </a:solidFill>
                 <a:latin typeface="Arial"/>
               </a:rPr>
-              <a:t>13</a:t>
+              <a:t>12</a:t>
             </a:r>
           </a:p>
         </p:txBody>
@@ -6176,7 +5981,7 @@
                 </a:solidFill>
                 <a:latin typeface="Arial"/>
               </a:rPr>
-              <a:t>Giao diện Desktop – Màn hình dò vé số</a:t>
+              <a:t>Giao diện Desktop - Màn hình dò vé số</a:t>
             </a:r>
           </a:p>
         </p:txBody>
@@ -6317,7 +6122,7 @@
                 </a:solidFill>
                 <a:latin typeface="Arial"/>
               </a:rPr>
-              <a:t>14</a:t>
+              <a:t>13</a:t>
             </a:r>
           </a:p>
         </p:txBody>
@@ -6339,13 +6144,11 @@
             </a:avLst>
           </a:prstGeom>
           <a:solidFill>
-            <a:schemeClr val="bg1">
-              <a:lumMod val="85000"/>
-            </a:schemeClr>
+            <a:srgbClr val="E8EDF4"/>
           </a:solidFill>
-          <a:ln w="12700">
+          <a:ln w="17780">
             <a:solidFill>
-              <a:srgbClr val="D9E2EC"/>
+              <a:srgbClr val="B0BEC5"/>
             </a:solidFill>
           </a:ln>
           <a:effectLst/>
@@ -6800,7 +6603,7 @@
                 </a:solidFill>
                 <a:latin typeface="Arial"/>
               </a:rPr>
-              <a:t>15</a:t>
+              <a:t>14</a:t>
             </a:r>
           </a:p>
         </p:txBody>
@@ -6822,13 +6625,11 @@
             </a:avLst>
           </a:prstGeom>
           <a:solidFill>
-            <a:schemeClr val="bg1">
-              <a:lumMod val="85000"/>
-            </a:schemeClr>
+            <a:srgbClr val="E8EDF4"/>
           </a:solidFill>
-          <a:ln w="12700">
+          <a:ln w="17780">
             <a:solidFill>
-              <a:srgbClr val="D9E2EC"/>
+              <a:srgbClr val="B0BEC5"/>
             </a:solidFill>
           </a:ln>
           <a:effectLst/>
@@ -7283,7 +7084,7 @@
                 </a:solidFill>
                 <a:latin typeface="Arial"/>
               </a:rPr>
-              <a:t>16</a:t>
+              <a:t>15</a:t>
             </a:r>
           </a:p>
         </p:txBody>
@@ -7305,13 +7106,11 @@
             </a:avLst>
           </a:prstGeom>
           <a:solidFill>
-            <a:schemeClr val="bg1">
-              <a:lumMod val="85000"/>
-            </a:schemeClr>
+            <a:srgbClr val="E8EDF4"/>
           </a:solidFill>
-          <a:ln w="12700">
+          <a:ln w="17780">
             <a:solidFill>
-              <a:srgbClr val="D9E2EC"/>
+              <a:srgbClr val="B0BEC5"/>
             </a:solidFill>
           </a:ln>
           <a:effectLst/>
@@ -7428,13 +7227,11 @@
             </a:avLst>
           </a:prstGeom>
           <a:solidFill>
-            <a:schemeClr val="bg1">
-              <a:lumMod val="85000"/>
-            </a:schemeClr>
+            <a:srgbClr val="E8EDF4"/>
           </a:solidFill>
-          <a:ln w="12700">
+          <a:ln w="17780">
             <a:solidFill>
-              <a:srgbClr val="D9E2EC"/>
+              <a:srgbClr val="B0BEC5"/>
             </a:solidFill>
           </a:ln>
           <a:effectLst/>
@@ -7551,13 +7348,11 @@
             </a:avLst>
           </a:prstGeom>
           <a:solidFill>
-            <a:schemeClr val="bg1">
-              <a:lumMod val="85000"/>
-            </a:schemeClr>
+            <a:srgbClr val="E8EDF4"/>
           </a:solidFill>
-          <a:ln w="12700">
+          <a:ln w="17780">
             <a:solidFill>
-              <a:srgbClr val="D9E2EC"/>
+              <a:srgbClr val="B0BEC5"/>
             </a:solidFill>
           </a:ln>
           <a:effectLst/>
@@ -7674,13 +7469,11 @@
             </a:avLst>
           </a:prstGeom>
           <a:solidFill>
-            <a:schemeClr val="bg1">
-              <a:lumMod val="85000"/>
-            </a:schemeClr>
+            <a:srgbClr val="E8EDF4"/>
           </a:solidFill>
-          <a:ln w="12700">
+          <a:ln w="17780">
             <a:solidFill>
-              <a:srgbClr val="D9E2EC"/>
+              <a:srgbClr val="B0BEC5"/>
             </a:solidFill>
           </a:ln>
           <a:effectLst/>
@@ -8135,7 +7928,7 @@
                 </a:solidFill>
                 <a:latin typeface="Arial"/>
               </a:rPr>
-              <a:t>17</a:t>
+              <a:t>16</a:t>
             </a:r>
           </a:p>
         </p:txBody>
@@ -8157,13 +7950,11 @@
             </a:avLst>
           </a:prstGeom>
           <a:solidFill>
-            <a:schemeClr val="bg1">
-              <a:lumMod val="85000"/>
-            </a:schemeClr>
+            <a:srgbClr val="E8EDF4"/>
           </a:solidFill>
-          <a:ln w="12700">
+          <a:ln w="17780">
             <a:solidFill>
-              <a:srgbClr val="D9E2EC"/>
+              <a:srgbClr val="B0BEC5"/>
             </a:solidFill>
           </a:ln>
           <a:effectLst/>
@@ -8280,13 +8071,11 @@
             </a:avLst>
           </a:prstGeom>
           <a:solidFill>
-            <a:schemeClr val="bg1">
-              <a:lumMod val="85000"/>
-            </a:schemeClr>
+            <a:srgbClr val="E8EDF4"/>
           </a:solidFill>
-          <a:ln w="12700">
+          <a:ln w="17780">
             <a:solidFill>
-              <a:srgbClr val="D9E2EC"/>
+              <a:srgbClr val="B0BEC5"/>
             </a:solidFill>
           </a:ln>
           <a:effectLst/>
@@ -8403,13 +8192,11 @@
             </a:avLst>
           </a:prstGeom>
           <a:solidFill>
-            <a:schemeClr val="bg1">
-              <a:lumMod val="85000"/>
-            </a:schemeClr>
+            <a:srgbClr val="E8EDF4"/>
           </a:solidFill>
-          <a:ln w="12700">
+          <a:ln w="17780">
             <a:solidFill>
-              <a:srgbClr val="D9E2EC"/>
+              <a:srgbClr val="B0BEC5"/>
             </a:solidFill>
           </a:ln>
           <a:effectLst/>
@@ -8526,13 +8313,11 @@
             </a:avLst>
           </a:prstGeom>
           <a:solidFill>
-            <a:schemeClr val="bg1">
-              <a:lumMod val="85000"/>
-            </a:schemeClr>
+            <a:srgbClr val="E8EDF4"/>
           </a:solidFill>
-          <a:ln w="12700">
+          <a:ln w="17780">
             <a:solidFill>
-              <a:srgbClr val="D9E2EC"/>
+              <a:srgbClr val="B0BEC5"/>
             </a:solidFill>
           </a:ln>
           <a:effectLst/>
@@ -8987,7 +8772,7 @@
                 </a:solidFill>
                 <a:latin typeface="Arial"/>
               </a:rPr>
-              <a:t>18</a:t>
+              <a:t>17</a:t>
             </a:r>
           </a:p>
         </p:txBody>
@@ -10407,7 +10192,7 @@
                 </a:solidFill>
                 <a:latin typeface="Arial"/>
               </a:rPr>
-              <a:t>19</a:t>
+              <a:t>18</a:t>
             </a:r>
           </a:p>
         </p:txBody>
@@ -12142,7 +11927,7 @@
                 </a:solidFill>
                 <a:latin typeface="Arial"/>
               </a:rPr>
-              <a:t>20</a:t>
+              <a:t>19</a:t>
             </a:r>
           </a:p>
         </p:txBody>
@@ -13327,211 +13112,13 @@
               </a:defRPr>
             </a:pPr>
             <a:r>
-              <a:rPr sz="1300" b="0" dirty="0">
-                <a:solidFill>
-                  <a:srgbClr val="1F2937"/>
-                </a:solidFill>
-                <a:latin typeface="Arial"/>
-              </a:rPr>
-              <a:t>•  </a:t>
-            </a:r>
-            <a:r>
-              <a:rPr sz="1300" b="0" dirty="0" err="1">
-                <a:solidFill>
-                  <a:srgbClr val="1F2937"/>
-                </a:solidFill>
-                <a:latin typeface="Arial"/>
-              </a:rPr>
-              <a:t>Người</a:t>
-            </a:r>
-            <a:r>
-              <a:rPr sz="1300" b="0" dirty="0">
-                <a:solidFill>
-                  <a:srgbClr val="1F2937"/>
-                </a:solidFill>
-                <a:latin typeface="Arial"/>
-              </a:rPr>
-              <a:t> </a:t>
-            </a:r>
-            <a:r>
-              <a:rPr sz="1300" b="0" dirty="0" err="1">
-                <a:solidFill>
-                  <a:srgbClr val="1F2937"/>
-                </a:solidFill>
-                <a:latin typeface="Arial"/>
-              </a:rPr>
-              <a:t>dùng</a:t>
-            </a:r>
-            <a:r>
-              <a:rPr sz="1300" b="0" dirty="0">
-                <a:solidFill>
-                  <a:srgbClr val="1F2937"/>
-                </a:solidFill>
-                <a:latin typeface="Arial"/>
-              </a:rPr>
-              <a:t> </a:t>
-            </a:r>
-            <a:r>
-              <a:rPr sz="1300" b="0" dirty="0" err="1">
-                <a:solidFill>
-                  <a:srgbClr val="1F2937"/>
-                </a:solidFill>
-                <a:latin typeface="Arial"/>
-              </a:rPr>
-              <a:t>thường</a:t>
-            </a:r>
-            <a:r>
-              <a:rPr sz="1300" b="0" dirty="0">
-                <a:solidFill>
-                  <a:srgbClr val="1F2937"/>
-                </a:solidFill>
-                <a:latin typeface="Arial"/>
-              </a:rPr>
-              <a:t> </a:t>
-            </a:r>
-            <a:r>
-              <a:rPr sz="1300" b="0" dirty="0" err="1">
-                <a:solidFill>
-                  <a:srgbClr val="1F2937"/>
-                </a:solidFill>
-                <a:latin typeface="Arial"/>
-              </a:rPr>
-              <a:t>dò</a:t>
-            </a:r>
-            <a:r>
-              <a:rPr sz="1300" b="0" dirty="0">
-                <a:solidFill>
-                  <a:srgbClr val="1F2937"/>
-                </a:solidFill>
-                <a:latin typeface="Arial"/>
-              </a:rPr>
-              <a:t> </a:t>
-            </a:r>
-            <a:r>
-              <a:rPr sz="1300" b="0" dirty="0" err="1">
-                <a:solidFill>
-                  <a:srgbClr val="1F2937"/>
-                </a:solidFill>
-                <a:latin typeface="Arial"/>
-              </a:rPr>
-              <a:t>vé</a:t>
-            </a:r>
-            <a:r>
-              <a:rPr sz="1300" b="0" dirty="0">
-                <a:solidFill>
-                  <a:srgbClr val="1F2937"/>
-                </a:solidFill>
-                <a:latin typeface="Arial"/>
-              </a:rPr>
-              <a:t> </a:t>
-            </a:r>
-            <a:r>
-              <a:rPr sz="1300" b="0" dirty="0" err="1">
-                <a:solidFill>
-                  <a:srgbClr val="1F2937"/>
-                </a:solidFill>
-                <a:latin typeface="Arial"/>
-              </a:rPr>
-              <a:t>số</a:t>
-            </a:r>
-            <a:r>
-              <a:rPr sz="1300" b="0" dirty="0">
-                <a:solidFill>
-                  <a:srgbClr val="1F2937"/>
-                </a:solidFill>
-                <a:latin typeface="Arial"/>
-              </a:rPr>
-              <a:t> </a:t>
-            </a:r>
-            <a:r>
-              <a:rPr sz="1300" b="0" dirty="0" err="1">
-                <a:solidFill>
-                  <a:srgbClr val="1F2937"/>
-                </a:solidFill>
-                <a:latin typeface="Arial"/>
-              </a:rPr>
-              <a:t>thủ</a:t>
-            </a:r>
-            <a:r>
-              <a:rPr sz="1300" b="0" dirty="0">
-                <a:solidFill>
-                  <a:srgbClr val="1F2937"/>
-                </a:solidFill>
-                <a:latin typeface="Arial"/>
-              </a:rPr>
-              <a:t> </a:t>
-            </a:r>
-            <a:r>
-              <a:rPr sz="1300" b="0" dirty="0" err="1">
-                <a:solidFill>
-                  <a:srgbClr val="1F2937"/>
-                </a:solidFill>
-                <a:latin typeface="Arial"/>
-              </a:rPr>
-              <a:t>công</a:t>
-            </a:r>
-            <a:r>
-              <a:rPr sz="1300" b="0" dirty="0">
-                <a:solidFill>
-                  <a:srgbClr val="1F2937"/>
-                </a:solidFill>
-                <a:latin typeface="Arial"/>
-              </a:rPr>
-              <a:t>, </a:t>
-            </a:r>
-            <a:r>
-              <a:rPr sz="1300" b="0" dirty="0" err="1">
-                <a:solidFill>
-                  <a:srgbClr val="1F2937"/>
-                </a:solidFill>
-                <a:latin typeface="Arial"/>
-              </a:rPr>
-              <a:t>dễ</a:t>
-            </a:r>
-            <a:r>
-              <a:rPr sz="1300" b="0" dirty="0">
-                <a:solidFill>
-                  <a:srgbClr val="1F2937"/>
-                </a:solidFill>
-                <a:latin typeface="Arial"/>
-              </a:rPr>
-              <a:t> </a:t>
-            </a:r>
-            <a:r>
-              <a:rPr sz="1300" b="0" dirty="0" err="1">
-                <a:solidFill>
-                  <a:srgbClr val="1F2937"/>
-                </a:solidFill>
-                <a:latin typeface="Arial"/>
-              </a:rPr>
-              <a:t>sai</a:t>
-            </a:r>
-            <a:r>
-              <a:rPr sz="1300" b="0" dirty="0">
-                <a:solidFill>
-                  <a:srgbClr val="1F2937"/>
-                </a:solidFill>
-                <a:latin typeface="Arial"/>
-              </a:rPr>
-              <a:t> </a:t>
-            </a:r>
-            <a:r>
-              <a:rPr sz="1300" b="0" dirty="0" err="1">
-                <a:solidFill>
-                  <a:srgbClr val="1F2937"/>
-                </a:solidFill>
-                <a:latin typeface="Arial"/>
-              </a:rPr>
-              <a:t>sót</a:t>
-            </a:r>
-            <a:r>
-              <a:rPr sz="1300" b="0" dirty="0">
-                <a:solidFill>
-                  <a:srgbClr val="1F2937"/>
-                </a:solidFill>
-                <a:latin typeface="Arial"/>
-              </a:rPr>
-              <a:t>.</a:t>
+              <a:rPr sz="1300" b="0">
+                <a:solidFill>
+                  <a:srgbClr val="1F2937"/>
+                </a:solidFill>
+                <a:latin typeface="Arial"/>
+              </a:rPr>
+              <a:t>•  Người dùng thường dò vé số thủ công, dễ sai sót.</a:t>
             </a:r>
           </a:p>
           <a:p>
@@ -13550,121 +13137,13 @@
               </a:defRPr>
             </a:pPr>
             <a:r>
-              <a:rPr sz="1300" b="0" dirty="0">
-                <a:solidFill>
-                  <a:srgbClr val="1F2937"/>
-                </a:solidFill>
-                <a:latin typeface="Arial"/>
-              </a:rPr>
-              <a:t>•  </a:t>
-            </a:r>
-            <a:r>
-              <a:rPr sz="1300" b="0" dirty="0" err="1">
-                <a:solidFill>
-                  <a:srgbClr val="1F2937"/>
-                </a:solidFill>
-                <a:latin typeface="Arial"/>
-              </a:rPr>
-              <a:t>Khó</a:t>
-            </a:r>
-            <a:r>
-              <a:rPr sz="1300" b="0" dirty="0">
-                <a:solidFill>
-                  <a:srgbClr val="1F2937"/>
-                </a:solidFill>
-                <a:latin typeface="Arial"/>
-              </a:rPr>
-              <a:t> </a:t>
-            </a:r>
-            <a:r>
-              <a:rPr sz="1300" b="0" dirty="0" err="1">
-                <a:solidFill>
-                  <a:srgbClr val="1F2937"/>
-                </a:solidFill>
-                <a:latin typeface="Arial"/>
-              </a:rPr>
-              <a:t>dò</a:t>
-            </a:r>
-            <a:r>
-              <a:rPr sz="1300" b="0" dirty="0">
-                <a:solidFill>
-                  <a:srgbClr val="1F2937"/>
-                </a:solidFill>
-                <a:latin typeface="Arial"/>
-              </a:rPr>
-              <a:t> </a:t>
-            </a:r>
-            <a:r>
-              <a:rPr sz="1300" b="0" dirty="0" err="1">
-                <a:solidFill>
-                  <a:srgbClr val="1F2937"/>
-                </a:solidFill>
-                <a:latin typeface="Arial"/>
-              </a:rPr>
-              <a:t>nhiều</a:t>
-            </a:r>
-            <a:r>
-              <a:rPr sz="1300" b="0" dirty="0">
-                <a:solidFill>
-                  <a:srgbClr val="1F2937"/>
-                </a:solidFill>
-                <a:latin typeface="Arial"/>
-              </a:rPr>
-              <a:t> </a:t>
-            </a:r>
-            <a:r>
-              <a:rPr sz="1300" b="0" dirty="0" err="1">
-                <a:solidFill>
-                  <a:srgbClr val="1F2937"/>
-                </a:solidFill>
-                <a:latin typeface="Arial"/>
-              </a:rPr>
-              <a:t>vé</a:t>
-            </a:r>
-            <a:r>
-              <a:rPr sz="1300" b="0" dirty="0">
-                <a:solidFill>
-                  <a:srgbClr val="1F2937"/>
-                </a:solidFill>
-                <a:latin typeface="Arial"/>
-              </a:rPr>
-              <a:t> </a:t>
-            </a:r>
-            <a:r>
-              <a:rPr sz="1300" b="0" dirty="0" err="1">
-                <a:solidFill>
-                  <a:srgbClr val="1F2937"/>
-                </a:solidFill>
-                <a:latin typeface="Arial"/>
-              </a:rPr>
-              <a:t>cùng</a:t>
-            </a:r>
-            <a:r>
-              <a:rPr sz="1300" b="0" dirty="0">
-                <a:solidFill>
-                  <a:srgbClr val="1F2937"/>
-                </a:solidFill>
-                <a:latin typeface="Arial"/>
-              </a:rPr>
-              <a:t> </a:t>
-            </a:r>
-            <a:r>
-              <a:rPr sz="1300" b="0" dirty="0" err="1">
-                <a:solidFill>
-                  <a:srgbClr val="1F2937"/>
-                </a:solidFill>
-                <a:latin typeface="Arial"/>
-              </a:rPr>
-              <a:t>lúc</a:t>
-            </a:r>
-            <a:r>
-              <a:rPr sz="1300" b="0" dirty="0">
-                <a:solidFill>
-                  <a:srgbClr val="1F2937"/>
-                </a:solidFill>
-                <a:latin typeface="Arial"/>
-              </a:rPr>
-              <a:t>.</a:t>
+              <a:rPr sz="1300" b="0">
+                <a:solidFill>
+                  <a:srgbClr val="1F2937"/>
+                </a:solidFill>
+                <a:latin typeface="Arial"/>
+              </a:rPr>
+              <a:t>•  Khó dò nhiều vé cùng lúc.</a:t>
             </a:r>
           </a:p>
           <a:p>
@@ -13683,157 +13162,13 @@
               </a:defRPr>
             </a:pPr>
             <a:r>
-              <a:rPr sz="1300" b="0" dirty="0">
-                <a:solidFill>
-                  <a:srgbClr val="1F2937"/>
-                </a:solidFill>
-                <a:latin typeface="Arial"/>
-              </a:rPr>
-              <a:t>•  </a:t>
-            </a:r>
-            <a:r>
-              <a:rPr sz="1300" b="0" dirty="0" err="1">
-                <a:solidFill>
-                  <a:srgbClr val="1F2937"/>
-                </a:solidFill>
-                <a:latin typeface="Arial"/>
-              </a:rPr>
-              <a:t>Khó</a:t>
-            </a:r>
-            <a:r>
-              <a:rPr sz="1300" b="0" dirty="0">
-                <a:solidFill>
-                  <a:srgbClr val="1F2937"/>
-                </a:solidFill>
-                <a:latin typeface="Arial"/>
-              </a:rPr>
-              <a:t> </a:t>
-            </a:r>
-            <a:r>
-              <a:rPr sz="1300" b="0" dirty="0" err="1">
-                <a:solidFill>
-                  <a:srgbClr val="1F2937"/>
-                </a:solidFill>
-                <a:latin typeface="Arial"/>
-              </a:rPr>
-              <a:t>lưu</a:t>
-            </a:r>
-            <a:r>
-              <a:rPr sz="1300" b="0" dirty="0">
-                <a:solidFill>
-                  <a:srgbClr val="1F2937"/>
-                </a:solidFill>
-                <a:latin typeface="Arial"/>
-              </a:rPr>
-              <a:t> </a:t>
-            </a:r>
-            <a:r>
-              <a:rPr sz="1300" b="0" dirty="0" err="1">
-                <a:solidFill>
-                  <a:srgbClr val="1F2937"/>
-                </a:solidFill>
-                <a:latin typeface="Arial"/>
-              </a:rPr>
-              <a:t>lại</a:t>
-            </a:r>
-            <a:r>
-              <a:rPr sz="1300" b="0" dirty="0">
-                <a:solidFill>
-                  <a:srgbClr val="1F2937"/>
-                </a:solidFill>
-                <a:latin typeface="Arial"/>
-              </a:rPr>
-              <a:t> </a:t>
-            </a:r>
-            <a:r>
-              <a:rPr sz="1300" b="0" dirty="0" err="1">
-                <a:solidFill>
-                  <a:srgbClr val="1F2937"/>
-                </a:solidFill>
-                <a:latin typeface="Arial"/>
-              </a:rPr>
-              <a:t>lịch</a:t>
-            </a:r>
-            <a:r>
-              <a:rPr sz="1300" b="0" dirty="0">
-                <a:solidFill>
-                  <a:srgbClr val="1F2937"/>
-                </a:solidFill>
-                <a:latin typeface="Arial"/>
-              </a:rPr>
-              <a:t> </a:t>
-            </a:r>
-            <a:r>
-              <a:rPr sz="1300" b="0" dirty="0" err="1">
-                <a:solidFill>
-                  <a:srgbClr val="1F2937"/>
-                </a:solidFill>
-                <a:latin typeface="Arial"/>
-              </a:rPr>
-              <a:t>sử</a:t>
-            </a:r>
-            <a:r>
-              <a:rPr sz="1300" b="0" dirty="0">
-                <a:solidFill>
-                  <a:srgbClr val="1F2937"/>
-                </a:solidFill>
-                <a:latin typeface="Arial"/>
-              </a:rPr>
-              <a:t> </a:t>
-            </a:r>
-            <a:r>
-              <a:rPr sz="1300" b="0" dirty="0" err="1">
-                <a:solidFill>
-                  <a:srgbClr val="1F2937"/>
-                </a:solidFill>
-                <a:latin typeface="Arial"/>
-              </a:rPr>
-              <a:t>các</a:t>
-            </a:r>
-            <a:r>
-              <a:rPr sz="1300" b="0" dirty="0">
-                <a:solidFill>
-                  <a:srgbClr val="1F2937"/>
-                </a:solidFill>
-                <a:latin typeface="Arial"/>
-              </a:rPr>
-              <a:t> </a:t>
-            </a:r>
-            <a:r>
-              <a:rPr sz="1300" b="0" dirty="0" err="1">
-                <a:solidFill>
-                  <a:srgbClr val="1F2937"/>
-                </a:solidFill>
-                <a:latin typeface="Arial"/>
-              </a:rPr>
-              <a:t>lần</a:t>
-            </a:r>
-            <a:r>
-              <a:rPr sz="1300" b="0" dirty="0">
-                <a:solidFill>
-                  <a:srgbClr val="1F2937"/>
-                </a:solidFill>
-                <a:latin typeface="Arial"/>
-              </a:rPr>
-              <a:t> </a:t>
-            </a:r>
-            <a:r>
-              <a:rPr sz="1300" b="0" dirty="0" err="1">
-                <a:solidFill>
-                  <a:srgbClr val="1F2937"/>
-                </a:solidFill>
-                <a:latin typeface="Arial"/>
-              </a:rPr>
-              <a:t>dò</a:t>
-            </a:r>
-            <a:r>
-              <a:rPr sz="1300" b="0" dirty="0">
-                <a:solidFill>
-                  <a:srgbClr val="1F2937"/>
-                </a:solidFill>
-                <a:latin typeface="Arial"/>
-              </a:rPr>
-              <a:t>.</a:t>
+              <a:rPr sz="1300" b="0">
+                <a:solidFill>
+                  <a:srgbClr val="1F2937"/>
+                </a:solidFill>
+                <a:latin typeface="Arial"/>
+              </a:rPr>
+              <a:t>•  Khó lưu lại lịch sử các lần dò.</a:t>
             </a:r>
           </a:p>
           <a:p>
@@ -13852,211 +13187,13 @@
               </a:defRPr>
             </a:pPr>
             <a:r>
-              <a:rPr sz="1300" b="0" dirty="0">
-                <a:solidFill>
-                  <a:srgbClr val="1F2937"/>
-                </a:solidFill>
-                <a:latin typeface="Arial"/>
-              </a:rPr>
-              <a:t>•  Admin </a:t>
-            </a:r>
-            <a:r>
-              <a:rPr sz="1300" b="0" dirty="0" err="1">
-                <a:solidFill>
-                  <a:srgbClr val="1F2937"/>
-                </a:solidFill>
-                <a:latin typeface="Arial"/>
-              </a:rPr>
-              <a:t>cần</a:t>
-            </a:r>
-            <a:r>
-              <a:rPr sz="1300" b="0" dirty="0">
-                <a:solidFill>
-                  <a:srgbClr val="1F2937"/>
-                </a:solidFill>
-                <a:latin typeface="Arial"/>
-              </a:rPr>
-              <a:t> </a:t>
-            </a:r>
-            <a:r>
-              <a:rPr sz="1300" b="0" dirty="0" err="1">
-                <a:solidFill>
-                  <a:srgbClr val="1F2937"/>
-                </a:solidFill>
-                <a:latin typeface="Arial"/>
-              </a:rPr>
-              <a:t>quản</a:t>
-            </a:r>
-            <a:r>
-              <a:rPr sz="1300" b="0" dirty="0">
-                <a:solidFill>
-                  <a:srgbClr val="1F2937"/>
-                </a:solidFill>
-                <a:latin typeface="Arial"/>
-              </a:rPr>
-              <a:t> </a:t>
-            </a:r>
-            <a:r>
-              <a:rPr sz="1300" b="0" dirty="0" err="1">
-                <a:solidFill>
-                  <a:srgbClr val="1F2937"/>
-                </a:solidFill>
-                <a:latin typeface="Arial"/>
-              </a:rPr>
-              <a:t>lý</a:t>
-            </a:r>
-            <a:r>
-              <a:rPr sz="1300" b="0" dirty="0">
-                <a:solidFill>
-                  <a:srgbClr val="1F2937"/>
-                </a:solidFill>
-                <a:latin typeface="Arial"/>
-              </a:rPr>
-              <a:t> </a:t>
-            </a:r>
-            <a:r>
-              <a:rPr sz="1300" b="0" dirty="0" err="1">
-                <a:solidFill>
-                  <a:srgbClr val="1F2937"/>
-                </a:solidFill>
-                <a:latin typeface="Arial"/>
-              </a:rPr>
-              <a:t>kết</a:t>
-            </a:r>
-            <a:r>
-              <a:rPr sz="1300" b="0" dirty="0">
-                <a:solidFill>
-                  <a:srgbClr val="1F2937"/>
-                </a:solidFill>
-                <a:latin typeface="Arial"/>
-              </a:rPr>
-              <a:t> </a:t>
-            </a:r>
-            <a:r>
-              <a:rPr sz="1300" b="0" dirty="0" err="1">
-                <a:solidFill>
-                  <a:srgbClr val="1F2937"/>
-                </a:solidFill>
-                <a:latin typeface="Arial"/>
-              </a:rPr>
-              <a:t>quả</a:t>
-            </a:r>
-            <a:r>
-              <a:rPr sz="1300" b="0" dirty="0">
-                <a:solidFill>
-                  <a:srgbClr val="1F2937"/>
-                </a:solidFill>
-                <a:latin typeface="Arial"/>
-              </a:rPr>
-              <a:t> </a:t>
-            </a:r>
-            <a:r>
-              <a:rPr sz="1300" b="0" dirty="0" err="1">
-                <a:solidFill>
-                  <a:srgbClr val="1F2937"/>
-                </a:solidFill>
-                <a:latin typeface="Arial"/>
-              </a:rPr>
-              <a:t>xổ</a:t>
-            </a:r>
-            <a:r>
-              <a:rPr sz="1300" b="0" dirty="0">
-                <a:solidFill>
-                  <a:srgbClr val="1F2937"/>
-                </a:solidFill>
-                <a:latin typeface="Arial"/>
-              </a:rPr>
-              <a:t> </a:t>
-            </a:r>
-            <a:r>
-              <a:rPr sz="1300" b="0" dirty="0" err="1">
-                <a:solidFill>
-                  <a:srgbClr val="1F2937"/>
-                </a:solidFill>
-                <a:latin typeface="Arial"/>
-              </a:rPr>
-              <a:t>số</a:t>
-            </a:r>
-            <a:r>
-              <a:rPr sz="1300" b="0" dirty="0">
-                <a:solidFill>
-                  <a:srgbClr val="1F2937"/>
-                </a:solidFill>
-                <a:latin typeface="Arial"/>
-              </a:rPr>
-              <a:t> </a:t>
-            </a:r>
-            <a:r>
-              <a:rPr sz="1300" b="0" dirty="0" err="1">
-                <a:solidFill>
-                  <a:srgbClr val="1F2937"/>
-                </a:solidFill>
-                <a:latin typeface="Arial"/>
-              </a:rPr>
-              <a:t>theo</a:t>
-            </a:r>
-            <a:r>
-              <a:rPr sz="1300" b="0" dirty="0">
-                <a:solidFill>
-                  <a:srgbClr val="1F2937"/>
-                </a:solidFill>
-                <a:latin typeface="Arial"/>
-              </a:rPr>
-              <a:t> </a:t>
-            </a:r>
-            <a:r>
-              <a:rPr sz="1300" b="0" dirty="0" err="1">
-                <a:solidFill>
-                  <a:srgbClr val="1F2937"/>
-                </a:solidFill>
-                <a:latin typeface="Arial"/>
-              </a:rPr>
-              <a:t>đài</a:t>
-            </a:r>
-            <a:r>
-              <a:rPr sz="1300" b="0" dirty="0">
-                <a:solidFill>
-                  <a:srgbClr val="1F2937"/>
-                </a:solidFill>
-                <a:latin typeface="Arial"/>
-              </a:rPr>
-              <a:t> </a:t>
-            </a:r>
-            <a:r>
-              <a:rPr sz="1300" b="0" dirty="0" err="1">
-                <a:solidFill>
-                  <a:srgbClr val="1F2937"/>
-                </a:solidFill>
-                <a:latin typeface="Arial"/>
-              </a:rPr>
-              <a:t>và</a:t>
-            </a:r>
-            <a:r>
-              <a:rPr sz="1300" b="0" dirty="0">
-                <a:solidFill>
-                  <a:srgbClr val="1F2937"/>
-                </a:solidFill>
-                <a:latin typeface="Arial"/>
-              </a:rPr>
-              <a:t> </a:t>
-            </a:r>
-            <a:r>
-              <a:rPr sz="1300" b="0" dirty="0" err="1">
-                <a:solidFill>
-                  <a:srgbClr val="1F2937"/>
-                </a:solidFill>
-                <a:latin typeface="Arial"/>
-              </a:rPr>
-              <a:t>ngày</a:t>
-            </a:r>
-            <a:r>
-              <a:rPr sz="1300" b="0" dirty="0">
-                <a:solidFill>
-                  <a:srgbClr val="1F2937"/>
-                </a:solidFill>
-                <a:latin typeface="Arial"/>
-              </a:rPr>
-              <a:t>.</a:t>
+              <a:rPr sz="1300" b="0">
+                <a:solidFill>
+                  <a:srgbClr val="1F2937"/>
+                </a:solidFill>
+                <a:latin typeface="Arial"/>
+              </a:rPr>
+              <a:t>•  Admin cần quản lý kết quả xổ số theo đài và ngày.</a:t>
             </a:r>
           </a:p>
           <a:p>
@@ -14075,229 +13212,13 @@
               </a:defRPr>
             </a:pPr>
             <a:r>
-              <a:rPr sz="1300" b="0" dirty="0">
-                <a:solidFill>
-                  <a:srgbClr val="1F2937"/>
-                </a:solidFill>
-                <a:latin typeface="Arial"/>
-              </a:rPr>
-              <a:t>•  </a:t>
-            </a:r>
-            <a:r>
-              <a:rPr sz="1300" b="0" dirty="0" err="1">
-                <a:solidFill>
-                  <a:srgbClr val="1F2937"/>
-                </a:solidFill>
-                <a:latin typeface="Arial"/>
-              </a:rPr>
-              <a:t>Cần</a:t>
-            </a:r>
-            <a:r>
-              <a:rPr sz="1300" b="0" dirty="0">
-                <a:solidFill>
-                  <a:srgbClr val="1F2937"/>
-                </a:solidFill>
-                <a:latin typeface="Arial"/>
-              </a:rPr>
-              <a:t> </a:t>
-            </a:r>
-            <a:r>
-              <a:rPr sz="1300" b="0" dirty="0" err="1">
-                <a:solidFill>
-                  <a:srgbClr val="1F2937"/>
-                </a:solidFill>
-                <a:latin typeface="Arial"/>
-              </a:rPr>
-              <a:t>phân</a:t>
-            </a:r>
-            <a:r>
-              <a:rPr sz="1300" b="0" dirty="0">
-                <a:solidFill>
-                  <a:srgbClr val="1F2937"/>
-                </a:solidFill>
-                <a:latin typeface="Arial"/>
-              </a:rPr>
-              <a:t> </a:t>
-            </a:r>
-            <a:r>
-              <a:rPr sz="1300" b="0" dirty="0" err="1">
-                <a:solidFill>
-                  <a:srgbClr val="1F2937"/>
-                </a:solidFill>
-                <a:latin typeface="Arial"/>
-              </a:rPr>
-              <a:t>quyền</a:t>
-            </a:r>
-            <a:r>
-              <a:rPr sz="1300" b="0" dirty="0">
-                <a:solidFill>
-                  <a:srgbClr val="1F2937"/>
-                </a:solidFill>
-                <a:latin typeface="Arial"/>
-              </a:rPr>
-              <a:t> </a:t>
-            </a:r>
-            <a:r>
-              <a:rPr sz="1300" b="0" dirty="0" err="1">
-                <a:solidFill>
-                  <a:srgbClr val="1F2937"/>
-                </a:solidFill>
-                <a:latin typeface="Arial"/>
-              </a:rPr>
-              <a:t>người</a:t>
-            </a:r>
-            <a:r>
-              <a:rPr sz="1300" b="0" dirty="0">
-                <a:solidFill>
-                  <a:srgbClr val="1F2937"/>
-                </a:solidFill>
-                <a:latin typeface="Arial"/>
-              </a:rPr>
-              <a:t> </a:t>
-            </a:r>
-            <a:r>
-              <a:rPr sz="1300" b="0" dirty="0" err="1">
-                <a:solidFill>
-                  <a:srgbClr val="1F2937"/>
-                </a:solidFill>
-                <a:latin typeface="Arial"/>
-              </a:rPr>
-              <a:t>dùng</a:t>
-            </a:r>
-            <a:r>
-              <a:rPr sz="1300" b="0" dirty="0">
-                <a:solidFill>
-                  <a:srgbClr val="1F2937"/>
-                </a:solidFill>
-                <a:latin typeface="Arial"/>
-              </a:rPr>
-              <a:t> </a:t>
-            </a:r>
-            <a:r>
-              <a:rPr sz="1300" b="0" dirty="0" err="1">
-                <a:solidFill>
-                  <a:srgbClr val="1F2937"/>
-                </a:solidFill>
-                <a:latin typeface="Arial"/>
-              </a:rPr>
-              <a:t>và</a:t>
-            </a:r>
-            <a:r>
-              <a:rPr sz="1300" b="0" dirty="0">
-                <a:solidFill>
-                  <a:srgbClr val="1F2937"/>
-                </a:solidFill>
-                <a:latin typeface="Arial"/>
-              </a:rPr>
-              <a:t> </a:t>
-            </a:r>
-            <a:r>
-              <a:rPr sz="1300" b="0" dirty="0" err="1">
-                <a:solidFill>
-                  <a:srgbClr val="1F2937"/>
-                </a:solidFill>
-                <a:latin typeface="Arial"/>
-              </a:rPr>
-              <a:t>kiểm</a:t>
-            </a:r>
-            <a:r>
-              <a:rPr sz="1300" b="0" dirty="0">
-                <a:solidFill>
-                  <a:srgbClr val="1F2937"/>
-                </a:solidFill>
-                <a:latin typeface="Arial"/>
-              </a:rPr>
-              <a:t> </a:t>
-            </a:r>
-            <a:r>
-              <a:rPr sz="1300" b="0" dirty="0" err="1">
-                <a:solidFill>
-                  <a:srgbClr val="1F2937"/>
-                </a:solidFill>
-                <a:latin typeface="Arial"/>
-              </a:rPr>
-              <a:t>soát</a:t>
-            </a:r>
-            <a:r>
-              <a:rPr sz="1300" b="0" dirty="0">
-                <a:solidFill>
-                  <a:srgbClr val="1F2937"/>
-                </a:solidFill>
-                <a:latin typeface="Arial"/>
-              </a:rPr>
-              <a:t> </a:t>
-            </a:r>
-            <a:r>
-              <a:rPr sz="1300" b="0" dirty="0" err="1">
-                <a:solidFill>
-                  <a:srgbClr val="1F2937"/>
-                </a:solidFill>
-                <a:latin typeface="Arial"/>
-              </a:rPr>
-              <a:t>dữ</a:t>
-            </a:r>
-            <a:r>
-              <a:rPr sz="1300" b="0" dirty="0">
-                <a:solidFill>
-                  <a:srgbClr val="1F2937"/>
-                </a:solidFill>
-                <a:latin typeface="Arial"/>
-              </a:rPr>
-              <a:t> </a:t>
-            </a:r>
-            <a:r>
-              <a:rPr sz="1300" b="0" dirty="0" err="1">
-                <a:solidFill>
-                  <a:srgbClr val="1F2937"/>
-                </a:solidFill>
-                <a:latin typeface="Arial"/>
-              </a:rPr>
-              <a:t>liệu</a:t>
-            </a:r>
-            <a:r>
-              <a:rPr sz="1300" b="0" dirty="0">
-                <a:solidFill>
-                  <a:srgbClr val="1F2937"/>
-                </a:solidFill>
-                <a:latin typeface="Arial"/>
-              </a:rPr>
-              <a:t> </a:t>
-            </a:r>
-            <a:r>
-              <a:rPr sz="1300" b="0" dirty="0" err="1">
-                <a:solidFill>
-                  <a:srgbClr val="1F2937"/>
-                </a:solidFill>
-                <a:latin typeface="Arial"/>
-              </a:rPr>
-              <a:t>công</a:t>
-            </a:r>
-            <a:r>
-              <a:rPr sz="1300" b="0" dirty="0">
-                <a:solidFill>
-                  <a:srgbClr val="1F2937"/>
-                </a:solidFill>
-                <a:latin typeface="Arial"/>
-              </a:rPr>
-              <a:t> </a:t>
-            </a:r>
-            <a:r>
-              <a:rPr sz="1300" b="0" dirty="0" err="1">
-                <a:solidFill>
-                  <a:srgbClr val="1F2937"/>
-                </a:solidFill>
-                <a:latin typeface="Arial"/>
-              </a:rPr>
-              <a:t>bố</a:t>
-            </a:r>
-            <a:r>
-              <a:rPr sz="1300" b="0" dirty="0">
-                <a:solidFill>
-                  <a:srgbClr val="1F2937"/>
-                </a:solidFill>
-                <a:latin typeface="Arial"/>
-              </a:rPr>
-              <a:t>.</a:t>
+              <a:rPr sz="1300" b="0">
+                <a:solidFill>
+                  <a:srgbClr val="1F2937"/>
+                </a:solidFill>
+                <a:latin typeface="Arial"/>
+              </a:rPr>
+              <a:t>•  Cần phân quyền người dùng và kiểm soát dữ liệu công bố.</a:t>
             </a:r>
           </a:p>
         </p:txBody>
@@ -14512,7 +13433,7 @@
                 </a:solidFill>
                 <a:latin typeface="Arial"/>
               </a:rPr>
-              <a:t>•  Hỗ trợ guest, user và admin.</a:t>
+              <a:t>•  Hỗ trợ 3 nhóm người dùng: Guest (chưa đăng nhập), User (đã đăng nhập), Admin.</a:t>
             </a:r>
           </a:p>
           <a:p>
@@ -14600,8 +13521,8 @@
         </p:nvSpPr>
         <p:spPr>
           <a:xfrm>
-            <a:off x="777240" y="5166359"/>
-            <a:ext cx="10634472" cy="1200573"/>
+            <a:off x="777240" y="5166360"/>
+            <a:ext cx="10634472" cy="1173480"/>
           </a:xfrm>
           <a:prstGeom prst="roundRect">
             <a:avLst>
@@ -14650,7 +13571,7 @@
         <p:spPr>
           <a:xfrm>
             <a:off x="777240" y="5330952"/>
-            <a:ext cx="82296" cy="850392"/>
+            <a:ext cx="82296" cy="630936"/>
           </a:xfrm>
           <a:prstGeom prst="rect">
             <a:avLst/>
@@ -14742,7 +13663,7 @@
         </p:nvSpPr>
         <p:spPr>
           <a:xfrm>
-            <a:off x="982980" y="5595112"/>
+            <a:off x="963168" y="5596128"/>
             <a:ext cx="10222992" cy="210312"/>
           </a:xfrm>
           <a:prstGeom prst="rect">
@@ -15637,7 +14558,7 @@
                 </a:solidFill>
                 <a:latin typeface="Arial"/>
               </a:rPr>
-              <a:t>21</a:t>
+              <a:t>20</a:t>
             </a:r>
           </a:p>
         </p:txBody>
@@ -15827,7 +14748,7 @@
                 </a:solidFill>
                 <a:latin typeface="Arial"/>
               </a:rPr>
-              <a:t>•  Một số chức năng optional chưa hoàn thành: AdSense, gamification comment, preview vé dò.</a:t>
+              <a:t>•  Chưa hoàn thành: Google AdSense (FR 1.7), gamification comments (FR 2.6), preview vé dò (FR 3.15).</a:t>
             </a:r>
           </a:p>
           <a:p>
@@ -16627,7 +15548,7 @@
                 </a:solidFill>
                 <a:latin typeface="Arial"/>
               </a:rPr>
-              <a:t>22</a:t>
+              <a:t>21</a:t>
             </a:r>
           </a:p>
         </p:txBody>
@@ -24420,7 +23341,7 @@
         </p:nvSpPr>
         <p:spPr>
           <a:xfrm>
-            <a:off x="1005840" y="5257800"/>
+            <a:off x="1014984" y="5239512"/>
             <a:ext cx="10222992" cy="621792"/>
           </a:xfrm>
           <a:prstGeom prst="rect">
@@ -25715,11 +24636,11 @@
             </a:avLst>
           </a:prstGeom>
           <a:solidFill>
-            <a:srgbClr val="FFFFFF"/>
+            <a:srgbClr val="E8EDF4"/>
           </a:solidFill>
-          <a:ln w="12700">
+          <a:ln w="17780">
             <a:solidFill>
-              <a:srgbClr val="D9E2EC"/>
+              <a:srgbClr val="B0BEC5"/>
             </a:solidFill>
           </a:ln>
           <a:effectLst/>
@@ -25747,63 +24668,9 @@
           </a:p>
         </p:txBody>
       </p:sp>
-      <p:sp>
-        <p:nvSpPr>
-          <p:cNvPr id="11" name="TextBox 10"/>
-          <p:cNvSpPr txBox="1"/>
-          <p:nvPr/>
-        </p:nvSpPr>
-        <p:spPr>
-          <a:xfrm>
-            <a:off x="777240" y="5852160"/>
-            <a:ext cx="10634472" cy="274320"/>
-          </a:xfrm>
-          <a:prstGeom prst="rect">
-            <a:avLst/>
-          </a:prstGeom>
-          <a:noFill/>
-        </p:spPr>
-        <p:txBody>
-          <a:bodyPr wrap="square" lIns="0" tIns="0" rIns="0" bIns="0" anchor="t">
-            <a:spAutoFit/>
-          </a:bodyPr>
-          <a:lstStyle/>
-          <a:p>
-            <a:pPr algn="ctr">
-              <a:lnSpc>
-                <a:spcPct val="105000"/>
-              </a:lnSpc>
-              <a:spcAft>
-                <a:spcPts val="0"/>
-              </a:spcAft>
-              <a:defRPr sz="1000" b="0">
-                <a:solidFill>
-                  <a:srgbClr val="6B7280"/>
-                </a:solidFill>
-                <a:latin typeface="Arial"/>
-              </a:defRPr>
-            </a:pPr>
-            <a:r>
-              <a:rPr sz="1000" b="0">
-                <a:solidFill>
-                  <a:srgbClr val="6B7280"/>
-                </a:solidFill>
-                <a:latin typeface="Arial"/>
-              </a:rPr>
-              <a:t>Sơ đồ use case: Guest, User, Admin với các nhóm chức năng chính</a:t>
-            </a:r>
-          </a:p>
-        </p:txBody>
-      </p:sp>
       <p:pic>
         <p:nvPicPr>
-          <p:cNvPr id="13" name="Picture 12">
-            <a:extLst>
-              <a:ext uri="{FF2B5EF4-FFF2-40B4-BE49-F238E27FC236}">
-                <a16:creationId xmlns:a16="http://schemas.microsoft.com/office/drawing/2014/main" id="{96D846F2-0574-73E7-E1C1-E4B92BE9506B}"/>
-              </a:ext>
-            </a:extLst>
-          </p:cNvPr>
+          <p:cNvPr id="10" name="Picture 9" descr="usecase-diagram.png"/>
           <p:cNvPicPr>
             <a:picLocks noChangeAspect="1"/>
           </p:cNvPicPr>
@@ -25817,14 +24684,62 @@
         </p:blipFill>
         <p:spPr>
           <a:xfrm>
-            <a:off x="934719" y="1990344"/>
-            <a:ext cx="10358121" cy="3481158"/>
+            <a:off x="777240" y="2162240"/>
+            <a:ext cx="10634472" cy="3036439"/>
           </a:xfrm>
           <a:prstGeom prst="rect">
             <a:avLst/>
           </a:prstGeom>
         </p:spPr>
       </p:pic>
+      <p:sp>
+        <p:nvSpPr>
+          <p:cNvPr id="11" name="TextBox 10"/>
+          <p:cNvSpPr txBox="1"/>
+          <p:nvPr/>
+        </p:nvSpPr>
+        <p:spPr>
+          <a:xfrm>
+            <a:off x="777240" y="5852160"/>
+            <a:ext cx="10634472" cy="274320"/>
+          </a:xfrm>
+          <a:prstGeom prst="rect">
+            <a:avLst/>
+          </a:prstGeom>
+          <a:noFill/>
+        </p:spPr>
+        <p:txBody>
+          <a:bodyPr wrap="square" lIns="0" tIns="0" rIns="0" bIns="0" anchor="t">
+            <a:spAutoFit/>
+          </a:bodyPr>
+          <a:lstStyle/>
+          <a:p>
+            <a:pPr algn="ctr">
+              <a:lnSpc>
+                <a:spcPct val="105000"/>
+              </a:lnSpc>
+              <a:spcAft>
+                <a:spcPts val="0"/>
+              </a:spcAft>
+              <a:defRPr sz="1000" b="0">
+                <a:solidFill>
+                  <a:srgbClr val="6B7280"/>
+                </a:solidFill>
+                <a:latin typeface="Arial"/>
+              </a:defRPr>
+            </a:pPr>
+            <a:r>
+              <a:rPr sz="1000" b="0">
+                <a:solidFill>
+                  <a:srgbClr val="6B7280"/>
+                </a:solidFill>
+                <a:latin typeface="Arial"/>
+              </a:rPr>
+              <a:t>Sơ đồ use case: Guest, User, Admin với các nhóm chức năng chính</a:t>
+            </a:r>
+          </a:p>
+        </p:txBody>
+      </p:sp>
     </p:spTree>
   </p:cSld>
   <p:clrMapOvr>
@@ -27189,7 +26104,7 @@
         <p:spPr>
           <a:xfrm>
             <a:off x="777240" y="4754880"/>
-            <a:ext cx="10634472" cy="1586714"/>
+            <a:ext cx="10634472" cy="1664208"/>
           </a:xfrm>
           <a:prstGeom prst="roundRect">
             <a:avLst>
@@ -27238,7 +26153,7 @@
         <p:spPr>
           <a:xfrm>
             <a:off x="777240" y="4919472"/>
-            <a:ext cx="82296" cy="1198456"/>
+            <a:ext cx="82296" cy="1042416"/>
           </a:xfrm>
           <a:prstGeom prst="rect">
             <a:avLst/>
@@ -27330,7 +26245,7 @@
         </p:nvSpPr>
         <p:spPr>
           <a:xfrm>
-            <a:off x="1014984" y="5201357"/>
+            <a:off x="987552" y="5106924"/>
             <a:ext cx="10222992" cy="621792"/>
           </a:xfrm>
           <a:prstGeom prst="rect">
@@ -27733,6 +26648,139 @@
                 <a:latin typeface="Arial"/>
               </a:rPr>
               <a:t>.</a:t>
+            </a:r>
+          </a:p>
+          <a:p>
+            <a:pPr algn="l">
+              <a:lnSpc>
+                <a:spcPct val="108000"/>
+              </a:lnSpc>
+              <a:spcAft>
+                <a:spcPts val="500"/>
+              </a:spcAft>
+              <a:defRPr sz="1300" b="0">
+                <a:solidFill>
+                  <a:srgbClr val="1F2937"/>
+                </a:solidFill>
+                <a:latin typeface="Arial"/>
+              </a:defRPr>
+            </a:pPr>
+            <a:r>
+              <a:rPr sz="1300" b="0" dirty="0">
+                <a:solidFill>
+                  <a:srgbClr val="1F2937"/>
+                </a:solidFill>
+                <a:latin typeface="Arial"/>
+              </a:rPr>
+              <a:t>•  React </a:t>
+            </a:r>
+            <a:r>
+              <a:rPr sz="1300" b="0" dirty="0" err="1">
+                <a:solidFill>
+                  <a:srgbClr val="1F2937"/>
+                </a:solidFill>
+                <a:latin typeface="Arial"/>
+              </a:rPr>
+              <a:t>và</a:t>
+            </a:r>
+            <a:r>
+              <a:rPr sz="1300" b="0" dirty="0">
+                <a:solidFill>
+                  <a:srgbClr val="1F2937"/>
+                </a:solidFill>
+                <a:latin typeface="Arial"/>
+              </a:rPr>
+              <a:t> Ant Design </a:t>
+            </a:r>
+            <a:r>
+              <a:rPr sz="1300" b="0" dirty="0" err="1">
+                <a:solidFill>
+                  <a:srgbClr val="1F2937"/>
+                </a:solidFill>
+                <a:latin typeface="Arial"/>
+              </a:rPr>
+              <a:t>được</a:t>
+            </a:r>
+            <a:r>
+              <a:rPr sz="1300" b="0" dirty="0">
+                <a:solidFill>
+                  <a:srgbClr val="1F2937"/>
+                </a:solidFill>
+                <a:latin typeface="Arial"/>
+              </a:rPr>
+              <a:t> mentor </a:t>
+            </a:r>
+            <a:r>
+              <a:rPr sz="1300" b="0" dirty="0" err="1">
+                <a:solidFill>
+                  <a:srgbClr val="1F2937"/>
+                </a:solidFill>
+                <a:latin typeface="Arial"/>
+              </a:rPr>
+              <a:t>chấp</a:t>
+            </a:r>
+            <a:r>
+              <a:rPr sz="1300" b="0" dirty="0">
+                <a:solidFill>
+                  <a:srgbClr val="1F2937"/>
+                </a:solidFill>
+                <a:latin typeface="Arial"/>
+              </a:rPr>
+              <a:t> </a:t>
+            </a:r>
+            <a:r>
+              <a:rPr sz="1300" b="0" dirty="0" err="1">
+                <a:solidFill>
+                  <a:srgbClr val="1F2937"/>
+                </a:solidFill>
+                <a:latin typeface="Arial"/>
+              </a:rPr>
+              <a:t>thuận</a:t>
+            </a:r>
+            <a:r>
+              <a:rPr sz="1300" b="0" dirty="0">
+                <a:solidFill>
+                  <a:srgbClr val="1F2937"/>
+                </a:solidFill>
+                <a:latin typeface="Arial"/>
+              </a:rPr>
+              <a:t> </a:t>
+            </a:r>
+            <a:r>
+              <a:rPr sz="1300" b="0" dirty="0" err="1">
+                <a:solidFill>
+                  <a:srgbClr val="1F2937"/>
+                </a:solidFill>
+                <a:latin typeface="Arial"/>
+              </a:rPr>
+              <a:t>thay</a:t>
+            </a:r>
+            <a:r>
+              <a:rPr sz="1300" b="0" dirty="0">
+                <a:solidFill>
+                  <a:srgbClr val="1F2937"/>
+                </a:solidFill>
+                <a:latin typeface="Arial"/>
+              </a:rPr>
+              <a:t> </a:t>
+            </a:r>
+            <a:r>
+              <a:rPr sz="1300" b="0" dirty="0" err="1">
+                <a:solidFill>
+                  <a:srgbClr val="1F2937"/>
+                </a:solidFill>
+                <a:latin typeface="Arial"/>
+              </a:rPr>
+              <a:t>thế</a:t>
+            </a:r>
+            <a:r>
+              <a:rPr sz="1300" b="0" dirty="0">
+                <a:solidFill>
+                  <a:srgbClr val="1F2937"/>
+                </a:solidFill>
+                <a:latin typeface="Arial"/>
+              </a:rPr>
+              <a:t> Bootstrap.</a:t>
             </a:r>
           </a:p>
           <a:p>
@@ -28506,11 +27554,11 @@
             </a:avLst>
           </a:prstGeom>
           <a:solidFill>
-            <a:srgbClr val="FFFFFF"/>
+            <a:srgbClr val="E8EDF4"/>
           </a:solidFill>
-          <a:ln w="12700">
+          <a:ln w="17780">
             <a:solidFill>
-              <a:srgbClr val="D9E2EC"/>
+              <a:srgbClr val="B0BEC5"/>
             </a:solidFill>
           </a:ln>
           <a:effectLst/>
@@ -28538,63 +27586,9 @@
           </a:p>
         </p:txBody>
       </p:sp>
-      <p:sp>
-        <p:nvSpPr>
-          <p:cNvPr id="11" name="TextBox 10"/>
-          <p:cNvSpPr txBox="1"/>
-          <p:nvPr/>
-        </p:nvSpPr>
-        <p:spPr>
-          <a:xfrm>
-            <a:off x="777240" y="5852160"/>
-            <a:ext cx="10634472" cy="274320"/>
-          </a:xfrm>
-          <a:prstGeom prst="rect">
-            <a:avLst/>
-          </a:prstGeom>
-          <a:noFill/>
-        </p:spPr>
-        <p:txBody>
-          <a:bodyPr wrap="square" lIns="0" tIns="0" rIns="0" bIns="0" anchor="t">
-            <a:spAutoFit/>
-          </a:bodyPr>
-          <a:lstStyle/>
-          <a:p>
-            <a:pPr algn="ctr">
-              <a:lnSpc>
-                <a:spcPct val="105000"/>
-              </a:lnSpc>
-              <a:spcAft>
-                <a:spcPts val="0"/>
-              </a:spcAft>
-              <a:defRPr sz="1000" b="0">
-                <a:solidFill>
-                  <a:srgbClr val="6B7280"/>
-                </a:solidFill>
-                <a:latin typeface="Arial"/>
-              </a:defRPr>
-            </a:pPr>
-            <a:r>
-              <a:rPr sz="1000" b="0">
-                <a:solidFill>
-                  <a:srgbClr val="6B7280"/>
-                </a:solidFill>
-                <a:latin typeface="Arial"/>
-              </a:rPr>
-              <a:t>React SPA → Nginx/Vite proxy → Spring Boot REST API → MySQL</a:t>
-            </a:r>
-          </a:p>
-        </p:txBody>
-      </p:sp>
       <p:pic>
         <p:nvPicPr>
-          <p:cNvPr id="13" name="Picture 12">
-            <a:extLst>
-              <a:ext uri="{FF2B5EF4-FFF2-40B4-BE49-F238E27FC236}">
-                <a16:creationId xmlns:a16="http://schemas.microsoft.com/office/drawing/2014/main" id="{4A296E29-7658-2CFC-3C12-151A483783CA}"/>
-              </a:ext>
-            </a:extLst>
-          </p:cNvPr>
+          <p:cNvPr id="10" name="Picture 9" descr="architecture-diagram.png"/>
           <p:cNvPicPr>
             <a:picLocks noChangeAspect="1"/>
           </p:cNvPicPr>
@@ -28608,14 +27602,62 @@
         </p:blipFill>
         <p:spPr>
           <a:xfrm>
-            <a:off x="918412" y="1732360"/>
-            <a:ext cx="10352127" cy="3982640"/>
+            <a:off x="777240" y="1831874"/>
+            <a:ext cx="10634472" cy="3697172"/>
           </a:xfrm>
           <a:prstGeom prst="rect">
             <a:avLst/>
           </a:prstGeom>
         </p:spPr>
       </p:pic>
+      <p:sp>
+        <p:nvSpPr>
+          <p:cNvPr id="11" name="TextBox 10"/>
+          <p:cNvSpPr txBox="1"/>
+          <p:nvPr/>
+        </p:nvSpPr>
+        <p:spPr>
+          <a:xfrm>
+            <a:off x="777240" y="5852160"/>
+            <a:ext cx="10634472" cy="274320"/>
+          </a:xfrm>
+          <a:prstGeom prst="rect">
+            <a:avLst/>
+          </a:prstGeom>
+          <a:noFill/>
+        </p:spPr>
+        <p:txBody>
+          <a:bodyPr wrap="square" lIns="0" tIns="0" rIns="0" bIns="0" anchor="t">
+            <a:spAutoFit/>
+          </a:bodyPr>
+          <a:lstStyle/>
+          <a:p>
+            <a:pPr algn="ctr">
+              <a:lnSpc>
+                <a:spcPct val="105000"/>
+              </a:lnSpc>
+              <a:spcAft>
+                <a:spcPts val="0"/>
+              </a:spcAft>
+              <a:defRPr sz="1000" b="0">
+                <a:solidFill>
+                  <a:srgbClr val="6B7280"/>
+                </a:solidFill>
+                <a:latin typeface="Arial"/>
+              </a:defRPr>
+            </a:pPr>
+            <a:r>
+              <a:rPr sz="1000" b="0">
+                <a:solidFill>
+                  <a:srgbClr val="6B7280"/>
+                </a:solidFill>
+                <a:latin typeface="Arial"/>
+              </a:rPr>
+              <a:t>React SPA → Nginx/Vite proxy → Spring Boot REST API → MySQL</a:t>
+            </a:r>
+          </a:p>
+        </p:txBody>
+      </p:sp>
     </p:spTree>
   </p:cSld>
   <p:clrMapOvr>
@@ -28971,7 +28013,7 @@
                 </a:solidFill>
                 <a:latin typeface="Arial"/>
               </a:rPr>
-              <a:t>8</a:t>
+              <a:t>7</a:t>
             </a:r>
           </a:p>
         </p:txBody>
@@ -28993,11 +28035,11 @@
             </a:avLst>
           </a:prstGeom>
           <a:solidFill>
-            <a:srgbClr val="FFFFFF"/>
+            <a:srgbClr val="E8EDF4"/>
           </a:solidFill>
-          <a:ln w="12700">
+          <a:ln w="17780">
             <a:solidFill>
-              <a:srgbClr val="D9E2EC"/>
+              <a:srgbClr val="B0BEC5"/>
             </a:solidFill>
           </a:ln>
           <a:effectLst/>
@@ -29452,7 +28494,7 @@
                 </a:solidFill>
                 <a:latin typeface="Arial"/>
               </a:rPr>
-              <a:t>9</a:t>
+              <a:t>8</a:t>
             </a:r>
           </a:p>
         </p:txBody>
@@ -30536,7 +29578,7 @@
                 </a:solidFill>
                 <a:latin typeface="Arial"/>
               </a:rPr>
-              <a:t>10</a:t>
+              <a:t>9</a:t>
             </a:r>
           </a:p>
         </p:txBody>
@@ -30558,11 +29600,11 @@
             </a:avLst>
           </a:prstGeom>
           <a:solidFill>
-            <a:srgbClr val="FFFFFF"/>
+            <a:srgbClr val="E8EDF4"/>
           </a:solidFill>
-          <a:ln w="12700">
+          <a:ln w="17780">
             <a:solidFill>
-              <a:srgbClr val="D9E2EC"/>
+              <a:srgbClr val="B0BEC5"/>
             </a:solidFill>
           </a:ln>
           <a:effectLst/>

--- a/Task 9/Presentation/DoVeSo_BaoCao_Lab3.pptx
+++ b/Task 9/Presentation/DoVeSo_BaoCao_Lab3.pptx
@@ -14714,7 +14714,7 @@
         <p:spPr>
           <a:xfrm>
             <a:off x="1005840" y="2203704"/>
-            <a:ext cx="4800600" cy="3730752"/>
+            <a:ext cx="4800600" cy="1753044"/>
           </a:xfrm>
           <a:prstGeom prst="rect">
             <a:avLst/>
@@ -14742,13 +14742,297 @@
               </a:defRPr>
             </a:pPr>
             <a:r>
-              <a:rPr sz="1300" b="0">
-                <a:solidFill>
-                  <a:srgbClr val="1F2937"/>
-                </a:solidFill>
-                <a:latin typeface="Arial"/>
-              </a:rPr>
-              <a:t>•  Chưa hoàn thành: Google AdSense (FR 1.7), gamification comments (FR 2.6), preview vé dò (FR 3.15).</a:t>
+              <a:rPr sz="1300" b="0" dirty="0">
+                <a:solidFill>
+                  <a:srgbClr val="1F2937"/>
+                </a:solidFill>
+                <a:latin typeface="Arial"/>
+              </a:rPr>
+              <a:t>•  </a:t>
+            </a:r>
+            <a:r>
+              <a:rPr sz="1300" b="0" dirty="0" err="1">
+                <a:solidFill>
+                  <a:srgbClr val="1F2937"/>
+                </a:solidFill>
+                <a:latin typeface="Arial"/>
+              </a:rPr>
+              <a:t>Chưa</a:t>
+            </a:r>
+            <a:r>
+              <a:rPr sz="1300" b="0" dirty="0">
+                <a:solidFill>
+                  <a:srgbClr val="1F2937"/>
+                </a:solidFill>
+                <a:latin typeface="Arial"/>
+              </a:rPr>
+              <a:t> </a:t>
+            </a:r>
+            <a:r>
+              <a:rPr sz="1300" b="0" dirty="0" err="1">
+                <a:solidFill>
+                  <a:srgbClr val="1F2937"/>
+                </a:solidFill>
+                <a:latin typeface="Arial"/>
+              </a:rPr>
+              <a:t>hoàn</a:t>
+            </a:r>
+            <a:r>
+              <a:rPr sz="1300" b="0" dirty="0">
+                <a:solidFill>
+                  <a:srgbClr val="1F2937"/>
+                </a:solidFill>
+                <a:latin typeface="Arial"/>
+              </a:rPr>
+              <a:t> </a:t>
+            </a:r>
+            <a:r>
+              <a:rPr sz="1300" b="0" dirty="0" err="1">
+                <a:solidFill>
+                  <a:srgbClr val="1F2937"/>
+                </a:solidFill>
+                <a:latin typeface="Arial"/>
+              </a:rPr>
+              <a:t>thành</a:t>
+            </a:r>
+            <a:r>
+              <a:rPr sz="1300" b="0" dirty="0">
+                <a:solidFill>
+                  <a:srgbClr val="1F2937"/>
+                </a:solidFill>
+                <a:latin typeface="Arial"/>
+              </a:rPr>
+              <a:t>: Google AdSense (FR 1.7), gamification comments (FR 2.6), preview </a:t>
+            </a:r>
+            <a:r>
+              <a:rPr sz="1300" b="0" dirty="0" err="1">
+                <a:solidFill>
+                  <a:srgbClr val="1F2937"/>
+                </a:solidFill>
+                <a:latin typeface="Arial"/>
+              </a:rPr>
+              <a:t>vé</a:t>
+            </a:r>
+            <a:r>
+              <a:rPr sz="1300" b="0" dirty="0">
+                <a:solidFill>
+                  <a:srgbClr val="1F2937"/>
+                </a:solidFill>
+                <a:latin typeface="Arial"/>
+              </a:rPr>
+              <a:t> </a:t>
+            </a:r>
+            <a:r>
+              <a:rPr sz="1300" b="0" dirty="0" err="1">
+                <a:solidFill>
+                  <a:srgbClr val="1F2937"/>
+                </a:solidFill>
+                <a:latin typeface="Arial"/>
+              </a:rPr>
+              <a:t>dò</a:t>
+            </a:r>
+            <a:r>
+              <a:rPr sz="1300" b="0" dirty="0">
+                <a:solidFill>
+                  <a:srgbClr val="1F2937"/>
+                </a:solidFill>
+                <a:latin typeface="Arial"/>
+              </a:rPr>
+              <a:t> (FR 3.15).</a:t>
+            </a:r>
+          </a:p>
+          <a:p>
+            <a:pPr>
+              <a:lnSpc>
+                <a:spcPct val="108000"/>
+              </a:lnSpc>
+              <a:spcAft>
+                <a:spcPts val="500"/>
+              </a:spcAft>
+              <a:defRPr sz="1300" b="0">
+                <a:solidFill>
+                  <a:srgbClr val="1F2937"/>
+                </a:solidFill>
+                <a:latin typeface="Arial"/>
+              </a:defRPr>
+            </a:pPr>
+            <a:r>
+              <a:rPr sz="1300" b="0" dirty="0">
+                <a:solidFill>
+                  <a:srgbClr val="1F2937"/>
+                </a:solidFill>
+                <a:latin typeface="Arial"/>
+              </a:rPr>
+              <a:t>•  </a:t>
+            </a:r>
+            <a:r>
+              <a:rPr lang="en-US" sz="1300" dirty="0"/>
+              <a:t>Code coverage 70.66%. </a:t>
+            </a:r>
+            <a:r>
+              <a:rPr lang="en-US" sz="1300" dirty="0" err="1"/>
+              <a:t>Phần</a:t>
+            </a:r>
+            <a:r>
+              <a:rPr lang="en-US" sz="1300" dirty="0"/>
+              <a:t> </a:t>
+            </a:r>
+            <a:r>
+              <a:rPr lang="en-US" sz="1300" dirty="0" err="1"/>
+              <a:t>chưa</a:t>
+            </a:r>
+            <a:r>
+              <a:rPr lang="en-US" sz="1300" dirty="0"/>
+              <a:t> </a:t>
+            </a:r>
+            <a:r>
+              <a:rPr lang="en-US" sz="1300" dirty="0" err="1"/>
+              <a:t>phủ</a:t>
+            </a:r>
+            <a:r>
+              <a:rPr lang="en-US" sz="1300" dirty="0"/>
+              <a:t>: </a:t>
+            </a:r>
+            <a:r>
+              <a:rPr lang="en-US" sz="1300" dirty="0" err="1"/>
+              <a:t>các</a:t>
+            </a:r>
+            <a:r>
+              <a:rPr lang="en-US" sz="1300" dirty="0"/>
+              <a:t> </a:t>
+            </a:r>
+            <a:r>
+              <a:rPr lang="en-US" sz="1300" dirty="0" err="1"/>
+              <a:t>lớp</a:t>
+            </a:r>
+            <a:r>
+              <a:rPr lang="en-US" sz="1300" dirty="0"/>
+              <a:t> infra </a:t>
+            </a:r>
+            <a:r>
+              <a:rPr lang="en-US" sz="1300" dirty="0" err="1"/>
+              <a:t>mỏng</a:t>
+            </a:r>
+            <a:r>
+              <a:rPr lang="en-US" sz="1300" dirty="0"/>
+              <a:t> (</a:t>
+            </a:r>
+            <a:r>
+              <a:rPr lang="en-US" sz="1300" dirty="0" err="1"/>
+              <a:t>JwtService</a:t>
+            </a:r>
+            <a:r>
+              <a:rPr lang="en-US" sz="1300" dirty="0"/>
+              <a:t>, config) </a:t>
+            </a:r>
+            <a:r>
+              <a:rPr lang="en-US" sz="1300" dirty="0" err="1"/>
+              <a:t>và</a:t>
+            </a:r>
+            <a:r>
+              <a:rPr lang="en-US" sz="1300" dirty="0"/>
+              <a:t> </a:t>
+            </a:r>
+            <a:r>
+              <a:rPr lang="en-US" sz="1300" dirty="0" err="1"/>
+              <a:t>một</a:t>
+            </a:r>
+            <a:r>
+              <a:rPr lang="en-US" sz="1300" dirty="0"/>
+              <a:t> </a:t>
+            </a:r>
+            <a:r>
+              <a:rPr lang="en-US" sz="1300" dirty="0" err="1"/>
+              <a:t>số</a:t>
+            </a:r>
+            <a:r>
+              <a:rPr lang="en-US" sz="1300" dirty="0"/>
+              <a:t> </a:t>
+            </a:r>
+            <a:r>
+              <a:rPr lang="en-US" sz="1300" dirty="0" err="1"/>
+              <a:t>nhánh</a:t>
+            </a:r>
+            <a:r>
+              <a:rPr lang="en-US" sz="1300" dirty="0"/>
+              <a:t> </a:t>
+            </a:r>
+            <a:r>
+              <a:rPr lang="en-US" sz="1300" dirty="0" err="1"/>
+              <a:t>lỗi</a:t>
+            </a:r>
+            <a:r>
+              <a:rPr lang="en-US" sz="1300" dirty="0"/>
+              <a:t> </a:t>
+            </a:r>
+            <a:r>
+              <a:rPr lang="en-US" sz="1300" dirty="0" err="1"/>
+              <a:t>hiếm</a:t>
+            </a:r>
+            <a:r>
+              <a:rPr lang="en-US" sz="1300" dirty="0"/>
+              <a:t>.</a:t>
+            </a:r>
+          </a:p>
+          <a:p>
+            <a:pPr>
+              <a:lnSpc>
+                <a:spcPct val="108000"/>
+              </a:lnSpc>
+              <a:spcAft>
+                <a:spcPts val="500"/>
+              </a:spcAft>
+              <a:defRPr sz="1300" b="0">
+                <a:solidFill>
+                  <a:srgbClr val="1F2937"/>
+                </a:solidFill>
+                <a:latin typeface="Arial"/>
+              </a:defRPr>
+            </a:pPr>
+            <a:r>
+              <a:rPr sz="1300" b="0" dirty="0">
+                <a:solidFill>
+                  <a:srgbClr val="1F2937"/>
+                </a:solidFill>
+                <a:latin typeface="Arial"/>
+              </a:rPr>
+              <a:t>•  </a:t>
+            </a:r>
+            <a:r>
+              <a:rPr sz="1300" b="0" dirty="0" err="1">
+                <a:solidFill>
+                  <a:srgbClr val="1F2937"/>
+                </a:solidFill>
+                <a:latin typeface="Arial"/>
+              </a:rPr>
+              <a:t>Chưa</a:t>
+            </a:r>
+            <a:r>
+              <a:rPr sz="1300" b="0" dirty="0">
+                <a:solidFill>
+                  <a:srgbClr val="1F2937"/>
+                </a:solidFill>
+                <a:latin typeface="Arial"/>
+              </a:rPr>
+              <a:t> </a:t>
+            </a:r>
+            <a:r>
+              <a:rPr sz="1300" b="0" dirty="0" err="1">
+                <a:solidFill>
+                  <a:srgbClr val="1F2937"/>
+                </a:solidFill>
+                <a:latin typeface="Arial"/>
+              </a:rPr>
+              <a:t>có</a:t>
+            </a:r>
+            <a:r>
+              <a:rPr sz="1300" b="0" dirty="0">
+                <a:solidFill>
+                  <a:srgbClr val="1F2937"/>
+                </a:solidFill>
+                <a:latin typeface="Arial"/>
+              </a:rPr>
+              <a:t> refresh token.</a:t>
             </a:r>
           </a:p>
           <a:p>
@@ -14767,13 +15051,67 @@
               </a:defRPr>
             </a:pPr>
             <a:r>
-              <a:rPr sz="1300" b="0">
-                <a:solidFill>
-                  <a:srgbClr val="1F2937"/>
-                </a:solidFill>
-                <a:latin typeface="Arial"/>
-              </a:rPr>
-              <a:t>•  Code coverage chưa cao, khoảng 37.30%.</a:t>
+              <a:rPr sz="1300" b="0" dirty="0">
+                <a:solidFill>
+                  <a:srgbClr val="1F2937"/>
+                </a:solidFill>
+                <a:latin typeface="Arial"/>
+              </a:rPr>
+              <a:t>•  </a:t>
+            </a:r>
+            <a:r>
+              <a:rPr sz="1300" b="0" dirty="0" err="1">
+                <a:solidFill>
+                  <a:srgbClr val="1F2937"/>
+                </a:solidFill>
+                <a:latin typeface="Arial"/>
+              </a:rPr>
+              <a:t>Chưa</a:t>
+            </a:r>
+            <a:r>
+              <a:rPr sz="1300" b="0" dirty="0">
+                <a:solidFill>
+                  <a:srgbClr val="1F2937"/>
+                </a:solidFill>
+                <a:latin typeface="Arial"/>
+              </a:rPr>
+              <a:t> </a:t>
+            </a:r>
+            <a:r>
+              <a:rPr sz="1300" b="0" dirty="0" err="1">
+                <a:solidFill>
+                  <a:srgbClr val="1F2937"/>
+                </a:solidFill>
+                <a:latin typeface="Arial"/>
+              </a:rPr>
+              <a:t>có</a:t>
+            </a:r>
+            <a:r>
+              <a:rPr sz="1300" b="0" dirty="0">
+                <a:solidFill>
+                  <a:srgbClr val="1F2937"/>
+                </a:solidFill>
+                <a:latin typeface="Arial"/>
+              </a:rPr>
+              <a:t> rate limiting </a:t>
+            </a:r>
+            <a:r>
+              <a:rPr sz="1300" b="0" dirty="0" err="1">
+                <a:solidFill>
+                  <a:srgbClr val="1F2937"/>
+                </a:solidFill>
+                <a:latin typeface="Arial"/>
+              </a:rPr>
+              <a:t>hoặc</a:t>
+            </a:r>
+            <a:r>
+              <a:rPr sz="1300" b="0" dirty="0">
+                <a:solidFill>
+                  <a:srgbClr val="1F2937"/>
+                </a:solidFill>
+                <a:latin typeface="Arial"/>
+              </a:rPr>
+              <a:t> CAPTCHA.</a:t>
             </a:r>
           </a:p>
           <a:p>
@@ -14792,88 +15130,193 @@
               </a:defRPr>
             </a:pPr>
             <a:r>
-              <a:rPr sz="1300" b="0">
-                <a:solidFill>
-                  <a:srgbClr val="1F2937"/>
-                </a:solidFill>
-                <a:latin typeface="Arial"/>
-              </a:rPr>
-              <a:t>•  Chưa có refresh token.</a:t>
-            </a:r>
-          </a:p>
-          <a:p>
-            <a:pPr algn="l">
-              <a:lnSpc>
-                <a:spcPct val="108000"/>
-              </a:lnSpc>
-              <a:spcAft>
-                <a:spcPts val="500"/>
-              </a:spcAft>
-              <a:defRPr sz="1300" b="0">
-                <a:solidFill>
-                  <a:srgbClr val="1F2937"/>
-                </a:solidFill>
-                <a:latin typeface="Arial"/>
-              </a:defRPr>
-            </a:pPr>
-            <a:r>
-              <a:rPr sz="1300" b="0">
-                <a:solidFill>
-                  <a:srgbClr val="1F2937"/>
-                </a:solidFill>
-                <a:latin typeface="Arial"/>
-              </a:rPr>
-              <a:t>•  Chưa có rate limiting hoặc CAPTCHA.</a:t>
-            </a:r>
-          </a:p>
-          <a:p>
-            <a:pPr algn="l">
-              <a:lnSpc>
-                <a:spcPct val="108000"/>
-              </a:lnSpc>
-              <a:spcAft>
-                <a:spcPts val="500"/>
-              </a:spcAft>
-              <a:defRPr sz="1300" b="0">
-                <a:solidFill>
-                  <a:srgbClr val="1F2937"/>
-                </a:solidFill>
-                <a:latin typeface="Arial"/>
-              </a:defRPr>
-            </a:pPr>
-            <a:r>
-              <a:rPr sz="1300" b="0">
-                <a:solidFill>
-                  <a:srgbClr val="1F2937"/>
-                </a:solidFill>
-                <a:latin typeface="Arial"/>
-              </a:rPr>
-              <a:t>•  Dữ liệu kết quả đang nhập tay, chưa crawl tự động.</a:t>
-            </a:r>
-          </a:p>
-          <a:p>
-            <a:pPr algn="l">
-              <a:lnSpc>
-                <a:spcPct val="108000"/>
-              </a:lnSpc>
-              <a:spcAft>
-                <a:spcPts val="500"/>
-              </a:spcAft>
-              <a:defRPr sz="1300" b="0">
-                <a:solidFill>
-                  <a:srgbClr val="1F2937"/>
-                </a:solidFill>
-                <a:latin typeface="Arial"/>
-              </a:defRPr>
-            </a:pPr>
-            <a:r>
-              <a:rPr sz="1300" b="0">
-                <a:solidFill>
-                  <a:srgbClr val="1F2937"/>
-                </a:solidFill>
-                <a:latin typeface="Arial"/>
-              </a:rPr>
-              <a:t>•  Desktop history sort còn hạn chế so với mobile.</a:t>
+              <a:rPr sz="1300" b="0" dirty="0">
+                <a:solidFill>
+                  <a:srgbClr val="1F2937"/>
+                </a:solidFill>
+                <a:latin typeface="Arial"/>
+              </a:rPr>
+              <a:t>•  </a:t>
+            </a:r>
+            <a:r>
+              <a:rPr sz="1300" b="0" dirty="0" err="1">
+                <a:solidFill>
+                  <a:srgbClr val="1F2937"/>
+                </a:solidFill>
+                <a:latin typeface="Arial"/>
+              </a:rPr>
+              <a:t>Dữ</a:t>
+            </a:r>
+            <a:r>
+              <a:rPr sz="1300" b="0" dirty="0">
+                <a:solidFill>
+                  <a:srgbClr val="1F2937"/>
+                </a:solidFill>
+                <a:latin typeface="Arial"/>
+              </a:rPr>
+              <a:t> </a:t>
+            </a:r>
+            <a:r>
+              <a:rPr sz="1300" b="0" dirty="0" err="1">
+                <a:solidFill>
+                  <a:srgbClr val="1F2937"/>
+                </a:solidFill>
+                <a:latin typeface="Arial"/>
+              </a:rPr>
+              <a:t>liệu</a:t>
+            </a:r>
+            <a:r>
+              <a:rPr sz="1300" b="0" dirty="0">
+                <a:solidFill>
+                  <a:srgbClr val="1F2937"/>
+                </a:solidFill>
+                <a:latin typeface="Arial"/>
+              </a:rPr>
+              <a:t> </a:t>
+            </a:r>
+            <a:r>
+              <a:rPr sz="1300" b="0" dirty="0" err="1">
+                <a:solidFill>
+                  <a:srgbClr val="1F2937"/>
+                </a:solidFill>
+                <a:latin typeface="Arial"/>
+              </a:rPr>
+              <a:t>kết</a:t>
+            </a:r>
+            <a:r>
+              <a:rPr sz="1300" b="0" dirty="0">
+                <a:solidFill>
+                  <a:srgbClr val="1F2937"/>
+                </a:solidFill>
+                <a:latin typeface="Arial"/>
+              </a:rPr>
+              <a:t> </a:t>
+            </a:r>
+            <a:r>
+              <a:rPr sz="1300" b="0" dirty="0" err="1">
+                <a:solidFill>
+                  <a:srgbClr val="1F2937"/>
+                </a:solidFill>
+                <a:latin typeface="Arial"/>
+              </a:rPr>
+              <a:t>quả</a:t>
+            </a:r>
+            <a:r>
+              <a:rPr sz="1300" b="0" dirty="0">
+                <a:solidFill>
+                  <a:srgbClr val="1F2937"/>
+                </a:solidFill>
+                <a:latin typeface="Arial"/>
+              </a:rPr>
+              <a:t> </a:t>
+            </a:r>
+            <a:r>
+              <a:rPr sz="1300" b="0" dirty="0" err="1">
+                <a:solidFill>
+                  <a:srgbClr val="1F2937"/>
+                </a:solidFill>
+                <a:latin typeface="Arial"/>
+              </a:rPr>
+              <a:t>đang</a:t>
+            </a:r>
+            <a:r>
+              <a:rPr sz="1300" b="0" dirty="0">
+                <a:solidFill>
+                  <a:srgbClr val="1F2937"/>
+                </a:solidFill>
+                <a:latin typeface="Arial"/>
+              </a:rPr>
+              <a:t> </a:t>
+            </a:r>
+            <a:r>
+              <a:rPr sz="1300" b="0" dirty="0" err="1">
+                <a:solidFill>
+                  <a:srgbClr val="1F2937"/>
+                </a:solidFill>
+                <a:latin typeface="Arial"/>
+              </a:rPr>
+              <a:t>nhập</a:t>
+            </a:r>
+            <a:r>
+              <a:rPr sz="1300" b="0" dirty="0">
+                <a:solidFill>
+                  <a:srgbClr val="1F2937"/>
+                </a:solidFill>
+                <a:latin typeface="Arial"/>
+              </a:rPr>
+              <a:t> </a:t>
+            </a:r>
+            <a:r>
+              <a:rPr sz="1300" b="0" dirty="0" err="1">
+                <a:solidFill>
+                  <a:srgbClr val="1F2937"/>
+                </a:solidFill>
+                <a:latin typeface="Arial"/>
+              </a:rPr>
+              <a:t>tay</a:t>
+            </a:r>
+            <a:r>
+              <a:rPr sz="1300" b="0" dirty="0">
+                <a:solidFill>
+                  <a:srgbClr val="1F2937"/>
+                </a:solidFill>
+                <a:latin typeface="Arial"/>
+              </a:rPr>
+              <a:t>, </a:t>
+            </a:r>
+            <a:r>
+              <a:rPr sz="1300" b="0" dirty="0" err="1">
+                <a:solidFill>
+                  <a:srgbClr val="1F2937"/>
+                </a:solidFill>
+                <a:latin typeface="Arial"/>
+              </a:rPr>
+              <a:t>chưa</a:t>
+            </a:r>
+            <a:r>
+              <a:rPr sz="1300" b="0" dirty="0">
+                <a:solidFill>
+                  <a:srgbClr val="1F2937"/>
+                </a:solidFill>
+                <a:latin typeface="Arial"/>
+              </a:rPr>
+              <a:t> crawl </a:t>
+            </a:r>
+            <a:r>
+              <a:rPr sz="1300" b="0" dirty="0" err="1">
+                <a:solidFill>
+                  <a:srgbClr val="1F2937"/>
+                </a:solidFill>
+                <a:latin typeface="Arial"/>
+              </a:rPr>
+              <a:t>tự</a:t>
+            </a:r>
+            <a:r>
+              <a:rPr sz="1300" b="0" dirty="0">
+                <a:solidFill>
+                  <a:srgbClr val="1F2937"/>
+                </a:solidFill>
+                <a:latin typeface="Arial"/>
+              </a:rPr>
+              <a:t> </a:t>
+            </a:r>
+            <a:r>
+              <a:rPr sz="1300" b="0" dirty="0" err="1">
+                <a:solidFill>
+                  <a:srgbClr val="1F2937"/>
+                </a:solidFill>
+                <a:latin typeface="Arial"/>
+              </a:rPr>
+              <a:t>động</a:t>
+            </a:r>
+            <a:r>
+              <a:rPr sz="1300" b="0" dirty="0">
+                <a:solidFill>
+                  <a:srgbClr val="1F2937"/>
+                </a:solidFill>
+                <a:latin typeface="Arial"/>
+              </a:rPr>
+              <a:t>.</a:t>
             </a:r>
           </a:p>
         </p:txBody>
@@ -25279,7 +25722,7 @@
               </a:defRPr>
             </a:pPr>
             <a:r>
-              <a:rPr sz="1200" b="0">
+              <a:rPr sz="1200" b="0" dirty="0">
                 <a:solidFill>
                   <a:srgbClr val="1F2937"/>
                 </a:solidFill>
@@ -25304,7 +25747,7 @@
               </a:defRPr>
             </a:pPr>
             <a:r>
-              <a:rPr sz="1200" b="0">
+              <a:rPr sz="1200" b="0" dirty="0">
                 <a:solidFill>
                   <a:srgbClr val="1F2937"/>
                 </a:solidFill>
@@ -25329,7 +25772,7 @@
               </a:defRPr>
             </a:pPr>
             <a:r>
-              <a:rPr sz="1200" b="0">
+              <a:rPr sz="1200" b="0" dirty="0">
                 <a:solidFill>
                   <a:srgbClr val="1F2937"/>
                 </a:solidFill>
@@ -25354,7 +25797,7 @@
               </a:defRPr>
             </a:pPr>
             <a:r>
-              <a:rPr sz="1200" b="0">
+              <a:rPr sz="1200" b="0" dirty="0">
                 <a:solidFill>
                   <a:srgbClr val="1F2937"/>
                 </a:solidFill>
@@ -25379,7 +25822,7 @@
               </a:defRPr>
             </a:pPr>
             <a:r>
-              <a:rPr sz="1200" b="0">
+              <a:rPr sz="1200" b="0" dirty="0">
                 <a:solidFill>
                   <a:srgbClr val="1F2937"/>
                 </a:solidFill>
@@ -25404,7 +25847,7 @@
               </a:defRPr>
             </a:pPr>
             <a:r>
-              <a:rPr sz="1200" b="0">
+              <a:rPr sz="1200" b="0" dirty="0">
                 <a:solidFill>
                   <a:srgbClr val="1F2937"/>
                 </a:solidFill>
@@ -25429,7 +25872,7 @@
               </a:defRPr>
             </a:pPr>
             <a:r>
-              <a:rPr sz="1200" b="0">
+              <a:rPr sz="1200" b="0" dirty="0">
                 <a:solidFill>
                   <a:srgbClr val="1F2937"/>
                 </a:solidFill>

--- a/Task 9/Presentation/DoVeSo_BaoCao_Lab3.pptx
+++ b/Task 9/Presentation/DoVeSo_BaoCao_Lab3.pptx
@@ -8956,13 +8956,31 @@
               </a:defRPr>
             </a:pPr>
             <a:r>
-              <a:rPr sz="1200" b="0">
-                <a:solidFill>
-                  <a:srgbClr val="1F2937"/>
-                </a:solidFill>
-                <a:latin typeface="Arial"/>
-              </a:rPr>
-              <a:t>•  BCrypt password hashing.</a:t>
+              <a:rPr sz="1200" b="0" dirty="0">
+                <a:solidFill>
+                  <a:srgbClr val="1F2937"/>
+                </a:solidFill>
+                <a:latin typeface="Arial"/>
+              </a:rPr>
+              <a:t>•  </a:t>
+            </a:r>
+            <a:r>
+              <a:rPr sz="1200" b="0" dirty="0" err="1">
+                <a:solidFill>
+                  <a:srgbClr val="1F2937"/>
+                </a:solidFill>
+                <a:latin typeface="Arial"/>
+              </a:rPr>
+              <a:t>BCrypt</a:t>
+            </a:r>
+            <a:r>
+              <a:rPr sz="1200" b="0" dirty="0">
+                <a:solidFill>
+                  <a:srgbClr val="1F2937"/>
+                </a:solidFill>
+                <a:latin typeface="Arial"/>
+              </a:rPr>
+              <a:t> password hashing.</a:t>
             </a:r>
           </a:p>
           <a:p>
@@ -8981,13 +8999,49 @@
               </a:defRPr>
             </a:pPr>
             <a:r>
-              <a:rPr sz="1200" b="0">
-                <a:solidFill>
-                  <a:srgbClr val="1F2937"/>
-                </a:solidFill>
-                <a:latin typeface="Arial"/>
-              </a:rPr>
-              <a:t>•  JWT stateless, hạn 24 giờ.</a:t>
+              <a:rPr sz="1200" b="0" dirty="0">
+                <a:solidFill>
+                  <a:srgbClr val="1F2937"/>
+                </a:solidFill>
+                <a:latin typeface="Arial"/>
+              </a:rPr>
+              <a:t>•  JWT stateless, </a:t>
+            </a:r>
+            <a:r>
+              <a:rPr sz="1200" b="0" dirty="0" err="1">
+                <a:solidFill>
+                  <a:srgbClr val="1F2937"/>
+                </a:solidFill>
+                <a:latin typeface="Arial"/>
+              </a:rPr>
+              <a:t>hạn</a:t>
+            </a:r>
+            <a:r>
+              <a:rPr sz="1200" b="0" dirty="0">
+                <a:solidFill>
+                  <a:srgbClr val="1F2937"/>
+                </a:solidFill>
+                <a:latin typeface="Arial"/>
+              </a:rPr>
+              <a:t> 24 </a:t>
+            </a:r>
+            <a:r>
+              <a:rPr sz="1200" b="0" dirty="0" err="1">
+                <a:solidFill>
+                  <a:srgbClr val="1F2937"/>
+                </a:solidFill>
+                <a:latin typeface="Arial"/>
+              </a:rPr>
+              <a:t>giờ</a:t>
+            </a:r>
+            <a:r>
+              <a:rPr sz="1200" b="0" dirty="0">
+                <a:solidFill>
+                  <a:srgbClr val="1F2937"/>
+                </a:solidFill>
+                <a:latin typeface="Arial"/>
+              </a:rPr>
+              <a:t>.</a:t>
             </a:r>
           </a:p>
           <a:p>
@@ -9006,13 +9060,103 @@
               </a:defRPr>
             </a:pPr>
             <a:r>
-              <a:rPr sz="1200" b="0">
-                <a:solidFill>
-                  <a:srgbClr val="1F2937"/>
-                </a:solidFill>
-                <a:latin typeface="Arial"/>
-              </a:rPr>
-              <a:t>•  Đọc role và isActive từ DB mỗi request.</a:t>
+              <a:rPr sz="1200" b="0" dirty="0">
+                <a:solidFill>
+                  <a:srgbClr val="1F2937"/>
+                </a:solidFill>
+                <a:latin typeface="Arial"/>
+              </a:rPr>
+              <a:t>•  </a:t>
+            </a:r>
+            <a:r>
+              <a:rPr sz="1200" b="0" dirty="0" err="1">
+                <a:solidFill>
+                  <a:srgbClr val="1F2937"/>
+                </a:solidFill>
+                <a:latin typeface="Arial"/>
+              </a:rPr>
+              <a:t>Đọc</a:t>
+            </a:r>
+            <a:r>
+              <a:rPr sz="1200" b="0" dirty="0">
+                <a:solidFill>
+                  <a:srgbClr val="1F2937"/>
+                </a:solidFill>
+                <a:latin typeface="Arial"/>
+              </a:rPr>
+              <a:t> role </a:t>
+            </a:r>
+            <a:r>
+              <a:rPr sz="1200" b="0" dirty="0" err="1">
+                <a:solidFill>
+                  <a:srgbClr val="1F2937"/>
+                </a:solidFill>
+                <a:latin typeface="Arial"/>
+              </a:rPr>
+              <a:t>và</a:t>
+            </a:r>
+            <a:r>
+              <a:rPr sz="1200" b="0" dirty="0">
+                <a:solidFill>
+                  <a:srgbClr val="1F2937"/>
+                </a:solidFill>
+                <a:latin typeface="Arial"/>
+              </a:rPr>
+              <a:t> </a:t>
+            </a:r>
+            <a:r>
+              <a:rPr sz="1200" b="0" dirty="0" err="1">
+                <a:solidFill>
+                  <a:srgbClr val="1F2937"/>
+                </a:solidFill>
+                <a:latin typeface="Arial"/>
+              </a:rPr>
+              <a:t>isActive</a:t>
+            </a:r>
+            <a:r>
+              <a:rPr sz="1200" b="0" dirty="0">
+                <a:solidFill>
+                  <a:srgbClr val="1F2937"/>
+                </a:solidFill>
+                <a:latin typeface="Arial"/>
+              </a:rPr>
+              <a:t> </a:t>
+            </a:r>
+            <a:r>
+              <a:rPr sz="1200" b="0" dirty="0" err="1">
+                <a:solidFill>
+                  <a:srgbClr val="1F2937"/>
+                </a:solidFill>
+                <a:latin typeface="Arial"/>
+              </a:rPr>
+              <a:t>từ</a:t>
+            </a:r>
+            <a:r>
+              <a:rPr sz="1200" b="0" dirty="0">
+                <a:solidFill>
+                  <a:srgbClr val="1F2937"/>
+                </a:solidFill>
+                <a:latin typeface="Arial"/>
+              </a:rPr>
+              <a:t> DB </a:t>
+            </a:r>
+            <a:r>
+              <a:rPr sz="1200" b="0" dirty="0" err="1">
+                <a:solidFill>
+                  <a:srgbClr val="1F2937"/>
+                </a:solidFill>
+                <a:latin typeface="Arial"/>
+              </a:rPr>
+              <a:t>mỗi</a:t>
+            </a:r>
+            <a:r>
+              <a:rPr sz="1200" b="0" dirty="0">
+                <a:solidFill>
+                  <a:srgbClr val="1F2937"/>
+                </a:solidFill>
+                <a:latin typeface="Arial"/>
+              </a:rPr>
+              <a:t> request.</a:t>
             </a:r>
           </a:p>
           <a:p>
@@ -9031,13 +9175,49 @@
               </a:defRPr>
             </a:pPr>
             <a:r>
-              <a:rPr sz="1200" b="0">
-                <a:solidFill>
-                  <a:srgbClr val="1F2937"/>
-                </a:solidFill>
-                <a:latin typeface="Arial"/>
-              </a:rPr>
-              <a:t>•  Google JWKS và Facebook debug_token.</a:t>
+              <a:rPr sz="1200" b="0" dirty="0">
+                <a:solidFill>
+                  <a:srgbClr val="1F2937"/>
+                </a:solidFill>
+                <a:latin typeface="Arial"/>
+              </a:rPr>
+              <a:t>•  Google JWKS </a:t>
+            </a:r>
+            <a:r>
+              <a:rPr sz="1200" b="0" dirty="0" err="1">
+                <a:solidFill>
+                  <a:srgbClr val="1F2937"/>
+                </a:solidFill>
+                <a:latin typeface="Arial"/>
+              </a:rPr>
+              <a:t>và</a:t>
+            </a:r>
+            <a:r>
+              <a:rPr sz="1200" b="0" dirty="0">
+                <a:solidFill>
+                  <a:srgbClr val="1F2937"/>
+                </a:solidFill>
+                <a:latin typeface="Arial"/>
+              </a:rPr>
+              <a:t> Facebook </a:t>
+            </a:r>
+            <a:r>
+              <a:rPr sz="1200" b="0" dirty="0" err="1">
+                <a:solidFill>
+                  <a:srgbClr val="1F2937"/>
+                </a:solidFill>
+                <a:latin typeface="Arial"/>
+              </a:rPr>
+              <a:t>debug_token</a:t>
+            </a:r>
+            <a:r>
+              <a:rPr sz="1200" b="0" dirty="0">
+                <a:solidFill>
+                  <a:srgbClr val="1F2937"/>
+                </a:solidFill>
+                <a:latin typeface="Arial"/>
+              </a:rPr>
+              <a:t>.</a:t>
             </a:r>
           </a:p>
         </p:txBody>
@@ -9221,13 +9401,85 @@
               </a:defRPr>
             </a:pPr>
             <a:r>
-              <a:rPr sz="1200" b="0">
-                <a:solidFill>
-                  <a:srgbClr val="1F2937"/>
-                </a:solidFill>
-                <a:latin typeface="Arial"/>
-              </a:rPr>
-              <a:t>•  Batch query kiểm tra vé trùng.</a:t>
+              <a:rPr sz="1200" b="0" dirty="0">
+                <a:solidFill>
+                  <a:srgbClr val="1F2937"/>
+                </a:solidFill>
+                <a:latin typeface="Arial"/>
+              </a:rPr>
+              <a:t>•  Batch query </a:t>
+            </a:r>
+            <a:r>
+              <a:rPr sz="1200" b="0" dirty="0" err="1">
+                <a:solidFill>
+                  <a:srgbClr val="1F2937"/>
+                </a:solidFill>
+                <a:latin typeface="Arial"/>
+              </a:rPr>
+              <a:t>kiểm</a:t>
+            </a:r>
+            <a:r>
+              <a:rPr sz="1200" b="0" dirty="0">
+                <a:solidFill>
+                  <a:srgbClr val="1F2937"/>
+                </a:solidFill>
+                <a:latin typeface="Arial"/>
+              </a:rPr>
+              <a:t> </a:t>
+            </a:r>
+            <a:r>
+              <a:rPr sz="1200" b="0" dirty="0" err="1">
+                <a:solidFill>
+                  <a:srgbClr val="1F2937"/>
+                </a:solidFill>
+                <a:latin typeface="Arial"/>
+              </a:rPr>
+              <a:t>tra</a:t>
+            </a:r>
+            <a:r>
+              <a:rPr sz="1200" b="0" dirty="0">
+                <a:solidFill>
+                  <a:srgbClr val="1F2937"/>
+                </a:solidFill>
+                <a:latin typeface="Arial"/>
+              </a:rPr>
+              <a:t> </a:t>
+            </a:r>
+            <a:r>
+              <a:rPr sz="1200" b="0" dirty="0" err="1">
+                <a:solidFill>
+                  <a:srgbClr val="1F2937"/>
+                </a:solidFill>
+                <a:latin typeface="Arial"/>
+              </a:rPr>
+              <a:t>vé</a:t>
+            </a:r>
+            <a:r>
+              <a:rPr sz="1200" b="0" dirty="0">
+                <a:solidFill>
+                  <a:srgbClr val="1F2937"/>
+                </a:solidFill>
+                <a:latin typeface="Arial"/>
+              </a:rPr>
+              <a:t> </a:t>
+            </a:r>
+            <a:r>
+              <a:rPr sz="1200" b="0" dirty="0" err="1">
+                <a:solidFill>
+                  <a:srgbClr val="1F2937"/>
+                </a:solidFill>
+                <a:latin typeface="Arial"/>
+              </a:rPr>
+              <a:t>trùng</a:t>
+            </a:r>
+            <a:r>
+              <a:rPr sz="1200" b="0" dirty="0">
+                <a:solidFill>
+                  <a:srgbClr val="1F2937"/>
+                </a:solidFill>
+                <a:latin typeface="Arial"/>
+              </a:rPr>
+              <a:t>.</a:t>
             </a:r>
           </a:p>
           <a:p>
@@ -9246,13 +9498,31 @@
               </a:defRPr>
             </a:pPr>
             <a:r>
-              <a:rPr sz="1200" b="0">
-                <a:solidFill>
-                  <a:srgbClr val="1F2937"/>
-                </a:solidFill>
-                <a:latin typeface="Arial"/>
-              </a:rPr>
-              <a:t>•  Atomic update total_queries.</a:t>
+              <a:rPr sz="1200" b="0" dirty="0">
+                <a:solidFill>
+                  <a:srgbClr val="1F2937"/>
+                </a:solidFill>
+                <a:latin typeface="Arial"/>
+              </a:rPr>
+              <a:t>•  Atomic update </a:t>
+            </a:r>
+            <a:r>
+              <a:rPr sz="1200" b="0" dirty="0" err="1">
+                <a:solidFill>
+                  <a:srgbClr val="1F2937"/>
+                </a:solidFill>
+                <a:latin typeface="Arial"/>
+              </a:rPr>
+              <a:t>total_queries</a:t>
+            </a:r>
+            <a:r>
+              <a:rPr sz="1200" b="0" dirty="0">
+                <a:solidFill>
+                  <a:srgbClr val="1F2937"/>
+                </a:solidFill>
+                <a:latin typeface="Arial"/>
+              </a:rPr>
+              <a:t>.</a:t>
             </a:r>
           </a:p>
           <a:p>
@@ -9271,7 +9541,7 @@
               </a:defRPr>
             </a:pPr>
             <a:r>
-              <a:rPr sz="1200" b="0">
+              <a:rPr sz="1200" b="0" dirty="0">
                 <a:solidFill>
                   <a:srgbClr val="1F2937"/>
                 </a:solidFill>
@@ -9296,13 +9566,31 @@
               </a:defRPr>
             </a:pPr>
             <a:r>
-              <a:rPr sz="1200" b="0">
-                <a:solidFill>
-                  <a:srgbClr val="1F2937"/>
-                </a:solidFill>
-                <a:latin typeface="Arial"/>
-              </a:rPr>
-              <a:t>•  Pagination ở tầng database.</a:t>
+              <a:rPr sz="1200" b="0" dirty="0">
+                <a:solidFill>
+                  <a:srgbClr val="1F2937"/>
+                </a:solidFill>
+                <a:latin typeface="Arial"/>
+              </a:rPr>
+              <a:t>•  Pagination ở </a:t>
+            </a:r>
+            <a:r>
+              <a:rPr sz="1200" b="0" dirty="0" err="1">
+                <a:solidFill>
+                  <a:srgbClr val="1F2937"/>
+                </a:solidFill>
+                <a:latin typeface="Arial"/>
+              </a:rPr>
+              <a:t>tầng</a:t>
+            </a:r>
+            <a:r>
+              <a:rPr sz="1200" b="0" dirty="0">
+                <a:solidFill>
+                  <a:srgbClr val="1F2937"/>
+                </a:solidFill>
+                <a:latin typeface="Arial"/>
+              </a:rPr>
+              <a:t> database.</a:t>
             </a:r>
           </a:p>
         </p:txBody>
@@ -9486,7 +9774,7 @@
               </a:defRPr>
             </a:pPr>
             <a:r>
-              <a:rPr sz="1200" b="0">
+              <a:rPr sz="1200" b="0" dirty="0">
                 <a:solidFill>
                   <a:srgbClr val="1F2937"/>
                 </a:solidFill>
@@ -9511,13 +9799,67 @@
               </a:defRPr>
             </a:pPr>
             <a:r>
-              <a:rPr sz="1200" b="0">
-                <a:solidFill>
-                  <a:srgbClr val="1F2937"/>
-                </a:solidFill>
-                <a:latin typeface="Arial"/>
-              </a:rPr>
-              <a:t>•  Table chuyển thành card list trên mobile.</a:t>
+              <a:rPr sz="1200" b="0" dirty="0">
+                <a:solidFill>
+                  <a:srgbClr val="1F2937"/>
+                </a:solidFill>
+                <a:latin typeface="Arial"/>
+              </a:rPr>
+              <a:t>•  Table </a:t>
+            </a:r>
+            <a:r>
+              <a:rPr sz="1200" b="0" dirty="0" err="1">
+                <a:solidFill>
+                  <a:srgbClr val="1F2937"/>
+                </a:solidFill>
+                <a:latin typeface="Arial"/>
+              </a:rPr>
+              <a:t>chuyển</a:t>
+            </a:r>
+            <a:r>
+              <a:rPr sz="1200" b="0" dirty="0">
+                <a:solidFill>
+                  <a:srgbClr val="1F2937"/>
+                </a:solidFill>
+                <a:latin typeface="Arial"/>
+              </a:rPr>
+              <a:t> </a:t>
+            </a:r>
+            <a:r>
+              <a:rPr sz="1200" b="0" dirty="0" err="1">
+                <a:solidFill>
+                  <a:srgbClr val="1F2937"/>
+                </a:solidFill>
+                <a:latin typeface="Arial"/>
+              </a:rPr>
+              <a:t>thành</a:t>
+            </a:r>
+            <a:r>
+              <a:rPr sz="1200" b="0" dirty="0">
+                <a:solidFill>
+                  <a:srgbClr val="1F2937"/>
+                </a:solidFill>
+                <a:latin typeface="Arial"/>
+              </a:rPr>
+              <a:t> card list </a:t>
+            </a:r>
+            <a:r>
+              <a:rPr sz="1200" b="0" dirty="0" err="1">
+                <a:solidFill>
+                  <a:srgbClr val="1F2937"/>
+                </a:solidFill>
+                <a:latin typeface="Arial"/>
+              </a:rPr>
+              <a:t>trên</a:t>
+            </a:r>
+            <a:r>
+              <a:rPr sz="1200" b="0" dirty="0">
+                <a:solidFill>
+                  <a:srgbClr val="1F2937"/>
+                </a:solidFill>
+                <a:latin typeface="Arial"/>
+              </a:rPr>
+              <a:t> mobile.</a:t>
             </a:r>
           </a:p>
           <a:p>
@@ -9536,13 +9878,49 @@
               </a:defRPr>
             </a:pPr>
             <a:r>
-              <a:rPr sz="1200" b="0">
-                <a:solidFill>
-                  <a:srgbClr val="1F2937"/>
-                </a:solidFill>
-                <a:latin typeface="Arial"/>
-              </a:rPr>
-              <a:t>•  Ant Design theme tùy chỉnh.</a:t>
+              <a:rPr sz="1200" b="0" dirty="0">
+                <a:solidFill>
+                  <a:srgbClr val="1F2937"/>
+                </a:solidFill>
+                <a:latin typeface="Arial"/>
+              </a:rPr>
+              <a:t>•  Ant Design theme </a:t>
+            </a:r>
+            <a:r>
+              <a:rPr sz="1200" b="0" dirty="0" err="1">
+                <a:solidFill>
+                  <a:srgbClr val="1F2937"/>
+                </a:solidFill>
+                <a:latin typeface="Arial"/>
+              </a:rPr>
+              <a:t>tùy</a:t>
+            </a:r>
+            <a:r>
+              <a:rPr sz="1200" b="0" dirty="0">
+                <a:solidFill>
+                  <a:srgbClr val="1F2937"/>
+                </a:solidFill>
+                <a:latin typeface="Arial"/>
+              </a:rPr>
+              <a:t> </a:t>
+            </a:r>
+            <a:r>
+              <a:rPr sz="1200" b="0" dirty="0" err="1">
+                <a:solidFill>
+                  <a:srgbClr val="1F2937"/>
+                </a:solidFill>
+                <a:latin typeface="Arial"/>
+              </a:rPr>
+              <a:t>chỉnh</a:t>
+            </a:r>
+            <a:r>
+              <a:rPr sz="1200" b="0" dirty="0">
+                <a:solidFill>
+                  <a:srgbClr val="1F2937"/>
+                </a:solidFill>
+                <a:latin typeface="Arial"/>
+              </a:rPr>
+              <a:t>.</a:t>
             </a:r>
           </a:p>
           <a:p>
@@ -9561,13 +9939,49 @@
               </a:defRPr>
             </a:pPr>
             <a:r>
-              <a:rPr sz="1200" b="0">
-                <a:solidFill>
-                  <a:srgbClr val="1F2937"/>
-                </a:solidFill>
-                <a:latin typeface="Arial"/>
-              </a:rPr>
-              <a:t>•  Biểu đồ Recharts.</a:t>
+              <a:rPr sz="1200" b="0" dirty="0">
+                <a:solidFill>
+                  <a:srgbClr val="1F2937"/>
+                </a:solidFill>
+                <a:latin typeface="Arial"/>
+              </a:rPr>
+              <a:t>•  </a:t>
+            </a:r>
+            <a:r>
+              <a:rPr sz="1200" b="0" dirty="0" err="1">
+                <a:solidFill>
+                  <a:srgbClr val="1F2937"/>
+                </a:solidFill>
+                <a:latin typeface="Arial"/>
+              </a:rPr>
+              <a:t>Biểu</a:t>
+            </a:r>
+            <a:r>
+              <a:rPr sz="1200" b="0" dirty="0">
+                <a:solidFill>
+                  <a:srgbClr val="1F2937"/>
+                </a:solidFill>
+                <a:latin typeface="Arial"/>
+              </a:rPr>
+              <a:t> </a:t>
+            </a:r>
+            <a:r>
+              <a:rPr sz="1200" b="0" dirty="0" err="1">
+                <a:solidFill>
+                  <a:srgbClr val="1F2937"/>
+                </a:solidFill>
+                <a:latin typeface="Arial"/>
+              </a:rPr>
+              <a:t>đồ</a:t>
+            </a:r>
+            <a:r>
+              <a:rPr sz="1200" b="0" dirty="0">
+                <a:solidFill>
+                  <a:srgbClr val="1F2937"/>
+                </a:solidFill>
+                <a:latin typeface="Arial"/>
+              </a:rPr>
+              <a:t> Recharts.</a:t>
             </a:r>
           </a:p>
         </p:txBody>
@@ -9751,7 +10165,7 @@
               </a:defRPr>
             </a:pPr>
             <a:r>
-              <a:rPr sz="1200" b="0">
+              <a:rPr sz="1200" b="0" dirty="0">
                 <a:solidFill>
                   <a:srgbClr val="1F2937"/>
                 </a:solidFill>
@@ -9776,13 +10190,31 @@
               </a:defRPr>
             </a:pPr>
             <a:r>
-              <a:rPr sz="1200" b="0">
-                <a:solidFill>
-                  <a:srgbClr val="1F2937"/>
-                </a:solidFill>
-                <a:latin typeface="Arial"/>
-              </a:rPr>
-              <a:t>•  Docker Compose dev và prod.</a:t>
+              <a:rPr sz="1200" b="0" dirty="0">
+                <a:solidFill>
+                  <a:srgbClr val="1F2937"/>
+                </a:solidFill>
+                <a:latin typeface="Arial"/>
+              </a:rPr>
+              <a:t>•  Docker Compose dev </a:t>
+            </a:r>
+            <a:r>
+              <a:rPr sz="1200" b="0" dirty="0" err="1">
+                <a:solidFill>
+                  <a:srgbClr val="1F2937"/>
+                </a:solidFill>
+                <a:latin typeface="Arial"/>
+              </a:rPr>
+              <a:t>và</a:t>
+            </a:r>
+            <a:r>
+              <a:rPr sz="1200" b="0" dirty="0">
+                <a:solidFill>
+                  <a:srgbClr val="1F2937"/>
+                </a:solidFill>
+                <a:latin typeface="Arial"/>
+              </a:rPr>
+              <a:t> prod.</a:t>
             </a:r>
           </a:p>
           <a:p>
@@ -9801,7 +10233,7 @@
               </a:defRPr>
             </a:pPr>
             <a:r>
-              <a:rPr sz="1200" b="0">
+              <a:rPr sz="1200" b="0" dirty="0">
                 <a:solidFill>
                   <a:srgbClr val="1F2937"/>
                 </a:solidFill>
@@ -9826,7 +10258,7 @@
               </a:defRPr>
             </a:pPr>
             <a:r>
-              <a:rPr sz="1200" b="0">
+              <a:rPr sz="1200" b="0" dirty="0">
                 <a:solidFill>
                   <a:srgbClr val="1F2937"/>
                 </a:solidFill>
@@ -13112,13 +13544,211 @@
               </a:defRPr>
             </a:pPr>
             <a:r>
-              <a:rPr sz="1300" b="0">
-                <a:solidFill>
-                  <a:srgbClr val="1F2937"/>
-                </a:solidFill>
-                <a:latin typeface="Arial"/>
-              </a:rPr>
-              <a:t>•  Người dùng thường dò vé số thủ công, dễ sai sót.</a:t>
+              <a:rPr sz="1300" b="0" dirty="0">
+                <a:solidFill>
+                  <a:srgbClr val="1F2937"/>
+                </a:solidFill>
+                <a:latin typeface="Arial"/>
+              </a:rPr>
+              <a:t>•  </a:t>
+            </a:r>
+            <a:r>
+              <a:rPr sz="1300" b="0" dirty="0" err="1">
+                <a:solidFill>
+                  <a:srgbClr val="1F2937"/>
+                </a:solidFill>
+                <a:latin typeface="Arial"/>
+              </a:rPr>
+              <a:t>Người</a:t>
+            </a:r>
+            <a:r>
+              <a:rPr sz="1300" b="0" dirty="0">
+                <a:solidFill>
+                  <a:srgbClr val="1F2937"/>
+                </a:solidFill>
+                <a:latin typeface="Arial"/>
+              </a:rPr>
+              <a:t> </a:t>
+            </a:r>
+            <a:r>
+              <a:rPr sz="1300" b="0" dirty="0" err="1">
+                <a:solidFill>
+                  <a:srgbClr val="1F2937"/>
+                </a:solidFill>
+                <a:latin typeface="Arial"/>
+              </a:rPr>
+              <a:t>dùng</a:t>
+            </a:r>
+            <a:r>
+              <a:rPr sz="1300" b="0" dirty="0">
+                <a:solidFill>
+                  <a:srgbClr val="1F2937"/>
+                </a:solidFill>
+                <a:latin typeface="Arial"/>
+              </a:rPr>
+              <a:t> </a:t>
+            </a:r>
+            <a:r>
+              <a:rPr sz="1300" b="0" dirty="0" err="1">
+                <a:solidFill>
+                  <a:srgbClr val="1F2937"/>
+                </a:solidFill>
+                <a:latin typeface="Arial"/>
+              </a:rPr>
+              <a:t>thường</a:t>
+            </a:r>
+            <a:r>
+              <a:rPr sz="1300" b="0" dirty="0">
+                <a:solidFill>
+                  <a:srgbClr val="1F2937"/>
+                </a:solidFill>
+                <a:latin typeface="Arial"/>
+              </a:rPr>
+              <a:t> </a:t>
+            </a:r>
+            <a:r>
+              <a:rPr sz="1300" b="0" dirty="0" err="1">
+                <a:solidFill>
+                  <a:srgbClr val="1F2937"/>
+                </a:solidFill>
+                <a:latin typeface="Arial"/>
+              </a:rPr>
+              <a:t>dò</a:t>
+            </a:r>
+            <a:r>
+              <a:rPr sz="1300" b="0" dirty="0">
+                <a:solidFill>
+                  <a:srgbClr val="1F2937"/>
+                </a:solidFill>
+                <a:latin typeface="Arial"/>
+              </a:rPr>
+              <a:t> </a:t>
+            </a:r>
+            <a:r>
+              <a:rPr sz="1300" b="0" dirty="0" err="1">
+                <a:solidFill>
+                  <a:srgbClr val="1F2937"/>
+                </a:solidFill>
+                <a:latin typeface="Arial"/>
+              </a:rPr>
+              <a:t>vé</a:t>
+            </a:r>
+            <a:r>
+              <a:rPr sz="1300" b="0" dirty="0">
+                <a:solidFill>
+                  <a:srgbClr val="1F2937"/>
+                </a:solidFill>
+                <a:latin typeface="Arial"/>
+              </a:rPr>
+              <a:t> </a:t>
+            </a:r>
+            <a:r>
+              <a:rPr sz="1300" b="0" dirty="0" err="1">
+                <a:solidFill>
+                  <a:srgbClr val="1F2937"/>
+                </a:solidFill>
+                <a:latin typeface="Arial"/>
+              </a:rPr>
+              <a:t>số</a:t>
+            </a:r>
+            <a:r>
+              <a:rPr sz="1300" b="0" dirty="0">
+                <a:solidFill>
+                  <a:srgbClr val="1F2937"/>
+                </a:solidFill>
+                <a:latin typeface="Arial"/>
+              </a:rPr>
+              <a:t> </a:t>
+            </a:r>
+            <a:r>
+              <a:rPr sz="1300" b="0" dirty="0" err="1">
+                <a:solidFill>
+                  <a:srgbClr val="1F2937"/>
+                </a:solidFill>
+                <a:latin typeface="Arial"/>
+              </a:rPr>
+              <a:t>thủ</a:t>
+            </a:r>
+            <a:r>
+              <a:rPr sz="1300" b="0" dirty="0">
+                <a:solidFill>
+                  <a:srgbClr val="1F2937"/>
+                </a:solidFill>
+                <a:latin typeface="Arial"/>
+              </a:rPr>
+              <a:t> </a:t>
+            </a:r>
+            <a:r>
+              <a:rPr sz="1300" b="0" dirty="0" err="1">
+                <a:solidFill>
+                  <a:srgbClr val="1F2937"/>
+                </a:solidFill>
+                <a:latin typeface="Arial"/>
+              </a:rPr>
+              <a:t>công</a:t>
+            </a:r>
+            <a:r>
+              <a:rPr sz="1300" b="0" dirty="0">
+                <a:solidFill>
+                  <a:srgbClr val="1F2937"/>
+                </a:solidFill>
+                <a:latin typeface="Arial"/>
+              </a:rPr>
+              <a:t>, </a:t>
+            </a:r>
+            <a:r>
+              <a:rPr sz="1300" b="0" dirty="0" err="1">
+                <a:solidFill>
+                  <a:srgbClr val="1F2937"/>
+                </a:solidFill>
+                <a:latin typeface="Arial"/>
+              </a:rPr>
+              <a:t>dễ</a:t>
+            </a:r>
+            <a:r>
+              <a:rPr sz="1300" b="0" dirty="0">
+                <a:solidFill>
+                  <a:srgbClr val="1F2937"/>
+                </a:solidFill>
+                <a:latin typeface="Arial"/>
+              </a:rPr>
+              <a:t> </a:t>
+            </a:r>
+            <a:r>
+              <a:rPr sz="1300" b="0" dirty="0" err="1">
+                <a:solidFill>
+                  <a:srgbClr val="1F2937"/>
+                </a:solidFill>
+                <a:latin typeface="Arial"/>
+              </a:rPr>
+              <a:t>sai</a:t>
+            </a:r>
+            <a:r>
+              <a:rPr sz="1300" b="0" dirty="0">
+                <a:solidFill>
+                  <a:srgbClr val="1F2937"/>
+                </a:solidFill>
+                <a:latin typeface="Arial"/>
+              </a:rPr>
+              <a:t> </a:t>
+            </a:r>
+            <a:r>
+              <a:rPr sz="1300" b="0" dirty="0" err="1">
+                <a:solidFill>
+                  <a:srgbClr val="1F2937"/>
+                </a:solidFill>
+                <a:latin typeface="Arial"/>
+              </a:rPr>
+              <a:t>sót</a:t>
+            </a:r>
+            <a:r>
+              <a:rPr sz="1300" b="0" dirty="0">
+                <a:solidFill>
+                  <a:srgbClr val="1F2937"/>
+                </a:solidFill>
+                <a:latin typeface="Arial"/>
+              </a:rPr>
+              <a:t>.</a:t>
             </a:r>
           </a:p>
           <a:p>
@@ -13137,13 +13767,121 @@
               </a:defRPr>
             </a:pPr>
             <a:r>
-              <a:rPr sz="1300" b="0">
-                <a:solidFill>
-                  <a:srgbClr val="1F2937"/>
-                </a:solidFill>
-                <a:latin typeface="Arial"/>
-              </a:rPr>
-              <a:t>•  Khó dò nhiều vé cùng lúc.</a:t>
+              <a:rPr sz="1300" b="0" dirty="0">
+                <a:solidFill>
+                  <a:srgbClr val="1F2937"/>
+                </a:solidFill>
+                <a:latin typeface="Arial"/>
+              </a:rPr>
+              <a:t>•  </a:t>
+            </a:r>
+            <a:r>
+              <a:rPr sz="1300" b="0" dirty="0" err="1">
+                <a:solidFill>
+                  <a:srgbClr val="1F2937"/>
+                </a:solidFill>
+                <a:latin typeface="Arial"/>
+              </a:rPr>
+              <a:t>Khó</a:t>
+            </a:r>
+            <a:r>
+              <a:rPr sz="1300" b="0" dirty="0">
+                <a:solidFill>
+                  <a:srgbClr val="1F2937"/>
+                </a:solidFill>
+                <a:latin typeface="Arial"/>
+              </a:rPr>
+              <a:t> </a:t>
+            </a:r>
+            <a:r>
+              <a:rPr sz="1300" b="0" dirty="0" err="1">
+                <a:solidFill>
+                  <a:srgbClr val="1F2937"/>
+                </a:solidFill>
+                <a:latin typeface="Arial"/>
+              </a:rPr>
+              <a:t>dò</a:t>
+            </a:r>
+            <a:r>
+              <a:rPr sz="1300" b="0" dirty="0">
+                <a:solidFill>
+                  <a:srgbClr val="1F2937"/>
+                </a:solidFill>
+                <a:latin typeface="Arial"/>
+              </a:rPr>
+              <a:t> </a:t>
+            </a:r>
+            <a:r>
+              <a:rPr sz="1300" b="0" dirty="0" err="1">
+                <a:solidFill>
+                  <a:srgbClr val="1F2937"/>
+                </a:solidFill>
+                <a:latin typeface="Arial"/>
+              </a:rPr>
+              <a:t>nhiều</a:t>
+            </a:r>
+            <a:r>
+              <a:rPr sz="1300" b="0" dirty="0">
+                <a:solidFill>
+                  <a:srgbClr val="1F2937"/>
+                </a:solidFill>
+                <a:latin typeface="Arial"/>
+              </a:rPr>
+              <a:t> </a:t>
+            </a:r>
+            <a:r>
+              <a:rPr sz="1300" b="0" dirty="0" err="1">
+                <a:solidFill>
+                  <a:srgbClr val="1F2937"/>
+                </a:solidFill>
+                <a:latin typeface="Arial"/>
+              </a:rPr>
+              <a:t>vé</a:t>
+            </a:r>
+            <a:r>
+              <a:rPr sz="1300" b="0" dirty="0">
+                <a:solidFill>
+                  <a:srgbClr val="1F2937"/>
+                </a:solidFill>
+                <a:latin typeface="Arial"/>
+              </a:rPr>
+              <a:t> </a:t>
+            </a:r>
+            <a:r>
+              <a:rPr sz="1300" b="0" dirty="0" err="1">
+                <a:solidFill>
+                  <a:srgbClr val="1F2937"/>
+                </a:solidFill>
+                <a:latin typeface="Arial"/>
+              </a:rPr>
+              <a:t>cùng</a:t>
+            </a:r>
+            <a:r>
+              <a:rPr sz="1300" b="0" dirty="0">
+                <a:solidFill>
+                  <a:srgbClr val="1F2937"/>
+                </a:solidFill>
+                <a:latin typeface="Arial"/>
+              </a:rPr>
+              <a:t> </a:t>
+            </a:r>
+            <a:r>
+              <a:rPr sz="1300" b="0" dirty="0" err="1">
+                <a:solidFill>
+                  <a:srgbClr val="1F2937"/>
+                </a:solidFill>
+                <a:latin typeface="Arial"/>
+              </a:rPr>
+              <a:t>lúc</a:t>
+            </a:r>
+            <a:r>
+              <a:rPr sz="1300" b="0" dirty="0">
+                <a:solidFill>
+                  <a:srgbClr val="1F2937"/>
+                </a:solidFill>
+                <a:latin typeface="Arial"/>
+              </a:rPr>
+              <a:t>.</a:t>
             </a:r>
           </a:p>
           <a:p>
@@ -13162,13 +13900,157 @@
               </a:defRPr>
             </a:pPr>
             <a:r>
-              <a:rPr sz="1300" b="0">
-                <a:solidFill>
-                  <a:srgbClr val="1F2937"/>
-                </a:solidFill>
-                <a:latin typeface="Arial"/>
-              </a:rPr>
-              <a:t>•  Khó lưu lại lịch sử các lần dò.</a:t>
+              <a:rPr sz="1300" b="0" dirty="0">
+                <a:solidFill>
+                  <a:srgbClr val="1F2937"/>
+                </a:solidFill>
+                <a:latin typeface="Arial"/>
+              </a:rPr>
+              <a:t>•  </a:t>
+            </a:r>
+            <a:r>
+              <a:rPr sz="1300" b="0" dirty="0" err="1">
+                <a:solidFill>
+                  <a:srgbClr val="1F2937"/>
+                </a:solidFill>
+                <a:latin typeface="Arial"/>
+              </a:rPr>
+              <a:t>Khó</a:t>
+            </a:r>
+            <a:r>
+              <a:rPr sz="1300" b="0" dirty="0">
+                <a:solidFill>
+                  <a:srgbClr val="1F2937"/>
+                </a:solidFill>
+                <a:latin typeface="Arial"/>
+              </a:rPr>
+              <a:t> </a:t>
+            </a:r>
+            <a:r>
+              <a:rPr sz="1300" b="0" dirty="0" err="1">
+                <a:solidFill>
+                  <a:srgbClr val="1F2937"/>
+                </a:solidFill>
+                <a:latin typeface="Arial"/>
+              </a:rPr>
+              <a:t>lưu</a:t>
+            </a:r>
+            <a:r>
+              <a:rPr sz="1300" b="0" dirty="0">
+                <a:solidFill>
+                  <a:srgbClr val="1F2937"/>
+                </a:solidFill>
+                <a:latin typeface="Arial"/>
+              </a:rPr>
+              <a:t> </a:t>
+            </a:r>
+            <a:r>
+              <a:rPr sz="1300" b="0" dirty="0" err="1">
+                <a:solidFill>
+                  <a:srgbClr val="1F2937"/>
+                </a:solidFill>
+                <a:latin typeface="Arial"/>
+              </a:rPr>
+              <a:t>lại</a:t>
+            </a:r>
+            <a:r>
+              <a:rPr sz="1300" b="0" dirty="0">
+                <a:solidFill>
+                  <a:srgbClr val="1F2937"/>
+                </a:solidFill>
+                <a:latin typeface="Arial"/>
+              </a:rPr>
+              <a:t> </a:t>
+            </a:r>
+            <a:r>
+              <a:rPr sz="1300" b="0" dirty="0" err="1">
+                <a:solidFill>
+                  <a:srgbClr val="1F2937"/>
+                </a:solidFill>
+                <a:latin typeface="Arial"/>
+              </a:rPr>
+              <a:t>lịch</a:t>
+            </a:r>
+            <a:r>
+              <a:rPr sz="1300" b="0" dirty="0">
+                <a:solidFill>
+                  <a:srgbClr val="1F2937"/>
+                </a:solidFill>
+                <a:latin typeface="Arial"/>
+              </a:rPr>
+              <a:t> </a:t>
+            </a:r>
+            <a:r>
+              <a:rPr sz="1300" b="0" dirty="0" err="1">
+                <a:solidFill>
+                  <a:srgbClr val="1F2937"/>
+                </a:solidFill>
+                <a:latin typeface="Arial"/>
+              </a:rPr>
+              <a:t>sử</a:t>
+            </a:r>
+            <a:r>
+              <a:rPr sz="1300" b="0" dirty="0">
+                <a:solidFill>
+                  <a:srgbClr val="1F2937"/>
+                </a:solidFill>
+                <a:latin typeface="Arial"/>
+              </a:rPr>
+              <a:t> </a:t>
+            </a:r>
+            <a:r>
+              <a:rPr sz="1300" b="0" dirty="0" err="1">
+                <a:solidFill>
+                  <a:srgbClr val="1F2937"/>
+                </a:solidFill>
+                <a:latin typeface="Arial"/>
+              </a:rPr>
+              <a:t>các</a:t>
+            </a:r>
+            <a:r>
+              <a:rPr sz="1300" b="0" dirty="0">
+                <a:solidFill>
+                  <a:srgbClr val="1F2937"/>
+                </a:solidFill>
+                <a:latin typeface="Arial"/>
+              </a:rPr>
+              <a:t> </a:t>
+            </a:r>
+            <a:r>
+              <a:rPr sz="1300" b="0" dirty="0" err="1">
+                <a:solidFill>
+                  <a:srgbClr val="1F2937"/>
+                </a:solidFill>
+                <a:latin typeface="Arial"/>
+              </a:rPr>
+              <a:t>lần</a:t>
+            </a:r>
+            <a:r>
+              <a:rPr sz="1300" b="0" dirty="0">
+                <a:solidFill>
+                  <a:srgbClr val="1F2937"/>
+                </a:solidFill>
+                <a:latin typeface="Arial"/>
+              </a:rPr>
+              <a:t> </a:t>
+            </a:r>
+            <a:r>
+              <a:rPr sz="1300" b="0" dirty="0" err="1">
+                <a:solidFill>
+                  <a:srgbClr val="1F2937"/>
+                </a:solidFill>
+                <a:latin typeface="Arial"/>
+              </a:rPr>
+              <a:t>dò</a:t>
+            </a:r>
+            <a:r>
+              <a:rPr sz="1300" b="0" dirty="0">
+                <a:solidFill>
+                  <a:srgbClr val="1F2937"/>
+                </a:solidFill>
+                <a:latin typeface="Arial"/>
+              </a:rPr>
+              <a:t>.</a:t>
             </a:r>
           </a:p>
           <a:p>
@@ -13187,13 +14069,211 @@
               </a:defRPr>
             </a:pPr>
             <a:r>
-              <a:rPr sz="1300" b="0">
-                <a:solidFill>
-                  <a:srgbClr val="1F2937"/>
-                </a:solidFill>
-                <a:latin typeface="Arial"/>
-              </a:rPr>
-              <a:t>•  Admin cần quản lý kết quả xổ số theo đài và ngày.</a:t>
+              <a:rPr sz="1300" b="0" dirty="0">
+                <a:solidFill>
+                  <a:srgbClr val="1F2937"/>
+                </a:solidFill>
+                <a:latin typeface="Arial"/>
+              </a:rPr>
+              <a:t>•  Admin </a:t>
+            </a:r>
+            <a:r>
+              <a:rPr sz="1300" b="0" dirty="0" err="1">
+                <a:solidFill>
+                  <a:srgbClr val="1F2937"/>
+                </a:solidFill>
+                <a:latin typeface="Arial"/>
+              </a:rPr>
+              <a:t>cần</a:t>
+            </a:r>
+            <a:r>
+              <a:rPr sz="1300" b="0" dirty="0">
+                <a:solidFill>
+                  <a:srgbClr val="1F2937"/>
+                </a:solidFill>
+                <a:latin typeface="Arial"/>
+              </a:rPr>
+              <a:t> </a:t>
+            </a:r>
+            <a:r>
+              <a:rPr sz="1300" b="0" dirty="0" err="1">
+                <a:solidFill>
+                  <a:srgbClr val="1F2937"/>
+                </a:solidFill>
+                <a:latin typeface="Arial"/>
+              </a:rPr>
+              <a:t>quản</a:t>
+            </a:r>
+            <a:r>
+              <a:rPr sz="1300" b="0" dirty="0">
+                <a:solidFill>
+                  <a:srgbClr val="1F2937"/>
+                </a:solidFill>
+                <a:latin typeface="Arial"/>
+              </a:rPr>
+              <a:t> </a:t>
+            </a:r>
+            <a:r>
+              <a:rPr sz="1300" b="0" dirty="0" err="1">
+                <a:solidFill>
+                  <a:srgbClr val="1F2937"/>
+                </a:solidFill>
+                <a:latin typeface="Arial"/>
+              </a:rPr>
+              <a:t>lý</a:t>
+            </a:r>
+            <a:r>
+              <a:rPr sz="1300" b="0" dirty="0">
+                <a:solidFill>
+                  <a:srgbClr val="1F2937"/>
+                </a:solidFill>
+                <a:latin typeface="Arial"/>
+              </a:rPr>
+              <a:t> </a:t>
+            </a:r>
+            <a:r>
+              <a:rPr sz="1300" b="0" dirty="0" err="1">
+                <a:solidFill>
+                  <a:srgbClr val="1F2937"/>
+                </a:solidFill>
+                <a:latin typeface="Arial"/>
+              </a:rPr>
+              <a:t>kết</a:t>
+            </a:r>
+            <a:r>
+              <a:rPr sz="1300" b="0" dirty="0">
+                <a:solidFill>
+                  <a:srgbClr val="1F2937"/>
+                </a:solidFill>
+                <a:latin typeface="Arial"/>
+              </a:rPr>
+              <a:t> </a:t>
+            </a:r>
+            <a:r>
+              <a:rPr sz="1300" b="0" dirty="0" err="1">
+                <a:solidFill>
+                  <a:srgbClr val="1F2937"/>
+                </a:solidFill>
+                <a:latin typeface="Arial"/>
+              </a:rPr>
+              <a:t>quả</a:t>
+            </a:r>
+            <a:r>
+              <a:rPr sz="1300" b="0" dirty="0">
+                <a:solidFill>
+                  <a:srgbClr val="1F2937"/>
+                </a:solidFill>
+                <a:latin typeface="Arial"/>
+              </a:rPr>
+              <a:t> </a:t>
+            </a:r>
+            <a:r>
+              <a:rPr sz="1300" b="0" dirty="0" err="1">
+                <a:solidFill>
+                  <a:srgbClr val="1F2937"/>
+                </a:solidFill>
+                <a:latin typeface="Arial"/>
+              </a:rPr>
+              <a:t>xổ</a:t>
+            </a:r>
+            <a:r>
+              <a:rPr sz="1300" b="0" dirty="0">
+                <a:solidFill>
+                  <a:srgbClr val="1F2937"/>
+                </a:solidFill>
+                <a:latin typeface="Arial"/>
+              </a:rPr>
+              <a:t> </a:t>
+            </a:r>
+            <a:r>
+              <a:rPr sz="1300" b="0" dirty="0" err="1">
+                <a:solidFill>
+                  <a:srgbClr val="1F2937"/>
+                </a:solidFill>
+                <a:latin typeface="Arial"/>
+              </a:rPr>
+              <a:t>số</a:t>
+            </a:r>
+            <a:r>
+              <a:rPr sz="1300" b="0" dirty="0">
+                <a:solidFill>
+                  <a:srgbClr val="1F2937"/>
+                </a:solidFill>
+                <a:latin typeface="Arial"/>
+              </a:rPr>
+              <a:t> </a:t>
+            </a:r>
+            <a:r>
+              <a:rPr sz="1300" b="0" dirty="0" err="1">
+                <a:solidFill>
+                  <a:srgbClr val="1F2937"/>
+                </a:solidFill>
+                <a:latin typeface="Arial"/>
+              </a:rPr>
+              <a:t>theo</a:t>
+            </a:r>
+            <a:r>
+              <a:rPr sz="1300" b="0" dirty="0">
+                <a:solidFill>
+                  <a:srgbClr val="1F2937"/>
+                </a:solidFill>
+                <a:latin typeface="Arial"/>
+              </a:rPr>
+              <a:t> </a:t>
+            </a:r>
+            <a:r>
+              <a:rPr sz="1300" b="0" dirty="0" err="1">
+                <a:solidFill>
+                  <a:srgbClr val="1F2937"/>
+                </a:solidFill>
+                <a:latin typeface="Arial"/>
+              </a:rPr>
+              <a:t>đài</a:t>
+            </a:r>
+            <a:r>
+              <a:rPr sz="1300" b="0" dirty="0">
+                <a:solidFill>
+                  <a:srgbClr val="1F2937"/>
+                </a:solidFill>
+                <a:latin typeface="Arial"/>
+              </a:rPr>
+              <a:t> </a:t>
+            </a:r>
+            <a:r>
+              <a:rPr sz="1300" b="0" dirty="0" err="1">
+                <a:solidFill>
+                  <a:srgbClr val="1F2937"/>
+                </a:solidFill>
+                <a:latin typeface="Arial"/>
+              </a:rPr>
+              <a:t>và</a:t>
+            </a:r>
+            <a:r>
+              <a:rPr sz="1300" b="0" dirty="0">
+                <a:solidFill>
+                  <a:srgbClr val="1F2937"/>
+                </a:solidFill>
+                <a:latin typeface="Arial"/>
+              </a:rPr>
+              <a:t> </a:t>
+            </a:r>
+            <a:r>
+              <a:rPr sz="1300" b="0" dirty="0" err="1">
+                <a:solidFill>
+                  <a:srgbClr val="1F2937"/>
+                </a:solidFill>
+                <a:latin typeface="Arial"/>
+              </a:rPr>
+              <a:t>ngày</a:t>
+            </a:r>
+            <a:r>
+              <a:rPr sz="1300" b="0" dirty="0">
+                <a:solidFill>
+                  <a:srgbClr val="1F2937"/>
+                </a:solidFill>
+                <a:latin typeface="Arial"/>
+              </a:rPr>
+              <a:t>.</a:t>
             </a:r>
           </a:p>
           <a:p>
@@ -13212,13 +14292,229 @@
               </a:defRPr>
             </a:pPr>
             <a:r>
-              <a:rPr sz="1300" b="0">
-                <a:solidFill>
-                  <a:srgbClr val="1F2937"/>
-                </a:solidFill>
-                <a:latin typeface="Arial"/>
-              </a:rPr>
-              <a:t>•  Cần phân quyền người dùng và kiểm soát dữ liệu công bố.</a:t>
+              <a:rPr sz="1300" b="0" dirty="0">
+                <a:solidFill>
+                  <a:srgbClr val="1F2937"/>
+                </a:solidFill>
+                <a:latin typeface="Arial"/>
+              </a:rPr>
+              <a:t>•  </a:t>
+            </a:r>
+            <a:r>
+              <a:rPr sz="1300" b="0" dirty="0" err="1">
+                <a:solidFill>
+                  <a:srgbClr val="1F2937"/>
+                </a:solidFill>
+                <a:latin typeface="Arial"/>
+              </a:rPr>
+              <a:t>Cần</a:t>
+            </a:r>
+            <a:r>
+              <a:rPr sz="1300" b="0" dirty="0">
+                <a:solidFill>
+                  <a:srgbClr val="1F2937"/>
+                </a:solidFill>
+                <a:latin typeface="Arial"/>
+              </a:rPr>
+              <a:t> </a:t>
+            </a:r>
+            <a:r>
+              <a:rPr sz="1300" b="0" dirty="0" err="1">
+                <a:solidFill>
+                  <a:srgbClr val="1F2937"/>
+                </a:solidFill>
+                <a:latin typeface="Arial"/>
+              </a:rPr>
+              <a:t>phân</a:t>
+            </a:r>
+            <a:r>
+              <a:rPr sz="1300" b="0" dirty="0">
+                <a:solidFill>
+                  <a:srgbClr val="1F2937"/>
+                </a:solidFill>
+                <a:latin typeface="Arial"/>
+              </a:rPr>
+              <a:t> </a:t>
+            </a:r>
+            <a:r>
+              <a:rPr sz="1300" b="0" dirty="0" err="1">
+                <a:solidFill>
+                  <a:srgbClr val="1F2937"/>
+                </a:solidFill>
+                <a:latin typeface="Arial"/>
+              </a:rPr>
+              <a:t>quyền</a:t>
+            </a:r>
+            <a:r>
+              <a:rPr sz="1300" b="0" dirty="0">
+                <a:solidFill>
+                  <a:srgbClr val="1F2937"/>
+                </a:solidFill>
+                <a:latin typeface="Arial"/>
+              </a:rPr>
+              <a:t> </a:t>
+            </a:r>
+            <a:r>
+              <a:rPr sz="1300" b="0" dirty="0" err="1">
+                <a:solidFill>
+                  <a:srgbClr val="1F2937"/>
+                </a:solidFill>
+                <a:latin typeface="Arial"/>
+              </a:rPr>
+              <a:t>người</a:t>
+            </a:r>
+            <a:r>
+              <a:rPr sz="1300" b="0" dirty="0">
+                <a:solidFill>
+                  <a:srgbClr val="1F2937"/>
+                </a:solidFill>
+                <a:latin typeface="Arial"/>
+              </a:rPr>
+              <a:t> </a:t>
+            </a:r>
+            <a:r>
+              <a:rPr sz="1300" b="0" dirty="0" err="1">
+                <a:solidFill>
+                  <a:srgbClr val="1F2937"/>
+                </a:solidFill>
+                <a:latin typeface="Arial"/>
+              </a:rPr>
+              <a:t>dùng</a:t>
+            </a:r>
+            <a:r>
+              <a:rPr sz="1300" b="0" dirty="0">
+                <a:solidFill>
+                  <a:srgbClr val="1F2937"/>
+                </a:solidFill>
+                <a:latin typeface="Arial"/>
+              </a:rPr>
+              <a:t> </a:t>
+            </a:r>
+            <a:r>
+              <a:rPr sz="1300" b="0" dirty="0" err="1">
+                <a:solidFill>
+                  <a:srgbClr val="1F2937"/>
+                </a:solidFill>
+                <a:latin typeface="Arial"/>
+              </a:rPr>
+              <a:t>và</a:t>
+            </a:r>
+            <a:r>
+              <a:rPr sz="1300" b="0" dirty="0">
+                <a:solidFill>
+                  <a:srgbClr val="1F2937"/>
+                </a:solidFill>
+                <a:latin typeface="Arial"/>
+              </a:rPr>
+              <a:t> </a:t>
+            </a:r>
+            <a:r>
+              <a:rPr sz="1300" b="0" dirty="0" err="1">
+                <a:solidFill>
+                  <a:srgbClr val="1F2937"/>
+                </a:solidFill>
+                <a:latin typeface="Arial"/>
+              </a:rPr>
+              <a:t>kiểm</a:t>
+            </a:r>
+            <a:r>
+              <a:rPr sz="1300" b="0" dirty="0">
+                <a:solidFill>
+                  <a:srgbClr val="1F2937"/>
+                </a:solidFill>
+                <a:latin typeface="Arial"/>
+              </a:rPr>
+              <a:t> </a:t>
+            </a:r>
+            <a:r>
+              <a:rPr sz="1300" b="0" dirty="0" err="1">
+                <a:solidFill>
+                  <a:srgbClr val="1F2937"/>
+                </a:solidFill>
+                <a:latin typeface="Arial"/>
+              </a:rPr>
+              <a:t>soát</a:t>
+            </a:r>
+            <a:r>
+              <a:rPr sz="1300" b="0" dirty="0">
+                <a:solidFill>
+                  <a:srgbClr val="1F2937"/>
+                </a:solidFill>
+                <a:latin typeface="Arial"/>
+              </a:rPr>
+              <a:t> </a:t>
+            </a:r>
+            <a:r>
+              <a:rPr sz="1300" b="0" dirty="0" err="1">
+                <a:solidFill>
+                  <a:srgbClr val="1F2937"/>
+                </a:solidFill>
+                <a:latin typeface="Arial"/>
+              </a:rPr>
+              <a:t>dữ</a:t>
+            </a:r>
+            <a:r>
+              <a:rPr sz="1300" b="0" dirty="0">
+                <a:solidFill>
+                  <a:srgbClr val="1F2937"/>
+                </a:solidFill>
+                <a:latin typeface="Arial"/>
+              </a:rPr>
+              <a:t> </a:t>
+            </a:r>
+            <a:r>
+              <a:rPr sz="1300" b="0" dirty="0" err="1">
+                <a:solidFill>
+                  <a:srgbClr val="1F2937"/>
+                </a:solidFill>
+                <a:latin typeface="Arial"/>
+              </a:rPr>
+              <a:t>liệu</a:t>
+            </a:r>
+            <a:r>
+              <a:rPr sz="1300" b="0" dirty="0">
+                <a:solidFill>
+                  <a:srgbClr val="1F2937"/>
+                </a:solidFill>
+                <a:latin typeface="Arial"/>
+              </a:rPr>
+              <a:t> </a:t>
+            </a:r>
+            <a:r>
+              <a:rPr sz="1300" b="0" dirty="0" err="1">
+                <a:solidFill>
+                  <a:srgbClr val="1F2937"/>
+                </a:solidFill>
+                <a:latin typeface="Arial"/>
+              </a:rPr>
+              <a:t>công</a:t>
+            </a:r>
+            <a:r>
+              <a:rPr sz="1300" b="0" dirty="0">
+                <a:solidFill>
+                  <a:srgbClr val="1F2937"/>
+                </a:solidFill>
+                <a:latin typeface="Arial"/>
+              </a:rPr>
+              <a:t> </a:t>
+            </a:r>
+            <a:r>
+              <a:rPr sz="1300" b="0" dirty="0" err="1">
+                <a:solidFill>
+                  <a:srgbClr val="1F2937"/>
+                </a:solidFill>
+                <a:latin typeface="Arial"/>
+              </a:rPr>
+              <a:t>bố</a:t>
+            </a:r>
+            <a:r>
+              <a:rPr sz="1300" b="0" dirty="0">
+                <a:solidFill>
+                  <a:srgbClr val="1F2937"/>
+                </a:solidFill>
+                <a:latin typeface="Arial"/>
+              </a:rPr>
+              <a:t>.</a:t>
             </a:r>
           </a:p>
         </p:txBody>
@@ -13402,13 +14698,175 @@
               </a:defRPr>
             </a:pPr>
             <a:r>
-              <a:rPr sz="1300" b="0">
-                <a:solidFill>
-                  <a:srgbClr val="1F2937"/>
-                </a:solidFill>
-                <a:latin typeface="Arial"/>
-              </a:rPr>
-              <a:t>•  Xây dựng web app dò vé số theo đài và ngày quay.</a:t>
+              <a:rPr sz="1300" b="0" dirty="0">
+                <a:solidFill>
+                  <a:srgbClr val="1F2937"/>
+                </a:solidFill>
+                <a:latin typeface="Arial"/>
+              </a:rPr>
+              <a:t>•  </a:t>
+            </a:r>
+            <a:r>
+              <a:rPr sz="1300" b="0" dirty="0" err="1">
+                <a:solidFill>
+                  <a:srgbClr val="1F2937"/>
+                </a:solidFill>
+                <a:latin typeface="Arial"/>
+              </a:rPr>
+              <a:t>Xây</a:t>
+            </a:r>
+            <a:r>
+              <a:rPr sz="1300" b="0" dirty="0">
+                <a:solidFill>
+                  <a:srgbClr val="1F2937"/>
+                </a:solidFill>
+                <a:latin typeface="Arial"/>
+              </a:rPr>
+              <a:t> </a:t>
+            </a:r>
+            <a:r>
+              <a:rPr sz="1300" b="0" dirty="0" err="1">
+                <a:solidFill>
+                  <a:srgbClr val="1F2937"/>
+                </a:solidFill>
+                <a:latin typeface="Arial"/>
+              </a:rPr>
+              <a:t>dựng</a:t>
+            </a:r>
+            <a:r>
+              <a:rPr sz="1300" b="0" dirty="0">
+                <a:solidFill>
+                  <a:srgbClr val="1F2937"/>
+                </a:solidFill>
+                <a:latin typeface="Arial"/>
+              </a:rPr>
+              <a:t> web app </a:t>
+            </a:r>
+            <a:r>
+              <a:rPr sz="1300" b="0" dirty="0" err="1">
+                <a:solidFill>
+                  <a:srgbClr val="1F2937"/>
+                </a:solidFill>
+                <a:latin typeface="Arial"/>
+              </a:rPr>
+              <a:t>dò</a:t>
+            </a:r>
+            <a:r>
+              <a:rPr sz="1300" b="0" dirty="0">
+                <a:solidFill>
+                  <a:srgbClr val="1F2937"/>
+                </a:solidFill>
+                <a:latin typeface="Arial"/>
+              </a:rPr>
+              <a:t> </a:t>
+            </a:r>
+            <a:r>
+              <a:rPr sz="1300" b="0" dirty="0" err="1">
+                <a:solidFill>
+                  <a:srgbClr val="1F2937"/>
+                </a:solidFill>
+                <a:latin typeface="Arial"/>
+              </a:rPr>
+              <a:t>vé</a:t>
+            </a:r>
+            <a:r>
+              <a:rPr sz="1300" b="0" dirty="0">
+                <a:solidFill>
+                  <a:srgbClr val="1F2937"/>
+                </a:solidFill>
+                <a:latin typeface="Arial"/>
+              </a:rPr>
+              <a:t> </a:t>
+            </a:r>
+            <a:r>
+              <a:rPr sz="1300" b="0" dirty="0" err="1">
+                <a:solidFill>
+                  <a:srgbClr val="1F2937"/>
+                </a:solidFill>
+                <a:latin typeface="Arial"/>
+              </a:rPr>
+              <a:t>số</a:t>
+            </a:r>
+            <a:r>
+              <a:rPr sz="1300" b="0" dirty="0">
+                <a:solidFill>
+                  <a:srgbClr val="1F2937"/>
+                </a:solidFill>
+                <a:latin typeface="Arial"/>
+              </a:rPr>
+              <a:t> </a:t>
+            </a:r>
+            <a:r>
+              <a:rPr sz="1300" b="0" dirty="0" err="1">
+                <a:solidFill>
+                  <a:srgbClr val="1F2937"/>
+                </a:solidFill>
+                <a:latin typeface="Arial"/>
+              </a:rPr>
+              <a:t>theo</a:t>
+            </a:r>
+            <a:r>
+              <a:rPr sz="1300" b="0" dirty="0">
+                <a:solidFill>
+                  <a:srgbClr val="1F2937"/>
+                </a:solidFill>
+                <a:latin typeface="Arial"/>
+              </a:rPr>
+              <a:t> </a:t>
+            </a:r>
+            <a:r>
+              <a:rPr sz="1300" b="0" dirty="0" err="1">
+                <a:solidFill>
+                  <a:srgbClr val="1F2937"/>
+                </a:solidFill>
+                <a:latin typeface="Arial"/>
+              </a:rPr>
+              <a:t>đài</a:t>
+            </a:r>
+            <a:r>
+              <a:rPr sz="1300" b="0" dirty="0">
+                <a:solidFill>
+                  <a:srgbClr val="1F2937"/>
+                </a:solidFill>
+                <a:latin typeface="Arial"/>
+              </a:rPr>
+              <a:t> </a:t>
+            </a:r>
+            <a:r>
+              <a:rPr sz="1300" b="0" dirty="0" err="1">
+                <a:solidFill>
+                  <a:srgbClr val="1F2937"/>
+                </a:solidFill>
+                <a:latin typeface="Arial"/>
+              </a:rPr>
+              <a:t>và</a:t>
+            </a:r>
+            <a:r>
+              <a:rPr sz="1300" b="0" dirty="0">
+                <a:solidFill>
+                  <a:srgbClr val="1F2937"/>
+                </a:solidFill>
+                <a:latin typeface="Arial"/>
+              </a:rPr>
+              <a:t> </a:t>
+            </a:r>
+            <a:r>
+              <a:rPr sz="1300" b="0" dirty="0" err="1">
+                <a:solidFill>
+                  <a:srgbClr val="1F2937"/>
+                </a:solidFill>
+                <a:latin typeface="Arial"/>
+              </a:rPr>
+              <a:t>ngày</a:t>
+            </a:r>
+            <a:r>
+              <a:rPr sz="1300" b="0" dirty="0">
+                <a:solidFill>
+                  <a:srgbClr val="1F2937"/>
+                </a:solidFill>
+                <a:latin typeface="Arial"/>
+              </a:rPr>
+              <a:t> quay.</a:t>
             </a:r>
           </a:p>
           <a:p>
@@ -13427,13 +14885,211 @@
               </a:defRPr>
             </a:pPr>
             <a:r>
-              <a:rPr sz="1300" b="0">
-                <a:solidFill>
-                  <a:srgbClr val="1F2937"/>
-                </a:solidFill>
-                <a:latin typeface="Arial"/>
-              </a:rPr>
-              <a:t>•  Hỗ trợ 3 nhóm người dùng: Guest (chưa đăng nhập), User (đã đăng nhập), Admin.</a:t>
+              <a:rPr sz="1300" b="0" dirty="0">
+                <a:solidFill>
+                  <a:srgbClr val="1F2937"/>
+                </a:solidFill>
+                <a:latin typeface="Arial"/>
+              </a:rPr>
+              <a:t>•  </a:t>
+            </a:r>
+            <a:r>
+              <a:rPr sz="1300" b="0" dirty="0" err="1">
+                <a:solidFill>
+                  <a:srgbClr val="1F2937"/>
+                </a:solidFill>
+                <a:latin typeface="Arial"/>
+              </a:rPr>
+              <a:t>Hỗ</a:t>
+            </a:r>
+            <a:r>
+              <a:rPr sz="1300" b="0" dirty="0">
+                <a:solidFill>
+                  <a:srgbClr val="1F2937"/>
+                </a:solidFill>
+                <a:latin typeface="Arial"/>
+              </a:rPr>
+              <a:t> </a:t>
+            </a:r>
+            <a:r>
+              <a:rPr sz="1300" b="0" dirty="0" err="1">
+                <a:solidFill>
+                  <a:srgbClr val="1F2937"/>
+                </a:solidFill>
+                <a:latin typeface="Arial"/>
+              </a:rPr>
+              <a:t>trợ</a:t>
+            </a:r>
+            <a:r>
+              <a:rPr sz="1300" b="0" dirty="0">
+                <a:solidFill>
+                  <a:srgbClr val="1F2937"/>
+                </a:solidFill>
+                <a:latin typeface="Arial"/>
+              </a:rPr>
+              <a:t> 3 </a:t>
+            </a:r>
+            <a:r>
+              <a:rPr sz="1300" b="0" dirty="0" err="1">
+                <a:solidFill>
+                  <a:srgbClr val="1F2937"/>
+                </a:solidFill>
+                <a:latin typeface="Arial"/>
+              </a:rPr>
+              <a:t>nhóm</a:t>
+            </a:r>
+            <a:r>
+              <a:rPr sz="1300" b="0" dirty="0">
+                <a:solidFill>
+                  <a:srgbClr val="1F2937"/>
+                </a:solidFill>
+                <a:latin typeface="Arial"/>
+              </a:rPr>
+              <a:t> </a:t>
+            </a:r>
+            <a:r>
+              <a:rPr sz="1300" b="0" dirty="0" err="1">
+                <a:solidFill>
+                  <a:srgbClr val="1F2937"/>
+                </a:solidFill>
+                <a:latin typeface="Arial"/>
+              </a:rPr>
+              <a:t>người</a:t>
+            </a:r>
+            <a:r>
+              <a:rPr sz="1300" b="0" dirty="0">
+                <a:solidFill>
+                  <a:srgbClr val="1F2937"/>
+                </a:solidFill>
+                <a:latin typeface="Arial"/>
+              </a:rPr>
+              <a:t> </a:t>
+            </a:r>
+            <a:r>
+              <a:rPr sz="1300" b="0" dirty="0" err="1">
+                <a:solidFill>
+                  <a:srgbClr val="1F2937"/>
+                </a:solidFill>
+                <a:latin typeface="Arial"/>
+              </a:rPr>
+              <a:t>dùng</a:t>
+            </a:r>
+            <a:r>
+              <a:rPr sz="1300" b="0" dirty="0">
+                <a:solidFill>
+                  <a:srgbClr val="1F2937"/>
+                </a:solidFill>
+                <a:latin typeface="Arial"/>
+              </a:rPr>
+              <a:t>: Guest (</a:t>
+            </a:r>
+            <a:r>
+              <a:rPr sz="1300" b="0" dirty="0" err="1">
+                <a:solidFill>
+                  <a:srgbClr val="1F2937"/>
+                </a:solidFill>
+                <a:latin typeface="Arial"/>
+              </a:rPr>
+              <a:t>chưa</a:t>
+            </a:r>
+            <a:r>
+              <a:rPr sz="1300" b="0" dirty="0">
+                <a:solidFill>
+                  <a:srgbClr val="1F2937"/>
+                </a:solidFill>
+                <a:latin typeface="Arial"/>
+              </a:rPr>
+              <a:t> </a:t>
+            </a:r>
+            <a:r>
+              <a:rPr sz="1300" b="0" dirty="0" err="1">
+                <a:solidFill>
+                  <a:srgbClr val="1F2937"/>
+                </a:solidFill>
+                <a:latin typeface="Arial"/>
+              </a:rPr>
+              <a:t>đăng</a:t>
+            </a:r>
+            <a:r>
+              <a:rPr sz="1300" b="0" dirty="0">
+                <a:solidFill>
+                  <a:srgbClr val="1F2937"/>
+                </a:solidFill>
+                <a:latin typeface="Arial"/>
+              </a:rPr>
+              <a:t> </a:t>
+            </a:r>
+            <a:r>
+              <a:rPr sz="1300" b="0" dirty="0" err="1">
+                <a:solidFill>
+                  <a:srgbClr val="1F2937"/>
+                </a:solidFill>
+                <a:latin typeface="Arial"/>
+              </a:rPr>
+              <a:t>nhập</a:t>
+            </a:r>
+            <a:r>
+              <a:rPr sz="1300" b="0" dirty="0">
+                <a:solidFill>
+                  <a:srgbClr val="1F2937"/>
+                </a:solidFill>
+                <a:latin typeface="Arial"/>
+              </a:rPr>
+              <a:t>), User (</a:t>
+            </a:r>
+            <a:r>
+              <a:rPr sz="1300" b="0" dirty="0" err="1">
+                <a:solidFill>
+                  <a:srgbClr val="1F2937"/>
+                </a:solidFill>
+                <a:latin typeface="Arial"/>
+              </a:rPr>
+              <a:t>đã</a:t>
+            </a:r>
+            <a:r>
+              <a:rPr sz="1300" b="0" dirty="0">
+                <a:solidFill>
+                  <a:srgbClr val="1F2937"/>
+                </a:solidFill>
+                <a:latin typeface="Arial"/>
+              </a:rPr>
+              <a:t> </a:t>
+            </a:r>
+            <a:r>
+              <a:rPr sz="1300" b="0" dirty="0" err="1">
+                <a:solidFill>
+                  <a:srgbClr val="1F2937"/>
+                </a:solidFill>
+                <a:latin typeface="Arial"/>
+              </a:rPr>
+              <a:t>đăng</a:t>
+            </a:r>
+            <a:r>
+              <a:rPr sz="1300" b="0" dirty="0">
+                <a:solidFill>
+                  <a:srgbClr val="1F2937"/>
+                </a:solidFill>
+                <a:latin typeface="Arial"/>
+              </a:rPr>
+              <a:t> </a:t>
+            </a:r>
+            <a:r>
+              <a:rPr sz="1300" b="0" dirty="0" err="1">
+                <a:solidFill>
+                  <a:srgbClr val="1F2937"/>
+                </a:solidFill>
+                <a:latin typeface="Arial"/>
+              </a:rPr>
+              <a:t>nhập</a:t>
+            </a:r>
+            <a:r>
+              <a:rPr sz="1300" b="0" dirty="0">
+                <a:solidFill>
+                  <a:srgbClr val="1F2937"/>
+                </a:solidFill>
+                <a:latin typeface="Arial"/>
+              </a:rPr>
+              <a:t>), Admin.</a:t>
             </a:r>
           </a:p>
           <a:p>
@@ -13452,13 +15108,139 @@
               </a:defRPr>
             </a:pPr>
             <a:r>
-              <a:rPr sz="1300" b="0">
-                <a:solidFill>
-                  <a:srgbClr val="1F2937"/>
-                </a:solidFill>
-                <a:latin typeface="Arial"/>
-              </a:rPr>
-              <a:t>•  Cho phép user dò tối đa 50 vé mỗi lần.</a:t>
+              <a:rPr sz="1300" b="0" dirty="0">
+                <a:solidFill>
+                  <a:srgbClr val="1F2937"/>
+                </a:solidFill>
+                <a:latin typeface="Arial"/>
+              </a:rPr>
+              <a:t>•  Cho </a:t>
+            </a:r>
+            <a:r>
+              <a:rPr sz="1300" b="0" dirty="0" err="1">
+                <a:solidFill>
+                  <a:srgbClr val="1F2937"/>
+                </a:solidFill>
+                <a:latin typeface="Arial"/>
+              </a:rPr>
+              <a:t>phép</a:t>
+            </a:r>
+            <a:r>
+              <a:rPr sz="1300" b="0" dirty="0">
+                <a:solidFill>
+                  <a:srgbClr val="1F2937"/>
+                </a:solidFill>
+                <a:latin typeface="Arial"/>
+              </a:rPr>
+              <a:t> user </a:t>
+            </a:r>
+            <a:r>
+              <a:rPr sz="1300" b="0" dirty="0" err="1">
+                <a:solidFill>
+                  <a:srgbClr val="1F2937"/>
+                </a:solidFill>
+                <a:latin typeface="Arial"/>
+              </a:rPr>
+              <a:t>dò</a:t>
+            </a:r>
+            <a:r>
+              <a:rPr sz="1300" b="0" dirty="0">
+                <a:solidFill>
+                  <a:srgbClr val="1F2937"/>
+                </a:solidFill>
+                <a:latin typeface="Arial"/>
+              </a:rPr>
+              <a:t> </a:t>
+            </a:r>
+            <a:r>
+              <a:rPr sz="1300" b="0" dirty="0" err="1">
+                <a:solidFill>
+                  <a:srgbClr val="1F2937"/>
+                </a:solidFill>
+                <a:latin typeface="Arial"/>
+              </a:rPr>
+              <a:t>tối</a:t>
+            </a:r>
+            <a:r>
+              <a:rPr sz="1300" b="0" dirty="0">
+                <a:solidFill>
+                  <a:srgbClr val="1F2937"/>
+                </a:solidFill>
+                <a:latin typeface="Arial"/>
+              </a:rPr>
+              <a:t> </a:t>
+            </a:r>
+            <a:r>
+              <a:rPr sz="1300" b="0" dirty="0" err="1">
+                <a:solidFill>
+                  <a:srgbClr val="1F2937"/>
+                </a:solidFill>
+                <a:latin typeface="Arial"/>
+              </a:rPr>
+              <a:t>đa</a:t>
+            </a:r>
+            <a:r>
+              <a:rPr sz="1300" b="0" dirty="0">
+                <a:solidFill>
+                  <a:srgbClr val="1F2937"/>
+                </a:solidFill>
+                <a:latin typeface="Arial"/>
+              </a:rPr>
+              <a:t> 50 </a:t>
+            </a:r>
+            <a:r>
+              <a:rPr sz="1300" b="0" dirty="0" err="1">
+                <a:solidFill>
+                  <a:srgbClr val="1F2937"/>
+                </a:solidFill>
+                <a:latin typeface="Arial"/>
+              </a:rPr>
+              <a:t>vé</a:t>
+            </a:r>
+            <a:r>
+              <a:rPr sz="1300" b="0" dirty="0">
+                <a:solidFill>
+                  <a:srgbClr val="1F2937"/>
+                </a:solidFill>
+                <a:latin typeface="Arial"/>
+              </a:rPr>
+              <a:t> </a:t>
+            </a:r>
+            <a:r>
+              <a:rPr sz="1300" b="0" dirty="0" err="1">
+                <a:solidFill>
+                  <a:srgbClr val="1F2937"/>
+                </a:solidFill>
+                <a:latin typeface="Arial"/>
+              </a:rPr>
+              <a:t>mỗi</a:t>
+            </a:r>
+            <a:r>
+              <a:rPr sz="1300" b="0" dirty="0">
+                <a:solidFill>
+                  <a:srgbClr val="1F2937"/>
+                </a:solidFill>
+                <a:latin typeface="Arial"/>
+              </a:rPr>
+              <a:t> </a:t>
+            </a:r>
+            <a:r>
+              <a:rPr sz="1300" b="0" dirty="0" err="1">
+                <a:solidFill>
+                  <a:srgbClr val="1F2937"/>
+                </a:solidFill>
+                <a:latin typeface="Arial"/>
+              </a:rPr>
+              <a:t>lần</a:t>
+            </a:r>
+            <a:r>
+              <a:rPr sz="1300" b="0" dirty="0">
+                <a:solidFill>
+                  <a:srgbClr val="1F2937"/>
+                </a:solidFill>
+                <a:latin typeface="Arial"/>
+              </a:rPr>
+              <a:t>.</a:t>
             </a:r>
           </a:p>
           <a:p>
@@ -13477,13 +15259,175 @@
               </a:defRPr>
             </a:pPr>
             <a:r>
-              <a:rPr sz="1300" b="0">
-                <a:solidFill>
-                  <a:srgbClr val="1F2937"/>
-                </a:solidFill>
-                <a:latin typeface="Arial"/>
-              </a:rPr>
-              <a:t>•  Lưu lịch sử dò và thống kê chi tiêu / trúng thưởng.</a:t>
+              <a:rPr sz="1300" b="0" dirty="0">
+                <a:solidFill>
+                  <a:srgbClr val="1F2937"/>
+                </a:solidFill>
+                <a:latin typeface="Arial"/>
+              </a:rPr>
+              <a:t>•  Lưu </a:t>
+            </a:r>
+            <a:r>
+              <a:rPr sz="1300" b="0" dirty="0" err="1">
+                <a:solidFill>
+                  <a:srgbClr val="1F2937"/>
+                </a:solidFill>
+                <a:latin typeface="Arial"/>
+              </a:rPr>
+              <a:t>lịch</a:t>
+            </a:r>
+            <a:r>
+              <a:rPr sz="1300" b="0" dirty="0">
+                <a:solidFill>
+                  <a:srgbClr val="1F2937"/>
+                </a:solidFill>
+                <a:latin typeface="Arial"/>
+              </a:rPr>
+              <a:t> </a:t>
+            </a:r>
+            <a:r>
+              <a:rPr sz="1300" b="0" dirty="0" err="1">
+                <a:solidFill>
+                  <a:srgbClr val="1F2937"/>
+                </a:solidFill>
+                <a:latin typeface="Arial"/>
+              </a:rPr>
+              <a:t>sử</a:t>
+            </a:r>
+            <a:r>
+              <a:rPr sz="1300" b="0" dirty="0">
+                <a:solidFill>
+                  <a:srgbClr val="1F2937"/>
+                </a:solidFill>
+                <a:latin typeface="Arial"/>
+              </a:rPr>
+              <a:t> </a:t>
+            </a:r>
+            <a:r>
+              <a:rPr sz="1300" b="0" dirty="0" err="1">
+                <a:solidFill>
+                  <a:srgbClr val="1F2937"/>
+                </a:solidFill>
+                <a:latin typeface="Arial"/>
+              </a:rPr>
+              <a:t>dò</a:t>
+            </a:r>
+            <a:r>
+              <a:rPr sz="1300" b="0" dirty="0">
+                <a:solidFill>
+                  <a:srgbClr val="1F2937"/>
+                </a:solidFill>
+                <a:latin typeface="Arial"/>
+              </a:rPr>
+              <a:t> </a:t>
+            </a:r>
+            <a:r>
+              <a:rPr sz="1300" b="0" dirty="0" err="1">
+                <a:solidFill>
+                  <a:srgbClr val="1F2937"/>
+                </a:solidFill>
+                <a:latin typeface="Arial"/>
+              </a:rPr>
+              <a:t>và</a:t>
+            </a:r>
+            <a:r>
+              <a:rPr sz="1300" b="0" dirty="0">
+                <a:solidFill>
+                  <a:srgbClr val="1F2937"/>
+                </a:solidFill>
+                <a:latin typeface="Arial"/>
+              </a:rPr>
+              <a:t> </a:t>
+            </a:r>
+            <a:r>
+              <a:rPr sz="1300" b="0" dirty="0" err="1">
+                <a:solidFill>
+                  <a:srgbClr val="1F2937"/>
+                </a:solidFill>
+                <a:latin typeface="Arial"/>
+              </a:rPr>
+              <a:t>thống</a:t>
+            </a:r>
+            <a:r>
+              <a:rPr sz="1300" b="0" dirty="0">
+                <a:solidFill>
+                  <a:srgbClr val="1F2937"/>
+                </a:solidFill>
+                <a:latin typeface="Arial"/>
+              </a:rPr>
+              <a:t> </a:t>
+            </a:r>
+            <a:r>
+              <a:rPr sz="1300" b="0" dirty="0" err="1">
+                <a:solidFill>
+                  <a:srgbClr val="1F2937"/>
+                </a:solidFill>
+                <a:latin typeface="Arial"/>
+              </a:rPr>
+              <a:t>kê</a:t>
+            </a:r>
+            <a:r>
+              <a:rPr sz="1300" b="0" dirty="0">
+                <a:solidFill>
+                  <a:srgbClr val="1F2937"/>
+                </a:solidFill>
+                <a:latin typeface="Arial"/>
+              </a:rPr>
+              <a:t> chi </a:t>
+            </a:r>
+            <a:r>
+              <a:rPr sz="1300" b="0" dirty="0" err="1">
+                <a:solidFill>
+                  <a:srgbClr val="1F2937"/>
+                </a:solidFill>
+                <a:latin typeface="Arial"/>
+              </a:rPr>
+              <a:t>tiêu</a:t>
+            </a:r>
+            <a:r>
+              <a:rPr sz="1300" b="0" dirty="0">
+                <a:solidFill>
+                  <a:srgbClr val="1F2937"/>
+                </a:solidFill>
+                <a:latin typeface="Arial"/>
+              </a:rPr>
+              <a:t> / </a:t>
+            </a:r>
+            <a:r>
+              <a:rPr sz="1300" b="0" dirty="0" err="1">
+                <a:solidFill>
+                  <a:srgbClr val="1F2937"/>
+                </a:solidFill>
+                <a:latin typeface="Arial"/>
+              </a:rPr>
+              <a:t>trúng</a:t>
+            </a:r>
+            <a:r>
+              <a:rPr sz="1300" b="0" dirty="0">
+                <a:solidFill>
+                  <a:srgbClr val="1F2937"/>
+                </a:solidFill>
+                <a:latin typeface="Arial"/>
+              </a:rPr>
+              <a:t> </a:t>
+            </a:r>
+            <a:r>
+              <a:rPr sz="1300" b="0" dirty="0" err="1">
+                <a:solidFill>
+                  <a:srgbClr val="1F2937"/>
+                </a:solidFill>
+                <a:latin typeface="Arial"/>
+              </a:rPr>
+              <a:t>thưởng</a:t>
+            </a:r>
+            <a:r>
+              <a:rPr sz="1300" b="0" dirty="0">
+                <a:solidFill>
+                  <a:srgbClr val="1F2937"/>
+                </a:solidFill>
+                <a:latin typeface="Arial"/>
+              </a:rPr>
+              <a:t>.</a:t>
             </a:r>
           </a:p>
           <a:p>
@@ -13502,13 +15446,175 @@
               </a:defRPr>
             </a:pPr>
             <a:r>
-              <a:rPr sz="1300" b="0">
-                <a:solidFill>
-                  <a:srgbClr val="1F2937"/>
-                </a:solidFill>
-                <a:latin typeface="Arial"/>
-              </a:rPr>
-              <a:t>•  Admin quản lý kết quả xổ số và người dùng.</a:t>
+              <a:rPr sz="1300" b="0" dirty="0">
+                <a:solidFill>
+                  <a:srgbClr val="1F2937"/>
+                </a:solidFill>
+                <a:latin typeface="Arial"/>
+              </a:rPr>
+              <a:t>•  Admin </a:t>
+            </a:r>
+            <a:r>
+              <a:rPr sz="1300" b="0" dirty="0" err="1">
+                <a:solidFill>
+                  <a:srgbClr val="1F2937"/>
+                </a:solidFill>
+                <a:latin typeface="Arial"/>
+              </a:rPr>
+              <a:t>quản</a:t>
+            </a:r>
+            <a:r>
+              <a:rPr sz="1300" b="0" dirty="0">
+                <a:solidFill>
+                  <a:srgbClr val="1F2937"/>
+                </a:solidFill>
+                <a:latin typeface="Arial"/>
+              </a:rPr>
+              <a:t> </a:t>
+            </a:r>
+            <a:r>
+              <a:rPr sz="1300" b="0" dirty="0" err="1">
+                <a:solidFill>
+                  <a:srgbClr val="1F2937"/>
+                </a:solidFill>
+                <a:latin typeface="Arial"/>
+              </a:rPr>
+              <a:t>lý</a:t>
+            </a:r>
+            <a:r>
+              <a:rPr sz="1300" b="0" dirty="0">
+                <a:solidFill>
+                  <a:srgbClr val="1F2937"/>
+                </a:solidFill>
+                <a:latin typeface="Arial"/>
+              </a:rPr>
+              <a:t> </a:t>
+            </a:r>
+            <a:r>
+              <a:rPr sz="1300" b="0" dirty="0" err="1">
+                <a:solidFill>
+                  <a:srgbClr val="1F2937"/>
+                </a:solidFill>
+                <a:latin typeface="Arial"/>
+              </a:rPr>
+              <a:t>kết</a:t>
+            </a:r>
+            <a:r>
+              <a:rPr sz="1300" b="0" dirty="0">
+                <a:solidFill>
+                  <a:srgbClr val="1F2937"/>
+                </a:solidFill>
+                <a:latin typeface="Arial"/>
+              </a:rPr>
+              <a:t> </a:t>
+            </a:r>
+            <a:r>
+              <a:rPr sz="1300" b="0" dirty="0" err="1">
+                <a:solidFill>
+                  <a:srgbClr val="1F2937"/>
+                </a:solidFill>
+                <a:latin typeface="Arial"/>
+              </a:rPr>
+              <a:t>quả</a:t>
+            </a:r>
+            <a:r>
+              <a:rPr sz="1300" b="0" dirty="0">
+                <a:solidFill>
+                  <a:srgbClr val="1F2937"/>
+                </a:solidFill>
+                <a:latin typeface="Arial"/>
+              </a:rPr>
+              <a:t> </a:t>
+            </a:r>
+            <a:r>
+              <a:rPr sz="1300" b="0" dirty="0" err="1">
+                <a:solidFill>
+                  <a:srgbClr val="1F2937"/>
+                </a:solidFill>
+                <a:latin typeface="Arial"/>
+              </a:rPr>
+              <a:t>xổ</a:t>
+            </a:r>
+            <a:r>
+              <a:rPr sz="1300" b="0" dirty="0">
+                <a:solidFill>
+                  <a:srgbClr val="1F2937"/>
+                </a:solidFill>
+                <a:latin typeface="Arial"/>
+              </a:rPr>
+              <a:t> </a:t>
+            </a:r>
+            <a:r>
+              <a:rPr sz="1300" b="0" dirty="0" err="1">
+                <a:solidFill>
+                  <a:srgbClr val="1F2937"/>
+                </a:solidFill>
+                <a:latin typeface="Arial"/>
+              </a:rPr>
+              <a:t>số</a:t>
+            </a:r>
+            <a:r>
+              <a:rPr sz="1300" b="0" dirty="0">
+                <a:solidFill>
+                  <a:srgbClr val="1F2937"/>
+                </a:solidFill>
+                <a:latin typeface="Arial"/>
+              </a:rPr>
+              <a:t> </a:t>
+            </a:r>
+            <a:r>
+              <a:rPr sz="1300" b="0" dirty="0" err="1">
+                <a:solidFill>
+                  <a:srgbClr val="1F2937"/>
+                </a:solidFill>
+                <a:latin typeface="Arial"/>
+              </a:rPr>
+              <a:t>và</a:t>
+            </a:r>
+            <a:r>
+              <a:rPr sz="1300" b="0" dirty="0">
+                <a:solidFill>
+                  <a:srgbClr val="1F2937"/>
+                </a:solidFill>
+                <a:latin typeface="Arial"/>
+              </a:rPr>
+              <a:t> </a:t>
+            </a:r>
+            <a:r>
+              <a:rPr sz="1300" b="0" dirty="0" err="1">
+                <a:solidFill>
+                  <a:srgbClr val="1F2937"/>
+                </a:solidFill>
+                <a:latin typeface="Arial"/>
+              </a:rPr>
+              <a:t>người</a:t>
+            </a:r>
+            <a:r>
+              <a:rPr sz="1300" b="0" dirty="0">
+                <a:solidFill>
+                  <a:srgbClr val="1F2937"/>
+                </a:solidFill>
+                <a:latin typeface="Arial"/>
+              </a:rPr>
+              <a:t> </a:t>
+            </a:r>
+            <a:r>
+              <a:rPr sz="1300" b="0" dirty="0" err="1">
+                <a:solidFill>
+                  <a:srgbClr val="1F2937"/>
+                </a:solidFill>
+                <a:latin typeface="Arial"/>
+              </a:rPr>
+              <a:t>dùng</a:t>
+            </a:r>
+            <a:r>
+              <a:rPr sz="1300" b="0" dirty="0">
+                <a:solidFill>
+                  <a:srgbClr val="1F2937"/>
+                </a:solidFill>
+                <a:latin typeface="Arial"/>
+              </a:rPr>
+              <a:t>.</a:t>
             </a:r>
           </a:p>
         </p:txBody>
@@ -23185,14 +25291,29 @@
               </a:defRPr>
             </a:pPr>
             <a:r>
-              <a:rPr sz="1600" b="1">
+              <a:rPr sz="1600" b="1" dirty="0">
                 <a:solidFill>
                   <a:srgbClr val="0B1220"/>
                 </a:solidFill>
                 <a:latin typeface="Arial"/>
               </a:rPr>
-              <a:t>Thành viên</a:t>
-            </a:r>
+              <a:t>Thành </a:t>
+            </a:r>
+            <a:r>
+              <a:rPr sz="1600" b="1" dirty="0" err="1">
+                <a:solidFill>
+                  <a:srgbClr val="0B1220"/>
+                </a:solidFill>
+                <a:latin typeface="Arial"/>
+              </a:rPr>
+              <a:t>viên</a:t>
+            </a:r>
+            <a:endParaRPr sz="1600" b="1" dirty="0">
+              <a:solidFill>
+                <a:srgbClr val="0B1220"/>
+              </a:solidFill>
+              <a:latin typeface="Arial"/>
+            </a:endParaRPr>
           </a:p>
         </p:txBody>
       </p:sp>
@@ -23233,13 +25354,139 @@
               </a:defRPr>
             </a:pPr>
             <a:r>
-              <a:rPr sz="1300" b="0">
-                <a:solidFill>
-                  <a:srgbClr val="1F2937"/>
-                </a:solidFill>
-                <a:latin typeface="Arial"/>
-              </a:rPr>
-              <a:t>•  Dò nhiều vé, tối đa 50 vé/lần.</a:t>
+              <a:rPr sz="1300" b="0" dirty="0">
+                <a:solidFill>
+                  <a:srgbClr val="1F2937"/>
+                </a:solidFill>
+                <a:latin typeface="Arial"/>
+              </a:rPr>
+              <a:t>•  </a:t>
+            </a:r>
+            <a:r>
+              <a:rPr sz="1300" b="0" dirty="0" err="1">
+                <a:solidFill>
+                  <a:srgbClr val="1F2937"/>
+                </a:solidFill>
+                <a:latin typeface="Arial"/>
+              </a:rPr>
+              <a:t>Dò</a:t>
+            </a:r>
+            <a:r>
+              <a:rPr sz="1300" b="0" dirty="0">
+                <a:solidFill>
+                  <a:srgbClr val="1F2937"/>
+                </a:solidFill>
+                <a:latin typeface="Arial"/>
+              </a:rPr>
+              <a:t> </a:t>
+            </a:r>
+            <a:r>
+              <a:rPr sz="1300" b="0" dirty="0" err="1">
+                <a:solidFill>
+                  <a:srgbClr val="1F2937"/>
+                </a:solidFill>
+                <a:latin typeface="Arial"/>
+              </a:rPr>
+              <a:t>nhiều</a:t>
+            </a:r>
+            <a:r>
+              <a:rPr sz="1300" b="0" dirty="0">
+                <a:solidFill>
+                  <a:srgbClr val="1F2937"/>
+                </a:solidFill>
+                <a:latin typeface="Arial"/>
+              </a:rPr>
+              <a:t> </a:t>
+            </a:r>
+            <a:r>
+              <a:rPr sz="1300" b="0" dirty="0" err="1">
+                <a:solidFill>
+                  <a:srgbClr val="1F2937"/>
+                </a:solidFill>
+                <a:latin typeface="Arial"/>
+              </a:rPr>
+              <a:t>vé</a:t>
+            </a:r>
+            <a:r>
+              <a:rPr sz="1300" b="0" dirty="0">
+                <a:solidFill>
+                  <a:srgbClr val="1F2937"/>
+                </a:solidFill>
+                <a:latin typeface="Arial"/>
+              </a:rPr>
+              <a:t>, </a:t>
+            </a:r>
+            <a:r>
+              <a:rPr sz="1300" b="0" dirty="0" err="1">
+                <a:solidFill>
+                  <a:srgbClr val="1F2937"/>
+                </a:solidFill>
+                <a:latin typeface="Arial"/>
+              </a:rPr>
+              <a:t>tối</a:t>
+            </a:r>
+            <a:r>
+              <a:rPr sz="1300" b="0" dirty="0">
+                <a:solidFill>
+                  <a:srgbClr val="1F2937"/>
+                </a:solidFill>
+                <a:latin typeface="Arial"/>
+              </a:rPr>
+              <a:t> </a:t>
+            </a:r>
+            <a:r>
+              <a:rPr sz="1300" b="0" dirty="0" err="1">
+                <a:solidFill>
+                  <a:srgbClr val="1F2937"/>
+                </a:solidFill>
+                <a:latin typeface="Arial"/>
+              </a:rPr>
+              <a:t>đa</a:t>
+            </a:r>
+            <a:r>
+              <a:rPr sz="1300" b="0" dirty="0">
+                <a:solidFill>
+                  <a:srgbClr val="1F2937"/>
+                </a:solidFill>
+                <a:latin typeface="Arial"/>
+              </a:rPr>
+              <a:t> 50 </a:t>
+            </a:r>
+            <a:r>
+              <a:rPr sz="1300" b="0" dirty="0" err="1">
+                <a:solidFill>
+                  <a:srgbClr val="1F2937"/>
+                </a:solidFill>
+                <a:latin typeface="Arial"/>
+              </a:rPr>
+              <a:t>vé</a:t>
+            </a:r>
+            <a:r>
+              <a:rPr sz="1300" b="0" dirty="0">
+                <a:solidFill>
+                  <a:srgbClr val="1F2937"/>
+                </a:solidFill>
+                <a:latin typeface="Arial"/>
+              </a:rPr>
+              <a:t>/</a:t>
+            </a:r>
+            <a:r>
+              <a:rPr sz="1300" b="0" dirty="0" err="1">
+                <a:solidFill>
+                  <a:srgbClr val="1F2937"/>
+                </a:solidFill>
+                <a:latin typeface="Arial"/>
+              </a:rPr>
+              <a:t>lần</a:t>
+            </a:r>
+            <a:r>
+              <a:rPr sz="1300" b="0" dirty="0">
+                <a:solidFill>
+                  <a:srgbClr val="1F2937"/>
+                </a:solidFill>
+                <a:latin typeface="Arial"/>
+              </a:rPr>
+              <a:t>.</a:t>
             </a:r>
           </a:p>
           <a:p>
@@ -23258,13 +25505,67 @@
               </a:defRPr>
             </a:pPr>
             <a:r>
-              <a:rPr sz="1300" b="0">
-                <a:solidFill>
-                  <a:srgbClr val="1F2937"/>
-                </a:solidFill>
-                <a:latin typeface="Arial"/>
-              </a:rPr>
-              <a:t>•  Xem lịch sử dò.</a:t>
+              <a:rPr sz="1300" b="0" dirty="0">
+                <a:solidFill>
+                  <a:srgbClr val="1F2937"/>
+                </a:solidFill>
+                <a:latin typeface="Arial"/>
+              </a:rPr>
+              <a:t>•  Xem </a:t>
+            </a:r>
+            <a:r>
+              <a:rPr sz="1300" b="0" dirty="0" err="1">
+                <a:solidFill>
+                  <a:srgbClr val="1F2937"/>
+                </a:solidFill>
+                <a:latin typeface="Arial"/>
+              </a:rPr>
+              <a:t>lịch</a:t>
+            </a:r>
+            <a:r>
+              <a:rPr sz="1300" b="0" dirty="0">
+                <a:solidFill>
+                  <a:srgbClr val="1F2937"/>
+                </a:solidFill>
+                <a:latin typeface="Arial"/>
+              </a:rPr>
+              <a:t> </a:t>
+            </a:r>
+            <a:r>
+              <a:rPr sz="1300" b="0" dirty="0" err="1">
+                <a:solidFill>
+                  <a:srgbClr val="1F2937"/>
+                </a:solidFill>
+                <a:latin typeface="Arial"/>
+              </a:rPr>
+              <a:t>sử</a:t>
+            </a:r>
+            <a:r>
+              <a:rPr sz="1300" b="0" dirty="0">
+                <a:solidFill>
+                  <a:srgbClr val="1F2937"/>
+                </a:solidFill>
+                <a:latin typeface="Arial"/>
+              </a:rPr>
+              <a:t> </a:t>
+            </a:r>
+            <a:r>
+              <a:rPr sz="1300" b="0" dirty="0" err="1">
+                <a:solidFill>
+                  <a:srgbClr val="1F2937"/>
+                </a:solidFill>
+                <a:latin typeface="Arial"/>
+              </a:rPr>
+              <a:t>dò</a:t>
+            </a:r>
+            <a:r>
+              <a:rPr sz="1300" b="0" dirty="0">
+                <a:solidFill>
+                  <a:srgbClr val="1F2937"/>
+                </a:solidFill>
+                <a:latin typeface="Arial"/>
+              </a:rPr>
+              <a:t>.</a:t>
             </a:r>
           </a:p>
           <a:p>
@@ -23283,13 +25584,85 @@
               </a:defRPr>
             </a:pPr>
             <a:r>
-              <a:rPr sz="1300" b="0">
-                <a:solidFill>
-                  <a:srgbClr val="1F2937"/>
-                </a:solidFill>
-                <a:latin typeface="Arial"/>
-              </a:rPr>
-              <a:t>•  Xem biểu đồ thống kê.</a:t>
+              <a:rPr sz="1300" b="0" dirty="0">
+                <a:solidFill>
+                  <a:srgbClr val="1F2937"/>
+                </a:solidFill>
+                <a:latin typeface="Arial"/>
+              </a:rPr>
+              <a:t>•  Xem </a:t>
+            </a:r>
+            <a:r>
+              <a:rPr sz="1300" b="0" dirty="0" err="1">
+                <a:solidFill>
+                  <a:srgbClr val="1F2937"/>
+                </a:solidFill>
+                <a:latin typeface="Arial"/>
+              </a:rPr>
+              <a:t>biểu</a:t>
+            </a:r>
+            <a:r>
+              <a:rPr sz="1300" b="0" dirty="0">
+                <a:solidFill>
+                  <a:srgbClr val="1F2937"/>
+                </a:solidFill>
+                <a:latin typeface="Arial"/>
+              </a:rPr>
+              <a:t> </a:t>
+            </a:r>
+            <a:r>
+              <a:rPr sz="1300" b="0" dirty="0" err="1">
+                <a:solidFill>
+                  <a:srgbClr val="1F2937"/>
+                </a:solidFill>
+                <a:latin typeface="Arial"/>
+              </a:rPr>
+              <a:t>đồ</a:t>
+            </a:r>
+            <a:r>
+              <a:rPr sz="1300" b="0" dirty="0">
+                <a:solidFill>
+                  <a:srgbClr val="1F2937"/>
+                </a:solidFill>
+                <a:latin typeface="Arial"/>
+              </a:rPr>
+              <a:t> </a:t>
+            </a:r>
+            <a:r>
+              <a:rPr sz="1300" b="0" dirty="0" err="1">
+                <a:solidFill>
+                  <a:srgbClr val="1F2937"/>
+                </a:solidFill>
+                <a:latin typeface="Arial"/>
+              </a:rPr>
+              <a:t>thống</a:t>
+            </a:r>
+            <a:r>
+              <a:rPr sz="1300" b="0" dirty="0">
+                <a:solidFill>
+                  <a:srgbClr val="1F2937"/>
+                </a:solidFill>
+                <a:latin typeface="Arial"/>
+              </a:rPr>
+              <a:t> </a:t>
+            </a:r>
+            <a:r>
+              <a:rPr sz="1300" b="0" dirty="0" err="1">
+                <a:solidFill>
+                  <a:srgbClr val="1F2937"/>
+                </a:solidFill>
+                <a:latin typeface="Arial"/>
+              </a:rPr>
+              <a:t>kê</a:t>
+            </a:r>
+            <a:r>
+              <a:rPr sz="1300" b="0" dirty="0">
+                <a:solidFill>
+                  <a:srgbClr val="1F2937"/>
+                </a:solidFill>
+                <a:latin typeface="Arial"/>
+              </a:rPr>
+              <a:t>.</a:t>
             </a:r>
           </a:p>
           <a:p>
@@ -23308,13 +25681,67 @@
               </a:defRPr>
             </a:pPr>
             <a:r>
-              <a:rPr sz="1300" b="0">
-                <a:solidFill>
-                  <a:srgbClr val="1F2937"/>
-                </a:solidFill>
-                <a:latin typeface="Arial"/>
-              </a:rPr>
-              <a:t>•  Đổi mật khẩu.</a:t>
+              <a:rPr sz="1300" b="0" dirty="0">
+                <a:solidFill>
+                  <a:srgbClr val="1F2937"/>
+                </a:solidFill>
+                <a:latin typeface="Arial"/>
+              </a:rPr>
+              <a:t>•  </a:t>
+            </a:r>
+            <a:r>
+              <a:rPr sz="1300" b="0" dirty="0" err="1">
+                <a:solidFill>
+                  <a:srgbClr val="1F2937"/>
+                </a:solidFill>
+                <a:latin typeface="Arial"/>
+              </a:rPr>
+              <a:t>Đổi</a:t>
+            </a:r>
+            <a:r>
+              <a:rPr sz="1300" b="0" dirty="0">
+                <a:solidFill>
+                  <a:srgbClr val="1F2937"/>
+                </a:solidFill>
+                <a:latin typeface="Arial"/>
+              </a:rPr>
+              <a:t> </a:t>
+            </a:r>
+            <a:r>
+              <a:rPr sz="1300" b="0" dirty="0" err="1">
+                <a:solidFill>
+                  <a:srgbClr val="1F2937"/>
+                </a:solidFill>
+                <a:latin typeface="Arial"/>
+              </a:rPr>
+              <a:t>mật</a:t>
+            </a:r>
+            <a:r>
+              <a:rPr sz="1300" b="0" dirty="0">
+                <a:solidFill>
+                  <a:srgbClr val="1F2937"/>
+                </a:solidFill>
+                <a:latin typeface="Arial"/>
+              </a:rPr>
+              <a:t> </a:t>
+            </a:r>
+            <a:r>
+              <a:rPr sz="1300" b="0" dirty="0" err="1">
+                <a:solidFill>
+                  <a:srgbClr val="1F2937"/>
+                </a:solidFill>
+                <a:latin typeface="Arial"/>
+              </a:rPr>
+              <a:t>khẩu</a:t>
+            </a:r>
+            <a:r>
+              <a:rPr sz="1300" b="0" dirty="0">
+                <a:solidFill>
+                  <a:srgbClr val="1F2937"/>
+                </a:solidFill>
+                <a:latin typeface="Arial"/>
+              </a:rPr>
+              <a:t>.</a:t>
             </a:r>
           </a:p>
           <a:p>
@@ -23333,13 +25760,31 @@
               </a:defRPr>
             </a:pPr>
             <a:r>
-              <a:rPr sz="1300" b="0">
-                <a:solidFill>
-                  <a:srgbClr val="1F2937"/>
-                </a:solidFill>
-                <a:latin typeface="Arial"/>
-              </a:rPr>
-              <a:t>•  Liên kết Google/Facebook.</a:t>
+              <a:rPr sz="1300" b="0" dirty="0">
+                <a:solidFill>
+                  <a:srgbClr val="1F2937"/>
+                </a:solidFill>
+                <a:latin typeface="Arial"/>
+              </a:rPr>
+              <a:t>•  Liên </a:t>
+            </a:r>
+            <a:r>
+              <a:rPr sz="1300" b="0" dirty="0" err="1">
+                <a:solidFill>
+                  <a:srgbClr val="1F2937"/>
+                </a:solidFill>
+                <a:latin typeface="Arial"/>
+              </a:rPr>
+              <a:t>kết</a:t>
+            </a:r>
+            <a:r>
+              <a:rPr sz="1300" b="0" dirty="0">
+                <a:solidFill>
+                  <a:srgbClr val="1F2937"/>
+                </a:solidFill>
+                <a:latin typeface="Arial"/>
+              </a:rPr>
+              <a:t> Google/Facebook.</a:t>
             </a:r>
           </a:p>
         </p:txBody>
@@ -23523,13 +25968,103 @@
               </a:defRPr>
             </a:pPr>
             <a:r>
-              <a:rPr sz="1300" b="0">
-                <a:solidFill>
-                  <a:srgbClr val="1F2937"/>
-                </a:solidFill>
-                <a:latin typeface="Arial"/>
-              </a:rPr>
-              <a:t>•  Kế thừa quyền thành viên.</a:t>
+              <a:rPr sz="1300" b="0" dirty="0">
+                <a:solidFill>
+                  <a:srgbClr val="1F2937"/>
+                </a:solidFill>
+                <a:latin typeface="Arial"/>
+              </a:rPr>
+              <a:t>•  </a:t>
+            </a:r>
+            <a:r>
+              <a:rPr sz="1300" b="0" dirty="0" err="1">
+                <a:solidFill>
+                  <a:srgbClr val="1F2937"/>
+                </a:solidFill>
+                <a:latin typeface="Arial"/>
+              </a:rPr>
+              <a:t>Kế</a:t>
+            </a:r>
+            <a:r>
+              <a:rPr sz="1300" b="0" dirty="0">
+                <a:solidFill>
+                  <a:srgbClr val="1F2937"/>
+                </a:solidFill>
+                <a:latin typeface="Arial"/>
+              </a:rPr>
+              <a:t> </a:t>
+            </a:r>
+            <a:r>
+              <a:rPr sz="1300" b="0" dirty="0" err="1">
+                <a:solidFill>
+                  <a:srgbClr val="1F2937"/>
+                </a:solidFill>
+                <a:latin typeface="Arial"/>
+              </a:rPr>
+              <a:t>thừa</a:t>
+            </a:r>
+            <a:r>
+              <a:rPr sz="1300" b="0" dirty="0">
+                <a:solidFill>
+                  <a:srgbClr val="1F2937"/>
+                </a:solidFill>
+                <a:latin typeface="Arial"/>
+              </a:rPr>
+              <a:t> </a:t>
+            </a:r>
+            <a:r>
+              <a:rPr sz="1300" b="0" dirty="0" err="1">
+                <a:solidFill>
+                  <a:srgbClr val="1F2937"/>
+                </a:solidFill>
+                <a:latin typeface="Arial"/>
+              </a:rPr>
+              <a:t>quyền</a:t>
+            </a:r>
+            <a:r>
+              <a:rPr sz="1300" b="0" dirty="0">
+                <a:solidFill>
+                  <a:srgbClr val="1F2937"/>
+                </a:solidFill>
+                <a:latin typeface="Arial"/>
+              </a:rPr>
+              <a:t> </a:t>
+            </a:r>
+            <a:r>
+              <a:rPr sz="1300" b="0" dirty="0" err="1">
+                <a:solidFill>
+                  <a:srgbClr val="1F2937"/>
+                </a:solidFill>
+                <a:latin typeface="Arial"/>
+              </a:rPr>
+              <a:t>thành</a:t>
+            </a:r>
+            <a:r>
+              <a:rPr sz="1300" b="0" dirty="0">
+                <a:solidFill>
+                  <a:srgbClr val="1F2937"/>
+                </a:solidFill>
+                <a:latin typeface="Arial"/>
+              </a:rPr>
+              <a:t> </a:t>
+            </a:r>
+            <a:r>
+              <a:rPr sz="1300" b="0" dirty="0" err="1">
+                <a:solidFill>
+                  <a:srgbClr val="1F2937"/>
+                </a:solidFill>
+                <a:latin typeface="Arial"/>
+              </a:rPr>
+              <a:t>viên</a:t>
+            </a:r>
+            <a:r>
+              <a:rPr sz="1300" b="0" dirty="0">
+                <a:solidFill>
+                  <a:srgbClr val="1F2937"/>
+                </a:solidFill>
+                <a:latin typeface="Arial"/>
+              </a:rPr>
+              <a:t>.</a:t>
             </a:r>
           </a:p>
           <a:p>
@@ -23548,13 +26083,67 @@
               </a:defRPr>
             </a:pPr>
             <a:r>
-              <a:rPr sz="1300" b="0">
-                <a:solidFill>
-                  <a:srgbClr val="1F2937"/>
-                </a:solidFill>
-                <a:latin typeface="Arial"/>
-              </a:rPr>
-              <a:t>•  Quản lý người dùng.</a:t>
+              <a:rPr sz="1300" b="0" dirty="0">
+                <a:solidFill>
+                  <a:srgbClr val="1F2937"/>
+                </a:solidFill>
+                <a:latin typeface="Arial"/>
+              </a:rPr>
+              <a:t>•  Quản </a:t>
+            </a:r>
+            <a:r>
+              <a:rPr sz="1300" b="0" dirty="0" err="1">
+                <a:solidFill>
+                  <a:srgbClr val="1F2937"/>
+                </a:solidFill>
+                <a:latin typeface="Arial"/>
+              </a:rPr>
+              <a:t>lý</a:t>
+            </a:r>
+            <a:r>
+              <a:rPr sz="1300" b="0" dirty="0">
+                <a:solidFill>
+                  <a:srgbClr val="1F2937"/>
+                </a:solidFill>
+                <a:latin typeface="Arial"/>
+              </a:rPr>
+              <a:t> </a:t>
+            </a:r>
+            <a:r>
+              <a:rPr sz="1300" b="0" dirty="0" err="1">
+                <a:solidFill>
+                  <a:srgbClr val="1F2937"/>
+                </a:solidFill>
+                <a:latin typeface="Arial"/>
+              </a:rPr>
+              <a:t>người</a:t>
+            </a:r>
+            <a:r>
+              <a:rPr sz="1300" b="0" dirty="0">
+                <a:solidFill>
+                  <a:srgbClr val="1F2937"/>
+                </a:solidFill>
+                <a:latin typeface="Arial"/>
+              </a:rPr>
+              <a:t> </a:t>
+            </a:r>
+            <a:r>
+              <a:rPr sz="1300" b="0" dirty="0" err="1">
+                <a:solidFill>
+                  <a:srgbClr val="1F2937"/>
+                </a:solidFill>
+                <a:latin typeface="Arial"/>
+              </a:rPr>
+              <a:t>dùng</a:t>
+            </a:r>
+            <a:r>
+              <a:rPr sz="1300" b="0" dirty="0">
+                <a:solidFill>
+                  <a:srgbClr val="1F2937"/>
+                </a:solidFill>
+                <a:latin typeface="Arial"/>
+              </a:rPr>
+              <a:t>.</a:t>
             </a:r>
           </a:p>
           <a:p>
@@ -23573,13 +26162,103 @@
               </a:defRPr>
             </a:pPr>
             <a:r>
-              <a:rPr sz="1300" b="0">
-                <a:solidFill>
-                  <a:srgbClr val="1F2937"/>
-                </a:solidFill>
-                <a:latin typeface="Arial"/>
-              </a:rPr>
-              <a:t>•  Quản lý kết quả xổ số.</a:t>
+              <a:rPr sz="1300" b="0" dirty="0">
+                <a:solidFill>
+                  <a:srgbClr val="1F2937"/>
+                </a:solidFill>
+                <a:latin typeface="Arial"/>
+              </a:rPr>
+              <a:t>•  Quản </a:t>
+            </a:r>
+            <a:r>
+              <a:rPr sz="1300" b="0" dirty="0" err="1">
+                <a:solidFill>
+                  <a:srgbClr val="1F2937"/>
+                </a:solidFill>
+                <a:latin typeface="Arial"/>
+              </a:rPr>
+              <a:t>lý</a:t>
+            </a:r>
+            <a:r>
+              <a:rPr sz="1300" b="0" dirty="0">
+                <a:solidFill>
+                  <a:srgbClr val="1F2937"/>
+                </a:solidFill>
+                <a:latin typeface="Arial"/>
+              </a:rPr>
+              <a:t> </a:t>
+            </a:r>
+            <a:r>
+              <a:rPr sz="1300" b="0" dirty="0" err="1">
+                <a:solidFill>
+                  <a:srgbClr val="1F2937"/>
+                </a:solidFill>
+                <a:latin typeface="Arial"/>
+              </a:rPr>
+              <a:t>kết</a:t>
+            </a:r>
+            <a:r>
+              <a:rPr sz="1300" b="0" dirty="0">
+                <a:solidFill>
+                  <a:srgbClr val="1F2937"/>
+                </a:solidFill>
+                <a:latin typeface="Arial"/>
+              </a:rPr>
+              <a:t> </a:t>
+            </a:r>
+            <a:r>
+              <a:rPr sz="1300" b="0" dirty="0" err="1">
+                <a:solidFill>
+                  <a:srgbClr val="1F2937"/>
+                </a:solidFill>
+                <a:latin typeface="Arial"/>
+              </a:rPr>
+              <a:t>quả</a:t>
+            </a:r>
+            <a:r>
+              <a:rPr sz="1300" b="0" dirty="0">
+                <a:solidFill>
+                  <a:srgbClr val="1F2937"/>
+                </a:solidFill>
+                <a:latin typeface="Arial"/>
+              </a:rPr>
+              <a:t> </a:t>
+            </a:r>
+            <a:r>
+              <a:rPr sz="1300" b="0" dirty="0" err="1">
+                <a:solidFill>
+                  <a:srgbClr val="1F2937"/>
+                </a:solidFill>
+                <a:latin typeface="Arial"/>
+              </a:rPr>
+              <a:t>xổ</a:t>
+            </a:r>
+            <a:r>
+              <a:rPr sz="1300" b="0" dirty="0">
+                <a:solidFill>
+                  <a:srgbClr val="1F2937"/>
+                </a:solidFill>
+                <a:latin typeface="Arial"/>
+              </a:rPr>
+              <a:t> </a:t>
+            </a:r>
+            <a:r>
+              <a:rPr sz="1300" b="0" dirty="0" err="1">
+                <a:solidFill>
+                  <a:srgbClr val="1F2937"/>
+                </a:solidFill>
+                <a:latin typeface="Arial"/>
+              </a:rPr>
+              <a:t>số</a:t>
+            </a:r>
+            <a:r>
+              <a:rPr sz="1300" b="0" dirty="0">
+                <a:solidFill>
+                  <a:srgbClr val="1F2937"/>
+                </a:solidFill>
+                <a:latin typeface="Arial"/>
+              </a:rPr>
+              <a:t>.</a:t>
             </a:r>
           </a:p>
           <a:p>
@@ -23598,13 +26277,49 @@
               </a:defRPr>
             </a:pPr>
             <a:r>
-              <a:rPr sz="1300" b="0">
-                <a:solidFill>
-                  <a:srgbClr val="1F2937"/>
-                </a:solidFill>
-                <a:latin typeface="Arial"/>
-              </a:rPr>
-              <a:t>•  Publish/unpublish kết quả.</a:t>
+              <a:rPr sz="1300" b="0" dirty="0">
+                <a:solidFill>
+                  <a:srgbClr val="1F2937"/>
+                </a:solidFill>
+                <a:latin typeface="Arial"/>
+              </a:rPr>
+              <a:t>•  Publish/unpublish </a:t>
+            </a:r>
+            <a:r>
+              <a:rPr sz="1300" b="0" dirty="0" err="1">
+                <a:solidFill>
+                  <a:srgbClr val="1F2937"/>
+                </a:solidFill>
+                <a:latin typeface="Arial"/>
+              </a:rPr>
+              <a:t>kết</a:t>
+            </a:r>
+            <a:r>
+              <a:rPr sz="1300" b="0" dirty="0">
+                <a:solidFill>
+                  <a:srgbClr val="1F2937"/>
+                </a:solidFill>
+                <a:latin typeface="Arial"/>
+              </a:rPr>
+              <a:t> </a:t>
+            </a:r>
+            <a:r>
+              <a:rPr sz="1300" b="0" dirty="0" err="1">
+                <a:solidFill>
+                  <a:srgbClr val="1F2937"/>
+                </a:solidFill>
+                <a:latin typeface="Arial"/>
+              </a:rPr>
+              <a:t>quả</a:t>
+            </a:r>
+            <a:r>
+              <a:rPr sz="1300" b="0" dirty="0">
+                <a:solidFill>
+                  <a:srgbClr val="1F2937"/>
+                </a:solidFill>
+                <a:latin typeface="Arial"/>
+              </a:rPr>
+              <a:t>.</a:t>
             </a:r>
           </a:p>
           <a:p>
@@ -23623,13 +26338,49 @@
               </a:defRPr>
             </a:pPr>
             <a:r>
-              <a:rPr sz="1300" b="0">
-                <a:solidFill>
-                  <a:srgbClr val="1F2937"/>
-                </a:solidFill>
-                <a:latin typeface="Arial"/>
-              </a:rPr>
-              <a:t>•  Gửi email, xuất Excel/CSV/JSON.</a:t>
+              <a:rPr sz="1300" b="0" dirty="0">
+                <a:solidFill>
+                  <a:srgbClr val="1F2937"/>
+                </a:solidFill>
+                <a:latin typeface="Arial"/>
+              </a:rPr>
+              <a:t>•  </a:t>
+            </a:r>
+            <a:r>
+              <a:rPr sz="1300" b="0" dirty="0" err="1">
+                <a:solidFill>
+                  <a:srgbClr val="1F2937"/>
+                </a:solidFill>
+                <a:latin typeface="Arial"/>
+              </a:rPr>
+              <a:t>Gửi</a:t>
+            </a:r>
+            <a:r>
+              <a:rPr sz="1300" b="0" dirty="0">
+                <a:solidFill>
+                  <a:srgbClr val="1F2937"/>
+                </a:solidFill>
+                <a:latin typeface="Arial"/>
+              </a:rPr>
+              <a:t> email, </a:t>
+            </a:r>
+            <a:r>
+              <a:rPr sz="1300" b="0" dirty="0" err="1">
+                <a:solidFill>
+                  <a:srgbClr val="1F2937"/>
+                </a:solidFill>
+                <a:latin typeface="Arial"/>
+              </a:rPr>
+              <a:t>xuất</a:t>
+            </a:r>
+            <a:r>
+              <a:rPr sz="1300" b="0" dirty="0">
+                <a:solidFill>
+                  <a:srgbClr val="1F2937"/>
+                </a:solidFill>
+                <a:latin typeface="Arial"/>
+              </a:rPr>
+              <a:t> Excel/CSV/JSON.</a:t>
             </a:r>
           </a:p>
         </p:txBody>
@@ -25071,7 +27822,7 @@
         <p:spPr>
           <a:xfrm>
             <a:off x="722376" y="1499616"/>
-            <a:ext cx="10744200" cy="4361688"/>
+            <a:ext cx="10744200" cy="5243262"/>
           </a:xfrm>
           <a:prstGeom prst="roundRect">
             <a:avLst>
@@ -25111,30 +27862,6 @@
           </a:p>
         </p:txBody>
       </p:sp>
-      <p:pic>
-        <p:nvPicPr>
-          <p:cNvPr id="10" name="Picture 9" descr="usecase-diagram.png"/>
-          <p:cNvPicPr>
-            <a:picLocks noChangeAspect="1"/>
-          </p:cNvPicPr>
-          <p:nvPr/>
-        </p:nvPicPr>
-        <p:blipFill>
-          <a:blip r:embed="rId2"/>
-          <a:stretch>
-            <a:fillRect/>
-          </a:stretch>
-        </p:blipFill>
-        <p:spPr>
-          <a:xfrm>
-            <a:off x="777240" y="2162240"/>
-            <a:ext cx="10634472" cy="3036439"/>
-          </a:xfrm>
-          <a:prstGeom prst="rect">
-            <a:avLst/>
-          </a:prstGeom>
-        </p:spPr>
-      </p:pic>
       <p:sp>
         <p:nvSpPr>
           <p:cNvPr id="11" name="TextBox 10"/>
@@ -25183,6 +27910,36 @@
           </a:p>
         </p:txBody>
       </p:sp>
+      <p:pic>
+        <p:nvPicPr>
+          <p:cNvPr id="13" name="Picture 12">
+            <a:extLst>
+              <a:ext uri="{FF2B5EF4-FFF2-40B4-BE49-F238E27FC236}">
+                <a16:creationId xmlns:a16="http://schemas.microsoft.com/office/drawing/2014/main" id="{AE73C4A6-43FE-7E0F-12DD-DD56AA07D4A6}"/>
+              </a:ext>
+            </a:extLst>
+          </p:cNvPr>
+          <p:cNvPicPr>
+            <a:picLocks noChangeAspect="1"/>
+          </p:cNvPicPr>
+          <p:nvPr/>
+        </p:nvPicPr>
+        <p:blipFill>
+          <a:blip r:embed="rId2"/>
+          <a:stretch>
+            <a:fillRect/>
+          </a:stretch>
+        </p:blipFill>
+        <p:spPr>
+          <a:xfrm>
+            <a:off x="3522066" y="1499616"/>
+            <a:ext cx="3793676" cy="5145967"/>
+          </a:xfrm>
+          <a:prstGeom prst="rect">
+            <a:avLst/>
+          </a:prstGeom>
+        </p:spPr>
+      </p:pic>
     </p:spTree>
   </p:cSld>
   <p:clrMapOvr>
@@ -26062,7 +28819,7 @@
               </a:defRPr>
             </a:pPr>
             <a:r>
-              <a:rPr sz="1200" b="0">
+              <a:rPr sz="1200" b="0" dirty="0">
                 <a:solidFill>
                   <a:srgbClr val="1F2937"/>
                 </a:solidFill>
@@ -26087,7 +28844,7 @@
               </a:defRPr>
             </a:pPr>
             <a:r>
-              <a:rPr sz="1200" b="0">
+              <a:rPr sz="1200" b="0" dirty="0">
                 <a:solidFill>
                   <a:srgbClr val="1F2937"/>
                 </a:solidFill>
@@ -26112,7 +28869,7 @@
               </a:defRPr>
             </a:pPr>
             <a:r>
-              <a:rPr sz="1200" b="0">
+              <a:rPr sz="1200" b="0" dirty="0">
                 <a:solidFill>
                   <a:srgbClr val="1F2937"/>
                 </a:solidFill>
@@ -26137,7 +28894,7 @@
               </a:defRPr>
             </a:pPr>
             <a:r>
-              <a:rPr sz="1200" b="0">
+              <a:rPr sz="1200" b="0" dirty="0">
                 <a:solidFill>
                   <a:srgbClr val="1F2937"/>
                 </a:solidFill>
@@ -26162,7 +28919,7 @@
               </a:defRPr>
             </a:pPr>
             <a:r>
-              <a:rPr sz="1200" b="0">
+              <a:rPr sz="1200" b="0" dirty="0">
                 <a:solidFill>
                   <a:srgbClr val="1F2937"/>
                 </a:solidFill>
@@ -26187,7 +28944,7 @@
               </a:defRPr>
             </a:pPr>
             <a:r>
-              <a:rPr sz="1200" b="0">
+              <a:rPr sz="1200" b="0" dirty="0">
                 <a:solidFill>
                   <a:srgbClr val="1F2937"/>
                 </a:solidFill>
@@ -26212,7 +28969,7 @@
               </a:defRPr>
             </a:pPr>
             <a:r>
-              <a:rPr sz="1200" b="0">
+              <a:rPr sz="1200" b="0" dirty="0">
                 <a:solidFill>
                   <a:srgbClr val="1F2937"/>
                 </a:solidFill>
@@ -29125,14 +31882,83 @@
                         </a:defRPr>
                       </a:pPr>
                       <a:r>
-                        <a:rPr sz="1200" b="0">
+                        <a:rPr sz="1200" b="0" dirty="0">
                           <a:solidFill>
                             <a:srgbClr val="1F2937"/>
                           </a:solidFill>
                           <a:latin typeface="Arial"/>
                         </a:rPr>
-                        <a:t>Lưu varchar cho ticket_number và winning_number</a:t>
+                        <a:t>Lưu varchar </a:t>
                       </a:r>
+                      <a:r>
+                        <a:rPr sz="1200" b="0" dirty="0" err="1">
+                          <a:solidFill>
+                            <a:srgbClr val="1F2937"/>
+                          </a:solidFill>
+                          <a:latin typeface="Arial"/>
+                        </a:rPr>
+                        <a:t>cho</a:t>
+                      </a:r>
+                      <a:r>
+                        <a:rPr sz="1200" b="0" dirty="0">
+                          <a:solidFill>
+                            <a:srgbClr val="1F2937"/>
+                          </a:solidFill>
+                          <a:latin typeface="Arial"/>
+                        </a:rPr>
+                        <a:t> </a:t>
+                      </a:r>
+                      <a:r>
+                        <a:rPr sz="1200" b="0" dirty="0" err="1">
+                          <a:solidFill>
+                            <a:srgbClr val="1F2937"/>
+                          </a:solidFill>
+                          <a:latin typeface="Arial"/>
+                        </a:rPr>
+                        <a:t>ticket_number</a:t>
+                      </a:r>
+                      <a:r>
+                        <a:rPr sz="1200" b="0" dirty="0">
+                          <a:solidFill>
+                            <a:srgbClr val="1F2937"/>
+                          </a:solidFill>
+                          <a:latin typeface="Arial"/>
+                        </a:rPr>
+                        <a:t> </a:t>
+                      </a:r>
+                      <a:r>
+                        <a:rPr sz="1200" b="0" dirty="0" err="1">
+                          <a:solidFill>
+                            <a:srgbClr val="1F2937"/>
+                          </a:solidFill>
+                          <a:latin typeface="Arial"/>
+                        </a:rPr>
+                        <a:t>và</a:t>
+                      </a:r>
+                      <a:r>
+                        <a:rPr sz="1200" b="0" dirty="0">
+                          <a:solidFill>
+                            <a:srgbClr val="1F2937"/>
+                          </a:solidFill>
+                          <a:latin typeface="Arial"/>
+                        </a:rPr>
+                        <a:t> </a:t>
+                      </a:r>
+                      <a:r>
+                        <a:rPr sz="1200" b="0" dirty="0" err="1">
+                          <a:solidFill>
+                            <a:srgbClr val="1F2937"/>
+                          </a:solidFill>
+                          <a:latin typeface="Arial"/>
+                        </a:rPr>
+                        <a:t>winning_number</a:t>
+                      </a:r>
+                      <a:endParaRPr sz="1200" b="0" dirty="0">
+                        <a:solidFill>
+                          <a:srgbClr val="1F2937"/>
+                        </a:solidFill>
+                        <a:latin typeface="Arial"/>
+                      </a:endParaRPr>
                     </a:p>
                   </a:txBody>
                   <a:tcPr marL="73152" marR="73152" marT="27432" marB="27432" anchor="ctr">
@@ -29222,13 +32048,49 @@
                         </a:defRPr>
                       </a:pPr>
                       <a:r>
-                        <a:rPr sz="1200" b="0">
+                        <a:rPr sz="1200" b="0" dirty="0">
                           <a:solidFill>
                             <a:srgbClr val="1F2937"/>
                           </a:solidFill>
                           <a:latin typeface="Arial"/>
                         </a:rPr>
-                        <a:t>UNIQUE(station_id, draw_date)</a:t>
+                        <a:t>UNIQUE(</a:t>
+                      </a:r>
+                      <a:r>
+                        <a:rPr sz="1200" b="0" dirty="0" err="1">
+                          <a:solidFill>
+                            <a:srgbClr val="1F2937"/>
+                          </a:solidFill>
+                          <a:latin typeface="Arial"/>
+                        </a:rPr>
+                        <a:t>station_id</a:t>
+                      </a:r>
+                      <a:r>
+                        <a:rPr sz="1200" b="0" dirty="0">
+                          <a:solidFill>
+                            <a:srgbClr val="1F2937"/>
+                          </a:solidFill>
+                          <a:latin typeface="Arial"/>
+                        </a:rPr>
+                        <a:t>, </a:t>
+                      </a:r>
+                      <a:r>
+                        <a:rPr sz="1200" b="0" dirty="0" err="1">
+                          <a:solidFill>
+                            <a:srgbClr val="1F2937"/>
+                          </a:solidFill>
+                          <a:latin typeface="Arial"/>
+                        </a:rPr>
+                        <a:t>draw_date</a:t>
+                      </a:r>
+                      <a:r>
+                        <a:rPr sz="1200" b="0" dirty="0">
+                          <a:solidFill>
+                            <a:srgbClr val="1F2937"/>
+                          </a:solidFill>
+                          <a:latin typeface="Arial"/>
+                        </a:rPr>
+                        <a:t>)</a:t>
                       </a:r>
                     </a:p>
                   </a:txBody>
@@ -29319,13 +32181,67 @@
                         </a:defRPr>
                       </a:pPr>
                       <a:r>
-                        <a:rPr sz="1200" b="0">
+                        <a:rPr sz="1200" b="0" dirty="0">
                           <a:solidFill>
                             <a:srgbClr val="1F2937"/>
                           </a:solidFill>
                           <a:latin typeface="Arial"/>
                         </a:rPr>
-                        <a:t>UNIQUE(result_id, prize_type, winning_number)</a:t>
+                        <a:t>UNIQUE(</a:t>
+                      </a:r>
+                      <a:r>
+                        <a:rPr sz="1200" b="0" dirty="0" err="1">
+                          <a:solidFill>
+                            <a:srgbClr val="1F2937"/>
+                          </a:solidFill>
+                          <a:latin typeface="Arial"/>
+                        </a:rPr>
+                        <a:t>result_id</a:t>
+                      </a:r>
+                      <a:r>
+                        <a:rPr sz="1200" b="0" dirty="0">
+                          <a:solidFill>
+                            <a:srgbClr val="1F2937"/>
+                          </a:solidFill>
+                          <a:latin typeface="Arial"/>
+                        </a:rPr>
+                        <a:t>, </a:t>
+                      </a:r>
+                      <a:r>
+                        <a:rPr sz="1200" b="0" dirty="0" err="1">
+                          <a:solidFill>
+                            <a:srgbClr val="1F2937"/>
+                          </a:solidFill>
+                          <a:latin typeface="Arial"/>
+                        </a:rPr>
+                        <a:t>prize_type</a:t>
+                      </a:r>
+                      <a:r>
+                        <a:rPr sz="1200" b="0" dirty="0">
+                          <a:solidFill>
+                            <a:srgbClr val="1F2937"/>
+                          </a:solidFill>
+                          <a:latin typeface="Arial"/>
+                        </a:rPr>
+                        <a:t>, </a:t>
+                      </a:r>
+                      <a:r>
+                        <a:rPr sz="1200" b="0" dirty="0" err="1">
+                          <a:solidFill>
+                            <a:srgbClr val="1F2937"/>
+                          </a:solidFill>
+                          <a:latin typeface="Arial"/>
+                        </a:rPr>
+                        <a:t>winning_number</a:t>
+                      </a:r>
+                      <a:r>
+                        <a:rPr sz="1200" b="0" dirty="0">
+                          <a:solidFill>
+                            <a:srgbClr val="1F2937"/>
+                          </a:solidFill>
+                          <a:latin typeface="Arial"/>
+                        </a:rPr>
+                        <a:t>)</a:t>
                       </a:r>
                     </a:p>
                   </a:txBody>
@@ -29416,13 +32332,22 @@
                         </a:defRPr>
                       </a:pPr>
                       <a:r>
-                        <a:rPr sz="1200" b="0">
+                        <a:rPr sz="1200" b="0" dirty="0" err="1">
                           <a:solidFill>
                             <a:srgbClr val="1F2937"/>
                           </a:solidFill>
                           <a:latin typeface="Arial"/>
                         </a:rPr>
-                        <a:t>check_sessions.user_id NULL</a:t>
+                        <a:t>check_sessions.user_id</a:t>
+                      </a:r>
+                      <a:r>
+                        <a:rPr sz="1200" b="0" dirty="0">
+                          <a:solidFill>
+                            <a:srgbClr val="1F2937"/>
+                          </a:solidFill>
+                          <a:latin typeface="Arial"/>
+                        </a:rPr>
+                        <a:t> NULL</a:t>
                       </a:r>
                     </a:p>
                   </a:txBody>
@@ -29513,13 +32438,76 @@
                         </a:defRPr>
                       </a:pPr>
                       <a:r>
-                        <a:rPr sz="1200" b="0">
+                        <a:rPr sz="1200" b="0" dirty="0" err="1">
                           <a:solidFill>
                             <a:srgbClr val="1F2937"/>
                           </a:solidFill>
                           <a:latin typeface="Arial"/>
                         </a:rPr>
-                        <a:t>total_spent và total_won theo session</a:t>
+                        <a:t>total_spent</a:t>
+                      </a:r>
+                      <a:r>
+                        <a:rPr sz="1200" b="0" dirty="0">
+                          <a:solidFill>
+                            <a:srgbClr val="1F2937"/>
+                          </a:solidFill>
+                          <a:latin typeface="Arial"/>
+                        </a:rPr>
+                        <a:t> </a:t>
+                      </a:r>
+                      <a:r>
+                        <a:rPr sz="1200" b="0" dirty="0" err="1">
+                          <a:solidFill>
+                            <a:srgbClr val="1F2937"/>
+                          </a:solidFill>
+                          <a:latin typeface="Arial"/>
+                        </a:rPr>
+                        <a:t>và</a:t>
+                      </a:r>
+                      <a:r>
+                        <a:rPr sz="1200" b="0" dirty="0">
+                          <a:solidFill>
+                            <a:srgbClr val="1F2937"/>
+                          </a:solidFill>
+                          <a:latin typeface="Arial"/>
+                        </a:rPr>
+                        <a:t> </a:t>
+                      </a:r>
+                      <a:r>
+                        <a:rPr sz="1200" b="0" dirty="0" err="1">
+                          <a:solidFill>
+                            <a:srgbClr val="1F2937"/>
+                          </a:solidFill>
+                          <a:latin typeface="Arial"/>
+                        </a:rPr>
+                        <a:t>total_won</a:t>
+                      </a:r>
+                      <a:r>
+                        <a:rPr sz="1200" b="0" dirty="0">
+                          <a:solidFill>
+                            <a:srgbClr val="1F2937"/>
+                          </a:solidFill>
+                          <a:latin typeface="Arial"/>
+                        </a:rPr>
+                        <a:t> </a:t>
+                      </a:r>
+                      <a:r>
+                        <a:rPr sz="1200" b="0" dirty="0" err="1">
+                          <a:solidFill>
+                            <a:srgbClr val="1F2937"/>
+                          </a:solidFill>
+                          <a:latin typeface="Arial"/>
+                        </a:rPr>
+                        <a:t>theo</a:t>
+                      </a:r>
+                      <a:r>
+                        <a:rPr sz="1200" b="0" dirty="0">
+                          <a:solidFill>
+                            <a:srgbClr val="1F2937"/>
+                          </a:solidFill>
+                          <a:latin typeface="Arial"/>
+                        </a:rPr>
+                        <a:t> session</a:t>
                       </a:r>
                     </a:p>
                   </a:txBody>
@@ -29610,14 +32598,29 @@
                         </a:defRPr>
                       </a:pPr>
                       <a:r>
-                        <a:rPr sz="1200" b="0">
+                        <a:rPr sz="1200" b="0" dirty="0">
                           <a:solidFill>
                             <a:srgbClr val="1F2937"/>
                           </a:solidFill>
                           <a:latin typeface="Arial"/>
                         </a:rPr>
-                        <a:t>Atomic UPDATE total_queries</a:t>
+                        <a:t>Atomic UPDATE </a:t>
                       </a:r>
+                      <a:r>
+                        <a:rPr sz="1200" b="0" dirty="0" err="1">
+                          <a:solidFill>
+                            <a:srgbClr val="1F2937"/>
+                          </a:solidFill>
+                          <a:latin typeface="Arial"/>
+                        </a:rPr>
+                        <a:t>total_queries</a:t>
+                      </a:r>
+                      <a:endParaRPr sz="1200" b="0" dirty="0">
+                        <a:solidFill>
+                          <a:srgbClr val="1F2937"/>
+                        </a:solidFill>
+                        <a:latin typeface="Arial"/>
+                      </a:endParaRPr>
                     </a:p>
                   </a:txBody>
                   <a:tcPr marL="73152" marR="73152" marT="27432" marB="27432" anchor="ctr">
@@ -29640,14 +32643,128 @@
                         </a:defRPr>
                       </a:pPr>
                       <a:r>
-                        <a:rPr sz="1200" b="0">
+                        <a:rPr sz="1200" b="0" dirty="0" err="1">
                           <a:solidFill>
                             <a:srgbClr val="1F2937"/>
                           </a:solidFill>
                           <a:latin typeface="Arial"/>
                         </a:rPr>
-                        <a:t>Tránh race condition khi nhiều người dò cùng lúc</a:t>
+                        <a:t>Tránh</a:t>
                       </a:r>
+                      <a:r>
+                        <a:rPr sz="1200" b="0" dirty="0">
+                          <a:solidFill>
+                            <a:srgbClr val="1F2937"/>
+                          </a:solidFill>
+                          <a:latin typeface="Arial"/>
+                        </a:rPr>
+                        <a:t> race condition </a:t>
+                      </a:r>
+                      <a:r>
+                        <a:rPr sz="1200" b="0" dirty="0" err="1">
+                          <a:solidFill>
+                            <a:srgbClr val="1F2937"/>
+                          </a:solidFill>
+                          <a:latin typeface="Arial"/>
+                        </a:rPr>
+                        <a:t>khi</a:t>
+                      </a:r>
+                      <a:r>
+                        <a:rPr sz="1200" b="0" dirty="0">
+                          <a:solidFill>
+                            <a:srgbClr val="1F2937"/>
+                          </a:solidFill>
+                          <a:latin typeface="Arial"/>
+                        </a:rPr>
+                        <a:t> </a:t>
+                      </a:r>
+                      <a:r>
+                        <a:rPr sz="1200" b="0" dirty="0" err="1">
+                          <a:solidFill>
+                            <a:srgbClr val="1F2937"/>
+                          </a:solidFill>
+                          <a:latin typeface="Arial"/>
+                        </a:rPr>
+                        <a:t>nhiều</a:t>
+                      </a:r>
+                      <a:r>
+                        <a:rPr sz="1200" b="0" dirty="0">
+                          <a:solidFill>
+                            <a:srgbClr val="1F2937"/>
+                          </a:solidFill>
+                          <a:latin typeface="Arial"/>
+                        </a:rPr>
+                        <a:t> </a:t>
+                      </a:r>
+                      <a:r>
+                        <a:rPr sz="1200" b="0" dirty="0" err="1">
+                          <a:solidFill>
+                            <a:srgbClr val="1F2937"/>
+                          </a:solidFill>
+                          <a:latin typeface="Arial"/>
+                        </a:rPr>
+                        <a:t>người</a:t>
+                      </a:r>
+                      <a:r>
+                        <a:rPr sz="1200" b="0" dirty="0">
+                          <a:solidFill>
+                            <a:srgbClr val="1F2937"/>
+                          </a:solidFill>
+                          <a:latin typeface="Arial"/>
+                        </a:rPr>
+                        <a:t> </a:t>
+                      </a:r>
+                      <a:r>
+                        <a:rPr sz="1200" b="0" dirty="0" err="1">
+                          <a:solidFill>
+                            <a:srgbClr val="1F2937"/>
+                          </a:solidFill>
+                          <a:latin typeface="Arial"/>
+                        </a:rPr>
+                        <a:t>dò</a:t>
+                      </a:r>
+                      <a:r>
+                        <a:rPr sz="1200" b="0" dirty="0">
+                          <a:solidFill>
+                            <a:srgbClr val="1F2937"/>
+                          </a:solidFill>
+                          <a:latin typeface="Arial"/>
+                        </a:rPr>
+                        <a:t> </a:t>
+                      </a:r>
+                      <a:r>
+                        <a:rPr sz="1200" b="0" dirty="0" err="1">
+                          <a:solidFill>
+                            <a:srgbClr val="1F2937"/>
+                          </a:solidFill>
+                          <a:latin typeface="Arial"/>
+                        </a:rPr>
+                        <a:t>cùng</a:t>
+                      </a:r>
+                      <a:r>
+                        <a:rPr sz="1200" b="0" dirty="0">
+                          <a:solidFill>
+                            <a:srgbClr val="1F2937"/>
+                          </a:solidFill>
+                          <a:latin typeface="Arial"/>
+                        </a:rPr>
+                        <a:t> </a:t>
+                      </a:r>
+                      <a:r>
+                        <a:rPr sz="1200" b="0" dirty="0" err="1">
+                          <a:solidFill>
+                            <a:srgbClr val="1F2937"/>
+                          </a:solidFill>
+                          <a:latin typeface="Arial"/>
+                        </a:rPr>
+                        <a:t>lúc</a:t>
+                      </a:r>
+                      <a:endParaRPr sz="1200" b="0" dirty="0">
+                        <a:solidFill>
+                          <a:srgbClr val="1F2937"/>
+                        </a:solidFill>
+                        <a:latin typeface="Arial"/>
+                      </a:endParaRPr>
                     </a:p>
                   </a:txBody>
                   <a:tcPr marL="73152" marR="73152" marT="27432" marB="27432" anchor="ctr">

--- a/Task 9/Presentation/DoVeSo_BaoCao_Lab3.pptx
+++ b/Task 9/Presentation/DoVeSo_BaoCao_Lab3.pptx
@@ -327,7 +327,7 @@
           <a:p>
             <a:fld id="{5BCAD085-E8A6-8845-BD4E-CB4CCA059FC4}" type="datetimeFigureOut">
               <a:rPr lang="en-US" smtClean="0"/>
-              <a:t>8/1/2026</a:t>
+              <a:t>8/3/2026</a:t>
             </a:fld>
             <a:endParaRPr lang="en-US"/>
           </a:p>
@@ -495,7 +495,7 @@
           <a:p>
             <a:fld id="{5BCAD085-E8A6-8845-BD4E-CB4CCA059FC4}" type="datetimeFigureOut">
               <a:rPr lang="en-US" smtClean="0"/>
-              <a:t>8/1/2026</a:t>
+              <a:t>8/3/2026</a:t>
             </a:fld>
             <a:endParaRPr lang="en-US"/>
           </a:p>
@@ -673,7 +673,7 @@
           <a:p>
             <a:fld id="{5BCAD085-E8A6-8845-BD4E-CB4CCA059FC4}" type="datetimeFigureOut">
               <a:rPr lang="en-US" smtClean="0"/>
-              <a:t>8/1/2026</a:t>
+              <a:t>8/3/2026</a:t>
             </a:fld>
             <a:endParaRPr lang="en-US"/>
           </a:p>
@@ -841,7 +841,7 @@
           <a:p>
             <a:fld id="{5BCAD085-E8A6-8845-BD4E-CB4CCA059FC4}" type="datetimeFigureOut">
               <a:rPr lang="en-US" smtClean="0"/>
-              <a:t>8/1/2026</a:t>
+              <a:t>8/3/2026</a:t>
             </a:fld>
             <a:endParaRPr lang="en-US"/>
           </a:p>
@@ -1086,7 +1086,7 @@
           <a:p>
             <a:fld id="{5BCAD085-E8A6-8845-BD4E-CB4CCA059FC4}" type="datetimeFigureOut">
               <a:rPr lang="en-US" smtClean="0"/>
-              <a:t>8/1/2026</a:t>
+              <a:t>8/3/2026</a:t>
             </a:fld>
             <a:endParaRPr lang="en-US"/>
           </a:p>
@@ -1371,7 +1371,7 @@
           <a:p>
             <a:fld id="{5BCAD085-E8A6-8845-BD4E-CB4CCA059FC4}" type="datetimeFigureOut">
               <a:rPr lang="en-US" smtClean="0"/>
-              <a:t>8/1/2026</a:t>
+              <a:t>8/3/2026</a:t>
             </a:fld>
             <a:endParaRPr lang="en-US"/>
           </a:p>
@@ -1790,7 +1790,7 @@
           <a:p>
             <a:fld id="{5BCAD085-E8A6-8845-BD4E-CB4CCA059FC4}" type="datetimeFigureOut">
               <a:rPr lang="en-US" smtClean="0"/>
-              <a:t>8/1/2026</a:t>
+              <a:t>8/3/2026</a:t>
             </a:fld>
             <a:endParaRPr lang="en-US"/>
           </a:p>
@@ -1907,7 +1907,7 @@
           <a:p>
             <a:fld id="{5BCAD085-E8A6-8845-BD4E-CB4CCA059FC4}" type="datetimeFigureOut">
               <a:rPr lang="en-US" smtClean="0"/>
-              <a:t>8/1/2026</a:t>
+              <a:t>8/3/2026</a:t>
             </a:fld>
             <a:endParaRPr lang="en-US"/>
           </a:p>
@@ -2002,7 +2002,7 @@
           <a:p>
             <a:fld id="{5BCAD085-E8A6-8845-BD4E-CB4CCA059FC4}" type="datetimeFigureOut">
               <a:rPr lang="en-US" smtClean="0"/>
-              <a:t>8/1/2026</a:t>
+              <a:t>8/3/2026</a:t>
             </a:fld>
             <a:endParaRPr lang="en-US"/>
           </a:p>
@@ -2277,7 +2277,7 @@
           <a:p>
             <a:fld id="{5BCAD085-E8A6-8845-BD4E-CB4CCA059FC4}" type="datetimeFigureOut">
               <a:rPr lang="en-US" smtClean="0"/>
-              <a:t>8/1/2026</a:t>
+              <a:t>8/3/2026</a:t>
             </a:fld>
             <a:endParaRPr lang="en-US"/>
           </a:p>
@@ -2529,7 +2529,7 @@
           <a:p>
             <a:fld id="{5BCAD085-E8A6-8845-BD4E-CB4CCA059FC4}" type="datetimeFigureOut">
               <a:rPr lang="en-US" smtClean="0"/>
-              <a:t>8/1/2026</a:t>
+              <a:t>8/3/2026</a:t>
             </a:fld>
             <a:endParaRPr lang="en-US"/>
           </a:p>
@@ -2740,7 +2740,7 @@
           <a:p>
             <a:fld id="{5BCAD085-E8A6-8845-BD4E-CB4CCA059FC4}" type="datetimeFigureOut">
               <a:rPr lang="en-US" smtClean="0"/>
-              <a:t>8/1/2026</a:t>
+              <a:t>8/3/2026</a:t>
             </a:fld>
             <a:endParaRPr lang="en-US"/>
           </a:p>
@@ -3967,7 +3967,7 @@
         <p:spPr>
           <a:xfrm>
             <a:off x="777240" y="5760720"/>
-            <a:ext cx="10634472" cy="548640"/>
+            <a:ext cx="10634472" cy="361766"/>
           </a:xfrm>
           <a:prstGeom prst="rect">
             <a:avLst/>
@@ -3995,13 +3995,265 @@
               </a:defRPr>
             </a:pPr>
             <a:r>
-              <a:rPr sz="1050" b="0">
-                <a:solidFill>
-                  <a:srgbClr val="1F2937"/>
-                </a:solidFill>
-                <a:latin typeface="Arial"/>
-              </a:rPr>
-              <a:t>•  Kết quả mới mặc định UNPUBLISH — chỉ admin thấy; khi publish lưu published_by + published_at để truy vết.</a:t>
+              <a:rPr sz="1050" b="0" dirty="0">
+                <a:solidFill>
+                  <a:srgbClr val="1F2937"/>
+                </a:solidFill>
+                <a:latin typeface="Arial"/>
+              </a:rPr>
+              <a:t>•  </a:t>
+            </a:r>
+            <a:r>
+              <a:rPr sz="1050" b="0" dirty="0" err="1">
+                <a:solidFill>
+                  <a:srgbClr val="1F2937"/>
+                </a:solidFill>
+                <a:latin typeface="Arial"/>
+              </a:rPr>
+              <a:t>Kết</a:t>
+            </a:r>
+            <a:r>
+              <a:rPr sz="1050" b="0" dirty="0">
+                <a:solidFill>
+                  <a:srgbClr val="1F2937"/>
+                </a:solidFill>
+                <a:latin typeface="Arial"/>
+              </a:rPr>
+              <a:t> </a:t>
+            </a:r>
+            <a:r>
+              <a:rPr sz="1050" b="0" dirty="0" err="1">
+                <a:solidFill>
+                  <a:srgbClr val="1F2937"/>
+                </a:solidFill>
+                <a:latin typeface="Arial"/>
+              </a:rPr>
+              <a:t>quả</a:t>
+            </a:r>
+            <a:r>
+              <a:rPr sz="1050" b="0" dirty="0">
+                <a:solidFill>
+                  <a:srgbClr val="1F2937"/>
+                </a:solidFill>
+                <a:latin typeface="Arial"/>
+              </a:rPr>
+              <a:t> </a:t>
+            </a:r>
+            <a:r>
+              <a:rPr sz="1050" b="0" dirty="0" err="1">
+                <a:solidFill>
+                  <a:srgbClr val="1F2937"/>
+                </a:solidFill>
+                <a:latin typeface="Arial"/>
+              </a:rPr>
+              <a:t>mới</a:t>
+            </a:r>
+            <a:r>
+              <a:rPr sz="1050" b="0" dirty="0">
+                <a:solidFill>
+                  <a:srgbClr val="1F2937"/>
+                </a:solidFill>
+                <a:latin typeface="Arial"/>
+              </a:rPr>
+              <a:t> </a:t>
+            </a:r>
+            <a:r>
+              <a:rPr sz="1050" b="0" dirty="0" err="1">
+                <a:solidFill>
+                  <a:srgbClr val="1F2937"/>
+                </a:solidFill>
+                <a:latin typeface="Arial"/>
+              </a:rPr>
+              <a:t>mặc</a:t>
+            </a:r>
+            <a:r>
+              <a:rPr sz="1050" b="0" dirty="0">
+                <a:solidFill>
+                  <a:srgbClr val="1F2937"/>
+                </a:solidFill>
+                <a:latin typeface="Arial"/>
+              </a:rPr>
+              <a:t> </a:t>
+            </a:r>
+            <a:r>
+              <a:rPr sz="1050" b="0" dirty="0" err="1">
+                <a:solidFill>
+                  <a:srgbClr val="1F2937"/>
+                </a:solidFill>
+                <a:latin typeface="Arial"/>
+              </a:rPr>
+              <a:t>định</a:t>
+            </a:r>
+            <a:r>
+              <a:rPr sz="1050" b="0" dirty="0">
+                <a:solidFill>
+                  <a:srgbClr val="1F2937"/>
+                </a:solidFill>
+                <a:latin typeface="Arial"/>
+              </a:rPr>
+              <a:t> UNPUBLISH — </a:t>
+            </a:r>
+            <a:r>
+              <a:rPr sz="1050" b="0" dirty="0" err="1">
+                <a:solidFill>
+                  <a:srgbClr val="1F2937"/>
+                </a:solidFill>
+                <a:latin typeface="Arial"/>
+              </a:rPr>
+              <a:t>chỉ</a:t>
+            </a:r>
+            <a:r>
+              <a:rPr sz="1050" b="0" dirty="0">
+                <a:solidFill>
+                  <a:srgbClr val="1F2937"/>
+                </a:solidFill>
+                <a:latin typeface="Arial"/>
+              </a:rPr>
+              <a:t> admin </a:t>
+            </a:r>
+            <a:r>
+              <a:rPr sz="1050" b="0" dirty="0" err="1">
+                <a:solidFill>
+                  <a:srgbClr val="1F2937"/>
+                </a:solidFill>
+                <a:latin typeface="Arial"/>
+              </a:rPr>
+              <a:t>thấy</a:t>
+            </a:r>
+            <a:r>
+              <a:rPr sz="1050" b="0" dirty="0">
+                <a:solidFill>
+                  <a:srgbClr val="1F2937"/>
+                </a:solidFill>
+                <a:latin typeface="Arial"/>
+              </a:rPr>
+              <a:t>; </a:t>
+            </a:r>
+            <a:r>
+              <a:rPr sz="1050" b="0" dirty="0" err="1">
+                <a:solidFill>
+                  <a:srgbClr val="1F2937"/>
+                </a:solidFill>
+                <a:latin typeface="Arial"/>
+              </a:rPr>
+              <a:t>khi</a:t>
+            </a:r>
+            <a:r>
+              <a:rPr sz="1050" b="0" dirty="0">
+                <a:solidFill>
+                  <a:srgbClr val="1F2937"/>
+                </a:solidFill>
+                <a:latin typeface="Arial"/>
+              </a:rPr>
+              <a:t> publish </a:t>
+            </a:r>
+            <a:r>
+              <a:rPr sz="1050" b="0" dirty="0" err="1">
+                <a:solidFill>
+                  <a:srgbClr val="1F2937"/>
+                </a:solidFill>
+                <a:latin typeface="Arial"/>
+              </a:rPr>
+              <a:t>lưu</a:t>
+            </a:r>
+            <a:r>
+              <a:rPr sz="1050" b="0" dirty="0">
+                <a:solidFill>
+                  <a:srgbClr val="1F2937"/>
+                </a:solidFill>
+                <a:latin typeface="Arial"/>
+              </a:rPr>
+              <a:t> </a:t>
+            </a:r>
+            <a:r>
+              <a:rPr sz="1050" b="0" dirty="0" err="1">
+                <a:solidFill>
+                  <a:srgbClr val="1F2937"/>
+                </a:solidFill>
+                <a:latin typeface="Arial"/>
+              </a:rPr>
+              <a:t>published_by</a:t>
+            </a:r>
+            <a:r>
+              <a:rPr sz="1050" b="0" dirty="0">
+                <a:solidFill>
+                  <a:srgbClr val="1F2937"/>
+                </a:solidFill>
+                <a:latin typeface="Arial"/>
+              </a:rPr>
+              <a:t> + </a:t>
+            </a:r>
+            <a:r>
+              <a:rPr sz="1050" b="0" dirty="0" err="1">
+                <a:solidFill>
+                  <a:srgbClr val="1F2937"/>
+                </a:solidFill>
+                <a:latin typeface="Arial"/>
+              </a:rPr>
+              <a:t>published_at</a:t>
+            </a:r>
+            <a:r>
+              <a:rPr sz="1050" b="0" dirty="0">
+                <a:solidFill>
+                  <a:srgbClr val="1F2937"/>
+                </a:solidFill>
+                <a:latin typeface="Arial"/>
+              </a:rPr>
+              <a:t> </a:t>
+            </a:r>
+            <a:r>
+              <a:rPr sz="1050" b="0" dirty="0" err="1">
+                <a:solidFill>
+                  <a:srgbClr val="1F2937"/>
+                </a:solidFill>
+                <a:latin typeface="Arial"/>
+              </a:rPr>
+              <a:t>để</a:t>
+            </a:r>
+            <a:r>
+              <a:rPr sz="1050" b="0" dirty="0">
+                <a:solidFill>
+                  <a:srgbClr val="1F2937"/>
+                </a:solidFill>
+                <a:latin typeface="Arial"/>
+              </a:rPr>
+              <a:t> </a:t>
+            </a:r>
+            <a:r>
+              <a:rPr sz="1050" b="0" dirty="0" err="1">
+                <a:solidFill>
+                  <a:srgbClr val="1F2937"/>
+                </a:solidFill>
+                <a:latin typeface="Arial"/>
+              </a:rPr>
+              <a:t>truy</a:t>
+            </a:r>
+            <a:r>
+              <a:rPr sz="1050" b="0" dirty="0">
+                <a:solidFill>
+                  <a:srgbClr val="1F2937"/>
+                </a:solidFill>
+                <a:latin typeface="Arial"/>
+              </a:rPr>
+              <a:t> </a:t>
+            </a:r>
+            <a:r>
+              <a:rPr sz="1050" b="0" dirty="0" err="1">
+                <a:solidFill>
+                  <a:srgbClr val="1F2937"/>
+                </a:solidFill>
+                <a:latin typeface="Arial"/>
+              </a:rPr>
+              <a:t>vết</a:t>
+            </a:r>
+            <a:r>
+              <a:rPr sz="1050" b="0" dirty="0">
+                <a:solidFill>
+                  <a:srgbClr val="1F2937"/>
+                </a:solidFill>
+                <a:latin typeface="Arial"/>
+              </a:rPr>
+              <a:t>.</a:t>
             </a:r>
           </a:p>
           <a:p>
@@ -4020,13 +4272,157 @@
               </a:defRPr>
             </a:pPr>
             <a:r>
-              <a:rPr sz="1050" b="0">
-                <a:solidFill>
-                  <a:srgbClr val="1F2937"/>
-                </a:solidFill>
-                <a:latin typeface="Arial"/>
-              </a:rPr>
-              <a:t>•  Chống trùng: UNIQUE(station_id, draw_date) và UNIQUE(result_id, prize_type, winning_number).</a:t>
+              <a:rPr sz="1050" b="0" dirty="0">
+                <a:solidFill>
+                  <a:srgbClr val="1F2937"/>
+                </a:solidFill>
+                <a:latin typeface="Arial"/>
+              </a:rPr>
+              <a:t>•  </a:t>
+            </a:r>
+            <a:r>
+              <a:rPr sz="1050" b="0" dirty="0" err="1">
+                <a:solidFill>
+                  <a:srgbClr val="1F2937"/>
+                </a:solidFill>
+                <a:latin typeface="Arial"/>
+              </a:rPr>
+              <a:t>Chống</a:t>
+            </a:r>
+            <a:r>
+              <a:rPr sz="1050" b="0" dirty="0">
+                <a:solidFill>
+                  <a:srgbClr val="1F2937"/>
+                </a:solidFill>
+                <a:latin typeface="Arial"/>
+              </a:rPr>
+              <a:t> </a:t>
+            </a:r>
+            <a:r>
+              <a:rPr sz="1050" b="0" dirty="0" err="1">
+                <a:solidFill>
+                  <a:srgbClr val="1F2937"/>
+                </a:solidFill>
+                <a:latin typeface="Arial"/>
+              </a:rPr>
+              <a:t>trùng</a:t>
+            </a:r>
+            <a:r>
+              <a:rPr sz="1050" b="0" dirty="0">
+                <a:solidFill>
+                  <a:srgbClr val="1F2937"/>
+                </a:solidFill>
+                <a:latin typeface="Arial"/>
+              </a:rPr>
+              <a:t>: UNIQUE(</a:t>
+            </a:r>
+            <a:r>
+              <a:rPr sz="1050" b="0" dirty="0" err="1">
+                <a:solidFill>
+                  <a:srgbClr val="1F2937"/>
+                </a:solidFill>
+                <a:latin typeface="Arial"/>
+              </a:rPr>
+              <a:t>station_id</a:t>
+            </a:r>
+            <a:r>
+              <a:rPr sz="1050" b="0" dirty="0">
+                <a:solidFill>
+                  <a:srgbClr val="1F2937"/>
+                </a:solidFill>
+                <a:latin typeface="Arial"/>
+              </a:rPr>
+              <a:t>, </a:t>
+            </a:r>
+            <a:r>
+              <a:rPr sz="1050" b="0" dirty="0" err="1">
+                <a:solidFill>
+                  <a:srgbClr val="1F2937"/>
+                </a:solidFill>
+                <a:latin typeface="Arial"/>
+              </a:rPr>
+              <a:t>draw_date</a:t>
+            </a:r>
+            <a:r>
+              <a:rPr sz="1050" b="0" dirty="0">
+                <a:solidFill>
+                  <a:srgbClr val="1F2937"/>
+                </a:solidFill>
+                <a:latin typeface="Arial"/>
+              </a:rPr>
+              <a:t>) </a:t>
+            </a:r>
+            <a:r>
+              <a:rPr sz="1050" b="0" dirty="0" err="1">
+                <a:solidFill>
+                  <a:srgbClr val="1F2937"/>
+                </a:solidFill>
+                <a:latin typeface="Arial"/>
+              </a:rPr>
+              <a:t>và</a:t>
+            </a:r>
+            <a:r>
+              <a:rPr sz="1050" b="0" dirty="0">
+                <a:solidFill>
+                  <a:srgbClr val="1F2937"/>
+                </a:solidFill>
+                <a:latin typeface="Arial"/>
+              </a:rPr>
+              <a:t> UNIQUE(</a:t>
+            </a:r>
+            <a:r>
+              <a:rPr sz="1050" b="0" dirty="0" err="1">
+                <a:solidFill>
+                  <a:srgbClr val="1F2937"/>
+                </a:solidFill>
+                <a:latin typeface="Arial"/>
+              </a:rPr>
+              <a:t>result_id</a:t>
+            </a:r>
+            <a:r>
+              <a:rPr sz="1050" b="0" dirty="0">
+                <a:solidFill>
+                  <a:srgbClr val="1F2937"/>
+                </a:solidFill>
+                <a:latin typeface="Arial"/>
+              </a:rPr>
+              <a:t>, </a:t>
+            </a:r>
+            <a:r>
+              <a:rPr sz="1050" b="0" dirty="0" err="1">
+                <a:solidFill>
+                  <a:srgbClr val="1F2937"/>
+                </a:solidFill>
+                <a:latin typeface="Arial"/>
+              </a:rPr>
+              <a:t>prize_type</a:t>
+            </a:r>
+            <a:r>
+              <a:rPr sz="1050" b="0" dirty="0">
+                <a:solidFill>
+                  <a:srgbClr val="1F2937"/>
+                </a:solidFill>
+                <a:latin typeface="Arial"/>
+              </a:rPr>
+              <a:t>, </a:t>
+            </a:r>
+            <a:r>
+              <a:rPr sz="1050" b="0" dirty="0" err="1">
+                <a:solidFill>
+                  <a:srgbClr val="1F2937"/>
+                </a:solidFill>
+                <a:latin typeface="Arial"/>
+              </a:rPr>
+              <a:t>winning_number</a:t>
+            </a:r>
+            <a:r>
+              <a:rPr sz="1050" b="0" dirty="0">
+                <a:solidFill>
+                  <a:srgbClr val="1F2937"/>
+                </a:solidFill>
+                <a:latin typeface="Arial"/>
+              </a:rPr>
+              <a:t>).</a:t>
             </a:r>
           </a:p>
         </p:txBody>
@@ -4464,79 +4860,6 @@
           </a:prstGeom>
         </p:spPr>
       </p:pic>
-      <p:sp>
-        <p:nvSpPr>
-          <p:cNvPr id="11" name="TextBox 10"/>
-          <p:cNvSpPr txBox="1"/>
-          <p:nvPr/>
-        </p:nvSpPr>
-        <p:spPr>
-          <a:xfrm>
-            <a:off x="777240" y="5760720"/>
-            <a:ext cx="10634472" cy="548640"/>
-          </a:xfrm>
-          <a:prstGeom prst="rect">
-            <a:avLst/>
-          </a:prstGeom>
-          <a:noFill/>
-        </p:spPr>
-        <p:txBody>
-          <a:bodyPr wrap="square" lIns="0" tIns="0" rIns="0" bIns="0" anchor="t">
-            <a:spAutoFit/>
-          </a:bodyPr>
-          <a:lstStyle/>
-          <a:p>
-            <a:pPr algn="l">
-              <a:lnSpc>
-                <a:spcPct val="108000"/>
-              </a:lnSpc>
-              <a:spcAft>
-                <a:spcPts val="200"/>
-              </a:spcAft>
-              <a:defRPr sz="1050" b="0">
-                <a:solidFill>
-                  <a:srgbClr val="1F2937"/>
-                </a:solidFill>
-                <a:latin typeface="Arial"/>
-              </a:defRPr>
-            </a:pPr>
-            <a:r>
-              <a:rPr sz="1050" b="0">
-                <a:solidFill>
-                  <a:srgbClr val="1F2937"/>
-                </a:solidFill>
-                <a:latin typeface="Arial"/>
-              </a:rPr>
-              <a:t>•  Guest 1 vé · User tối đa 50 vé — một session = một kết quả (1 đài + 1 ngày).</a:t>
-            </a:r>
-          </a:p>
-          <a:p>
-            <a:pPr algn="l">
-              <a:lnSpc>
-                <a:spcPct val="108000"/>
-              </a:lnSpc>
-              <a:spcAft>
-                <a:spcPts val="200"/>
-              </a:spcAft>
-              <a:defRPr sz="1050" b="0">
-                <a:solidFill>
-                  <a:srgbClr val="1F2937"/>
-                </a:solidFill>
-                <a:latin typeface="Arial"/>
-              </a:defRPr>
-            </a:pPr>
-            <a:r>
-              <a:rPr sz="1050" b="0">
-                <a:solidFill>
-                  <a:srgbClr val="1F2937"/>
-                </a:solidFill>
-                <a:latin typeface="Arial"/>
-              </a:rPr>
-              <a:t>•  Trùng vé đã dò → 400 · total_queries tăng 1 lần mỗi phiên bằng atomic UPDATE.</a:t>
-            </a:r>
-          </a:p>
-        </p:txBody>
-      </p:sp>
     </p:spTree>
   </p:cSld>
   <p:clrMapOvr>
@@ -8956,31 +9279,13 @@
               </a:defRPr>
             </a:pPr>
             <a:r>
-              <a:rPr sz="1200" b="0" dirty="0">
-                <a:solidFill>
-                  <a:srgbClr val="1F2937"/>
-                </a:solidFill>
-                <a:latin typeface="Arial"/>
-              </a:rPr>
-              <a:t>•  </a:t>
-            </a:r>
-            <a:r>
-              <a:rPr sz="1200" b="0" dirty="0" err="1">
-                <a:solidFill>
-                  <a:srgbClr val="1F2937"/>
-                </a:solidFill>
-                <a:latin typeface="Arial"/>
-              </a:rPr>
-              <a:t>BCrypt</a:t>
-            </a:r>
-            <a:r>
-              <a:rPr sz="1200" b="0" dirty="0">
-                <a:solidFill>
-                  <a:srgbClr val="1F2937"/>
-                </a:solidFill>
-                <a:latin typeface="Arial"/>
-              </a:rPr>
-              <a:t> password hashing.</a:t>
+              <a:rPr sz="1200" b="0">
+                <a:solidFill>
+                  <a:srgbClr val="1F2937"/>
+                </a:solidFill>
+                <a:latin typeface="Arial"/>
+              </a:rPr>
+              <a:t>•  BCrypt password hashing.</a:t>
             </a:r>
           </a:p>
           <a:p>
@@ -8999,49 +9304,13 @@
               </a:defRPr>
             </a:pPr>
             <a:r>
-              <a:rPr sz="1200" b="0" dirty="0">
-                <a:solidFill>
-                  <a:srgbClr val="1F2937"/>
-                </a:solidFill>
-                <a:latin typeface="Arial"/>
-              </a:rPr>
-              <a:t>•  JWT stateless, </a:t>
-            </a:r>
-            <a:r>
-              <a:rPr sz="1200" b="0" dirty="0" err="1">
-                <a:solidFill>
-                  <a:srgbClr val="1F2937"/>
-                </a:solidFill>
-                <a:latin typeface="Arial"/>
-              </a:rPr>
-              <a:t>hạn</a:t>
-            </a:r>
-            <a:r>
-              <a:rPr sz="1200" b="0" dirty="0">
-                <a:solidFill>
-                  <a:srgbClr val="1F2937"/>
-                </a:solidFill>
-                <a:latin typeface="Arial"/>
-              </a:rPr>
-              <a:t> 24 </a:t>
-            </a:r>
-            <a:r>
-              <a:rPr sz="1200" b="0" dirty="0" err="1">
-                <a:solidFill>
-                  <a:srgbClr val="1F2937"/>
-                </a:solidFill>
-                <a:latin typeface="Arial"/>
-              </a:rPr>
-              <a:t>giờ</a:t>
-            </a:r>
-            <a:r>
-              <a:rPr sz="1200" b="0" dirty="0">
-                <a:solidFill>
-                  <a:srgbClr val="1F2937"/>
-                </a:solidFill>
-                <a:latin typeface="Arial"/>
-              </a:rPr>
-              <a:t>.</a:t>
+              <a:rPr sz="1200" b="0">
+                <a:solidFill>
+                  <a:srgbClr val="1F2937"/>
+                </a:solidFill>
+                <a:latin typeface="Arial"/>
+              </a:rPr>
+              <a:t>•  JWT stateless, hạn 24 giờ.</a:t>
             </a:r>
           </a:p>
           <a:p>
@@ -9060,103 +9329,13 @@
               </a:defRPr>
             </a:pPr>
             <a:r>
-              <a:rPr sz="1200" b="0" dirty="0">
-                <a:solidFill>
-                  <a:srgbClr val="1F2937"/>
-                </a:solidFill>
-                <a:latin typeface="Arial"/>
-              </a:rPr>
-              <a:t>•  </a:t>
-            </a:r>
-            <a:r>
-              <a:rPr sz="1200" b="0" dirty="0" err="1">
-                <a:solidFill>
-                  <a:srgbClr val="1F2937"/>
-                </a:solidFill>
-                <a:latin typeface="Arial"/>
-              </a:rPr>
-              <a:t>Đọc</a:t>
-            </a:r>
-            <a:r>
-              <a:rPr sz="1200" b="0" dirty="0">
-                <a:solidFill>
-                  <a:srgbClr val="1F2937"/>
-                </a:solidFill>
-                <a:latin typeface="Arial"/>
-              </a:rPr>
-              <a:t> role </a:t>
-            </a:r>
-            <a:r>
-              <a:rPr sz="1200" b="0" dirty="0" err="1">
-                <a:solidFill>
-                  <a:srgbClr val="1F2937"/>
-                </a:solidFill>
-                <a:latin typeface="Arial"/>
-              </a:rPr>
-              <a:t>và</a:t>
-            </a:r>
-            <a:r>
-              <a:rPr sz="1200" b="0" dirty="0">
-                <a:solidFill>
-                  <a:srgbClr val="1F2937"/>
-                </a:solidFill>
-                <a:latin typeface="Arial"/>
-              </a:rPr>
-              <a:t> </a:t>
-            </a:r>
-            <a:r>
-              <a:rPr sz="1200" b="0" dirty="0" err="1">
-                <a:solidFill>
-                  <a:srgbClr val="1F2937"/>
-                </a:solidFill>
-                <a:latin typeface="Arial"/>
-              </a:rPr>
-              <a:t>isActive</a:t>
-            </a:r>
-            <a:r>
-              <a:rPr sz="1200" b="0" dirty="0">
-                <a:solidFill>
-                  <a:srgbClr val="1F2937"/>
-                </a:solidFill>
-                <a:latin typeface="Arial"/>
-              </a:rPr>
-              <a:t> </a:t>
-            </a:r>
-            <a:r>
-              <a:rPr sz="1200" b="0" dirty="0" err="1">
-                <a:solidFill>
-                  <a:srgbClr val="1F2937"/>
-                </a:solidFill>
-                <a:latin typeface="Arial"/>
-              </a:rPr>
-              <a:t>từ</a:t>
-            </a:r>
-            <a:r>
-              <a:rPr sz="1200" b="0" dirty="0">
-                <a:solidFill>
-                  <a:srgbClr val="1F2937"/>
-                </a:solidFill>
-                <a:latin typeface="Arial"/>
-              </a:rPr>
-              <a:t> DB </a:t>
-            </a:r>
-            <a:r>
-              <a:rPr sz="1200" b="0" dirty="0" err="1">
-                <a:solidFill>
-                  <a:srgbClr val="1F2937"/>
-                </a:solidFill>
-                <a:latin typeface="Arial"/>
-              </a:rPr>
-              <a:t>mỗi</a:t>
-            </a:r>
-            <a:r>
-              <a:rPr sz="1200" b="0" dirty="0">
-                <a:solidFill>
-                  <a:srgbClr val="1F2937"/>
-                </a:solidFill>
-                <a:latin typeface="Arial"/>
-              </a:rPr>
-              <a:t> request.</a:t>
+              <a:rPr sz="1200" b="0">
+                <a:solidFill>
+                  <a:srgbClr val="1F2937"/>
+                </a:solidFill>
+                <a:latin typeface="Arial"/>
+              </a:rPr>
+              <a:t>•  Đọc role và isActive từ DB mỗi request.</a:t>
             </a:r>
           </a:p>
           <a:p>
@@ -9175,49 +9354,13 @@
               </a:defRPr>
             </a:pPr>
             <a:r>
-              <a:rPr sz="1200" b="0" dirty="0">
-                <a:solidFill>
-                  <a:srgbClr val="1F2937"/>
-                </a:solidFill>
-                <a:latin typeface="Arial"/>
-              </a:rPr>
-              <a:t>•  Google JWKS </a:t>
-            </a:r>
-            <a:r>
-              <a:rPr sz="1200" b="0" dirty="0" err="1">
-                <a:solidFill>
-                  <a:srgbClr val="1F2937"/>
-                </a:solidFill>
-                <a:latin typeface="Arial"/>
-              </a:rPr>
-              <a:t>và</a:t>
-            </a:r>
-            <a:r>
-              <a:rPr sz="1200" b="0" dirty="0">
-                <a:solidFill>
-                  <a:srgbClr val="1F2937"/>
-                </a:solidFill>
-                <a:latin typeface="Arial"/>
-              </a:rPr>
-              <a:t> Facebook </a:t>
-            </a:r>
-            <a:r>
-              <a:rPr sz="1200" b="0" dirty="0" err="1">
-                <a:solidFill>
-                  <a:srgbClr val="1F2937"/>
-                </a:solidFill>
-                <a:latin typeface="Arial"/>
-              </a:rPr>
-              <a:t>debug_token</a:t>
-            </a:r>
-            <a:r>
-              <a:rPr sz="1200" b="0" dirty="0">
-                <a:solidFill>
-                  <a:srgbClr val="1F2937"/>
-                </a:solidFill>
-                <a:latin typeface="Arial"/>
-              </a:rPr>
-              <a:t>.</a:t>
+              <a:rPr sz="1200" b="0">
+                <a:solidFill>
+                  <a:srgbClr val="1F2937"/>
+                </a:solidFill>
+                <a:latin typeface="Arial"/>
+              </a:rPr>
+              <a:t>•  Google JWKS và Facebook debug_token.</a:t>
             </a:r>
           </a:p>
         </p:txBody>
@@ -9401,85 +9544,13 @@
               </a:defRPr>
             </a:pPr>
             <a:r>
-              <a:rPr sz="1200" b="0" dirty="0">
-                <a:solidFill>
-                  <a:srgbClr val="1F2937"/>
-                </a:solidFill>
-                <a:latin typeface="Arial"/>
-              </a:rPr>
-              <a:t>•  Batch query </a:t>
-            </a:r>
-            <a:r>
-              <a:rPr sz="1200" b="0" dirty="0" err="1">
-                <a:solidFill>
-                  <a:srgbClr val="1F2937"/>
-                </a:solidFill>
-                <a:latin typeface="Arial"/>
-              </a:rPr>
-              <a:t>kiểm</a:t>
-            </a:r>
-            <a:r>
-              <a:rPr sz="1200" b="0" dirty="0">
-                <a:solidFill>
-                  <a:srgbClr val="1F2937"/>
-                </a:solidFill>
-                <a:latin typeface="Arial"/>
-              </a:rPr>
-              <a:t> </a:t>
-            </a:r>
-            <a:r>
-              <a:rPr sz="1200" b="0" dirty="0" err="1">
-                <a:solidFill>
-                  <a:srgbClr val="1F2937"/>
-                </a:solidFill>
-                <a:latin typeface="Arial"/>
-              </a:rPr>
-              <a:t>tra</a:t>
-            </a:r>
-            <a:r>
-              <a:rPr sz="1200" b="0" dirty="0">
-                <a:solidFill>
-                  <a:srgbClr val="1F2937"/>
-                </a:solidFill>
-                <a:latin typeface="Arial"/>
-              </a:rPr>
-              <a:t> </a:t>
-            </a:r>
-            <a:r>
-              <a:rPr sz="1200" b="0" dirty="0" err="1">
-                <a:solidFill>
-                  <a:srgbClr val="1F2937"/>
-                </a:solidFill>
-                <a:latin typeface="Arial"/>
-              </a:rPr>
-              <a:t>vé</a:t>
-            </a:r>
-            <a:r>
-              <a:rPr sz="1200" b="0" dirty="0">
-                <a:solidFill>
-                  <a:srgbClr val="1F2937"/>
-                </a:solidFill>
-                <a:latin typeface="Arial"/>
-              </a:rPr>
-              <a:t> </a:t>
-            </a:r>
-            <a:r>
-              <a:rPr sz="1200" b="0" dirty="0" err="1">
-                <a:solidFill>
-                  <a:srgbClr val="1F2937"/>
-                </a:solidFill>
-                <a:latin typeface="Arial"/>
-              </a:rPr>
-              <a:t>trùng</a:t>
-            </a:r>
-            <a:r>
-              <a:rPr sz="1200" b="0" dirty="0">
-                <a:solidFill>
-                  <a:srgbClr val="1F2937"/>
-                </a:solidFill>
-                <a:latin typeface="Arial"/>
-              </a:rPr>
-              <a:t>.</a:t>
+              <a:rPr sz="1200" b="0">
+                <a:solidFill>
+                  <a:srgbClr val="1F2937"/>
+                </a:solidFill>
+                <a:latin typeface="Arial"/>
+              </a:rPr>
+              <a:t>•  Batch query kiểm tra vé trùng.</a:t>
             </a:r>
           </a:p>
           <a:p>
@@ -9498,31 +9569,13 @@
               </a:defRPr>
             </a:pPr>
             <a:r>
-              <a:rPr sz="1200" b="0" dirty="0">
-                <a:solidFill>
-                  <a:srgbClr val="1F2937"/>
-                </a:solidFill>
-                <a:latin typeface="Arial"/>
-              </a:rPr>
-              <a:t>•  Atomic update </a:t>
-            </a:r>
-            <a:r>
-              <a:rPr sz="1200" b="0" dirty="0" err="1">
-                <a:solidFill>
-                  <a:srgbClr val="1F2937"/>
-                </a:solidFill>
-                <a:latin typeface="Arial"/>
-              </a:rPr>
-              <a:t>total_queries</a:t>
-            </a:r>
-            <a:r>
-              <a:rPr sz="1200" b="0" dirty="0">
-                <a:solidFill>
-                  <a:srgbClr val="1F2937"/>
-                </a:solidFill>
-                <a:latin typeface="Arial"/>
-              </a:rPr>
-              <a:t>.</a:t>
+              <a:rPr sz="1200" b="0">
+                <a:solidFill>
+                  <a:srgbClr val="1F2937"/>
+                </a:solidFill>
+                <a:latin typeface="Arial"/>
+              </a:rPr>
+              <a:t>•  Atomic update total_queries.</a:t>
             </a:r>
           </a:p>
           <a:p>
@@ -9541,7 +9594,7 @@
               </a:defRPr>
             </a:pPr>
             <a:r>
-              <a:rPr sz="1200" b="0" dirty="0">
+              <a:rPr sz="1200" b="0">
                 <a:solidFill>
                   <a:srgbClr val="1F2937"/>
                 </a:solidFill>
@@ -9566,31 +9619,13 @@
               </a:defRPr>
             </a:pPr>
             <a:r>
-              <a:rPr sz="1200" b="0" dirty="0">
-                <a:solidFill>
-                  <a:srgbClr val="1F2937"/>
-                </a:solidFill>
-                <a:latin typeface="Arial"/>
-              </a:rPr>
-              <a:t>•  Pagination ở </a:t>
-            </a:r>
-            <a:r>
-              <a:rPr sz="1200" b="0" dirty="0" err="1">
-                <a:solidFill>
-                  <a:srgbClr val="1F2937"/>
-                </a:solidFill>
-                <a:latin typeface="Arial"/>
-              </a:rPr>
-              <a:t>tầng</a:t>
-            </a:r>
-            <a:r>
-              <a:rPr sz="1200" b="0" dirty="0">
-                <a:solidFill>
-                  <a:srgbClr val="1F2937"/>
-                </a:solidFill>
-                <a:latin typeface="Arial"/>
-              </a:rPr>
-              <a:t> database.</a:t>
+              <a:rPr sz="1200" b="0">
+                <a:solidFill>
+                  <a:srgbClr val="1F2937"/>
+                </a:solidFill>
+                <a:latin typeface="Arial"/>
+              </a:rPr>
+              <a:t>•  Pagination ở tầng database.</a:t>
             </a:r>
           </a:p>
         </p:txBody>
@@ -9774,7 +9809,7 @@
               </a:defRPr>
             </a:pPr>
             <a:r>
-              <a:rPr sz="1200" b="0" dirty="0">
+              <a:rPr sz="1200" b="0">
                 <a:solidFill>
                   <a:srgbClr val="1F2937"/>
                 </a:solidFill>
@@ -9799,67 +9834,13 @@
               </a:defRPr>
             </a:pPr>
             <a:r>
-              <a:rPr sz="1200" b="0" dirty="0">
-                <a:solidFill>
-                  <a:srgbClr val="1F2937"/>
-                </a:solidFill>
-                <a:latin typeface="Arial"/>
-              </a:rPr>
-              <a:t>•  Table </a:t>
-            </a:r>
-            <a:r>
-              <a:rPr sz="1200" b="0" dirty="0" err="1">
-                <a:solidFill>
-                  <a:srgbClr val="1F2937"/>
-                </a:solidFill>
-                <a:latin typeface="Arial"/>
-              </a:rPr>
-              <a:t>chuyển</a:t>
-            </a:r>
-            <a:r>
-              <a:rPr sz="1200" b="0" dirty="0">
-                <a:solidFill>
-                  <a:srgbClr val="1F2937"/>
-                </a:solidFill>
-                <a:latin typeface="Arial"/>
-              </a:rPr>
-              <a:t> </a:t>
-            </a:r>
-            <a:r>
-              <a:rPr sz="1200" b="0" dirty="0" err="1">
-                <a:solidFill>
-                  <a:srgbClr val="1F2937"/>
-                </a:solidFill>
-                <a:latin typeface="Arial"/>
-              </a:rPr>
-              <a:t>thành</a:t>
-            </a:r>
-            <a:r>
-              <a:rPr sz="1200" b="0" dirty="0">
-                <a:solidFill>
-                  <a:srgbClr val="1F2937"/>
-                </a:solidFill>
-                <a:latin typeface="Arial"/>
-              </a:rPr>
-              <a:t> card list </a:t>
-            </a:r>
-            <a:r>
-              <a:rPr sz="1200" b="0" dirty="0" err="1">
-                <a:solidFill>
-                  <a:srgbClr val="1F2937"/>
-                </a:solidFill>
-                <a:latin typeface="Arial"/>
-              </a:rPr>
-              <a:t>trên</a:t>
-            </a:r>
-            <a:r>
-              <a:rPr sz="1200" b="0" dirty="0">
-                <a:solidFill>
-                  <a:srgbClr val="1F2937"/>
-                </a:solidFill>
-                <a:latin typeface="Arial"/>
-              </a:rPr>
-              <a:t> mobile.</a:t>
+              <a:rPr sz="1200" b="0">
+                <a:solidFill>
+                  <a:srgbClr val="1F2937"/>
+                </a:solidFill>
+                <a:latin typeface="Arial"/>
+              </a:rPr>
+              <a:t>•  Table chuyển thành card list trên mobile.</a:t>
             </a:r>
           </a:p>
           <a:p>
@@ -9878,49 +9859,13 @@
               </a:defRPr>
             </a:pPr>
             <a:r>
-              <a:rPr sz="1200" b="0" dirty="0">
-                <a:solidFill>
-                  <a:srgbClr val="1F2937"/>
-                </a:solidFill>
-                <a:latin typeface="Arial"/>
-              </a:rPr>
-              <a:t>•  Ant Design theme </a:t>
-            </a:r>
-            <a:r>
-              <a:rPr sz="1200" b="0" dirty="0" err="1">
-                <a:solidFill>
-                  <a:srgbClr val="1F2937"/>
-                </a:solidFill>
-                <a:latin typeface="Arial"/>
-              </a:rPr>
-              <a:t>tùy</a:t>
-            </a:r>
-            <a:r>
-              <a:rPr sz="1200" b="0" dirty="0">
-                <a:solidFill>
-                  <a:srgbClr val="1F2937"/>
-                </a:solidFill>
-                <a:latin typeface="Arial"/>
-              </a:rPr>
-              <a:t> </a:t>
-            </a:r>
-            <a:r>
-              <a:rPr sz="1200" b="0" dirty="0" err="1">
-                <a:solidFill>
-                  <a:srgbClr val="1F2937"/>
-                </a:solidFill>
-                <a:latin typeface="Arial"/>
-              </a:rPr>
-              <a:t>chỉnh</a:t>
-            </a:r>
-            <a:r>
-              <a:rPr sz="1200" b="0" dirty="0">
-                <a:solidFill>
-                  <a:srgbClr val="1F2937"/>
-                </a:solidFill>
-                <a:latin typeface="Arial"/>
-              </a:rPr>
-              <a:t>.</a:t>
+              <a:rPr sz="1200" b="0">
+                <a:solidFill>
+                  <a:srgbClr val="1F2937"/>
+                </a:solidFill>
+                <a:latin typeface="Arial"/>
+              </a:rPr>
+              <a:t>•  Ant Design theme tùy chỉnh.</a:t>
             </a:r>
           </a:p>
           <a:p>
@@ -9939,49 +9884,13 @@
               </a:defRPr>
             </a:pPr>
             <a:r>
-              <a:rPr sz="1200" b="0" dirty="0">
-                <a:solidFill>
-                  <a:srgbClr val="1F2937"/>
-                </a:solidFill>
-                <a:latin typeface="Arial"/>
-              </a:rPr>
-              <a:t>•  </a:t>
-            </a:r>
-            <a:r>
-              <a:rPr sz="1200" b="0" dirty="0" err="1">
-                <a:solidFill>
-                  <a:srgbClr val="1F2937"/>
-                </a:solidFill>
-                <a:latin typeface="Arial"/>
-              </a:rPr>
-              <a:t>Biểu</a:t>
-            </a:r>
-            <a:r>
-              <a:rPr sz="1200" b="0" dirty="0">
-                <a:solidFill>
-                  <a:srgbClr val="1F2937"/>
-                </a:solidFill>
-                <a:latin typeface="Arial"/>
-              </a:rPr>
-              <a:t> </a:t>
-            </a:r>
-            <a:r>
-              <a:rPr sz="1200" b="0" dirty="0" err="1">
-                <a:solidFill>
-                  <a:srgbClr val="1F2937"/>
-                </a:solidFill>
-                <a:latin typeface="Arial"/>
-              </a:rPr>
-              <a:t>đồ</a:t>
-            </a:r>
-            <a:r>
-              <a:rPr sz="1200" b="0" dirty="0">
-                <a:solidFill>
-                  <a:srgbClr val="1F2937"/>
-                </a:solidFill>
-                <a:latin typeface="Arial"/>
-              </a:rPr>
-              <a:t> Recharts.</a:t>
+              <a:rPr sz="1200" b="0">
+                <a:solidFill>
+                  <a:srgbClr val="1F2937"/>
+                </a:solidFill>
+                <a:latin typeface="Arial"/>
+              </a:rPr>
+              <a:t>•  Biểu đồ Recharts.</a:t>
             </a:r>
           </a:p>
         </p:txBody>
@@ -10165,7 +10074,7 @@
               </a:defRPr>
             </a:pPr>
             <a:r>
-              <a:rPr sz="1200" b="0" dirty="0">
+              <a:rPr sz="1200" b="0">
                 <a:solidFill>
                   <a:srgbClr val="1F2937"/>
                 </a:solidFill>
@@ -10190,31 +10099,13 @@
               </a:defRPr>
             </a:pPr>
             <a:r>
-              <a:rPr sz="1200" b="0" dirty="0">
-                <a:solidFill>
-                  <a:srgbClr val="1F2937"/>
-                </a:solidFill>
-                <a:latin typeface="Arial"/>
-              </a:rPr>
-              <a:t>•  Docker Compose dev </a:t>
-            </a:r>
-            <a:r>
-              <a:rPr sz="1200" b="0" dirty="0" err="1">
-                <a:solidFill>
-                  <a:srgbClr val="1F2937"/>
-                </a:solidFill>
-                <a:latin typeface="Arial"/>
-              </a:rPr>
-              <a:t>và</a:t>
-            </a:r>
-            <a:r>
-              <a:rPr sz="1200" b="0" dirty="0">
-                <a:solidFill>
-                  <a:srgbClr val="1F2937"/>
-                </a:solidFill>
-                <a:latin typeface="Arial"/>
-              </a:rPr>
-              <a:t> prod.</a:t>
+              <a:rPr sz="1200" b="0">
+                <a:solidFill>
+                  <a:srgbClr val="1F2937"/>
+                </a:solidFill>
+                <a:latin typeface="Arial"/>
+              </a:rPr>
+              <a:t>•  Docker Compose dev và prod.</a:t>
             </a:r>
           </a:p>
           <a:p>
@@ -10233,7 +10124,7 @@
               </a:defRPr>
             </a:pPr>
             <a:r>
-              <a:rPr sz="1200" b="0" dirty="0">
+              <a:rPr sz="1200" b="0">
                 <a:solidFill>
                   <a:srgbClr val="1F2937"/>
                 </a:solidFill>
@@ -10258,7 +10149,7 @@
               </a:defRPr>
             </a:pPr>
             <a:r>
-              <a:rPr sz="1200" b="0" dirty="0">
+              <a:rPr sz="1200" b="0">
                 <a:solidFill>
                   <a:srgbClr val="1F2937"/>
                 </a:solidFill>
@@ -11156,7 +11047,7 @@
                 </a:solidFill>
                 <a:latin typeface="Arial"/>
               </a:rPr>
-              <a:t>40+</a:t>
+              <a:t>80+</a:t>
             </a:r>
           </a:p>
         </p:txBody>
@@ -11360,7 +11251,7 @@
         <p:spPr>
           <a:xfrm>
             <a:off x="1005840" y="3438144"/>
-            <a:ext cx="2953512" cy="2496312"/>
+            <a:ext cx="2953512" cy="1174681"/>
           </a:xfrm>
           <a:prstGeom prst="rect">
             <a:avLst/>
@@ -11388,7 +11279,7 @@
               </a:defRPr>
             </a:pPr>
             <a:r>
-              <a:rPr sz="1200" b="0">
+              <a:rPr sz="1200" b="0" dirty="0">
                 <a:solidFill>
                   <a:srgbClr val="1F2937"/>
                 </a:solidFill>
@@ -11413,13 +11304,13 @@
               </a:defRPr>
             </a:pPr>
             <a:r>
-              <a:rPr sz="1200" b="0">
-                <a:solidFill>
-                  <a:srgbClr val="1F2937"/>
-                </a:solidFill>
-                <a:latin typeface="Arial"/>
-              </a:rPr>
-              <a:t>•  Controller test.</a:t>
+              <a:rPr sz="1200" b="0" dirty="0">
+                <a:solidFill>
+                  <a:srgbClr val="1F2937"/>
+                </a:solidFill>
+                <a:latin typeface="Arial"/>
+              </a:rPr>
+              <a:t>•  Controller · Service test.</a:t>
             </a:r>
           </a:p>
           <a:p>
@@ -11438,13 +11329,31 @@
               </a:defRPr>
             </a:pPr>
             <a:r>
-              <a:rPr sz="1200" b="0">
-                <a:solidFill>
-                  <a:srgbClr val="1F2937"/>
-                </a:solidFill>
-                <a:latin typeface="Arial"/>
-              </a:rPr>
-              <a:t>•  Service test.</a:t>
+              <a:rPr sz="1200" b="0" dirty="0">
+                <a:solidFill>
+                  <a:srgbClr val="1F2937"/>
+                </a:solidFill>
+                <a:latin typeface="Arial"/>
+              </a:rPr>
+              <a:t>•  Repository test </a:t>
+            </a:r>
+            <a:r>
+              <a:rPr sz="1200" b="0" dirty="0" err="1">
+                <a:solidFill>
+                  <a:srgbClr val="1F2937"/>
+                </a:solidFill>
+                <a:latin typeface="Arial"/>
+              </a:rPr>
+              <a:t>với</a:t>
+            </a:r>
+            <a:r>
+              <a:rPr sz="1200" b="0" dirty="0">
+                <a:solidFill>
+                  <a:srgbClr val="1F2937"/>
+                </a:solidFill>
+                <a:latin typeface="Arial"/>
+              </a:rPr>
+              <a:t> H2 (MySQL mode).</a:t>
             </a:r>
           </a:p>
           <a:p>
@@ -11463,13 +11372,67 @@
               </a:defRPr>
             </a:pPr>
             <a:r>
-              <a:rPr sz="1200" b="0">
-                <a:solidFill>
-                  <a:srgbClr val="1F2937"/>
-                </a:solidFill>
-                <a:latin typeface="Arial"/>
-              </a:rPr>
-              <a:t>•  Repository test với H2.</a:t>
+              <a:rPr sz="1200" b="0" dirty="0">
+                <a:solidFill>
+                  <a:srgbClr val="1F2937"/>
+                </a:solidFill>
+                <a:latin typeface="Arial"/>
+              </a:rPr>
+              <a:t>•  Coverage 7</a:t>
+            </a:r>
+            <a:r>
+              <a:rPr lang="en-US" sz="1200" b="0" dirty="0">
+                <a:solidFill>
+                  <a:srgbClr val="1F2937"/>
+                </a:solidFill>
+                <a:latin typeface="Arial"/>
+              </a:rPr>
+              <a:t>0+</a:t>
+            </a:r>
+            <a:r>
+              <a:rPr sz="1200" b="0" dirty="0">
+                <a:solidFill>
+                  <a:srgbClr val="1F2937"/>
+                </a:solidFill>
+                <a:latin typeface="Arial"/>
+              </a:rPr>
+              <a:t>% (</a:t>
+            </a:r>
+            <a:r>
+              <a:rPr sz="1200" b="0" dirty="0" err="1">
+                <a:solidFill>
+                  <a:srgbClr val="1F2937"/>
+                </a:solidFill>
+                <a:latin typeface="Arial"/>
+              </a:rPr>
+              <a:t>JaCoCo</a:t>
+            </a:r>
+            <a:r>
+              <a:rPr sz="1200" b="0" dirty="0">
+                <a:solidFill>
+                  <a:srgbClr val="1F2937"/>
+                </a:solidFill>
+                <a:latin typeface="Arial"/>
+              </a:rPr>
+              <a:t>) · </a:t>
+            </a:r>
+            <a:r>
+              <a:rPr sz="1200" b="0" dirty="0" err="1">
+                <a:solidFill>
+                  <a:srgbClr val="1F2937"/>
+                </a:solidFill>
+                <a:latin typeface="Arial"/>
+              </a:rPr>
+              <a:t>SpotBugs</a:t>
+            </a:r>
+            <a:r>
+              <a:rPr sz="1200" b="0" dirty="0">
+                <a:solidFill>
+                  <a:srgbClr val="1F2937"/>
+                </a:solidFill>
+                <a:latin typeface="Arial"/>
+              </a:rPr>
+              <a:t>/PMD.</a:t>
             </a:r>
           </a:p>
         </p:txBody>
@@ -12374,7 +12337,7 @@
         </p:nvGraphicFramePr>
         <p:xfrm>
           <a:off x="777240" y="1600200"/>
-          <a:ext cx="10634472" cy="2871216"/>
+          <a:ext cx="10634472" cy="3493008"/>
         </p:xfrm>
         <a:graphic>
           <a:graphicData uri="http://schemas.openxmlformats.org/drawingml/2006/table">
@@ -12888,6 +12851,140 @@
                           </a:solidFill>
                           <a:latin typeface="Arial"/>
                         </a:rPr>
+                        <a:t>Logic nghiệp vụ nằm rải rác trong Controller</a:t>
+                      </a:r>
+                    </a:p>
+                  </a:txBody>
+                  <a:tcPr marL="73152" marR="73152" marT="27432" marB="27432" anchor="ctr">
+                    <a:solidFill>
+                      <a:srgbClr val="FFFFFF"/>
+                    </a:solidFill>
+                  </a:tcPr>
+                </a:tc>
+                <a:tc>
+                  <a:txBody>
+                    <a:bodyPr/>
+                    <a:lstStyle/>
+                    <a:p>
+                      <a:pPr algn="l">
+                        <a:defRPr sz="1200" b="0">
+                          <a:solidFill>
+                            <a:srgbClr val="1F2937"/>
+                          </a:solidFill>
+                          <a:latin typeface="Arial"/>
+                        </a:defRPr>
+                      </a:pPr>
+                      <a:r>
+                        <a:rPr sz="1200" b="0">
+                          <a:solidFill>
+                            <a:srgbClr val="1F2937"/>
+                          </a:solidFill>
+                          <a:latin typeface="Arial"/>
+                        </a:rPr>
+                        <a:t>Refactor về controller mỏng: tách AuthService, chuyển luật xuống Service</a:t>
+                      </a:r>
+                    </a:p>
+                  </a:txBody>
+                  <a:tcPr marL="73152" marR="73152" marT="27432" marB="27432" anchor="ctr">
+                    <a:solidFill>
+                      <a:srgbClr val="FFFFFF"/>
+                    </a:solidFill>
+                  </a:tcPr>
+                </a:tc>
+                <a:extLst>
+                  <a:ext uri="{0D108BD9-81ED-4DB2-BD59-A6C34878D82A}">
+                    <a16:rowId xmlns:a16="http://schemas.microsoft.com/office/drawing/2014/main" val="10007"/>
+                  </a:ext>
+                </a:extLst>
+              </a:tr>
+              <a:tr h="310896">
+                <a:tc>
+                  <a:txBody>
+                    <a:bodyPr/>
+                    <a:lstStyle/>
+                    <a:p>
+                      <a:pPr algn="l">
+                        <a:defRPr sz="1200" b="0">
+                          <a:solidFill>
+                            <a:srgbClr val="1F2937"/>
+                          </a:solidFill>
+                          <a:latin typeface="Arial"/>
+                        </a:defRPr>
+                      </a:pPr>
+                      <a:r>
+                        <a:rPr sz="1200" b="0">
+                          <a:solidFill>
+                            <a:srgbClr val="1F2937"/>
+                          </a:solidFill>
+                          <a:latin typeface="Arial"/>
+                        </a:rPr>
+                        <a:t>Sinh user_code trùng khi đăng ký song song</a:t>
+                      </a:r>
+                    </a:p>
+                  </a:txBody>
+                  <a:tcPr marL="73152" marR="73152" marT="27432" marB="27432" anchor="ctr">
+                    <a:solidFill>
+                      <a:srgbClr val="F8FAFC"/>
+                    </a:solidFill>
+                  </a:tcPr>
+                </a:tc>
+                <a:tc>
+                  <a:txBody>
+                    <a:bodyPr/>
+                    <a:lstStyle/>
+                    <a:p>
+                      <a:pPr algn="l">
+                        <a:defRPr sz="1200" b="0">
+                          <a:solidFill>
+                            <a:srgbClr val="1F2937"/>
+                          </a:solidFill>
+                          <a:latin typeface="Arial"/>
+                        </a:defRPr>
+                      </a:pPr>
+                      <a:r>
+                        <a:rPr sz="1200" b="0">
+                          <a:solidFill>
+                            <a:srgbClr val="1F2937"/>
+                          </a:solidFill>
+                          <a:latin typeface="Arial"/>
+                        </a:rPr>
+                        <a:t>Retry loop + unique constraint trên user_code</a:t>
+                      </a:r>
+                    </a:p>
+                  </a:txBody>
+                  <a:tcPr marL="73152" marR="73152" marT="27432" marB="27432" anchor="ctr">
+                    <a:solidFill>
+                      <a:srgbClr val="F8FAFC"/>
+                    </a:solidFill>
+                  </a:tcPr>
+                </a:tc>
+                <a:extLst>
+                  <a:ext uri="{0D108BD9-81ED-4DB2-BD59-A6C34878D82A}">
+                    <a16:rowId xmlns:a16="http://schemas.microsoft.com/office/drawing/2014/main" val="10008"/>
+                  </a:ext>
+                </a:extLst>
+              </a:tr>
+              <a:tr h="310896">
+                <a:tc>
+                  <a:txBody>
+                    <a:bodyPr/>
+                    <a:lstStyle/>
+                    <a:p>
+                      <a:pPr algn="l">
+                        <a:defRPr sz="1200" b="0">
+                          <a:solidFill>
+                            <a:srgbClr val="1F2937"/>
+                          </a:solidFill>
+                          <a:latin typeface="Arial"/>
+                        </a:defRPr>
+                      </a:pPr>
+                      <a:r>
+                        <a:rPr sz="1200" b="0">
+                          <a:solidFill>
+                            <a:srgbClr val="1F2937"/>
+                          </a:solidFill>
+                          <a:latin typeface="Arial"/>
+                        </a:rPr>
                         <a:t>Bảng admin khó dùng trên mobile</a:t>
                       </a:r>
                     </a:p>
@@ -12930,7 +13027,7 @@
                 </a:tc>
                 <a:extLst>
                   <a:ext uri="{0D108BD9-81ED-4DB2-BD59-A6C34878D82A}">
-                    <a16:rowId xmlns:a16="http://schemas.microsoft.com/office/drawing/2014/main" val="10007"/>
+                    <a16:rowId xmlns:a16="http://schemas.microsoft.com/office/drawing/2014/main" val="10009"/>
                   </a:ext>
                 </a:extLst>
               </a:tr>
@@ -12997,7 +13094,7 @@
                 </a:tc>
                 <a:extLst>
                   <a:ext uri="{0D108BD9-81ED-4DB2-BD59-A6C34878D82A}">
-                    <a16:rowId xmlns:a16="http://schemas.microsoft.com/office/drawing/2014/main" val="10008"/>
+                    <a16:rowId xmlns:a16="http://schemas.microsoft.com/office/drawing/2014/main" val="10010"/>
                   </a:ext>
                 </a:extLst>
               </a:tr>
@@ -13544,211 +13641,13 @@
               </a:defRPr>
             </a:pPr>
             <a:r>
-              <a:rPr sz="1300" b="0" dirty="0">
-                <a:solidFill>
-                  <a:srgbClr val="1F2937"/>
-                </a:solidFill>
-                <a:latin typeface="Arial"/>
-              </a:rPr>
-              <a:t>•  </a:t>
-            </a:r>
-            <a:r>
-              <a:rPr sz="1300" b="0" dirty="0" err="1">
-                <a:solidFill>
-                  <a:srgbClr val="1F2937"/>
-                </a:solidFill>
-                <a:latin typeface="Arial"/>
-              </a:rPr>
-              <a:t>Người</a:t>
-            </a:r>
-            <a:r>
-              <a:rPr sz="1300" b="0" dirty="0">
-                <a:solidFill>
-                  <a:srgbClr val="1F2937"/>
-                </a:solidFill>
-                <a:latin typeface="Arial"/>
-              </a:rPr>
-              <a:t> </a:t>
-            </a:r>
-            <a:r>
-              <a:rPr sz="1300" b="0" dirty="0" err="1">
-                <a:solidFill>
-                  <a:srgbClr val="1F2937"/>
-                </a:solidFill>
-                <a:latin typeface="Arial"/>
-              </a:rPr>
-              <a:t>dùng</a:t>
-            </a:r>
-            <a:r>
-              <a:rPr sz="1300" b="0" dirty="0">
-                <a:solidFill>
-                  <a:srgbClr val="1F2937"/>
-                </a:solidFill>
-                <a:latin typeface="Arial"/>
-              </a:rPr>
-              <a:t> </a:t>
-            </a:r>
-            <a:r>
-              <a:rPr sz="1300" b="0" dirty="0" err="1">
-                <a:solidFill>
-                  <a:srgbClr val="1F2937"/>
-                </a:solidFill>
-                <a:latin typeface="Arial"/>
-              </a:rPr>
-              <a:t>thường</a:t>
-            </a:r>
-            <a:r>
-              <a:rPr sz="1300" b="0" dirty="0">
-                <a:solidFill>
-                  <a:srgbClr val="1F2937"/>
-                </a:solidFill>
-                <a:latin typeface="Arial"/>
-              </a:rPr>
-              <a:t> </a:t>
-            </a:r>
-            <a:r>
-              <a:rPr sz="1300" b="0" dirty="0" err="1">
-                <a:solidFill>
-                  <a:srgbClr val="1F2937"/>
-                </a:solidFill>
-                <a:latin typeface="Arial"/>
-              </a:rPr>
-              <a:t>dò</a:t>
-            </a:r>
-            <a:r>
-              <a:rPr sz="1300" b="0" dirty="0">
-                <a:solidFill>
-                  <a:srgbClr val="1F2937"/>
-                </a:solidFill>
-                <a:latin typeface="Arial"/>
-              </a:rPr>
-              <a:t> </a:t>
-            </a:r>
-            <a:r>
-              <a:rPr sz="1300" b="0" dirty="0" err="1">
-                <a:solidFill>
-                  <a:srgbClr val="1F2937"/>
-                </a:solidFill>
-                <a:latin typeface="Arial"/>
-              </a:rPr>
-              <a:t>vé</a:t>
-            </a:r>
-            <a:r>
-              <a:rPr sz="1300" b="0" dirty="0">
-                <a:solidFill>
-                  <a:srgbClr val="1F2937"/>
-                </a:solidFill>
-                <a:latin typeface="Arial"/>
-              </a:rPr>
-              <a:t> </a:t>
-            </a:r>
-            <a:r>
-              <a:rPr sz="1300" b="0" dirty="0" err="1">
-                <a:solidFill>
-                  <a:srgbClr val="1F2937"/>
-                </a:solidFill>
-                <a:latin typeface="Arial"/>
-              </a:rPr>
-              <a:t>số</a:t>
-            </a:r>
-            <a:r>
-              <a:rPr sz="1300" b="0" dirty="0">
-                <a:solidFill>
-                  <a:srgbClr val="1F2937"/>
-                </a:solidFill>
-                <a:latin typeface="Arial"/>
-              </a:rPr>
-              <a:t> </a:t>
-            </a:r>
-            <a:r>
-              <a:rPr sz="1300" b="0" dirty="0" err="1">
-                <a:solidFill>
-                  <a:srgbClr val="1F2937"/>
-                </a:solidFill>
-                <a:latin typeface="Arial"/>
-              </a:rPr>
-              <a:t>thủ</a:t>
-            </a:r>
-            <a:r>
-              <a:rPr sz="1300" b="0" dirty="0">
-                <a:solidFill>
-                  <a:srgbClr val="1F2937"/>
-                </a:solidFill>
-                <a:latin typeface="Arial"/>
-              </a:rPr>
-              <a:t> </a:t>
-            </a:r>
-            <a:r>
-              <a:rPr sz="1300" b="0" dirty="0" err="1">
-                <a:solidFill>
-                  <a:srgbClr val="1F2937"/>
-                </a:solidFill>
-                <a:latin typeface="Arial"/>
-              </a:rPr>
-              <a:t>công</a:t>
-            </a:r>
-            <a:r>
-              <a:rPr sz="1300" b="0" dirty="0">
-                <a:solidFill>
-                  <a:srgbClr val="1F2937"/>
-                </a:solidFill>
-                <a:latin typeface="Arial"/>
-              </a:rPr>
-              <a:t>, </a:t>
-            </a:r>
-            <a:r>
-              <a:rPr sz="1300" b="0" dirty="0" err="1">
-                <a:solidFill>
-                  <a:srgbClr val="1F2937"/>
-                </a:solidFill>
-                <a:latin typeface="Arial"/>
-              </a:rPr>
-              <a:t>dễ</a:t>
-            </a:r>
-            <a:r>
-              <a:rPr sz="1300" b="0" dirty="0">
-                <a:solidFill>
-                  <a:srgbClr val="1F2937"/>
-                </a:solidFill>
-                <a:latin typeface="Arial"/>
-              </a:rPr>
-              <a:t> </a:t>
-            </a:r>
-            <a:r>
-              <a:rPr sz="1300" b="0" dirty="0" err="1">
-                <a:solidFill>
-                  <a:srgbClr val="1F2937"/>
-                </a:solidFill>
-                <a:latin typeface="Arial"/>
-              </a:rPr>
-              <a:t>sai</a:t>
-            </a:r>
-            <a:r>
-              <a:rPr sz="1300" b="0" dirty="0">
-                <a:solidFill>
-                  <a:srgbClr val="1F2937"/>
-                </a:solidFill>
-                <a:latin typeface="Arial"/>
-              </a:rPr>
-              <a:t> </a:t>
-            </a:r>
-            <a:r>
-              <a:rPr sz="1300" b="0" dirty="0" err="1">
-                <a:solidFill>
-                  <a:srgbClr val="1F2937"/>
-                </a:solidFill>
-                <a:latin typeface="Arial"/>
-              </a:rPr>
-              <a:t>sót</a:t>
-            </a:r>
-            <a:r>
-              <a:rPr sz="1300" b="0" dirty="0">
-                <a:solidFill>
-                  <a:srgbClr val="1F2937"/>
-                </a:solidFill>
-                <a:latin typeface="Arial"/>
-              </a:rPr>
-              <a:t>.</a:t>
+              <a:rPr sz="1300" b="0">
+                <a:solidFill>
+                  <a:srgbClr val="1F2937"/>
+                </a:solidFill>
+                <a:latin typeface="Arial"/>
+              </a:rPr>
+              <a:t>•  Người dùng thường dò vé số thủ công, dễ sai sót.</a:t>
             </a:r>
           </a:p>
           <a:p>
@@ -13767,121 +13666,13 @@
               </a:defRPr>
             </a:pPr>
             <a:r>
-              <a:rPr sz="1300" b="0" dirty="0">
-                <a:solidFill>
-                  <a:srgbClr val="1F2937"/>
-                </a:solidFill>
-                <a:latin typeface="Arial"/>
-              </a:rPr>
-              <a:t>•  </a:t>
-            </a:r>
-            <a:r>
-              <a:rPr sz="1300" b="0" dirty="0" err="1">
-                <a:solidFill>
-                  <a:srgbClr val="1F2937"/>
-                </a:solidFill>
-                <a:latin typeface="Arial"/>
-              </a:rPr>
-              <a:t>Khó</a:t>
-            </a:r>
-            <a:r>
-              <a:rPr sz="1300" b="0" dirty="0">
-                <a:solidFill>
-                  <a:srgbClr val="1F2937"/>
-                </a:solidFill>
-                <a:latin typeface="Arial"/>
-              </a:rPr>
-              <a:t> </a:t>
-            </a:r>
-            <a:r>
-              <a:rPr sz="1300" b="0" dirty="0" err="1">
-                <a:solidFill>
-                  <a:srgbClr val="1F2937"/>
-                </a:solidFill>
-                <a:latin typeface="Arial"/>
-              </a:rPr>
-              <a:t>dò</a:t>
-            </a:r>
-            <a:r>
-              <a:rPr sz="1300" b="0" dirty="0">
-                <a:solidFill>
-                  <a:srgbClr val="1F2937"/>
-                </a:solidFill>
-                <a:latin typeface="Arial"/>
-              </a:rPr>
-              <a:t> </a:t>
-            </a:r>
-            <a:r>
-              <a:rPr sz="1300" b="0" dirty="0" err="1">
-                <a:solidFill>
-                  <a:srgbClr val="1F2937"/>
-                </a:solidFill>
-                <a:latin typeface="Arial"/>
-              </a:rPr>
-              <a:t>nhiều</a:t>
-            </a:r>
-            <a:r>
-              <a:rPr sz="1300" b="0" dirty="0">
-                <a:solidFill>
-                  <a:srgbClr val="1F2937"/>
-                </a:solidFill>
-                <a:latin typeface="Arial"/>
-              </a:rPr>
-              <a:t> </a:t>
-            </a:r>
-            <a:r>
-              <a:rPr sz="1300" b="0" dirty="0" err="1">
-                <a:solidFill>
-                  <a:srgbClr val="1F2937"/>
-                </a:solidFill>
-                <a:latin typeface="Arial"/>
-              </a:rPr>
-              <a:t>vé</a:t>
-            </a:r>
-            <a:r>
-              <a:rPr sz="1300" b="0" dirty="0">
-                <a:solidFill>
-                  <a:srgbClr val="1F2937"/>
-                </a:solidFill>
-                <a:latin typeface="Arial"/>
-              </a:rPr>
-              <a:t> </a:t>
-            </a:r>
-            <a:r>
-              <a:rPr sz="1300" b="0" dirty="0" err="1">
-                <a:solidFill>
-                  <a:srgbClr val="1F2937"/>
-                </a:solidFill>
-                <a:latin typeface="Arial"/>
-              </a:rPr>
-              <a:t>cùng</a:t>
-            </a:r>
-            <a:r>
-              <a:rPr sz="1300" b="0" dirty="0">
-                <a:solidFill>
-                  <a:srgbClr val="1F2937"/>
-                </a:solidFill>
-                <a:latin typeface="Arial"/>
-              </a:rPr>
-              <a:t> </a:t>
-            </a:r>
-            <a:r>
-              <a:rPr sz="1300" b="0" dirty="0" err="1">
-                <a:solidFill>
-                  <a:srgbClr val="1F2937"/>
-                </a:solidFill>
-                <a:latin typeface="Arial"/>
-              </a:rPr>
-              <a:t>lúc</a:t>
-            </a:r>
-            <a:r>
-              <a:rPr sz="1300" b="0" dirty="0">
-                <a:solidFill>
-                  <a:srgbClr val="1F2937"/>
-                </a:solidFill>
-                <a:latin typeface="Arial"/>
-              </a:rPr>
-              <a:t>.</a:t>
+              <a:rPr sz="1300" b="0">
+                <a:solidFill>
+                  <a:srgbClr val="1F2937"/>
+                </a:solidFill>
+                <a:latin typeface="Arial"/>
+              </a:rPr>
+              <a:t>•  Khó dò nhiều vé cùng lúc.</a:t>
             </a:r>
           </a:p>
           <a:p>
@@ -13900,157 +13691,13 @@
               </a:defRPr>
             </a:pPr>
             <a:r>
-              <a:rPr sz="1300" b="0" dirty="0">
-                <a:solidFill>
-                  <a:srgbClr val="1F2937"/>
-                </a:solidFill>
-                <a:latin typeface="Arial"/>
-              </a:rPr>
-              <a:t>•  </a:t>
-            </a:r>
-            <a:r>
-              <a:rPr sz="1300" b="0" dirty="0" err="1">
-                <a:solidFill>
-                  <a:srgbClr val="1F2937"/>
-                </a:solidFill>
-                <a:latin typeface="Arial"/>
-              </a:rPr>
-              <a:t>Khó</a:t>
-            </a:r>
-            <a:r>
-              <a:rPr sz="1300" b="0" dirty="0">
-                <a:solidFill>
-                  <a:srgbClr val="1F2937"/>
-                </a:solidFill>
-                <a:latin typeface="Arial"/>
-              </a:rPr>
-              <a:t> </a:t>
-            </a:r>
-            <a:r>
-              <a:rPr sz="1300" b="0" dirty="0" err="1">
-                <a:solidFill>
-                  <a:srgbClr val="1F2937"/>
-                </a:solidFill>
-                <a:latin typeface="Arial"/>
-              </a:rPr>
-              <a:t>lưu</a:t>
-            </a:r>
-            <a:r>
-              <a:rPr sz="1300" b="0" dirty="0">
-                <a:solidFill>
-                  <a:srgbClr val="1F2937"/>
-                </a:solidFill>
-                <a:latin typeface="Arial"/>
-              </a:rPr>
-              <a:t> </a:t>
-            </a:r>
-            <a:r>
-              <a:rPr sz="1300" b="0" dirty="0" err="1">
-                <a:solidFill>
-                  <a:srgbClr val="1F2937"/>
-                </a:solidFill>
-                <a:latin typeface="Arial"/>
-              </a:rPr>
-              <a:t>lại</a:t>
-            </a:r>
-            <a:r>
-              <a:rPr sz="1300" b="0" dirty="0">
-                <a:solidFill>
-                  <a:srgbClr val="1F2937"/>
-                </a:solidFill>
-                <a:latin typeface="Arial"/>
-              </a:rPr>
-              <a:t> </a:t>
-            </a:r>
-            <a:r>
-              <a:rPr sz="1300" b="0" dirty="0" err="1">
-                <a:solidFill>
-                  <a:srgbClr val="1F2937"/>
-                </a:solidFill>
-                <a:latin typeface="Arial"/>
-              </a:rPr>
-              <a:t>lịch</a:t>
-            </a:r>
-            <a:r>
-              <a:rPr sz="1300" b="0" dirty="0">
-                <a:solidFill>
-                  <a:srgbClr val="1F2937"/>
-                </a:solidFill>
-                <a:latin typeface="Arial"/>
-              </a:rPr>
-              <a:t> </a:t>
-            </a:r>
-            <a:r>
-              <a:rPr sz="1300" b="0" dirty="0" err="1">
-                <a:solidFill>
-                  <a:srgbClr val="1F2937"/>
-                </a:solidFill>
-                <a:latin typeface="Arial"/>
-              </a:rPr>
-              <a:t>sử</a:t>
-            </a:r>
-            <a:r>
-              <a:rPr sz="1300" b="0" dirty="0">
-                <a:solidFill>
-                  <a:srgbClr val="1F2937"/>
-                </a:solidFill>
-                <a:latin typeface="Arial"/>
-              </a:rPr>
-              <a:t> </a:t>
-            </a:r>
-            <a:r>
-              <a:rPr sz="1300" b="0" dirty="0" err="1">
-                <a:solidFill>
-                  <a:srgbClr val="1F2937"/>
-                </a:solidFill>
-                <a:latin typeface="Arial"/>
-              </a:rPr>
-              <a:t>các</a:t>
-            </a:r>
-            <a:r>
-              <a:rPr sz="1300" b="0" dirty="0">
-                <a:solidFill>
-                  <a:srgbClr val="1F2937"/>
-                </a:solidFill>
-                <a:latin typeface="Arial"/>
-              </a:rPr>
-              <a:t> </a:t>
-            </a:r>
-            <a:r>
-              <a:rPr sz="1300" b="0" dirty="0" err="1">
-                <a:solidFill>
-                  <a:srgbClr val="1F2937"/>
-                </a:solidFill>
-                <a:latin typeface="Arial"/>
-              </a:rPr>
-              <a:t>lần</a:t>
-            </a:r>
-            <a:r>
-              <a:rPr sz="1300" b="0" dirty="0">
-                <a:solidFill>
-                  <a:srgbClr val="1F2937"/>
-                </a:solidFill>
-                <a:latin typeface="Arial"/>
-              </a:rPr>
-              <a:t> </a:t>
-            </a:r>
-            <a:r>
-              <a:rPr sz="1300" b="0" dirty="0" err="1">
-                <a:solidFill>
-                  <a:srgbClr val="1F2937"/>
-                </a:solidFill>
-                <a:latin typeface="Arial"/>
-              </a:rPr>
-              <a:t>dò</a:t>
-            </a:r>
-            <a:r>
-              <a:rPr sz="1300" b="0" dirty="0">
-                <a:solidFill>
-                  <a:srgbClr val="1F2937"/>
-                </a:solidFill>
-                <a:latin typeface="Arial"/>
-              </a:rPr>
-              <a:t>.</a:t>
+              <a:rPr sz="1300" b="0">
+                <a:solidFill>
+                  <a:srgbClr val="1F2937"/>
+                </a:solidFill>
+                <a:latin typeface="Arial"/>
+              </a:rPr>
+              <a:t>•  Khó lưu lại lịch sử các lần dò.</a:t>
             </a:r>
           </a:p>
           <a:p>
@@ -14069,211 +13716,13 @@
               </a:defRPr>
             </a:pPr>
             <a:r>
-              <a:rPr sz="1300" b="0" dirty="0">
-                <a:solidFill>
-                  <a:srgbClr val="1F2937"/>
-                </a:solidFill>
-                <a:latin typeface="Arial"/>
-              </a:rPr>
-              <a:t>•  Admin </a:t>
-            </a:r>
-            <a:r>
-              <a:rPr sz="1300" b="0" dirty="0" err="1">
-                <a:solidFill>
-                  <a:srgbClr val="1F2937"/>
-                </a:solidFill>
-                <a:latin typeface="Arial"/>
-              </a:rPr>
-              <a:t>cần</a:t>
-            </a:r>
-            <a:r>
-              <a:rPr sz="1300" b="0" dirty="0">
-                <a:solidFill>
-                  <a:srgbClr val="1F2937"/>
-                </a:solidFill>
-                <a:latin typeface="Arial"/>
-              </a:rPr>
-              <a:t> </a:t>
-            </a:r>
-            <a:r>
-              <a:rPr sz="1300" b="0" dirty="0" err="1">
-                <a:solidFill>
-                  <a:srgbClr val="1F2937"/>
-                </a:solidFill>
-                <a:latin typeface="Arial"/>
-              </a:rPr>
-              <a:t>quản</a:t>
-            </a:r>
-            <a:r>
-              <a:rPr sz="1300" b="0" dirty="0">
-                <a:solidFill>
-                  <a:srgbClr val="1F2937"/>
-                </a:solidFill>
-                <a:latin typeface="Arial"/>
-              </a:rPr>
-              <a:t> </a:t>
-            </a:r>
-            <a:r>
-              <a:rPr sz="1300" b="0" dirty="0" err="1">
-                <a:solidFill>
-                  <a:srgbClr val="1F2937"/>
-                </a:solidFill>
-                <a:latin typeface="Arial"/>
-              </a:rPr>
-              <a:t>lý</a:t>
-            </a:r>
-            <a:r>
-              <a:rPr sz="1300" b="0" dirty="0">
-                <a:solidFill>
-                  <a:srgbClr val="1F2937"/>
-                </a:solidFill>
-                <a:latin typeface="Arial"/>
-              </a:rPr>
-              <a:t> </a:t>
-            </a:r>
-            <a:r>
-              <a:rPr sz="1300" b="0" dirty="0" err="1">
-                <a:solidFill>
-                  <a:srgbClr val="1F2937"/>
-                </a:solidFill>
-                <a:latin typeface="Arial"/>
-              </a:rPr>
-              <a:t>kết</a:t>
-            </a:r>
-            <a:r>
-              <a:rPr sz="1300" b="0" dirty="0">
-                <a:solidFill>
-                  <a:srgbClr val="1F2937"/>
-                </a:solidFill>
-                <a:latin typeface="Arial"/>
-              </a:rPr>
-              <a:t> </a:t>
-            </a:r>
-            <a:r>
-              <a:rPr sz="1300" b="0" dirty="0" err="1">
-                <a:solidFill>
-                  <a:srgbClr val="1F2937"/>
-                </a:solidFill>
-                <a:latin typeface="Arial"/>
-              </a:rPr>
-              <a:t>quả</a:t>
-            </a:r>
-            <a:r>
-              <a:rPr sz="1300" b="0" dirty="0">
-                <a:solidFill>
-                  <a:srgbClr val="1F2937"/>
-                </a:solidFill>
-                <a:latin typeface="Arial"/>
-              </a:rPr>
-              <a:t> </a:t>
-            </a:r>
-            <a:r>
-              <a:rPr sz="1300" b="0" dirty="0" err="1">
-                <a:solidFill>
-                  <a:srgbClr val="1F2937"/>
-                </a:solidFill>
-                <a:latin typeface="Arial"/>
-              </a:rPr>
-              <a:t>xổ</a:t>
-            </a:r>
-            <a:r>
-              <a:rPr sz="1300" b="0" dirty="0">
-                <a:solidFill>
-                  <a:srgbClr val="1F2937"/>
-                </a:solidFill>
-                <a:latin typeface="Arial"/>
-              </a:rPr>
-              <a:t> </a:t>
-            </a:r>
-            <a:r>
-              <a:rPr sz="1300" b="0" dirty="0" err="1">
-                <a:solidFill>
-                  <a:srgbClr val="1F2937"/>
-                </a:solidFill>
-                <a:latin typeface="Arial"/>
-              </a:rPr>
-              <a:t>số</a:t>
-            </a:r>
-            <a:r>
-              <a:rPr sz="1300" b="0" dirty="0">
-                <a:solidFill>
-                  <a:srgbClr val="1F2937"/>
-                </a:solidFill>
-                <a:latin typeface="Arial"/>
-              </a:rPr>
-              <a:t> </a:t>
-            </a:r>
-            <a:r>
-              <a:rPr sz="1300" b="0" dirty="0" err="1">
-                <a:solidFill>
-                  <a:srgbClr val="1F2937"/>
-                </a:solidFill>
-                <a:latin typeface="Arial"/>
-              </a:rPr>
-              <a:t>theo</a:t>
-            </a:r>
-            <a:r>
-              <a:rPr sz="1300" b="0" dirty="0">
-                <a:solidFill>
-                  <a:srgbClr val="1F2937"/>
-                </a:solidFill>
-                <a:latin typeface="Arial"/>
-              </a:rPr>
-              <a:t> </a:t>
-            </a:r>
-            <a:r>
-              <a:rPr sz="1300" b="0" dirty="0" err="1">
-                <a:solidFill>
-                  <a:srgbClr val="1F2937"/>
-                </a:solidFill>
-                <a:latin typeface="Arial"/>
-              </a:rPr>
-              <a:t>đài</a:t>
-            </a:r>
-            <a:r>
-              <a:rPr sz="1300" b="0" dirty="0">
-                <a:solidFill>
-                  <a:srgbClr val="1F2937"/>
-                </a:solidFill>
-                <a:latin typeface="Arial"/>
-              </a:rPr>
-              <a:t> </a:t>
-            </a:r>
-            <a:r>
-              <a:rPr sz="1300" b="0" dirty="0" err="1">
-                <a:solidFill>
-                  <a:srgbClr val="1F2937"/>
-                </a:solidFill>
-                <a:latin typeface="Arial"/>
-              </a:rPr>
-              <a:t>và</a:t>
-            </a:r>
-            <a:r>
-              <a:rPr sz="1300" b="0" dirty="0">
-                <a:solidFill>
-                  <a:srgbClr val="1F2937"/>
-                </a:solidFill>
-                <a:latin typeface="Arial"/>
-              </a:rPr>
-              <a:t> </a:t>
-            </a:r>
-            <a:r>
-              <a:rPr sz="1300" b="0" dirty="0" err="1">
-                <a:solidFill>
-                  <a:srgbClr val="1F2937"/>
-                </a:solidFill>
-                <a:latin typeface="Arial"/>
-              </a:rPr>
-              <a:t>ngày</a:t>
-            </a:r>
-            <a:r>
-              <a:rPr sz="1300" b="0" dirty="0">
-                <a:solidFill>
-                  <a:srgbClr val="1F2937"/>
-                </a:solidFill>
-                <a:latin typeface="Arial"/>
-              </a:rPr>
-              <a:t>.</a:t>
+              <a:rPr sz="1300" b="0">
+                <a:solidFill>
+                  <a:srgbClr val="1F2937"/>
+                </a:solidFill>
+                <a:latin typeface="Arial"/>
+              </a:rPr>
+              <a:t>•  Admin cần quản lý kết quả xổ số theo đài và ngày.</a:t>
             </a:r>
           </a:p>
           <a:p>
@@ -14292,229 +13741,13 @@
               </a:defRPr>
             </a:pPr>
             <a:r>
-              <a:rPr sz="1300" b="0" dirty="0">
-                <a:solidFill>
-                  <a:srgbClr val="1F2937"/>
-                </a:solidFill>
-                <a:latin typeface="Arial"/>
-              </a:rPr>
-              <a:t>•  </a:t>
-            </a:r>
-            <a:r>
-              <a:rPr sz="1300" b="0" dirty="0" err="1">
-                <a:solidFill>
-                  <a:srgbClr val="1F2937"/>
-                </a:solidFill>
-                <a:latin typeface="Arial"/>
-              </a:rPr>
-              <a:t>Cần</a:t>
-            </a:r>
-            <a:r>
-              <a:rPr sz="1300" b="0" dirty="0">
-                <a:solidFill>
-                  <a:srgbClr val="1F2937"/>
-                </a:solidFill>
-                <a:latin typeface="Arial"/>
-              </a:rPr>
-              <a:t> </a:t>
-            </a:r>
-            <a:r>
-              <a:rPr sz="1300" b="0" dirty="0" err="1">
-                <a:solidFill>
-                  <a:srgbClr val="1F2937"/>
-                </a:solidFill>
-                <a:latin typeface="Arial"/>
-              </a:rPr>
-              <a:t>phân</a:t>
-            </a:r>
-            <a:r>
-              <a:rPr sz="1300" b="0" dirty="0">
-                <a:solidFill>
-                  <a:srgbClr val="1F2937"/>
-                </a:solidFill>
-                <a:latin typeface="Arial"/>
-              </a:rPr>
-              <a:t> </a:t>
-            </a:r>
-            <a:r>
-              <a:rPr sz="1300" b="0" dirty="0" err="1">
-                <a:solidFill>
-                  <a:srgbClr val="1F2937"/>
-                </a:solidFill>
-                <a:latin typeface="Arial"/>
-              </a:rPr>
-              <a:t>quyền</a:t>
-            </a:r>
-            <a:r>
-              <a:rPr sz="1300" b="0" dirty="0">
-                <a:solidFill>
-                  <a:srgbClr val="1F2937"/>
-                </a:solidFill>
-                <a:latin typeface="Arial"/>
-              </a:rPr>
-              <a:t> </a:t>
-            </a:r>
-            <a:r>
-              <a:rPr sz="1300" b="0" dirty="0" err="1">
-                <a:solidFill>
-                  <a:srgbClr val="1F2937"/>
-                </a:solidFill>
-                <a:latin typeface="Arial"/>
-              </a:rPr>
-              <a:t>người</a:t>
-            </a:r>
-            <a:r>
-              <a:rPr sz="1300" b="0" dirty="0">
-                <a:solidFill>
-                  <a:srgbClr val="1F2937"/>
-                </a:solidFill>
-                <a:latin typeface="Arial"/>
-              </a:rPr>
-              <a:t> </a:t>
-            </a:r>
-            <a:r>
-              <a:rPr sz="1300" b="0" dirty="0" err="1">
-                <a:solidFill>
-                  <a:srgbClr val="1F2937"/>
-                </a:solidFill>
-                <a:latin typeface="Arial"/>
-              </a:rPr>
-              <a:t>dùng</a:t>
-            </a:r>
-            <a:r>
-              <a:rPr sz="1300" b="0" dirty="0">
-                <a:solidFill>
-                  <a:srgbClr val="1F2937"/>
-                </a:solidFill>
-                <a:latin typeface="Arial"/>
-              </a:rPr>
-              <a:t> </a:t>
-            </a:r>
-            <a:r>
-              <a:rPr sz="1300" b="0" dirty="0" err="1">
-                <a:solidFill>
-                  <a:srgbClr val="1F2937"/>
-                </a:solidFill>
-                <a:latin typeface="Arial"/>
-              </a:rPr>
-              <a:t>và</a:t>
-            </a:r>
-            <a:r>
-              <a:rPr sz="1300" b="0" dirty="0">
-                <a:solidFill>
-                  <a:srgbClr val="1F2937"/>
-                </a:solidFill>
-                <a:latin typeface="Arial"/>
-              </a:rPr>
-              <a:t> </a:t>
-            </a:r>
-            <a:r>
-              <a:rPr sz="1300" b="0" dirty="0" err="1">
-                <a:solidFill>
-                  <a:srgbClr val="1F2937"/>
-                </a:solidFill>
-                <a:latin typeface="Arial"/>
-              </a:rPr>
-              <a:t>kiểm</a:t>
-            </a:r>
-            <a:r>
-              <a:rPr sz="1300" b="0" dirty="0">
-                <a:solidFill>
-                  <a:srgbClr val="1F2937"/>
-                </a:solidFill>
-                <a:latin typeface="Arial"/>
-              </a:rPr>
-              <a:t> </a:t>
-            </a:r>
-            <a:r>
-              <a:rPr sz="1300" b="0" dirty="0" err="1">
-                <a:solidFill>
-                  <a:srgbClr val="1F2937"/>
-                </a:solidFill>
-                <a:latin typeface="Arial"/>
-              </a:rPr>
-              <a:t>soát</a:t>
-            </a:r>
-            <a:r>
-              <a:rPr sz="1300" b="0" dirty="0">
-                <a:solidFill>
-                  <a:srgbClr val="1F2937"/>
-                </a:solidFill>
-                <a:latin typeface="Arial"/>
-              </a:rPr>
-              <a:t> </a:t>
-            </a:r>
-            <a:r>
-              <a:rPr sz="1300" b="0" dirty="0" err="1">
-                <a:solidFill>
-                  <a:srgbClr val="1F2937"/>
-                </a:solidFill>
-                <a:latin typeface="Arial"/>
-              </a:rPr>
-              <a:t>dữ</a:t>
-            </a:r>
-            <a:r>
-              <a:rPr sz="1300" b="0" dirty="0">
-                <a:solidFill>
-                  <a:srgbClr val="1F2937"/>
-                </a:solidFill>
-                <a:latin typeface="Arial"/>
-              </a:rPr>
-              <a:t> </a:t>
-            </a:r>
-            <a:r>
-              <a:rPr sz="1300" b="0" dirty="0" err="1">
-                <a:solidFill>
-                  <a:srgbClr val="1F2937"/>
-                </a:solidFill>
-                <a:latin typeface="Arial"/>
-              </a:rPr>
-              <a:t>liệu</a:t>
-            </a:r>
-            <a:r>
-              <a:rPr sz="1300" b="0" dirty="0">
-                <a:solidFill>
-                  <a:srgbClr val="1F2937"/>
-                </a:solidFill>
-                <a:latin typeface="Arial"/>
-              </a:rPr>
-              <a:t> </a:t>
-            </a:r>
-            <a:r>
-              <a:rPr sz="1300" b="0" dirty="0" err="1">
-                <a:solidFill>
-                  <a:srgbClr val="1F2937"/>
-                </a:solidFill>
-                <a:latin typeface="Arial"/>
-              </a:rPr>
-              <a:t>công</a:t>
-            </a:r>
-            <a:r>
-              <a:rPr sz="1300" b="0" dirty="0">
-                <a:solidFill>
-                  <a:srgbClr val="1F2937"/>
-                </a:solidFill>
-                <a:latin typeface="Arial"/>
-              </a:rPr>
-              <a:t> </a:t>
-            </a:r>
-            <a:r>
-              <a:rPr sz="1300" b="0" dirty="0" err="1">
-                <a:solidFill>
-                  <a:srgbClr val="1F2937"/>
-                </a:solidFill>
-                <a:latin typeface="Arial"/>
-              </a:rPr>
-              <a:t>bố</a:t>
-            </a:r>
-            <a:r>
-              <a:rPr sz="1300" b="0" dirty="0">
-                <a:solidFill>
-                  <a:srgbClr val="1F2937"/>
-                </a:solidFill>
-                <a:latin typeface="Arial"/>
-              </a:rPr>
-              <a:t>.</a:t>
+              <a:rPr sz="1300" b="0">
+                <a:solidFill>
+                  <a:srgbClr val="1F2937"/>
+                </a:solidFill>
+                <a:latin typeface="Arial"/>
+              </a:rPr>
+              <a:t>•  Cần phân quyền người dùng và kiểm soát dữ liệu công bố.</a:t>
             </a:r>
           </a:p>
         </p:txBody>
@@ -14698,175 +13931,13 @@
               </a:defRPr>
             </a:pPr>
             <a:r>
-              <a:rPr sz="1300" b="0" dirty="0">
-                <a:solidFill>
-                  <a:srgbClr val="1F2937"/>
-                </a:solidFill>
-                <a:latin typeface="Arial"/>
-              </a:rPr>
-              <a:t>•  </a:t>
-            </a:r>
-            <a:r>
-              <a:rPr sz="1300" b="0" dirty="0" err="1">
-                <a:solidFill>
-                  <a:srgbClr val="1F2937"/>
-                </a:solidFill>
-                <a:latin typeface="Arial"/>
-              </a:rPr>
-              <a:t>Xây</a:t>
-            </a:r>
-            <a:r>
-              <a:rPr sz="1300" b="0" dirty="0">
-                <a:solidFill>
-                  <a:srgbClr val="1F2937"/>
-                </a:solidFill>
-                <a:latin typeface="Arial"/>
-              </a:rPr>
-              <a:t> </a:t>
-            </a:r>
-            <a:r>
-              <a:rPr sz="1300" b="0" dirty="0" err="1">
-                <a:solidFill>
-                  <a:srgbClr val="1F2937"/>
-                </a:solidFill>
-                <a:latin typeface="Arial"/>
-              </a:rPr>
-              <a:t>dựng</a:t>
-            </a:r>
-            <a:r>
-              <a:rPr sz="1300" b="0" dirty="0">
-                <a:solidFill>
-                  <a:srgbClr val="1F2937"/>
-                </a:solidFill>
-                <a:latin typeface="Arial"/>
-              </a:rPr>
-              <a:t> web app </a:t>
-            </a:r>
-            <a:r>
-              <a:rPr sz="1300" b="0" dirty="0" err="1">
-                <a:solidFill>
-                  <a:srgbClr val="1F2937"/>
-                </a:solidFill>
-                <a:latin typeface="Arial"/>
-              </a:rPr>
-              <a:t>dò</a:t>
-            </a:r>
-            <a:r>
-              <a:rPr sz="1300" b="0" dirty="0">
-                <a:solidFill>
-                  <a:srgbClr val="1F2937"/>
-                </a:solidFill>
-                <a:latin typeface="Arial"/>
-              </a:rPr>
-              <a:t> </a:t>
-            </a:r>
-            <a:r>
-              <a:rPr sz="1300" b="0" dirty="0" err="1">
-                <a:solidFill>
-                  <a:srgbClr val="1F2937"/>
-                </a:solidFill>
-                <a:latin typeface="Arial"/>
-              </a:rPr>
-              <a:t>vé</a:t>
-            </a:r>
-            <a:r>
-              <a:rPr sz="1300" b="0" dirty="0">
-                <a:solidFill>
-                  <a:srgbClr val="1F2937"/>
-                </a:solidFill>
-                <a:latin typeface="Arial"/>
-              </a:rPr>
-              <a:t> </a:t>
-            </a:r>
-            <a:r>
-              <a:rPr sz="1300" b="0" dirty="0" err="1">
-                <a:solidFill>
-                  <a:srgbClr val="1F2937"/>
-                </a:solidFill>
-                <a:latin typeface="Arial"/>
-              </a:rPr>
-              <a:t>số</a:t>
-            </a:r>
-            <a:r>
-              <a:rPr sz="1300" b="0" dirty="0">
-                <a:solidFill>
-                  <a:srgbClr val="1F2937"/>
-                </a:solidFill>
-                <a:latin typeface="Arial"/>
-              </a:rPr>
-              <a:t> </a:t>
-            </a:r>
-            <a:r>
-              <a:rPr sz="1300" b="0" dirty="0" err="1">
-                <a:solidFill>
-                  <a:srgbClr val="1F2937"/>
-                </a:solidFill>
-                <a:latin typeface="Arial"/>
-              </a:rPr>
-              <a:t>theo</a:t>
-            </a:r>
-            <a:r>
-              <a:rPr sz="1300" b="0" dirty="0">
-                <a:solidFill>
-                  <a:srgbClr val="1F2937"/>
-                </a:solidFill>
-                <a:latin typeface="Arial"/>
-              </a:rPr>
-              <a:t> </a:t>
-            </a:r>
-            <a:r>
-              <a:rPr sz="1300" b="0" dirty="0" err="1">
-                <a:solidFill>
-                  <a:srgbClr val="1F2937"/>
-                </a:solidFill>
-                <a:latin typeface="Arial"/>
-              </a:rPr>
-              <a:t>đài</a:t>
-            </a:r>
-            <a:r>
-              <a:rPr sz="1300" b="0" dirty="0">
-                <a:solidFill>
-                  <a:srgbClr val="1F2937"/>
-                </a:solidFill>
-                <a:latin typeface="Arial"/>
-              </a:rPr>
-              <a:t> </a:t>
-            </a:r>
-            <a:r>
-              <a:rPr sz="1300" b="0" dirty="0" err="1">
-                <a:solidFill>
-                  <a:srgbClr val="1F2937"/>
-                </a:solidFill>
-                <a:latin typeface="Arial"/>
-              </a:rPr>
-              <a:t>và</a:t>
-            </a:r>
-            <a:r>
-              <a:rPr sz="1300" b="0" dirty="0">
-                <a:solidFill>
-                  <a:srgbClr val="1F2937"/>
-                </a:solidFill>
-                <a:latin typeface="Arial"/>
-              </a:rPr>
-              <a:t> </a:t>
-            </a:r>
-            <a:r>
-              <a:rPr sz="1300" b="0" dirty="0" err="1">
-                <a:solidFill>
-                  <a:srgbClr val="1F2937"/>
-                </a:solidFill>
-                <a:latin typeface="Arial"/>
-              </a:rPr>
-              <a:t>ngày</a:t>
-            </a:r>
-            <a:r>
-              <a:rPr sz="1300" b="0" dirty="0">
-                <a:solidFill>
-                  <a:srgbClr val="1F2937"/>
-                </a:solidFill>
-                <a:latin typeface="Arial"/>
-              </a:rPr>
-              <a:t> quay.</a:t>
+              <a:rPr sz="1300" b="0">
+                <a:solidFill>
+                  <a:srgbClr val="1F2937"/>
+                </a:solidFill>
+                <a:latin typeface="Arial"/>
+              </a:rPr>
+              <a:t>•  Xây dựng web app dò vé số theo đài và ngày quay.</a:t>
             </a:r>
           </a:p>
           <a:p>
@@ -14885,211 +13956,13 @@
               </a:defRPr>
             </a:pPr>
             <a:r>
-              <a:rPr sz="1300" b="0" dirty="0">
-                <a:solidFill>
-                  <a:srgbClr val="1F2937"/>
-                </a:solidFill>
-                <a:latin typeface="Arial"/>
-              </a:rPr>
-              <a:t>•  </a:t>
-            </a:r>
-            <a:r>
-              <a:rPr sz="1300" b="0" dirty="0" err="1">
-                <a:solidFill>
-                  <a:srgbClr val="1F2937"/>
-                </a:solidFill>
-                <a:latin typeface="Arial"/>
-              </a:rPr>
-              <a:t>Hỗ</a:t>
-            </a:r>
-            <a:r>
-              <a:rPr sz="1300" b="0" dirty="0">
-                <a:solidFill>
-                  <a:srgbClr val="1F2937"/>
-                </a:solidFill>
-                <a:latin typeface="Arial"/>
-              </a:rPr>
-              <a:t> </a:t>
-            </a:r>
-            <a:r>
-              <a:rPr sz="1300" b="0" dirty="0" err="1">
-                <a:solidFill>
-                  <a:srgbClr val="1F2937"/>
-                </a:solidFill>
-                <a:latin typeface="Arial"/>
-              </a:rPr>
-              <a:t>trợ</a:t>
-            </a:r>
-            <a:r>
-              <a:rPr sz="1300" b="0" dirty="0">
-                <a:solidFill>
-                  <a:srgbClr val="1F2937"/>
-                </a:solidFill>
-                <a:latin typeface="Arial"/>
-              </a:rPr>
-              <a:t> 3 </a:t>
-            </a:r>
-            <a:r>
-              <a:rPr sz="1300" b="0" dirty="0" err="1">
-                <a:solidFill>
-                  <a:srgbClr val="1F2937"/>
-                </a:solidFill>
-                <a:latin typeface="Arial"/>
-              </a:rPr>
-              <a:t>nhóm</a:t>
-            </a:r>
-            <a:r>
-              <a:rPr sz="1300" b="0" dirty="0">
-                <a:solidFill>
-                  <a:srgbClr val="1F2937"/>
-                </a:solidFill>
-                <a:latin typeface="Arial"/>
-              </a:rPr>
-              <a:t> </a:t>
-            </a:r>
-            <a:r>
-              <a:rPr sz="1300" b="0" dirty="0" err="1">
-                <a:solidFill>
-                  <a:srgbClr val="1F2937"/>
-                </a:solidFill>
-                <a:latin typeface="Arial"/>
-              </a:rPr>
-              <a:t>người</a:t>
-            </a:r>
-            <a:r>
-              <a:rPr sz="1300" b="0" dirty="0">
-                <a:solidFill>
-                  <a:srgbClr val="1F2937"/>
-                </a:solidFill>
-                <a:latin typeface="Arial"/>
-              </a:rPr>
-              <a:t> </a:t>
-            </a:r>
-            <a:r>
-              <a:rPr sz="1300" b="0" dirty="0" err="1">
-                <a:solidFill>
-                  <a:srgbClr val="1F2937"/>
-                </a:solidFill>
-                <a:latin typeface="Arial"/>
-              </a:rPr>
-              <a:t>dùng</a:t>
-            </a:r>
-            <a:r>
-              <a:rPr sz="1300" b="0" dirty="0">
-                <a:solidFill>
-                  <a:srgbClr val="1F2937"/>
-                </a:solidFill>
-                <a:latin typeface="Arial"/>
-              </a:rPr>
-              <a:t>: Guest (</a:t>
-            </a:r>
-            <a:r>
-              <a:rPr sz="1300" b="0" dirty="0" err="1">
-                <a:solidFill>
-                  <a:srgbClr val="1F2937"/>
-                </a:solidFill>
-                <a:latin typeface="Arial"/>
-              </a:rPr>
-              <a:t>chưa</a:t>
-            </a:r>
-            <a:r>
-              <a:rPr sz="1300" b="0" dirty="0">
-                <a:solidFill>
-                  <a:srgbClr val="1F2937"/>
-                </a:solidFill>
-                <a:latin typeface="Arial"/>
-              </a:rPr>
-              <a:t> </a:t>
-            </a:r>
-            <a:r>
-              <a:rPr sz="1300" b="0" dirty="0" err="1">
-                <a:solidFill>
-                  <a:srgbClr val="1F2937"/>
-                </a:solidFill>
-                <a:latin typeface="Arial"/>
-              </a:rPr>
-              <a:t>đăng</a:t>
-            </a:r>
-            <a:r>
-              <a:rPr sz="1300" b="0" dirty="0">
-                <a:solidFill>
-                  <a:srgbClr val="1F2937"/>
-                </a:solidFill>
-                <a:latin typeface="Arial"/>
-              </a:rPr>
-              <a:t> </a:t>
-            </a:r>
-            <a:r>
-              <a:rPr sz="1300" b="0" dirty="0" err="1">
-                <a:solidFill>
-                  <a:srgbClr val="1F2937"/>
-                </a:solidFill>
-                <a:latin typeface="Arial"/>
-              </a:rPr>
-              <a:t>nhập</a:t>
-            </a:r>
-            <a:r>
-              <a:rPr sz="1300" b="0" dirty="0">
-                <a:solidFill>
-                  <a:srgbClr val="1F2937"/>
-                </a:solidFill>
-                <a:latin typeface="Arial"/>
-              </a:rPr>
-              <a:t>), User (</a:t>
-            </a:r>
-            <a:r>
-              <a:rPr sz="1300" b="0" dirty="0" err="1">
-                <a:solidFill>
-                  <a:srgbClr val="1F2937"/>
-                </a:solidFill>
-                <a:latin typeface="Arial"/>
-              </a:rPr>
-              <a:t>đã</a:t>
-            </a:r>
-            <a:r>
-              <a:rPr sz="1300" b="0" dirty="0">
-                <a:solidFill>
-                  <a:srgbClr val="1F2937"/>
-                </a:solidFill>
-                <a:latin typeface="Arial"/>
-              </a:rPr>
-              <a:t> </a:t>
-            </a:r>
-            <a:r>
-              <a:rPr sz="1300" b="0" dirty="0" err="1">
-                <a:solidFill>
-                  <a:srgbClr val="1F2937"/>
-                </a:solidFill>
-                <a:latin typeface="Arial"/>
-              </a:rPr>
-              <a:t>đăng</a:t>
-            </a:r>
-            <a:r>
-              <a:rPr sz="1300" b="0" dirty="0">
-                <a:solidFill>
-                  <a:srgbClr val="1F2937"/>
-                </a:solidFill>
-                <a:latin typeface="Arial"/>
-              </a:rPr>
-              <a:t> </a:t>
-            </a:r>
-            <a:r>
-              <a:rPr sz="1300" b="0" dirty="0" err="1">
-                <a:solidFill>
-                  <a:srgbClr val="1F2937"/>
-                </a:solidFill>
-                <a:latin typeface="Arial"/>
-              </a:rPr>
-              <a:t>nhập</a:t>
-            </a:r>
-            <a:r>
-              <a:rPr sz="1300" b="0" dirty="0">
-                <a:solidFill>
-                  <a:srgbClr val="1F2937"/>
-                </a:solidFill>
-                <a:latin typeface="Arial"/>
-              </a:rPr>
-              <a:t>), Admin.</a:t>
+              <a:rPr sz="1300" b="0">
+                <a:solidFill>
+                  <a:srgbClr val="1F2937"/>
+                </a:solidFill>
+                <a:latin typeface="Arial"/>
+              </a:rPr>
+              <a:t>•  Hỗ trợ 3 nhóm người dùng: Guest (chưa đăng nhập), User (đã đăng nhập), Admin.</a:t>
             </a:r>
           </a:p>
           <a:p>
@@ -15108,139 +13981,13 @@
               </a:defRPr>
             </a:pPr>
             <a:r>
-              <a:rPr sz="1300" b="0" dirty="0">
-                <a:solidFill>
-                  <a:srgbClr val="1F2937"/>
-                </a:solidFill>
-                <a:latin typeface="Arial"/>
-              </a:rPr>
-              <a:t>•  Cho </a:t>
-            </a:r>
-            <a:r>
-              <a:rPr sz="1300" b="0" dirty="0" err="1">
-                <a:solidFill>
-                  <a:srgbClr val="1F2937"/>
-                </a:solidFill>
-                <a:latin typeface="Arial"/>
-              </a:rPr>
-              <a:t>phép</a:t>
-            </a:r>
-            <a:r>
-              <a:rPr sz="1300" b="0" dirty="0">
-                <a:solidFill>
-                  <a:srgbClr val="1F2937"/>
-                </a:solidFill>
-                <a:latin typeface="Arial"/>
-              </a:rPr>
-              <a:t> user </a:t>
-            </a:r>
-            <a:r>
-              <a:rPr sz="1300" b="0" dirty="0" err="1">
-                <a:solidFill>
-                  <a:srgbClr val="1F2937"/>
-                </a:solidFill>
-                <a:latin typeface="Arial"/>
-              </a:rPr>
-              <a:t>dò</a:t>
-            </a:r>
-            <a:r>
-              <a:rPr sz="1300" b="0" dirty="0">
-                <a:solidFill>
-                  <a:srgbClr val="1F2937"/>
-                </a:solidFill>
-                <a:latin typeface="Arial"/>
-              </a:rPr>
-              <a:t> </a:t>
-            </a:r>
-            <a:r>
-              <a:rPr sz="1300" b="0" dirty="0" err="1">
-                <a:solidFill>
-                  <a:srgbClr val="1F2937"/>
-                </a:solidFill>
-                <a:latin typeface="Arial"/>
-              </a:rPr>
-              <a:t>tối</a:t>
-            </a:r>
-            <a:r>
-              <a:rPr sz="1300" b="0" dirty="0">
-                <a:solidFill>
-                  <a:srgbClr val="1F2937"/>
-                </a:solidFill>
-                <a:latin typeface="Arial"/>
-              </a:rPr>
-              <a:t> </a:t>
-            </a:r>
-            <a:r>
-              <a:rPr sz="1300" b="0" dirty="0" err="1">
-                <a:solidFill>
-                  <a:srgbClr val="1F2937"/>
-                </a:solidFill>
-                <a:latin typeface="Arial"/>
-              </a:rPr>
-              <a:t>đa</a:t>
-            </a:r>
-            <a:r>
-              <a:rPr sz="1300" b="0" dirty="0">
-                <a:solidFill>
-                  <a:srgbClr val="1F2937"/>
-                </a:solidFill>
-                <a:latin typeface="Arial"/>
-              </a:rPr>
-              <a:t> 50 </a:t>
-            </a:r>
-            <a:r>
-              <a:rPr sz="1300" b="0" dirty="0" err="1">
-                <a:solidFill>
-                  <a:srgbClr val="1F2937"/>
-                </a:solidFill>
-                <a:latin typeface="Arial"/>
-              </a:rPr>
-              <a:t>vé</a:t>
-            </a:r>
-            <a:r>
-              <a:rPr sz="1300" b="0" dirty="0">
-                <a:solidFill>
-                  <a:srgbClr val="1F2937"/>
-                </a:solidFill>
-                <a:latin typeface="Arial"/>
-              </a:rPr>
-              <a:t> </a:t>
-            </a:r>
-            <a:r>
-              <a:rPr sz="1300" b="0" dirty="0" err="1">
-                <a:solidFill>
-                  <a:srgbClr val="1F2937"/>
-                </a:solidFill>
-                <a:latin typeface="Arial"/>
-              </a:rPr>
-              <a:t>mỗi</a:t>
-            </a:r>
-            <a:r>
-              <a:rPr sz="1300" b="0" dirty="0">
-                <a:solidFill>
-                  <a:srgbClr val="1F2937"/>
-                </a:solidFill>
-                <a:latin typeface="Arial"/>
-              </a:rPr>
-              <a:t> </a:t>
-            </a:r>
-            <a:r>
-              <a:rPr sz="1300" b="0" dirty="0" err="1">
-                <a:solidFill>
-                  <a:srgbClr val="1F2937"/>
-                </a:solidFill>
-                <a:latin typeface="Arial"/>
-              </a:rPr>
-              <a:t>lần</a:t>
-            </a:r>
-            <a:r>
-              <a:rPr sz="1300" b="0" dirty="0">
-                <a:solidFill>
-                  <a:srgbClr val="1F2937"/>
-                </a:solidFill>
-                <a:latin typeface="Arial"/>
-              </a:rPr>
-              <a:t>.</a:t>
+              <a:rPr sz="1300" b="0">
+                <a:solidFill>
+                  <a:srgbClr val="1F2937"/>
+                </a:solidFill>
+                <a:latin typeface="Arial"/>
+              </a:rPr>
+              <a:t>•  Cho phép user dò tối đa 50 vé mỗi lần.</a:t>
             </a:r>
           </a:p>
           <a:p>
@@ -15259,175 +14006,13 @@
               </a:defRPr>
             </a:pPr>
             <a:r>
-              <a:rPr sz="1300" b="0" dirty="0">
-                <a:solidFill>
-                  <a:srgbClr val="1F2937"/>
-                </a:solidFill>
-                <a:latin typeface="Arial"/>
-              </a:rPr>
-              <a:t>•  Lưu </a:t>
-            </a:r>
-            <a:r>
-              <a:rPr sz="1300" b="0" dirty="0" err="1">
-                <a:solidFill>
-                  <a:srgbClr val="1F2937"/>
-                </a:solidFill>
-                <a:latin typeface="Arial"/>
-              </a:rPr>
-              <a:t>lịch</a:t>
-            </a:r>
-            <a:r>
-              <a:rPr sz="1300" b="0" dirty="0">
-                <a:solidFill>
-                  <a:srgbClr val="1F2937"/>
-                </a:solidFill>
-                <a:latin typeface="Arial"/>
-              </a:rPr>
-              <a:t> </a:t>
-            </a:r>
-            <a:r>
-              <a:rPr sz="1300" b="0" dirty="0" err="1">
-                <a:solidFill>
-                  <a:srgbClr val="1F2937"/>
-                </a:solidFill>
-                <a:latin typeface="Arial"/>
-              </a:rPr>
-              <a:t>sử</a:t>
-            </a:r>
-            <a:r>
-              <a:rPr sz="1300" b="0" dirty="0">
-                <a:solidFill>
-                  <a:srgbClr val="1F2937"/>
-                </a:solidFill>
-                <a:latin typeface="Arial"/>
-              </a:rPr>
-              <a:t> </a:t>
-            </a:r>
-            <a:r>
-              <a:rPr sz="1300" b="0" dirty="0" err="1">
-                <a:solidFill>
-                  <a:srgbClr val="1F2937"/>
-                </a:solidFill>
-                <a:latin typeface="Arial"/>
-              </a:rPr>
-              <a:t>dò</a:t>
-            </a:r>
-            <a:r>
-              <a:rPr sz="1300" b="0" dirty="0">
-                <a:solidFill>
-                  <a:srgbClr val="1F2937"/>
-                </a:solidFill>
-                <a:latin typeface="Arial"/>
-              </a:rPr>
-              <a:t> </a:t>
-            </a:r>
-            <a:r>
-              <a:rPr sz="1300" b="0" dirty="0" err="1">
-                <a:solidFill>
-                  <a:srgbClr val="1F2937"/>
-                </a:solidFill>
-                <a:latin typeface="Arial"/>
-              </a:rPr>
-              <a:t>và</a:t>
-            </a:r>
-            <a:r>
-              <a:rPr sz="1300" b="0" dirty="0">
-                <a:solidFill>
-                  <a:srgbClr val="1F2937"/>
-                </a:solidFill>
-                <a:latin typeface="Arial"/>
-              </a:rPr>
-              <a:t> </a:t>
-            </a:r>
-            <a:r>
-              <a:rPr sz="1300" b="0" dirty="0" err="1">
-                <a:solidFill>
-                  <a:srgbClr val="1F2937"/>
-                </a:solidFill>
-                <a:latin typeface="Arial"/>
-              </a:rPr>
-              <a:t>thống</a:t>
-            </a:r>
-            <a:r>
-              <a:rPr sz="1300" b="0" dirty="0">
-                <a:solidFill>
-                  <a:srgbClr val="1F2937"/>
-                </a:solidFill>
-                <a:latin typeface="Arial"/>
-              </a:rPr>
-              <a:t> </a:t>
-            </a:r>
-            <a:r>
-              <a:rPr sz="1300" b="0" dirty="0" err="1">
-                <a:solidFill>
-                  <a:srgbClr val="1F2937"/>
-                </a:solidFill>
-                <a:latin typeface="Arial"/>
-              </a:rPr>
-              <a:t>kê</a:t>
-            </a:r>
-            <a:r>
-              <a:rPr sz="1300" b="0" dirty="0">
-                <a:solidFill>
-                  <a:srgbClr val="1F2937"/>
-                </a:solidFill>
-                <a:latin typeface="Arial"/>
-              </a:rPr>
-              <a:t> chi </a:t>
-            </a:r>
-            <a:r>
-              <a:rPr sz="1300" b="0" dirty="0" err="1">
-                <a:solidFill>
-                  <a:srgbClr val="1F2937"/>
-                </a:solidFill>
-                <a:latin typeface="Arial"/>
-              </a:rPr>
-              <a:t>tiêu</a:t>
-            </a:r>
-            <a:r>
-              <a:rPr sz="1300" b="0" dirty="0">
-                <a:solidFill>
-                  <a:srgbClr val="1F2937"/>
-                </a:solidFill>
-                <a:latin typeface="Arial"/>
-              </a:rPr>
-              <a:t> / </a:t>
-            </a:r>
-            <a:r>
-              <a:rPr sz="1300" b="0" dirty="0" err="1">
-                <a:solidFill>
-                  <a:srgbClr val="1F2937"/>
-                </a:solidFill>
-                <a:latin typeface="Arial"/>
-              </a:rPr>
-              <a:t>trúng</a:t>
-            </a:r>
-            <a:r>
-              <a:rPr sz="1300" b="0" dirty="0">
-                <a:solidFill>
-                  <a:srgbClr val="1F2937"/>
-                </a:solidFill>
-                <a:latin typeface="Arial"/>
-              </a:rPr>
-              <a:t> </a:t>
-            </a:r>
-            <a:r>
-              <a:rPr sz="1300" b="0" dirty="0" err="1">
-                <a:solidFill>
-                  <a:srgbClr val="1F2937"/>
-                </a:solidFill>
-                <a:latin typeface="Arial"/>
-              </a:rPr>
-              <a:t>thưởng</a:t>
-            </a:r>
-            <a:r>
-              <a:rPr sz="1300" b="0" dirty="0">
-                <a:solidFill>
-                  <a:srgbClr val="1F2937"/>
-                </a:solidFill>
-                <a:latin typeface="Arial"/>
-              </a:rPr>
-              <a:t>.</a:t>
+              <a:rPr sz="1300" b="0">
+                <a:solidFill>
+                  <a:srgbClr val="1F2937"/>
+                </a:solidFill>
+                <a:latin typeface="Arial"/>
+              </a:rPr>
+              <a:t>•  Lưu lịch sử dò và thống kê chi tiêu / trúng thưởng.</a:t>
             </a:r>
           </a:p>
           <a:p>
@@ -15446,175 +14031,13 @@
               </a:defRPr>
             </a:pPr>
             <a:r>
-              <a:rPr sz="1300" b="0" dirty="0">
-                <a:solidFill>
-                  <a:srgbClr val="1F2937"/>
-                </a:solidFill>
-                <a:latin typeface="Arial"/>
-              </a:rPr>
-              <a:t>•  Admin </a:t>
-            </a:r>
-            <a:r>
-              <a:rPr sz="1300" b="0" dirty="0" err="1">
-                <a:solidFill>
-                  <a:srgbClr val="1F2937"/>
-                </a:solidFill>
-                <a:latin typeface="Arial"/>
-              </a:rPr>
-              <a:t>quản</a:t>
-            </a:r>
-            <a:r>
-              <a:rPr sz="1300" b="0" dirty="0">
-                <a:solidFill>
-                  <a:srgbClr val="1F2937"/>
-                </a:solidFill>
-                <a:latin typeface="Arial"/>
-              </a:rPr>
-              <a:t> </a:t>
-            </a:r>
-            <a:r>
-              <a:rPr sz="1300" b="0" dirty="0" err="1">
-                <a:solidFill>
-                  <a:srgbClr val="1F2937"/>
-                </a:solidFill>
-                <a:latin typeface="Arial"/>
-              </a:rPr>
-              <a:t>lý</a:t>
-            </a:r>
-            <a:r>
-              <a:rPr sz="1300" b="0" dirty="0">
-                <a:solidFill>
-                  <a:srgbClr val="1F2937"/>
-                </a:solidFill>
-                <a:latin typeface="Arial"/>
-              </a:rPr>
-              <a:t> </a:t>
-            </a:r>
-            <a:r>
-              <a:rPr sz="1300" b="0" dirty="0" err="1">
-                <a:solidFill>
-                  <a:srgbClr val="1F2937"/>
-                </a:solidFill>
-                <a:latin typeface="Arial"/>
-              </a:rPr>
-              <a:t>kết</a:t>
-            </a:r>
-            <a:r>
-              <a:rPr sz="1300" b="0" dirty="0">
-                <a:solidFill>
-                  <a:srgbClr val="1F2937"/>
-                </a:solidFill>
-                <a:latin typeface="Arial"/>
-              </a:rPr>
-              <a:t> </a:t>
-            </a:r>
-            <a:r>
-              <a:rPr sz="1300" b="0" dirty="0" err="1">
-                <a:solidFill>
-                  <a:srgbClr val="1F2937"/>
-                </a:solidFill>
-                <a:latin typeface="Arial"/>
-              </a:rPr>
-              <a:t>quả</a:t>
-            </a:r>
-            <a:r>
-              <a:rPr sz="1300" b="0" dirty="0">
-                <a:solidFill>
-                  <a:srgbClr val="1F2937"/>
-                </a:solidFill>
-                <a:latin typeface="Arial"/>
-              </a:rPr>
-              <a:t> </a:t>
-            </a:r>
-            <a:r>
-              <a:rPr sz="1300" b="0" dirty="0" err="1">
-                <a:solidFill>
-                  <a:srgbClr val="1F2937"/>
-                </a:solidFill>
-                <a:latin typeface="Arial"/>
-              </a:rPr>
-              <a:t>xổ</a:t>
-            </a:r>
-            <a:r>
-              <a:rPr sz="1300" b="0" dirty="0">
-                <a:solidFill>
-                  <a:srgbClr val="1F2937"/>
-                </a:solidFill>
-                <a:latin typeface="Arial"/>
-              </a:rPr>
-              <a:t> </a:t>
-            </a:r>
-            <a:r>
-              <a:rPr sz="1300" b="0" dirty="0" err="1">
-                <a:solidFill>
-                  <a:srgbClr val="1F2937"/>
-                </a:solidFill>
-                <a:latin typeface="Arial"/>
-              </a:rPr>
-              <a:t>số</a:t>
-            </a:r>
-            <a:r>
-              <a:rPr sz="1300" b="0" dirty="0">
-                <a:solidFill>
-                  <a:srgbClr val="1F2937"/>
-                </a:solidFill>
-                <a:latin typeface="Arial"/>
-              </a:rPr>
-              <a:t> </a:t>
-            </a:r>
-            <a:r>
-              <a:rPr sz="1300" b="0" dirty="0" err="1">
-                <a:solidFill>
-                  <a:srgbClr val="1F2937"/>
-                </a:solidFill>
-                <a:latin typeface="Arial"/>
-              </a:rPr>
-              <a:t>và</a:t>
-            </a:r>
-            <a:r>
-              <a:rPr sz="1300" b="0" dirty="0">
-                <a:solidFill>
-                  <a:srgbClr val="1F2937"/>
-                </a:solidFill>
-                <a:latin typeface="Arial"/>
-              </a:rPr>
-              <a:t> </a:t>
-            </a:r>
-            <a:r>
-              <a:rPr sz="1300" b="0" dirty="0" err="1">
-                <a:solidFill>
-                  <a:srgbClr val="1F2937"/>
-                </a:solidFill>
-                <a:latin typeface="Arial"/>
-              </a:rPr>
-              <a:t>người</a:t>
-            </a:r>
-            <a:r>
-              <a:rPr sz="1300" b="0" dirty="0">
-                <a:solidFill>
-                  <a:srgbClr val="1F2937"/>
-                </a:solidFill>
-                <a:latin typeface="Arial"/>
-              </a:rPr>
-              <a:t> </a:t>
-            </a:r>
-            <a:r>
-              <a:rPr sz="1300" b="0" dirty="0" err="1">
-                <a:solidFill>
-                  <a:srgbClr val="1F2937"/>
-                </a:solidFill>
-                <a:latin typeface="Arial"/>
-              </a:rPr>
-              <a:t>dùng</a:t>
-            </a:r>
-            <a:r>
-              <a:rPr sz="1300" b="0" dirty="0">
-                <a:solidFill>
-                  <a:srgbClr val="1F2937"/>
-                </a:solidFill>
-                <a:latin typeface="Arial"/>
-              </a:rPr>
-              <a:t>.</a:t>
+              <a:rPr sz="1300" b="0">
+                <a:solidFill>
+                  <a:srgbClr val="1F2937"/>
+                </a:solidFill>
+                <a:latin typeface="Arial"/>
+              </a:rPr>
+              <a:t>•  Admin quản lý kết quả xổ số và người dùng.</a:t>
             </a:r>
           </a:p>
         </p:txBody>
@@ -15627,8 +14050,8 @@
         </p:nvSpPr>
         <p:spPr>
           <a:xfrm>
-            <a:off x="777240" y="5166360"/>
-            <a:ext cx="10634472" cy="1173480"/>
+            <a:off x="762000" y="5148072"/>
+            <a:ext cx="10634472" cy="1271693"/>
           </a:xfrm>
           <a:prstGeom prst="roundRect">
             <a:avLst>
@@ -15677,7 +14100,7 @@
         <p:spPr>
           <a:xfrm>
             <a:off x="777240" y="5330952"/>
-            <a:ext cx="82296" cy="630936"/>
+            <a:ext cx="60960" cy="1021080"/>
           </a:xfrm>
           <a:prstGeom prst="rect">
             <a:avLst/>
@@ -15769,7 +14192,7 @@
         </p:nvSpPr>
         <p:spPr>
           <a:xfrm>
-            <a:off x="963168" y="5596128"/>
+            <a:off x="982980" y="5650653"/>
             <a:ext cx="10222992" cy="210312"/>
           </a:xfrm>
           <a:prstGeom prst="rect">
@@ -16820,7 +15243,7 @@
         <p:spPr>
           <a:xfrm>
             <a:off x="1005840" y="2203704"/>
-            <a:ext cx="4800600" cy="1753044"/>
+            <a:ext cx="4800600" cy="3730752"/>
           </a:xfrm>
           <a:prstGeom prst="rect">
             <a:avLst/>
@@ -16848,297 +15271,13 @@
               </a:defRPr>
             </a:pPr>
             <a:r>
-              <a:rPr sz="1300" b="0" dirty="0">
-                <a:solidFill>
-                  <a:srgbClr val="1F2937"/>
-                </a:solidFill>
-                <a:latin typeface="Arial"/>
-              </a:rPr>
-              <a:t>•  </a:t>
-            </a:r>
-            <a:r>
-              <a:rPr sz="1300" b="0" dirty="0" err="1">
-                <a:solidFill>
-                  <a:srgbClr val="1F2937"/>
-                </a:solidFill>
-                <a:latin typeface="Arial"/>
-              </a:rPr>
-              <a:t>Chưa</a:t>
-            </a:r>
-            <a:r>
-              <a:rPr sz="1300" b="0" dirty="0">
-                <a:solidFill>
-                  <a:srgbClr val="1F2937"/>
-                </a:solidFill>
-                <a:latin typeface="Arial"/>
-              </a:rPr>
-              <a:t> </a:t>
-            </a:r>
-            <a:r>
-              <a:rPr sz="1300" b="0" dirty="0" err="1">
-                <a:solidFill>
-                  <a:srgbClr val="1F2937"/>
-                </a:solidFill>
-                <a:latin typeface="Arial"/>
-              </a:rPr>
-              <a:t>hoàn</a:t>
-            </a:r>
-            <a:r>
-              <a:rPr sz="1300" b="0" dirty="0">
-                <a:solidFill>
-                  <a:srgbClr val="1F2937"/>
-                </a:solidFill>
-                <a:latin typeface="Arial"/>
-              </a:rPr>
-              <a:t> </a:t>
-            </a:r>
-            <a:r>
-              <a:rPr sz="1300" b="0" dirty="0" err="1">
-                <a:solidFill>
-                  <a:srgbClr val="1F2937"/>
-                </a:solidFill>
-                <a:latin typeface="Arial"/>
-              </a:rPr>
-              <a:t>thành</a:t>
-            </a:r>
-            <a:r>
-              <a:rPr sz="1300" b="0" dirty="0">
-                <a:solidFill>
-                  <a:srgbClr val="1F2937"/>
-                </a:solidFill>
-                <a:latin typeface="Arial"/>
-              </a:rPr>
-              <a:t>: Google AdSense (FR 1.7), gamification comments (FR 2.6), preview </a:t>
-            </a:r>
-            <a:r>
-              <a:rPr sz="1300" b="0" dirty="0" err="1">
-                <a:solidFill>
-                  <a:srgbClr val="1F2937"/>
-                </a:solidFill>
-                <a:latin typeface="Arial"/>
-              </a:rPr>
-              <a:t>vé</a:t>
-            </a:r>
-            <a:r>
-              <a:rPr sz="1300" b="0" dirty="0">
-                <a:solidFill>
-                  <a:srgbClr val="1F2937"/>
-                </a:solidFill>
-                <a:latin typeface="Arial"/>
-              </a:rPr>
-              <a:t> </a:t>
-            </a:r>
-            <a:r>
-              <a:rPr sz="1300" b="0" dirty="0" err="1">
-                <a:solidFill>
-                  <a:srgbClr val="1F2937"/>
-                </a:solidFill>
-                <a:latin typeface="Arial"/>
-              </a:rPr>
-              <a:t>dò</a:t>
-            </a:r>
-            <a:r>
-              <a:rPr sz="1300" b="0" dirty="0">
-                <a:solidFill>
-                  <a:srgbClr val="1F2937"/>
-                </a:solidFill>
-                <a:latin typeface="Arial"/>
-              </a:rPr>
-              <a:t> (FR 3.15).</a:t>
-            </a:r>
-          </a:p>
-          <a:p>
-            <a:pPr>
-              <a:lnSpc>
-                <a:spcPct val="108000"/>
-              </a:lnSpc>
-              <a:spcAft>
-                <a:spcPts val="500"/>
-              </a:spcAft>
-              <a:defRPr sz="1300" b="0">
-                <a:solidFill>
-                  <a:srgbClr val="1F2937"/>
-                </a:solidFill>
-                <a:latin typeface="Arial"/>
-              </a:defRPr>
-            </a:pPr>
-            <a:r>
-              <a:rPr sz="1300" b="0" dirty="0">
-                <a:solidFill>
-                  <a:srgbClr val="1F2937"/>
-                </a:solidFill>
-                <a:latin typeface="Arial"/>
-              </a:rPr>
-              <a:t>•  </a:t>
-            </a:r>
-            <a:r>
-              <a:rPr lang="en-US" sz="1300" dirty="0"/>
-              <a:t>Code coverage 70.66%. </a:t>
-            </a:r>
-            <a:r>
-              <a:rPr lang="en-US" sz="1300" dirty="0" err="1"/>
-              <a:t>Phần</a:t>
-            </a:r>
-            <a:r>
-              <a:rPr lang="en-US" sz="1300" dirty="0"/>
-              <a:t> </a:t>
-            </a:r>
-            <a:r>
-              <a:rPr lang="en-US" sz="1300" dirty="0" err="1"/>
-              <a:t>chưa</a:t>
-            </a:r>
-            <a:r>
-              <a:rPr lang="en-US" sz="1300" dirty="0"/>
-              <a:t> </a:t>
-            </a:r>
-            <a:r>
-              <a:rPr lang="en-US" sz="1300" dirty="0" err="1"/>
-              <a:t>phủ</a:t>
-            </a:r>
-            <a:r>
-              <a:rPr lang="en-US" sz="1300" dirty="0"/>
-              <a:t>: </a:t>
-            </a:r>
-            <a:r>
-              <a:rPr lang="en-US" sz="1300" dirty="0" err="1"/>
-              <a:t>các</a:t>
-            </a:r>
-            <a:r>
-              <a:rPr lang="en-US" sz="1300" dirty="0"/>
-              <a:t> </a:t>
-            </a:r>
-            <a:r>
-              <a:rPr lang="en-US" sz="1300" dirty="0" err="1"/>
-              <a:t>lớp</a:t>
-            </a:r>
-            <a:r>
-              <a:rPr lang="en-US" sz="1300" dirty="0"/>
-              <a:t> infra </a:t>
-            </a:r>
-            <a:r>
-              <a:rPr lang="en-US" sz="1300" dirty="0" err="1"/>
-              <a:t>mỏng</a:t>
-            </a:r>
-            <a:r>
-              <a:rPr lang="en-US" sz="1300" dirty="0"/>
-              <a:t> (</a:t>
-            </a:r>
-            <a:r>
-              <a:rPr lang="en-US" sz="1300" dirty="0" err="1"/>
-              <a:t>JwtService</a:t>
-            </a:r>
-            <a:r>
-              <a:rPr lang="en-US" sz="1300" dirty="0"/>
-              <a:t>, config) </a:t>
-            </a:r>
-            <a:r>
-              <a:rPr lang="en-US" sz="1300" dirty="0" err="1"/>
-              <a:t>và</a:t>
-            </a:r>
-            <a:r>
-              <a:rPr lang="en-US" sz="1300" dirty="0"/>
-              <a:t> </a:t>
-            </a:r>
-            <a:r>
-              <a:rPr lang="en-US" sz="1300" dirty="0" err="1"/>
-              <a:t>một</a:t>
-            </a:r>
-            <a:r>
-              <a:rPr lang="en-US" sz="1300" dirty="0"/>
-              <a:t> </a:t>
-            </a:r>
-            <a:r>
-              <a:rPr lang="en-US" sz="1300" dirty="0" err="1"/>
-              <a:t>số</a:t>
-            </a:r>
-            <a:r>
-              <a:rPr lang="en-US" sz="1300" dirty="0"/>
-              <a:t> </a:t>
-            </a:r>
-            <a:r>
-              <a:rPr lang="en-US" sz="1300" dirty="0" err="1"/>
-              <a:t>nhánh</a:t>
-            </a:r>
-            <a:r>
-              <a:rPr lang="en-US" sz="1300" dirty="0"/>
-              <a:t> </a:t>
-            </a:r>
-            <a:r>
-              <a:rPr lang="en-US" sz="1300" dirty="0" err="1"/>
-              <a:t>lỗi</a:t>
-            </a:r>
-            <a:r>
-              <a:rPr lang="en-US" sz="1300" dirty="0"/>
-              <a:t> </a:t>
-            </a:r>
-            <a:r>
-              <a:rPr lang="en-US" sz="1300" dirty="0" err="1"/>
-              <a:t>hiếm</a:t>
-            </a:r>
-            <a:r>
-              <a:rPr lang="en-US" sz="1300" dirty="0"/>
-              <a:t>.</a:t>
-            </a:r>
-          </a:p>
-          <a:p>
-            <a:pPr>
-              <a:lnSpc>
-                <a:spcPct val="108000"/>
-              </a:lnSpc>
-              <a:spcAft>
-                <a:spcPts val="500"/>
-              </a:spcAft>
-              <a:defRPr sz="1300" b="0">
-                <a:solidFill>
-                  <a:srgbClr val="1F2937"/>
-                </a:solidFill>
-                <a:latin typeface="Arial"/>
-              </a:defRPr>
-            </a:pPr>
-            <a:r>
-              <a:rPr sz="1300" b="0" dirty="0">
-                <a:solidFill>
-                  <a:srgbClr val="1F2937"/>
-                </a:solidFill>
-                <a:latin typeface="Arial"/>
-              </a:rPr>
-              <a:t>•  </a:t>
-            </a:r>
-            <a:r>
-              <a:rPr sz="1300" b="0" dirty="0" err="1">
-                <a:solidFill>
-                  <a:srgbClr val="1F2937"/>
-                </a:solidFill>
-                <a:latin typeface="Arial"/>
-              </a:rPr>
-              <a:t>Chưa</a:t>
-            </a:r>
-            <a:r>
-              <a:rPr sz="1300" b="0" dirty="0">
-                <a:solidFill>
-                  <a:srgbClr val="1F2937"/>
-                </a:solidFill>
-                <a:latin typeface="Arial"/>
-              </a:rPr>
-              <a:t> </a:t>
-            </a:r>
-            <a:r>
-              <a:rPr sz="1300" b="0" dirty="0" err="1">
-                <a:solidFill>
-                  <a:srgbClr val="1F2937"/>
-                </a:solidFill>
-                <a:latin typeface="Arial"/>
-              </a:rPr>
-              <a:t>có</a:t>
-            </a:r>
-            <a:r>
-              <a:rPr sz="1300" b="0" dirty="0">
-                <a:solidFill>
-                  <a:srgbClr val="1F2937"/>
-                </a:solidFill>
-                <a:latin typeface="Arial"/>
-              </a:rPr>
-              <a:t> refresh token.</a:t>
+              <a:rPr sz="1300" b="0">
+                <a:solidFill>
+                  <a:srgbClr val="1F2937"/>
+                </a:solidFill>
+                <a:latin typeface="Arial"/>
+              </a:rPr>
+              <a:t>•  Chưa hoàn thành: Google AdSense (FR 1.7), gamification comments (FR 2.6), preview vé dò (FR 3.15).</a:t>
             </a:r>
           </a:p>
           <a:p>
@@ -17157,67 +15296,13 @@
               </a:defRPr>
             </a:pPr>
             <a:r>
-              <a:rPr sz="1300" b="0" dirty="0">
-                <a:solidFill>
-                  <a:srgbClr val="1F2937"/>
-                </a:solidFill>
-                <a:latin typeface="Arial"/>
-              </a:rPr>
-              <a:t>•  </a:t>
-            </a:r>
-            <a:r>
-              <a:rPr sz="1300" b="0" dirty="0" err="1">
-                <a:solidFill>
-                  <a:srgbClr val="1F2937"/>
-                </a:solidFill>
-                <a:latin typeface="Arial"/>
-              </a:rPr>
-              <a:t>Chưa</a:t>
-            </a:r>
-            <a:r>
-              <a:rPr sz="1300" b="0" dirty="0">
-                <a:solidFill>
-                  <a:srgbClr val="1F2937"/>
-                </a:solidFill>
-                <a:latin typeface="Arial"/>
-              </a:rPr>
-              <a:t> </a:t>
-            </a:r>
-            <a:r>
-              <a:rPr sz="1300" b="0" dirty="0" err="1">
-                <a:solidFill>
-                  <a:srgbClr val="1F2937"/>
-                </a:solidFill>
-                <a:latin typeface="Arial"/>
-              </a:rPr>
-              <a:t>có</a:t>
-            </a:r>
-            <a:r>
-              <a:rPr sz="1300" b="0" dirty="0">
-                <a:solidFill>
-                  <a:srgbClr val="1F2937"/>
-                </a:solidFill>
-                <a:latin typeface="Arial"/>
-              </a:rPr>
-              <a:t> rate limiting </a:t>
-            </a:r>
-            <a:r>
-              <a:rPr sz="1300" b="0" dirty="0" err="1">
-                <a:solidFill>
-                  <a:srgbClr val="1F2937"/>
-                </a:solidFill>
-                <a:latin typeface="Arial"/>
-              </a:rPr>
-              <a:t>hoặc</a:t>
-            </a:r>
-            <a:r>
-              <a:rPr sz="1300" b="0" dirty="0">
-                <a:solidFill>
-                  <a:srgbClr val="1F2937"/>
-                </a:solidFill>
-                <a:latin typeface="Arial"/>
-              </a:rPr>
-              <a:t> CAPTCHA.</a:t>
+              <a:rPr sz="1300" b="0">
+                <a:solidFill>
+                  <a:srgbClr val="1F2937"/>
+                </a:solidFill>
+                <a:latin typeface="Arial"/>
+              </a:rPr>
+              <a:t>•  Reset token lưu plaintext trong DB (hướng cải tiến: chỉ lưu hash).</a:t>
             </a:r>
           </a:p>
           <a:p>
@@ -17236,193 +15321,88 @@
               </a:defRPr>
             </a:pPr>
             <a:r>
-              <a:rPr sz="1300" b="0" dirty="0">
-                <a:solidFill>
-                  <a:srgbClr val="1F2937"/>
-                </a:solidFill>
-                <a:latin typeface="Arial"/>
-              </a:rPr>
-              <a:t>•  </a:t>
-            </a:r>
-            <a:r>
-              <a:rPr sz="1300" b="0" dirty="0" err="1">
-                <a:solidFill>
-                  <a:srgbClr val="1F2937"/>
-                </a:solidFill>
-                <a:latin typeface="Arial"/>
-              </a:rPr>
-              <a:t>Dữ</a:t>
-            </a:r>
-            <a:r>
-              <a:rPr sz="1300" b="0" dirty="0">
-                <a:solidFill>
-                  <a:srgbClr val="1F2937"/>
-                </a:solidFill>
-                <a:latin typeface="Arial"/>
-              </a:rPr>
-              <a:t> </a:t>
-            </a:r>
-            <a:r>
-              <a:rPr sz="1300" b="0" dirty="0" err="1">
-                <a:solidFill>
-                  <a:srgbClr val="1F2937"/>
-                </a:solidFill>
-                <a:latin typeface="Arial"/>
-              </a:rPr>
-              <a:t>liệu</a:t>
-            </a:r>
-            <a:r>
-              <a:rPr sz="1300" b="0" dirty="0">
-                <a:solidFill>
-                  <a:srgbClr val="1F2937"/>
-                </a:solidFill>
-                <a:latin typeface="Arial"/>
-              </a:rPr>
-              <a:t> </a:t>
-            </a:r>
-            <a:r>
-              <a:rPr sz="1300" b="0" dirty="0" err="1">
-                <a:solidFill>
-                  <a:srgbClr val="1F2937"/>
-                </a:solidFill>
-                <a:latin typeface="Arial"/>
-              </a:rPr>
-              <a:t>kết</a:t>
-            </a:r>
-            <a:r>
-              <a:rPr sz="1300" b="0" dirty="0">
-                <a:solidFill>
-                  <a:srgbClr val="1F2937"/>
-                </a:solidFill>
-                <a:latin typeface="Arial"/>
-              </a:rPr>
-              <a:t> </a:t>
-            </a:r>
-            <a:r>
-              <a:rPr sz="1300" b="0" dirty="0" err="1">
-                <a:solidFill>
-                  <a:srgbClr val="1F2937"/>
-                </a:solidFill>
-                <a:latin typeface="Arial"/>
-              </a:rPr>
-              <a:t>quả</a:t>
-            </a:r>
-            <a:r>
-              <a:rPr sz="1300" b="0" dirty="0">
-                <a:solidFill>
-                  <a:srgbClr val="1F2937"/>
-                </a:solidFill>
-                <a:latin typeface="Arial"/>
-              </a:rPr>
-              <a:t> </a:t>
-            </a:r>
-            <a:r>
-              <a:rPr sz="1300" b="0" dirty="0" err="1">
-                <a:solidFill>
-                  <a:srgbClr val="1F2937"/>
-                </a:solidFill>
-                <a:latin typeface="Arial"/>
-              </a:rPr>
-              <a:t>đang</a:t>
-            </a:r>
-            <a:r>
-              <a:rPr sz="1300" b="0" dirty="0">
-                <a:solidFill>
-                  <a:srgbClr val="1F2937"/>
-                </a:solidFill>
-                <a:latin typeface="Arial"/>
-              </a:rPr>
-              <a:t> </a:t>
-            </a:r>
-            <a:r>
-              <a:rPr sz="1300" b="0" dirty="0" err="1">
-                <a:solidFill>
-                  <a:srgbClr val="1F2937"/>
-                </a:solidFill>
-                <a:latin typeface="Arial"/>
-              </a:rPr>
-              <a:t>nhập</a:t>
-            </a:r>
-            <a:r>
-              <a:rPr sz="1300" b="0" dirty="0">
-                <a:solidFill>
-                  <a:srgbClr val="1F2937"/>
-                </a:solidFill>
-                <a:latin typeface="Arial"/>
-              </a:rPr>
-              <a:t> </a:t>
-            </a:r>
-            <a:r>
-              <a:rPr sz="1300" b="0" dirty="0" err="1">
-                <a:solidFill>
-                  <a:srgbClr val="1F2937"/>
-                </a:solidFill>
-                <a:latin typeface="Arial"/>
-              </a:rPr>
-              <a:t>tay</a:t>
-            </a:r>
-            <a:r>
-              <a:rPr sz="1300" b="0" dirty="0">
-                <a:solidFill>
-                  <a:srgbClr val="1F2937"/>
-                </a:solidFill>
-                <a:latin typeface="Arial"/>
-              </a:rPr>
-              <a:t>, </a:t>
-            </a:r>
-            <a:r>
-              <a:rPr sz="1300" b="0" dirty="0" err="1">
-                <a:solidFill>
-                  <a:srgbClr val="1F2937"/>
-                </a:solidFill>
-                <a:latin typeface="Arial"/>
-              </a:rPr>
-              <a:t>chưa</a:t>
-            </a:r>
-            <a:r>
-              <a:rPr sz="1300" b="0" dirty="0">
-                <a:solidFill>
-                  <a:srgbClr val="1F2937"/>
-                </a:solidFill>
-                <a:latin typeface="Arial"/>
-              </a:rPr>
-              <a:t> crawl </a:t>
-            </a:r>
-            <a:r>
-              <a:rPr sz="1300" b="0" dirty="0" err="1">
-                <a:solidFill>
-                  <a:srgbClr val="1F2937"/>
-                </a:solidFill>
-                <a:latin typeface="Arial"/>
-              </a:rPr>
-              <a:t>tự</a:t>
-            </a:r>
-            <a:r>
-              <a:rPr sz="1300" b="0" dirty="0">
-                <a:solidFill>
-                  <a:srgbClr val="1F2937"/>
-                </a:solidFill>
-                <a:latin typeface="Arial"/>
-              </a:rPr>
-              <a:t> </a:t>
-            </a:r>
-            <a:r>
-              <a:rPr sz="1300" b="0" dirty="0" err="1">
-                <a:solidFill>
-                  <a:srgbClr val="1F2937"/>
-                </a:solidFill>
-                <a:latin typeface="Arial"/>
-              </a:rPr>
-              <a:t>động</a:t>
-            </a:r>
-            <a:r>
-              <a:rPr sz="1300" b="0" dirty="0">
-                <a:solidFill>
-                  <a:srgbClr val="1F2937"/>
-                </a:solidFill>
-                <a:latin typeface="Arial"/>
-              </a:rPr>
-              <a:t>.</a:t>
+              <a:rPr sz="1300" b="0">
+                <a:solidFill>
+                  <a:srgbClr val="1F2937"/>
+                </a:solidFill>
+                <a:latin typeface="Arial"/>
+              </a:rPr>
+              <a:t>•  Chưa có refresh token.</a:t>
+            </a:r>
+          </a:p>
+          <a:p>
+            <a:pPr algn="l">
+              <a:lnSpc>
+                <a:spcPct val="108000"/>
+              </a:lnSpc>
+              <a:spcAft>
+                <a:spcPts val="500"/>
+              </a:spcAft>
+              <a:defRPr sz="1300" b="0">
+                <a:solidFill>
+                  <a:srgbClr val="1F2937"/>
+                </a:solidFill>
+                <a:latin typeface="Arial"/>
+              </a:defRPr>
+            </a:pPr>
+            <a:r>
+              <a:rPr sz="1300" b="0">
+                <a:solidFill>
+                  <a:srgbClr val="1F2937"/>
+                </a:solidFill>
+                <a:latin typeface="Arial"/>
+              </a:rPr>
+              <a:t>•  Chưa có rate limiting hoặc CAPTCHA.</a:t>
+            </a:r>
+          </a:p>
+          <a:p>
+            <a:pPr algn="l">
+              <a:lnSpc>
+                <a:spcPct val="108000"/>
+              </a:lnSpc>
+              <a:spcAft>
+                <a:spcPts val="500"/>
+              </a:spcAft>
+              <a:defRPr sz="1300" b="0">
+                <a:solidFill>
+                  <a:srgbClr val="1F2937"/>
+                </a:solidFill>
+                <a:latin typeface="Arial"/>
+              </a:defRPr>
+            </a:pPr>
+            <a:r>
+              <a:rPr sz="1300" b="0">
+                <a:solidFill>
+                  <a:srgbClr val="1F2937"/>
+                </a:solidFill>
+                <a:latin typeface="Arial"/>
+              </a:rPr>
+              <a:t>•  Dữ liệu kết quả đang nhập tay, chưa crawl tự động.</a:t>
+            </a:r>
+          </a:p>
+          <a:p>
+            <a:pPr algn="l">
+              <a:lnSpc>
+                <a:spcPct val="108000"/>
+              </a:lnSpc>
+              <a:spcAft>
+                <a:spcPts val="500"/>
+              </a:spcAft>
+              <a:defRPr sz="1300" b="0">
+                <a:solidFill>
+                  <a:srgbClr val="1F2937"/>
+                </a:solidFill>
+                <a:latin typeface="Arial"/>
+              </a:defRPr>
+            </a:pPr>
+            <a:r>
+              <a:rPr sz="1300" b="0">
+                <a:solidFill>
+                  <a:srgbClr val="1F2937"/>
+                </a:solidFill>
+                <a:latin typeface="Arial"/>
+              </a:rPr>
+              <a:t>•  Desktop history sort còn hạn chế so với mobile.</a:t>
             </a:r>
           </a:p>
         </p:txBody>
@@ -17612,7 +15592,7 @@
                 </a:solidFill>
                 <a:latin typeface="Arial"/>
               </a:rPr>
-              <a:t>•  Tăng unit test coverage lên tối thiểu 70%.</a:t>
+              <a:t>•  Duy trì coverage &gt;70% và bổ sung test tích hợp (@WebMvcTest).</a:t>
             </a:r>
           </a:p>
           <a:p>
@@ -17777,514 +15757,14 @@
       </p:grpSpPr>
       <p:sp>
         <p:nvSpPr>
-          <p:cNvPr id="2" name="Rectangle 1"/>
-          <p:cNvSpPr/>
-          <p:nvPr/>
-        </p:nvSpPr>
-        <p:spPr>
-          <a:xfrm>
-            <a:off x="0" y="0"/>
-            <a:ext cx="12191695" cy="146304"/>
-          </a:xfrm>
-          <a:prstGeom prst="rect">
-            <a:avLst/>
-          </a:prstGeom>
-          <a:solidFill>
-            <a:srgbClr val="1677FF"/>
-          </a:solidFill>
-          <a:ln>
-            <a:noFill/>
-          </a:ln>
-          <a:effectLst/>
-        </p:spPr>
-        <p:style>
-          <a:lnRef idx="1">
-            <a:schemeClr val="accent1"/>
-          </a:lnRef>
-          <a:fillRef idx="3">
-            <a:schemeClr val="accent1"/>
-          </a:fillRef>
-          <a:effectRef idx="2">
-            <a:schemeClr val="accent1"/>
-          </a:effectRef>
-          <a:fontRef idx="minor">
-            <a:schemeClr val="lt1"/>
-          </a:fontRef>
-        </p:style>
-        <p:txBody>
-          <a:bodyPr rtlCol="0" anchor="ctr"/>
-          <a:lstStyle/>
-          <a:p>
-            <a:pPr algn="ctr"/>
-            <a:endParaRPr/>
-          </a:p>
-        </p:txBody>
-      </p:sp>
-      <p:sp>
-        <p:nvSpPr>
-          <p:cNvPr id="3" name="Rectangle 2"/>
-          <p:cNvSpPr/>
-          <p:nvPr/>
-        </p:nvSpPr>
-        <p:spPr>
-          <a:xfrm>
-            <a:off x="502920" y="530352"/>
-            <a:ext cx="128016" cy="749808"/>
-          </a:xfrm>
-          <a:prstGeom prst="rect">
-            <a:avLst/>
-          </a:prstGeom>
-          <a:solidFill>
-            <a:srgbClr val="1677FF"/>
-          </a:solidFill>
-          <a:ln>
-            <a:noFill/>
-          </a:ln>
-          <a:effectLst/>
-        </p:spPr>
-        <p:style>
-          <a:lnRef idx="1">
-            <a:schemeClr val="accent1"/>
-          </a:lnRef>
-          <a:fillRef idx="3">
-            <a:schemeClr val="accent1"/>
-          </a:fillRef>
-          <a:effectRef idx="2">
-            <a:schemeClr val="accent1"/>
-          </a:effectRef>
-          <a:fontRef idx="minor">
-            <a:schemeClr val="lt1"/>
-          </a:fontRef>
-        </p:style>
-        <p:txBody>
-          <a:bodyPr rtlCol="0" anchor="ctr"/>
-          <a:lstStyle/>
-          <a:p>
-            <a:pPr algn="ctr"/>
-            <a:endParaRPr/>
-          </a:p>
-        </p:txBody>
-      </p:sp>
-      <p:sp>
-        <p:nvSpPr>
-          <p:cNvPr id="4" name="TextBox 3"/>
-          <p:cNvSpPr txBox="1"/>
-          <p:nvPr/>
-        </p:nvSpPr>
-        <p:spPr>
-          <a:xfrm>
-            <a:off x="777240" y="420624"/>
-            <a:ext cx="9875520" cy="274320"/>
-          </a:xfrm>
-          <a:prstGeom prst="rect">
-            <a:avLst/>
-          </a:prstGeom>
-          <a:noFill/>
-        </p:spPr>
-        <p:txBody>
-          <a:bodyPr wrap="square" lIns="0" tIns="0" rIns="0" bIns="0" anchor="t">
-            <a:spAutoFit/>
-          </a:bodyPr>
-          <a:lstStyle/>
-          <a:p>
-            <a:pPr algn="l">
-              <a:lnSpc>
-                <a:spcPct val="105000"/>
-              </a:lnSpc>
-              <a:spcAft>
-                <a:spcPts val="600"/>
-              </a:spcAft>
-              <a:defRPr sz="1200" b="1">
-                <a:solidFill>
-                  <a:srgbClr val="1677FF"/>
-                </a:solidFill>
-                <a:latin typeface="Arial"/>
-              </a:defRPr>
-            </a:pPr>
-            <a:r>
-              <a:rPr sz="1200" b="1">
-                <a:solidFill>
-                  <a:srgbClr val="1677FF"/>
-                </a:solidFill>
-                <a:latin typeface="Arial"/>
-              </a:rPr>
-              <a:t>KẾT LUẬN</a:t>
-            </a:r>
-          </a:p>
-        </p:txBody>
-      </p:sp>
-      <p:sp>
-        <p:nvSpPr>
-          <p:cNvPr id="5" name="TextBox 4"/>
-          <p:cNvSpPr txBox="1"/>
-          <p:nvPr/>
-        </p:nvSpPr>
-        <p:spPr>
-          <a:xfrm>
-            <a:off x="777240" y="676656"/>
-            <a:ext cx="10515600" cy="685800"/>
-          </a:xfrm>
-          <a:prstGeom prst="rect">
-            <a:avLst/>
-          </a:prstGeom>
-          <a:noFill/>
-        </p:spPr>
-        <p:txBody>
-          <a:bodyPr wrap="square" lIns="0" tIns="0" rIns="0" bIns="0" anchor="t">
-            <a:spAutoFit/>
-          </a:bodyPr>
-          <a:lstStyle/>
-          <a:p>
-            <a:pPr algn="l">
-              <a:lnSpc>
-                <a:spcPct val="105000"/>
-              </a:lnSpc>
-              <a:spcAft>
-                <a:spcPts val="600"/>
-              </a:spcAft>
-              <a:defRPr sz="3000" b="1">
-                <a:solidFill>
-                  <a:srgbClr val="0B1220"/>
-                </a:solidFill>
-                <a:latin typeface="Arial"/>
-              </a:defRPr>
-            </a:pPr>
-            <a:r>
-              <a:rPr sz="3000" b="1">
-                <a:solidFill>
-                  <a:srgbClr val="0B1220"/>
-                </a:solidFill>
-                <a:latin typeface="Arial"/>
-              </a:rPr>
-              <a:t>Kết quả đạt được</a:t>
-            </a:r>
-          </a:p>
-        </p:txBody>
-      </p:sp>
-      <p:sp>
-        <p:nvSpPr>
-          <p:cNvPr id="6" name="Rectangle 5"/>
-          <p:cNvSpPr/>
-          <p:nvPr/>
-        </p:nvSpPr>
-        <p:spPr>
-          <a:xfrm>
-            <a:off x="777240" y="1335024"/>
-            <a:ext cx="10634472" cy="15240"/>
-          </a:xfrm>
-          <a:prstGeom prst="rect">
-            <a:avLst/>
-          </a:prstGeom>
-          <a:solidFill>
-            <a:srgbClr val="D9E2EC"/>
-          </a:solidFill>
-          <a:ln>
-            <a:noFill/>
-          </a:ln>
-          <a:effectLst/>
-        </p:spPr>
-        <p:style>
-          <a:lnRef idx="1">
-            <a:schemeClr val="accent1"/>
-          </a:lnRef>
-          <a:fillRef idx="3">
-            <a:schemeClr val="accent1"/>
-          </a:fillRef>
-          <a:effectRef idx="2">
-            <a:schemeClr val="accent1"/>
-          </a:effectRef>
-          <a:fontRef idx="minor">
-            <a:schemeClr val="lt1"/>
-          </a:fontRef>
-        </p:style>
-        <p:txBody>
-          <a:bodyPr rtlCol="0" anchor="ctr"/>
-          <a:lstStyle/>
-          <a:p>
-            <a:pPr algn="ctr"/>
-            <a:endParaRPr/>
-          </a:p>
-        </p:txBody>
-      </p:sp>
-      <p:sp>
-        <p:nvSpPr>
-          <p:cNvPr id="7" name="TextBox 6"/>
-          <p:cNvSpPr txBox="1"/>
-          <p:nvPr/>
-        </p:nvSpPr>
-        <p:spPr>
-          <a:xfrm>
-            <a:off x="777240" y="6419088"/>
-            <a:ext cx="7315200" cy="274320"/>
-          </a:xfrm>
-          <a:prstGeom prst="rect">
-            <a:avLst/>
-          </a:prstGeom>
-          <a:noFill/>
-        </p:spPr>
-        <p:txBody>
-          <a:bodyPr wrap="square" lIns="0" tIns="0" rIns="0" bIns="0" anchor="t">
-            <a:spAutoFit/>
-          </a:bodyPr>
-          <a:lstStyle/>
-          <a:p>
-            <a:pPr algn="l">
-              <a:lnSpc>
-                <a:spcPct val="105000"/>
-              </a:lnSpc>
-              <a:spcAft>
-                <a:spcPts val="600"/>
-              </a:spcAft>
-              <a:defRPr sz="900" b="0">
-                <a:solidFill>
-                  <a:srgbClr val="6B7280"/>
-                </a:solidFill>
-                <a:latin typeface="Arial"/>
-              </a:defRPr>
-            </a:pPr>
-            <a:r>
-              <a:rPr sz="900" b="0">
-                <a:solidFill>
-                  <a:srgbClr val="6B7280"/>
-                </a:solidFill>
-                <a:latin typeface="Arial"/>
-              </a:rPr>
-              <a:t>Dò Vé Số – Báo cáo Lab3</a:t>
-            </a:r>
-          </a:p>
-        </p:txBody>
-      </p:sp>
-      <p:sp>
-        <p:nvSpPr>
-          <p:cNvPr id="8" name="TextBox 7"/>
-          <p:cNvSpPr txBox="1"/>
-          <p:nvPr/>
-        </p:nvSpPr>
-        <p:spPr>
-          <a:xfrm>
-            <a:off x="10332720" y="6419088"/>
-            <a:ext cx="1097280" cy="274320"/>
-          </a:xfrm>
-          <a:prstGeom prst="rect">
-            <a:avLst/>
-          </a:prstGeom>
-          <a:noFill/>
-        </p:spPr>
-        <p:txBody>
-          <a:bodyPr wrap="square" lIns="0" tIns="0" rIns="0" bIns="0" anchor="t">
-            <a:spAutoFit/>
-          </a:bodyPr>
-          <a:lstStyle/>
-          <a:p>
-            <a:pPr algn="r">
-              <a:lnSpc>
-                <a:spcPct val="105000"/>
-              </a:lnSpc>
-              <a:spcAft>
-                <a:spcPts val="600"/>
-              </a:spcAft>
-              <a:defRPr sz="900" b="0">
-                <a:solidFill>
-                  <a:srgbClr val="6B7280"/>
-                </a:solidFill>
-                <a:latin typeface="Arial"/>
-              </a:defRPr>
-            </a:pPr>
-            <a:r>
-              <a:rPr sz="900" b="0">
-                <a:solidFill>
-                  <a:srgbClr val="6B7280"/>
-                </a:solidFill>
-                <a:latin typeface="Arial"/>
-              </a:rPr>
-              <a:t>21</a:t>
-            </a:r>
-          </a:p>
-        </p:txBody>
-      </p:sp>
-      <p:sp>
-        <p:nvSpPr>
-          <p:cNvPr id="9" name="TextBox 8"/>
-          <p:cNvSpPr txBox="1"/>
-          <p:nvPr/>
-        </p:nvSpPr>
-        <p:spPr>
-          <a:xfrm>
-            <a:off x="777240" y="1645920"/>
-            <a:ext cx="5852160" cy="4389120"/>
-          </a:xfrm>
-          <a:prstGeom prst="rect">
-            <a:avLst/>
-          </a:prstGeom>
-          <a:noFill/>
-        </p:spPr>
-        <p:txBody>
-          <a:bodyPr wrap="square" lIns="0" tIns="0" rIns="0" bIns="0" anchor="t">
-            <a:spAutoFit/>
-          </a:bodyPr>
-          <a:lstStyle/>
-          <a:p>
-            <a:pPr algn="l">
-              <a:lnSpc>
-                <a:spcPct val="108000"/>
-              </a:lnSpc>
-              <a:spcAft>
-                <a:spcPts val="800"/>
-              </a:spcAft>
-              <a:defRPr sz="1400" b="0">
-                <a:solidFill>
-                  <a:srgbClr val="1F2937"/>
-                </a:solidFill>
-                <a:latin typeface="Arial"/>
-              </a:defRPr>
-            </a:pPr>
-            <a:r>
-              <a:rPr sz="1400" b="0">
-                <a:solidFill>
-                  <a:srgbClr val="1F2937"/>
-                </a:solidFill>
-                <a:latin typeface="Arial"/>
-              </a:rPr>
-              <a:t>•  Hoàn thành 3 module chính: quản lý người dùng, quản lý vé dò, dò vé số.</a:t>
-            </a:r>
-          </a:p>
-          <a:p>
-            <a:pPr algn="l">
-              <a:lnSpc>
-                <a:spcPct val="108000"/>
-              </a:lnSpc>
-              <a:spcAft>
-                <a:spcPts val="800"/>
-              </a:spcAft>
-              <a:defRPr sz="1400" b="0">
-                <a:solidFill>
-                  <a:srgbClr val="1F2937"/>
-                </a:solidFill>
-                <a:latin typeface="Arial"/>
-              </a:defRPr>
-            </a:pPr>
-            <a:r>
-              <a:rPr sz="1400" b="0">
-                <a:solidFill>
-                  <a:srgbClr val="1F2937"/>
-                </a:solidFill>
-                <a:latin typeface="Arial"/>
-              </a:rPr>
-              <a:t>•  Kiến trúc RESTful: Spring Boot + React + MySQL.</a:t>
-            </a:r>
-          </a:p>
-          <a:p>
-            <a:pPr algn="l">
-              <a:lnSpc>
-                <a:spcPct val="108000"/>
-              </a:lnSpc>
-              <a:spcAft>
-                <a:spcPts val="800"/>
-              </a:spcAft>
-              <a:defRPr sz="1400" b="0">
-                <a:solidFill>
-                  <a:srgbClr val="1F2937"/>
-                </a:solidFill>
-                <a:latin typeface="Arial"/>
-              </a:defRPr>
-            </a:pPr>
-            <a:r>
-              <a:rPr sz="1400" b="0">
-                <a:solidFill>
-                  <a:srgbClr val="1F2937"/>
-                </a:solidFill>
-                <a:latin typeface="Arial"/>
-              </a:rPr>
-              <a:t>•  Bảo mật: BCrypt, JWT, phân quyền, kiểm tra active/role từ DB.</a:t>
-            </a:r>
-          </a:p>
-          <a:p>
-            <a:pPr algn="l">
-              <a:lnSpc>
-                <a:spcPct val="108000"/>
-              </a:lnSpc>
-              <a:spcAft>
-                <a:spcPts val="800"/>
-              </a:spcAft>
-              <a:defRPr sz="1400" b="0">
-                <a:solidFill>
-                  <a:srgbClr val="1F2937"/>
-                </a:solidFill>
-                <a:latin typeface="Arial"/>
-              </a:defRPr>
-            </a:pPr>
-            <a:r>
-              <a:rPr sz="1400" b="0">
-                <a:solidFill>
-                  <a:srgbClr val="1F2937"/>
-                </a:solidFill>
-                <a:latin typeface="Arial"/>
-              </a:rPr>
-              <a:t>•  Giao diện responsive, mobile-first.</a:t>
-            </a:r>
-          </a:p>
-          <a:p>
-            <a:pPr algn="l">
-              <a:lnSpc>
-                <a:spcPct val="108000"/>
-              </a:lnSpc>
-              <a:spcAft>
-                <a:spcPts val="800"/>
-              </a:spcAft>
-              <a:defRPr sz="1400" b="0">
-                <a:solidFill>
-                  <a:srgbClr val="1F2937"/>
-                </a:solidFill>
-                <a:latin typeface="Arial"/>
-              </a:defRPr>
-            </a:pPr>
-            <a:r>
-              <a:rPr sz="1400" b="0">
-                <a:solidFill>
-                  <a:srgbClr val="1F2937"/>
-                </a:solidFill>
-                <a:latin typeface="Arial"/>
-              </a:rPr>
-              <a:t>•  Có unit test backend/frontend và test case hệ thống.</a:t>
-            </a:r>
-          </a:p>
-          <a:p>
-            <a:pPr algn="l">
-              <a:lnSpc>
-                <a:spcPct val="108000"/>
-              </a:lnSpc>
-              <a:spcAft>
-                <a:spcPts val="800"/>
-              </a:spcAft>
-              <a:defRPr sz="1400" b="0">
-                <a:solidFill>
-                  <a:srgbClr val="1F2937"/>
-                </a:solidFill>
-                <a:latin typeface="Arial"/>
-              </a:defRPr>
-            </a:pPr>
-            <a:r>
-              <a:rPr sz="1400" b="0">
-                <a:solidFill>
-                  <a:srgbClr val="1F2937"/>
-                </a:solidFill>
-                <a:latin typeface="Arial"/>
-              </a:rPr>
-              <a:t>•  Triển khai được bằng Docker Compose dev/prod.</a:t>
-            </a:r>
-          </a:p>
-        </p:txBody>
-      </p:sp>
-      <p:sp>
-        <p:nvSpPr>
           <p:cNvPr id="10" name="Rounded Rectangle 9"/>
           <p:cNvSpPr/>
           <p:nvPr/>
         </p:nvSpPr>
         <p:spPr>
           <a:xfrm>
-            <a:off x="6903720" y="1645920"/>
-            <a:ext cx="4507992" cy="4389120"/>
+            <a:off x="678070" y="1617666"/>
+            <a:ext cx="10832811" cy="4389120"/>
           </a:xfrm>
           <a:prstGeom prst="roundRect">
             <a:avLst>
@@ -18326,14 +15806,14 @@
       </p:sp>
       <p:sp>
         <p:nvSpPr>
-          <p:cNvPr id="11" name="Rectangle 10"/>
+          <p:cNvPr id="2" name="Rectangle 1"/>
           <p:cNvSpPr/>
           <p:nvPr/>
         </p:nvSpPr>
         <p:spPr>
           <a:xfrm>
-            <a:off x="6903720" y="1810512"/>
-            <a:ext cx="82296" cy="4059936"/>
+            <a:off x="0" y="0"/>
+            <a:ext cx="12191695" cy="146304"/>
           </a:xfrm>
           <a:prstGeom prst="rect">
             <a:avLst/>
@@ -18371,14 +15851,59 @@
       </p:sp>
       <p:sp>
         <p:nvSpPr>
-          <p:cNvPr id="12" name="TextBox 11"/>
+          <p:cNvPr id="3" name="Rectangle 2"/>
+          <p:cNvSpPr/>
+          <p:nvPr/>
+        </p:nvSpPr>
+        <p:spPr>
+          <a:xfrm>
+            <a:off x="502920" y="530352"/>
+            <a:ext cx="128016" cy="749808"/>
+          </a:xfrm>
+          <a:prstGeom prst="rect">
+            <a:avLst/>
+          </a:prstGeom>
+          <a:solidFill>
+            <a:srgbClr val="1677FF"/>
+          </a:solidFill>
+          <a:ln>
+            <a:noFill/>
+          </a:ln>
+          <a:effectLst/>
+        </p:spPr>
+        <p:style>
+          <a:lnRef idx="1">
+            <a:schemeClr val="accent1"/>
+          </a:lnRef>
+          <a:fillRef idx="3">
+            <a:schemeClr val="accent1"/>
+          </a:fillRef>
+          <a:effectRef idx="2">
+            <a:schemeClr val="accent1"/>
+          </a:effectRef>
+          <a:fontRef idx="minor">
+            <a:schemeClr val="lt1"/>
+          </a:fontRef>
+        </p:style>
+        <p:txBody>
+          <a:bodyPr rtlCol="0" anchor="ctr"/>
+          <a:lstStyle/>
+          <a:p>
+            <a:pPr algn="ctr"/>
+            <a:endParaRPr/>
+          </a:p>
+        </p:txBody>
+      </p:sp>
+      <p:sp>
+        <p:nvSpPr>
+          <p:cNvPr id="4" name="TextBox 3"/>
           <p:cNvSpPr txBox="1"/>
           <p:nvPr/>
         </p:nvSpPr>
         <p:spPr>
           <a:xfrm>
-            <a:off x="7132320" y="1792224"/>
-            <a:ext cx="4096512" cy="411480"/>
+            <a:off x="777240" y="420624"/>
+            <a:ext cx="9875520" cy="274320"/>
           </a:xfrm>
           <a:prstGeom prst="rect">
             <a:avLst/>
@@ -18398,7 +15923,55 @@
               <a:spcAft>
                 <a:spcPts val="600"/>
               </a:spcAft>
-              <a:defRPr sz="1600" b="1">
+              <a:defRPr sz="1200" b="1">
+                <a:solidFill>
+                  <a:srgbClr val="1677FF"/>
+                </a:solidFill>
+                <a:latin typeface="Arial"/>
+              </a:defRPr>
+            </a:pPr>
+            <a:r>
+              <a:rPr sz="1200" b="1">
+                <a:solidFill>
+                  <a:srgbClr val="1677FF"/>
+                </a:solidFill>
+                <a:latin typeface="Arial"/>
+              </a:rPr>
+              <a:t>KẾT LUẬN</a:t>
+            </a:r>
+          </a:p>
+        </p:txBody>
+      </p:sp>
+      <p:sp>
+        <p:nvSpPr>
+          <p:cNvPr id="5" name="TextBox 4"/>
+          <p:cNvSpPr txBox="1"/>
+          <p:nvPr/>
+        </p:nvSpPr>
+        <p:spPr>
+          <a:xfrm>
+            <a:off x="777240" y="676656"/>
+            <a:ext cx="10515600" cy="685800"/>
+          </a:xfrm>
+          <a:prstGeom prst="rect">
+            <a:avLst/>
+          </a:prstGeom>
+          <a:noFill/>
+        </p:spPr>
+        <p:txBody>
+          <a:bodyPr wrap="square" lIns="0" tIns="0" rIns="0" bIns="0" anchor="t">
+            <a:spAutoFit/>
+          </a:bodyPr>
+          <a:lstStyle/>
+          <a:p>
+            <a:pPr algn="l">
+              <a:lnSpc>
+                <a:spcPct val="105000"/>
+              </a:lnSpc>
+              <a:spcAft>
+                <a:spcPts val="600"/>
+              </a:spcAft>
+              <a:defRPr sz="3000" b="1">
                 <a:solidFill>
                   <a:srgbClr val="0B1220"/>
                 </a:solidFill>
@@ -18406,27 +15979,168 @@
               </a:defRPr>
             </a:pPr>
             <a:r>
-              <a:rPr sz="1600" b="1">
+              <a:rPr sz="3000" b="1">
                 <a:solidFill>
                   <a:srgbClr val="0B1220"/>
                 </a:solidFill>
                 <a:latin typeface="Arial"/>
               </a:rPr>
-              <a:t>Thông điệp chính</a:t>
-            </a:r>
-          </a:p>
-        </p:txBody>
-      </p:sp>
-      <p:sp>
-        <p:nvSpPr>
-          <p:cNvPr id="13" name="TextBox 12"/>
+              <a:t>Kết quả đạt được</a:t>
+            </a:r>
+          </a:p>
+        </p:txBody>
+      </p:sp>
+      <p:sp>
+        <p:nvSpPr>
+          <p:cNvPr id="6" name="Rectangle 5"/>
+          <p:cNvSpPr/>
+          <p:nvPr/>
+        </p:nvSpPr>
+        <p:spPr>
+          <a:xfrm>
+            <a:off x="777240" y="1335024"/>
+            <a:ext cx="10634472" cy="15240"/>
+          </a:xfrm>
+          <a:prstGeom prst="rect">
+            <a:avLst/>
+          </a:prstGeom>
+          <a:solidFill>
+            <a:srgbClr val="D9E2EC"/>
+          </a:solidFill>
+          <a:ln>
+            <a:noFill/>
+          </a:ln>
+          <a:effectLst/>
+        </p:spPr>
+        <p:style>
+          <a:lnRef idx="1">
+            <a:schemeClr val="accent1"/>
+          </a:lnRef>
+          <a:fillRef idx="3">
+            <a:schemeClr val="accent1"/>
+          </a:fillRef>
+          <a:effectRef idx="2">
+            <a:schemeClr val="accent1"/>
+          </a:effectRef>
+          <a:fontRef idx="minor">
+            <a:schemeClr val="lt1"/>
+          </a:fontRef>
+        </p:style>
+        <p:txBody>
+          <a:bodyPr rtlCol="0" anchor="ctr"/>
+          <a:lstStyle/>
+          <a:p>
+            <a:pPr algn="ctr"/>
+            <a:endParaRPr/>
+          </a:p>
+        </p:txBody>
+      </p:sp>
+      <p:sp>
+        <p:nvSpPr>
+          <p:cNvPr id="7" name="TextBox 6"/>
           <p:cNvSpPr txBox="1"/>
           <p:nvPr/>
         </p:nvSpPr>
         <p:spPr>
           <a:xfrm>
-            <a:off x="7132320" y="2249424"/>
-            <a:ext cx="4096512" cy="3639312"/>
+            <a:off x="777240" y="6419088"/>
+            <a:ext cx="7315200" cy="274320"/>
+          </a:xfrm>
+          <a:prstGeom prst="rect">
+            <a:avLst/>
+          </a:prstGeom>
+          <a:noFill/>
+        </p:spPr>
+        <p:txBody>
+          <a:bodyPr wrap="square" lIns="0" tIns="0" rIns="0" bIns="0" anchor="t">
+            <a:spAutoFit/>
+          </a:bodyPr>
+          <a:lstStyle/>
+          <a:p>
+            <a:pPr algn="l">
+              <a:lnSpc>
+                <a:spcPct val="105000"/>
+              </a:lnSpc>
+              <a:spcAft>
+                <a:spcPts val="600"/>
+              </a:spcAft>
+              <a:defRPr sz="900" b="0">
+                <a:solidFill>
+                  <a:srgbClr val="6B7280"/>
+                </a:solidFill>
+                <a:latin typeface="Arial"/>
+              </a:defRPr>
+            </a:pPr>
+            <a:r>
+              <a:rPr sz="900" b="0">
+                <a:solidFill>
+                  <a:srgbClr val="6B7280"/>
+                </a:solidFill>
+                <a:latin typeface="Arial"/>
+              </a:rPr>
+              <a:t>Dò Vé Số – Báo cáo Lab3</a:t>
+            </a:r>
+          </a:p>
+        </p:txBody>
+      </p:sp>
+      <p:sp>
+        <p:nvSpPr>
+          <p:cNvPr id="8" name="TextBox 7"/>
+          <p:cNvSpPr txBox="1"/>
+          <p:nvPr/>
+        </p:nvSpPr>
+        <p:spPr>
+          <a:xfrm>
+            <a:off x="10332720" y="6419088"/>
+            <a:ext cx="1097280" cy="274320"/>
+          </a:xfrm>
+          <a:prstGeom prst="rect">
+            <a:avLst/>
+          </a:prstGeom>
+          <a:noFill/>
+        </p:spPr>
+        <p:txBody>
+          <a:bodyPr wrap="square" lIns="0" tIns="0" rIns="0" bIns="0" anchor="t">
+            <a:spAutoFit/>
+          </a:bodyPr>
+          <a:lstStyle/>
+          <a:p>
+            <a:pPr algn="r">
+              <a:lnSpc>
+                <a:spcPct val="105000"/>
+              </a:lnSpc>
+              <a:spcAft>
+                <a:spcPts val="600"/>
+              </a:spcAft>
+              <a:defRPr sz="900" b="0">
+                <a:solidFill>
+                  <a:srgbClr val="6B7280"/>
+                </a:solidFill>
+                <a:latin typeface="Arial"/>
+              </a:defRPr>
+            </a:pPr>
+            <a:r>
+              <a:rPr sz="900" b="0">
+                <a:solidFill>
+                  <a:srgbClr val="6B7280"/>
+                </a:solidFill>
+                <a:latin typeface="Arial"/>
+              </a:rPr>
+              <a:t>21</a:t>
+            </a:r>
+          </a:p>
+        </p:txBody>
+      </p:sp>
+      <p:sp>
+        <p:nvSpPr>
+          <p:cNvPr id="9" name="TextBox 8"/>
+          <p:cNvSpPr txBox="1"/>
+          <p:nvPr/>
+        </p:nvSpPr>
+        <p:spPr>
+          <a:xfrm>
+            <a:off x="928543" y="1968372"/>
+            <a:ext cx="5852160" cy="2124492"/>
           </a:xfrm>
           <a:prstGeom prst="rect">
             <a:avLst/>
@@ -18444,7 +16158,7 @@
                 <a:spcPct val="108000"/>
               </a:lnSpc>
               <a:spcAft>
-                <a:spcPts val="500"/>
+                <a:spcPts val="800"/>
               </a:spcAft>
               <a:defRPr sz="1400" b="0">
                 <a:solidFill>
@@ -18454,13 +16168,247 @@
               </a:defRPr>
             </a:pPr>
             <a:r>
-              <a:rPr sz="1400" b="0">
-                <a:solidFill>
-                  <a:srgbClr val="1F2937"/>
-                </a:solidFill>
-                <a:latin typeface="Arial"/>
-              </a:rPr>
-              <a:t>•  Project không chỉ là CRUD.</a:t>
+              <a:rPr sz="1400" b="0" dirty="0">
+                <a:solidFill>
+                  <a:srgbClr val="1F2937"/>
+                </a:solidFill>
+                <a:latin typeface="Arial"/>
+              </a:rPr>
+              <a:t>•  Hoàn </a:t>
+            </a:r>
+            <a:r>
+              <a:rPr sz="1400" b="0" dirty="0" err="1">
+                <a:solidFill>
+                  <a:srgbClr val="1F2937"/>
+                </a:solidFill>
+                <a:latin typeface="Arial"/>
+              </a:rPr>
+              <a:t>thành</a:t>
+            </a:r>
+            <a:r>
+              <a:rPr sz="1400" b="0" dirty="0">
+                <a:solidFill>
+                  <a:srgbClr val="1F2937"/>
+                </a:solidFill>
+                <a:latin typeface="Arial"/>
+              </a:rPr>
+              <a:t> 3 module </a:t>
+            </a:r>
+            <a:r>
+              <a:rPr sz="1400" b="0" dirty="0" err="1">
+                <a:solidFill>
+                  <a:srgbClr val="1F2937"/>
+                </a:solidFill>
+                <a:latin typeface="Arial"/>
+              </a:rPr>
+              <a:t>chính</a:t>
+            </a:r>
+            <a:r>
+              <a:rPr sz="1400" b="0" dirty="0">
+                <a:solidFill>
+                  <a:srgbClr val="1F2937"/>
+                </a:solidFill>
+                <a:latin typeface="Arial"/>
+              </a:rPr>
+              <a:t>: </a:t>
+            </a:r>
+            <a:r>
+              <a:rPr sz="1400" b="0" dirty="0" err="1">
+                <a:solidFill>
+                  <a:srgbClr val="1F2937"/>
+                </a:solidFill>
+                <a:latin typeface="Arial"/>
+              </a:rPr>
+              <a:t>quản</a:t>
+            </a:r>
+            <a:r>
+              <a:rPr sz="1400" b="0" dirty="0">
+                <a:solidFill>
+                  <a:srgbClr val="1F2937"/>
+                </a:solidFill>
+                <a:latin typeface="Arial"/>
+              </a:rPr>
+              <a:t> </a:t>
+            </a:r>
+            <a:r>
+              <a:rPr sz="1400" b="0" dirty="0" err="1">
+                <a:solidFill>
+                  <a:srgbClr val="1F2937"/>
+                </a:solidFill>
+                <a:latin typeface="Arial"/>
+              </a:rPr>
+              <a:t>lý</a:t>
+            </a:r>
+            <a:r>
+              <a:rPr sz="1400" b="0" dirty="0">
+                <a:solidFill>
+                  <a:srgbClr val="1F2937"/>
+                </a:solidFill>
+                <a:latin typeface="Arial"/>
+              </a:rPr>
+              <a:t> </a:t>
+            </a:r>
+            <a:r>
+              <a:rPr sz="1400" b="0" dirty="0" err="1">
+                <a:solidFill>
+                  <a:srgbClr val="1F2937"/>
+                </a:solidFill>
+                <a:latin typeface="Arial"/>
+              </a:rPr>
+              <a:t>người</a:t>
+            </a:r>
+            <a:r>
+              <a:rPr sz="1400" b="0" dirty="0">
+                <a:solidFill>
+                  <a:srgbClr val="1F2937"/>
+                </a:solidFill>
+                <a:latin typeface="Arial"/>
+              </a:rPr>
+              <a:t> </a:t>
+            </a:r>
+            <a:r>
+              <a:rPr sz="1400" b="0" dirty="0" err="1">
+                <a:solidFill>
+                  <a:srgbClr val="1F2937"/>
+                </a:solidFill>
+                <a:latin typeface="Arial"/>
+              </a:rPr>
+              <a:t>dùng</a:t>
+            </a:r>
+            <a:r>
+              <a:rPr sz="1400" b="0" dirty="0">
+                <a:solidFill>
+                  <a:srgbClr val="1F2937"/>
+                </a:solidFill>
+                <a:latin typeface="Arial"/>
+              </a:rPr>
+              <a:t>, </a:t>
+            </a:r>
+            <a:r>
+              <a:rPr sz="1400" b="0" dirty="0" err="1">
+                <a:solidFill>
+                  <a:srgbClr val="1F2937"/>
+                </a:solidFill>
+                <a:latin typeface="Arial"/>
+              </a:rPr>
+              <a:t>quản</a:t>
+            </a:r>
+            <a:r>
+              <a:rPr sz="1400" b="0" dirty="0">
+                <a:solidFill>
+                  <a:srgbClr val="1F2937"/>
+                </a:solidFill>
+                <a:latin typeface="Arial"/>
+              </a:rPr>
+              <a:t> </a:t>
+            </a:r>
+            <a:r>
+              <a:rPr sz="1400" b="0" dirty="0" err="1">
+                <a:solidFill>
+                  <a:srgbClr val="1F2937"/>
+                </a:solidFill>
+                <a:latin typeface="Arial"/>
+              </a:rPr>
+              <a:t>lý</a:t>
+            </a:r>
+            <a:r>
+              <a:rPr sz="1400" b="0" dirty="0">
+                <a:solidFill>
+                  <a:srgbClr val="1F2937"/>
+                </a:solidFill>
+                <a:latin typeface="Arial"/>
+              </a:rPr>
+              <a:t> </a:t>
+            </a:r>
+            <a:r>
+              <a:rPr sz="1400" b="0" dirty="0" err="1">
+                <a:solidFill>
+                  <a:srgbClr val="1F2937"/>
+                </a:solidFill>
+                <a:latin typeface="Arial"/>
+              </a:rPr>
+              <a:t>vé</a:t>
+            </a:r>
+            <a:r>
+              <a:rPr sz="1400" b="0" dirty="0">
+                <a:solidFill>
+                  <a:srgbClr val="1F2937"/>
+                </a:solidFill>
+                <a:latin typeface="Arial"/>
+              </a:rPr>
+              <a:t> </a:t>
+            </a:r>
+            <a:r>
+              <a:rPr sz="1400" b="0" dirty="0" err="1">
+                <a:solidFill>
+                  <a:srgbClr val="1F2937"/>
+                </a:solidFill>
+                <a:latin typeface="Arial"/>
+              </a:rPr>
+              <a:t>dò</a:t>
+            </a:r>
+            <a:r>
+              <a:rPr sz="1400" b="0" dirty="0">
+                <a:solidFill>
+                  <a:srgbClr val="1F2937"/>
+                </a:solidFill>
+                <a:latin typeface="Arial"/>
+              </a:rPr>
+              <a:t>, </a:t>
+            </a:r>
+            <a:r>
+              <a:rPr sz="1400" b="0" dirty="0" err="1">
+                <a:solidFill>
+                  <a:srgbClr val="1F2937"/>
+                </a:solidFill>
+                <a:latin typeface="Arial"/>
+              </a:rPr>
+              <a:t>dò</a:t>
+            </a:r>
+            <a:r>
+              <a:rPr sz="1400" b="0" dirty="0">
+                <a:solidFill>
+                  <a:srgbClr val="1F2937"/>
+                </a:solidFill>
+                <a:latin typeface="Arial"/>
+              </a:rPr>
+              <a:t> </a:t>
+            </a:r>
+            <a:r>
+              <a:rPr sz="1400" b="0" dirty="0" err="1">
+                <a:solidFill>
+                  <a:srgbClr val="1F2937"/>
+                </a:solidFill>
+                <a:latin typeface="Arial"/>
+              </a:rPr>
+              <a:t>vé</a:t>
+            </a:r>
+            <a:r>
+              <a:rPr sz="1400" b="0" dirty="0">
+                <a:solidFill>
+                  <a:srgbClr val="1F2937"/>
+                </a:solidFill>
+                <a:latin typeface="Arial"/>
+              </a:rPr>
+              <a:t> </a:t>
+            </a:r>
+            <a:r>
+              <a:rPr sz="1400" b="0" dirty="0" err="1">
+                <a:solidFill>
+                  <a:srgbClr val="1F2937"/>
+                </a:solidFill>
+                <a:latin typeface="Arial"/>
+              </a:rPr>
+              <a:t>số</a:t>
+            </a:r>
+            <a:r>
+              <a:rPr sz="1400" b="0" dirty="0">
+                <a:solidFill>
+                  <a:srgbClr val="1F2937"/>
+                </a:solidFill>
+                <a:latin typeface="Arial"/>
+              </a:rPr>
+              <a:t>.</a:t>
             </a:r>
           </a:p>
           <a:p>
@@ -18469,7 +16417,7 @@
                 <a:spcPct val="108000"/>
               </a:lnSpc>
               <a:spcAft>
-                <a:spcPts val="500"/>
+                <a:spcPts val="800"/>
               </a:spcAft>
               <a:defRPr sz="1400" b="0">
                 <a:solidFill>
@@ -18479,13 +16427,49 @@
               </a:defRPr>
             </a:pPr>
             <a:r>
-              <a:rPr sz="1400" b="0">
-                <a:solidFill>
-                  <a:srgbClr val="1F2937"/>
-                </a:solidFill>
-                <a:latin typeface="Arial"/>
-              </a:rPr>
-              <a:t>•  Có tư duy thiết kế CSDL và bảo mật.</a:t>
+              <a:rPr sz="1400" b="0" dirty="0">
+                <a:solidFill>
+                  <a:srgbClr val="1F2937"/>
+                </a:solidFill>
+                <a:latin typeface="Arial"/>
+              </a:rPr>
+              <a:t>•  </a:t>
+            </a:r>
+            <a:r>
+              <a:rPr sz="1400" b="0" dirty="0" err="1">
+                <a:solidFill>
+                  <a:srgbClr val="1F2937"/>
+                </a:solidFill>
+                <a:latin typeface="Arial"/>
+              </a:rPr>
+              <a:t>Kiến</a:t>
+            </a:r>
+            <a:r>
+              <a:rPr sz="1400" b="0" dirty="0">
+                <a:solidFill>
+                  <a:srgbClr val="1F2937"/>
+                </a:solidFill>
+                <a:latin typeface="Arial"/>
+              </a:rPr>
+              <a:t> </a:t>
+            </a:r>
+            <a:r>
+              <a:rPr sz="1400" b="0" dirty="0" err="1">
+                <a:solidFill>
+                  <a:srgbClr val="1F2937"/>
+                </a:solidFill>
+                <a:latin typeface="Arial"/>
+              </a:rPr>
+              <a:t>trúc</a:t>
+            </a:r>
+            <a:r>
+              <a:rPr sz="1400" b="0" dirty="0">
+                <a:solidFill>
+                  <a:srgbClr val="1F2937"/>
+                </a:solidFill>
+                <a:latin typeface="Arial"/>
+              </a:rPr>
+              <a:t> RESTful: Spring Boot + React + MySQL.</a:t>
             </a:r>
           </a:p>
           <a:p>
@@ -18494,7 +16478,7 @@
                 <a:spcPct val="108000"/>
               </a:lnSpc>
               <a:spcAft>
-                <a:spcPts val="500"/>
+                <a:spcPts val="800"/>
               </a:spcAft>
               <a:defRPr sz="1400" b="0">
                 <a:solidFill>
@@ -18504,13 +16488,139 @@
               </a:defRPr>
             </a:pPr>
             <a:r>
-              <a:rPr sz="1400" b="0">
-                <a:solidFill>
-                  <a:srgbClr val="1F2937"/>
-                </a:solidFill>
-                <a:latin typeface="Arial"/>
-              </a:rPr>
-              <a:t>•  Có xử lý hiệu năng và trải nghiệm người dùng.</a:t>
+              <a:rPr sz="1400" b="0" dirty="0">
+                <a:solidFill>
+                  <a:srgbClr val="1F2937"/>
+                </a:solidFill>
+                <a:latin typeface="Arial"/>
+              </a:rPr>
+              <a:t>•  Bảo </a:t>
+            </a:r>
+            <a:r>
+              <a:rPr sz="1400" b="0" dirty="0" err="1">
+                <a:solidFill>
+                  <a:srgbClr val="1F2937"/>
+                </a:solidFill>
+                <a:latin typeface="Arial"/>
+              </a:rPr>
+              <a:t>mật</a:t>
+            </a:r>
+            <a:r>
+              <a:rPr sz="1400" b="0" dirty="0">
+                <a:solidFill>
+                  <a:srgbClr val="1F2937"/>
+                </a:solidFill>
+                <a:latin typeface="Arial"/>
+              </a:rPr>
+              <a:t>: </a:t>
+            </a:r>
+            <a:r>
+              <a:rPr sz="1400" b="0" dirty="0" err="1">
+                <a:solidFill>
+                  <a:srgbClr val="1F2937"/>
+                </a:solidFill>
+                <a:latin typeface="Arial"/>
+              </a:rPr>
+              <a:t>BCrypt</a:t>
+            </a:r>
+            <a:r>
+              <a:rPr sz="1400" b="0" dirty="0">
+                <a:solidFill>
+                  <a:srgbClr val="1F2937"/>
+                </a:solidFill>
+                <a:latin typeface="Arial"/>
+              </a:rPr>
+              <a:t>, JWT, </a:t>
+            </a:r>
+            <a:r>
+              <a:rPr sz="1400" b="0" dirty="0" err="1">
+                <a:solidFill>
+                  <a:srgbClr val="1F2937"/>
+                </a:solidFill>
+                <a:latin typeface="Arial"/>
+              </a:rPr>
+              <a:t>phân</a:t>
+            </a:r>
+            <a:r>
+              <a:rPr sz="1400" b="0" dirty="0">
+                <a:solidFill>
+                  <a:srgbClr val="1F2937"/>
+                </a:solidFill>
+                <a:latin typeface="Arial"/>
+              </a:rPr>
+              <a:t> </a:t>
+            </a:r>
+            <a:r>
+              <a:rPr sz="1400" b="0" dirty="0" err="1">
+                <a:solidFill>
+                  <a:srgbClr val="1F2937"/>
+                </a:solidFill>
+                <a:latin typeface="Arial"/>
+              </a:rPr>
+              <a:t>quyền</a:t>
+            </a:r>
+            <a:r>
+              <a:rPr sz="1400" b="0" dirty="0">
+                <a:solidFill>
+                  <a:srgbClr val="1F2937"/>
+                </a:solidFill>
+                <a:latin typeface="Arial"/>
+              </a:rPr>
+              <a:t>, </a:t>
+            </a:r>
+            <a:r>
+              <a:rPr sz="1400" b="0" dirty="0" err="1">
+                <a:solidFill>
+                  <a:srgbClr val="1F2937"/>
+                </a:solidFill>
+                <a:latin typeface="Arial"/>
+              </a:rPr>
+              <a:t>kiểm</a:t>
+            </a:r>
+            <a:r>
+              <a:rPr sz="1400" b="0" dirty="0">
+                <a:solidFill>
+                  <a:srgbClr val="1F2937"/>
+                </a:solidFill>
+                <a:latin typeface="Arial"/>
+              </a:rPr>
+              <a:t> </a:t>
+            </a:r>
+            <a:r>
+              <a:rPr sz="1400" b="0" dirty="0" err="1">
+                <a:solidFill>
+                  <a:srgbClr val="1F2937"/>
+                </a:solidFill>
+                <a:latin typeface="Arial"/>
+              </a:rPr>
+              <a:t>tra</a:t>
+            </a:r>
+            <a:r>
+              <a:rPr sz="1400" b="0" dirty="0">
+                <a:solidFill>
+                  <a:srgbClr val="1F2937"/>
+                </a:solidFill>
+                <a:latin typeface="Arial"/>
+              </a:rPr>
+              <a:t> active/role </a:t>
+            </a:r>
+            <a:r>
+              <a:rPr sz="1400" b="0" dirty="0" err="1">
+                <a:solidFill>
+                  <a:srgbClr val="1F2937"/>
+                </a:solidFill>
+                <a:latin typeface="Arial"/>
+              </a:rPr>
+              <a:t>từ</a:t>
+            </a:r>
+            <a:r>
+              <a:rPr sz="1400" b="0" dirty="0">
+                <a:solidFill>
+                  <a:srgbClr val="1F2937"/>
+                </a:solidFill>
+                <a:latin typeface="Arial"/>
+              </a:rPr>
+              <a:t> DB.</a:t>
             </a:r>
           </a:p>
           <a:p>
@@ -18519,7 +16629,7 @@
                 <a:spcPct val="108000"/>
               </a:lnSpc>
               <a:spcAft>
-                <a:spcPts val="500"/>
+                <a:spcPts val="800"/>
               </a:spcAft>
               <a:defRPr sz="1400" b="0">
                 <a:solidFill>
@@ -18529,13 +16639,31 @@
               </a:defRPr>
             </a:pPr>
             <a:r>
-              <a:rPr sz="1400" b="0">
-                <a:solidFill>
-                  <a:srgbClr val="1F2937"/>
-                </a:solidFill>
-                <a:latin typeface="Arial"/>
-              </a:rPr>
-              <a:t>•  Có kiểm thử và triển khai Docker.</a:t>
+              <a:rPr sz="1400" b="0" dirty="0">
+                <a:solidFill>
+                  <a:srgbClr val="1F2937"/>
+                </a:solidFill>
+                <a:latin typeface="Arial"/>
+              </a:rPr>
+              <a:t>•  Giao </a:t>
+            </a:r>
+            <a:r>
+              <a:rPr sz="1400" b="0" dirty="0" err="1">
+                <a:solidFill>
+                  <a:srgbClr val="1F2937"/>
+                </a:solidFill>
+                <a:latin typeface="Arial"/>
+              </a:rPr>
+              <a:t>diện</a:t>
+            </a:r>
+            <a:r>
+              <a:rPr sz="1400" b="0" dirty="0">
+                <a:solidFill>
+                  <a:srgbClr val="1F2937"/>
+                </a:solidFill>
+                <a:latin typeface="Arial"/>
+              </a:rPr>
+              <a:t> responsive, mobile-first.</a:t>
             </a:r>
           </a:p>
           <a:p>
@@ -18544,7 +16672,7 @@
                 <a:spcPct val="108000"/>
               </a:lnSpc>
               <a:spcAft>
-                <a:spcPts val="500"/>
+                <a:spcPts val="800"/>
               </a:spcAft>
               <a:defRPr sz="1400" b="0">
                 <a:solidFill>
@@ -18554,14 +16682,228 @@
               </a:defRPr>
             </a:pPr>
             <a:r>
-              <a:rPr sz="1400" b="0">
-                <a:solidFill>
-                  <a:srgbClr val="1F2937"/>
-                </a:solidFill>
-                <a:latin typeface="Arial"/>
-              </a:rPr>
-              <a:t>•  Em hiểu rõ hơn về Spring Boot, JWT, JPA và React SPA.</a:t>
-            </a:r>
+              <a:rPr sz="1400" b="0" dirty="0">
+                <a:solidFill>
+                  <a:srgbClr val="1F2937"/>
+                </a:solidFill>
+                <a:latin typeface="Arial"/>
+              </a:rPr>
+              <a:t>•  </a:t>
+            </a:r>
+            <a:r>
+              <a:rPr sz="1400" b="0" dirty="0" err="1">
+                <a:solidFill>
+                  <a:srgbClr val="1F2937"/>
+                </a:solidFill>
+                <a:latin typeface="Arial"/>
+              </a:rPr>
+              <a:t>Có</a:t>
+            </a:r>
+            <a:r>
+              <a:rPr sz="1400" b="0" dirty="0">
+                <a:solidFill>
+                  <a:srgbClr val="1F2937"/>
+                </a:solidFill>
+                <a:latin typeface="Arial"/>
+              </a:rPr>
+              <a:t> unit test backend/frontend </a:t>
+            </a:r>
+            <a:r>
+              <a:rPr sz="1400" b="0" dirty="0" err="1">
+                <a:solidFill>
+                  <a:srgbClr val="1F2937"/>
+                </a:solidFill>
+                <a:latin typeface="Arial"/>
+              </a:rPr>
+              <a:t>và</a:t>
+            </a:r>
+            <a:r>
+              <a:rPr sz="1400" b="0" dirty="0">
+                <a:solidFill>
+                  <a:srgbClr val="1F2937"/>
+                </a:solidFill>
+                <a:latin typeface="Arial"/>
+              </a:rPr>
+              <a:t> test case </a:t>
+            </a:r>
+            <a:r>
+              <a:rPr sz="1400" b="0" dirty="0" err="1">
+                <a:solidFill>
+                  <a:srgbClr val="1F2937"/>
+                </a:solidFill>
+                <a:latin typeface="Arial"/>
+              </a:rPr>
+              <a:t>hệ</a:t>
+            </a:r>
+            <a:r>
+              <a:rPr sz="1400" b="0" dirty="0">
+                <a:solidFill>
+                  <a:srgbClr val="1F2937"/>
+                </a:solidFill>
+                <a:latin typeface="Arial"/>
+              </a:rPr>
+              <a:t> </a:t>
+            </a:r>
+            <a:r>
+              <a:rPr sz="1400" b="0" dirty="0" err="1">
+                <a:solidFill>
+                  <a:srgbClr val="1F2937"/>
+                </a:solidFill>
+                <a:latin typeface="Arial"/>
+              </a:rPr>
+              <a:t>thống</a:t>
+            </a:r>
+            <a:r>
+              <a:rPr sz="1400" b="0" dirty="0">
+                <a:solidFill>
+                  <a:srgbClr val="1F2937"/>
+                </a:solidFill>
+                <a:latin typeface="Arial"/>
+              </a:rPr>
+              <a:t>.</a:t>
+            </a:r>
+          </a:p>
+          <a:p>
+            <a:pPr algn="l">
+              <a:lnSpc>
+                <a:spcPct val="108000"/>
+              </a:lnSpc>
+              <a:spcAft>
+                <a:spcPts val="800"/>
+              </a:spcAft>
+              <a:defRPr sz="1400" b="0">
+                <a:solidFill>
+                  <a:srgbClr val="1F2937"/>
+                </a:solidFill>
+                <a:latin typeface="Arial"/>
+              </a:defRPr>
+            </a:pPr>
+            <a:r>
+              <a:rPr sz="1400" b="0" dirty="0">
+                <a:solidFill>
+                  <a:srgbClr val="1F2937"/>
+                </a:solidFill>
+                <a:latin typeface="Arial"/>
+              </a:rPr>
+              <a:t>•  </a:t>
+            </a:r>
+            <a:r>
+              <a:rPr sz="1400" b="0" dirty="0" err="1">
+                <a:solidFill>
+                  <a:srgbClr val="1F2937"/>
+                </a:solidFill>
+                <a:latin typeface="Arial"/>
+              </a:rPr>
+              <a:t>Triển</a:t>
+            </a:r>
+            <a:r>
+              <a:rPr sz="1400" b="0" dirty="0">
+                <a:solidFill>
+                  <a:srgbClr val="1F2937"/>
+                </a:solidFill>
+                <a:latin typeface="Arial"/>
+              </a:rPr>
+              <a:t> </a:t>
+            </a:r>
+            <a:r>
+              <a:rPr sz="1400" b="0" dirty="0" err="1">
+                <a:solidFill>
+                  <a:srgbClr val="1F2937"/>
+                </a:solidFill>
+                <a:latin typeface="Arial"/>
+              </a:rPr>
+              <a:t>khai</a:t>
+            </a:r>
+            <a:r>
+              <a:rPr sz="1400" b="0" dirty="0">
+                <a:solidFill>
+                  <a:srgbClr val="1F2937"/>
+                </a:solidFill>
+                <a:latin typeface="Arial"/>
+              </a:rPr>
+              <a:t> </a:t>
+            </a:r>
+            <a:r>
+              <a:rPr sz="1400" b="0" dirty="0" err="1">
+                <a:solidFill>
+                  <a:srgbClr val="1F2937"/>
+                </a:solidFill>
+                <a:latin typeface="Arial"/>
+              </a:rPr>
+              <a:t>được</a:t>
+            </a:r>
+            <a:r>
+              <a:rPr sz="1400" b="0" dirty="0">
+                <a:solidFill>
+                  <a:srgbClr val="1F2937"/>
+                </a:solidFill>
+                <a:latin typeface="Arial"/>
+              </a:rPr>
+              <a:t> </a:t>
+            </a:r>
+            <a:r>
+              <a:rPr sz="1400" b="0" dirty="0" err="1">
+                <a:solidFill>
+                  <a:srgbClr val="1F2937"/>
+                </a:solidFill>
+                <a:latin typeface="Arial"/>
+              </a:rPr>
+              <a:t>bằng</a:t>
+            </a:r>
+            <a:r>
+              <a:rPr sz="1400" b="0" dirty="0">
+                <a:solidFill>
+                  <a:srgbClr val="1F2937"/>
+                </a:solidFill>
+                <a:latin typeface="Arial"/>
+              </a:rPr>
+              <a:t> Docker Compose dev/prod.</a:t>
+            </a:r>
+          </a:p>
+        </p:txBody>
+      </p:sp>
+      <p:sp>
+        <p:nvSpPr>
+          <p:cNvPr id="11" name="Rectangle 10"/>
+          <p:cNvSpPr/>
+          <p:nvPr/>
+        </p:nvSpPr>
+        <p:spPr>
+          <a:xfrm>
+            <a:off x="661295" y="1810512"/>
+            <a:ext cx="82296" cy="4059936"/>
+          </a:xfrm>
+          <a:prstGeom prst="rect">
+            <a:avLst/>
+          </a:prstGeom>
+          <a:solidFill>
+            <a:srgbClr val="1677FF"/>
+          </a:solidFill>
+          <a:ln>
+            <a:noFill/>
+          </a:ln>
+          <a:effectLst/>
+        </p:spPr>
+        <p:style>
+          <a:lnRef idx="1">
+            <a:schemeClr val="accent1"/>
+          </a:lnRef>
+          <a:fillRef idx="3">
+            <a:schemeClr val="accent1"/>
+          </a:fillRef>
+          <a:effectRef idx="2">
+            <a:schemeClr val="accent1"/>
+          </a:effectRef>
+          <a:fontRef idx="minor">
+            <a:schemeClr val="lt1"/>
+          </a:fontRef>
+        </p:style>
+        <p:txBody>
+          <a:bodyPr rtlCol="0" anchor="ctr"/>
+          <a:lstStyle/>
+          <a:p>
+            <a:pPr algn="ctr"/>
+            <a:endParaRPr dirty="0"/>
           </a:p>
         </p:txBody>
       </p:sp>
@@ -23224,7 +21566,7 @@
                 </a:solidFill>
                 <a:latin typeface="Arial"/>
               </a:rPr>
-              <a:t>•  Google login: verify chữ ký JWT bằng JWKS.</a:t>
+              <a:t>•  Google login: verify chữ ký RSA qua JWKS (cache 6 giờ), kiểm thêm aud/iss.</a:t>
             </a:r>
           </a:p>
           <a:p>
@@ -23249,7 +21591,7 @@
                 </a:solidFill>
                 <a:latin typeface="Arial"/>
               </a:rPr>
-              <a:t>•  Facebook login: verify bằng debug_token.</a:t>
+              <a:t>•  Facebook login: verify bằng debug_token (is_valid + đúng app_id).</a:t>
             </a:r>
           </a:p>
           <a:p>
@@ -23349,7 +21691,7 @@
                 </a:solidFill>
                 <a:latin typeface="Arial"/>
               </a:rPr>
-              <a:t>•  Password bị chặn nếu quá phổ biến.</a:t>
+              <a:t>•  Chặn mật khẩu yếu bằng blocklist + dictionary (có từ tiếng Việt).</a:t>
             </a:r>
           </a:p>
         </p:txBody>
@@ -25291,29 +23633,14 @@
               </a:defRPr>
             </a:pPr>
             <a:r>
-              <a:rPr sz="1600" b="1" dirty="0">
+              <a:rPr sz="1600" b="1">
                 <a:solidFill>
                   <a:srgbClr val="0B1220"/>
                 </a:solidFill>
                 <a:latin typeface="Arial"/>
               </a:rPr>
-              <a:t>Thành </a:t>
-            </a:r>
-            <a:r>
-              <a:rPr sz="1600" b="1" dirty="0" err="1">
-                <a:solidFill>
-                  <a:srgbClr val="0B1220"/>
-                </a:solidFill>
-                <a:latin typeface="Arial"/>
-              </a:rPr>
-              <a:t>viên</a:t>
-            </a:r>
-            <a:endParaRPr sz="1600" b="1" dirty="0">
-              <a:solidFill>
-                <a:srgbClr val="0B1220"/>
-              </a:solidFill>
-              <a:latin typeface="Arial"/>
-            </a:endParaRPr>
+              <a:t>Thành viên</a:t>
+            </a:r>
           </a:p>
         </p:txBody>
       </p:sp>
@@ -25354,139 +23681,13 @@
               </a:defRPr>
             </a:pPr>
             <a:r>
-              <a:rPr sz="1300" b="0" dirty="0">
-                <a:solidFill>
-                  <a:srgbClr val="1F2937"/>
-                </a:solidFill>
-                <a:latin typeface="Arial"/>
-              </a:rPr>
-              <a:t>•  </a:t>
-            </a:r>
-            <a:r>
-              <a:rPr sz="1300" b="0" dirty="0" err="1">
-                <a:solidFill>
-                  <a:srgbClr val="1F2937"/>
-                </a:solidFill>
-                <a:latin typeface="Arial"/>
-              </a:rPr>
-              <a:t>Dò</a:t>
-            </a:r>
-            <a:r>
-              <a:rPr sz="1300" b="0" dirty="0">
-                <a:solidFill>
-                  <a:srgbClr val="1F2937"/>
-                </a:solidFill>
-                <a:latin typeface="Arial"/>
-              </a:rPr>
-              <a:t> </a:t>
-            </a:r>
-            <a:r>
-              <a:rPr sz="1300" b="0" dirty="0" err="1">
-                <a:solidFill>
-                  <a:srgbClr val="1F2937"/>
-                </a:solidFill>
-                <a:latin typeface="Arial"/>
-              </a:rPr>
-              <a:t>nhiều</a:t>
-            </a:r>
-            <a:r>
-              <a:rPr sz="1300" b="0" dirty="0">
-                <a:solidFill>
-                  <a:srgbClr val="1F2937"/>
-                </a:solidFill>
-                <a:latin typeface="Arial"/>
-              </a:rPr>
-              <a:t> </a:t>
-            </a:r>
-            <a:r>
-              <a:rPr sz="1300" b="0" dirty="0" err="1">
-                <a:solidFill>
-                  <a:srgbClr val="1F2937"/>
-                </a:solidFill>
-                <a:latin typeface="Arial"/>
-              </a:rPr>
-              <a:t>vé</a:t>
-            </a:r>
-            <a:r>
-              <a:rPr sz="1300" b="0" dirty="0">
-                <a:solidFill>
-                  <a:srgbClr val="1F2937"/>
-                </a:solidFill>
-                <a:latin typeface="Arial"/>
-              </a:rPr>
-              <a:t>, </a:t>
-            </a:r>
-            <a:r>
-              <a:rPr sz="1300" b="0" dirty="0" err="1">
-                <a:solidFill>
-                  <a:srgbClr val="1F2937"/>
-                </a:solidFill>
-                <a:latin typeface="Arial"/>
-              </a:rPr>
-              <a:t>tối</a:t>
-            </a:r>
-            <a:r>
-              <a:rPr sz="1300" b="0" dirty="0">
-                <a:solidFill>
-                  <a:srgbClr val="1F2937"/>
-                </a:solidFill>
-                <a:latin typeface="Arial"/>
-              </a:rPr>
-              <a:t> </a:t>
-            </a:r>
-            <a:r>
-              <a:rPr sz="1300" b="0" dirty="0" err="1">
-                <a:solidFill>
-                  <a:srgbClr val="1F2937"/>
-                </a:solidFill>
-                <a:latin typeface="Arial"/>
-              </a:rPr>
-              <a:t>đa</a:t>
-            </a:r>
-            <a:r>
-              <a:rPr sz="1300" b="0" dirty="0">
-                <a:solidFill>
-                  <a:srgbClr val="1F2937"/>
-                </a:solidFill>
-                <a:latin typeface="Arial"/>
-              </a:rPr>
-              <a:t> 50 </a:t>
-            </a:r>
-            <a:r>
-              <a:rPr sz="1300" b="0" dirty="0" err="1">
-                <a:solidFill>
-                  <a:srgbClr val="1F2937"/>
-                </a:solidFill>
-                <a:latin typeface="Arial"/>
-              </a:rPr>
-              <a:t>vé</a:t>
-            </a:r>
-            <a:r>
-              <a:rPr sz="1300" b="0" dirty="0">
-                <a:solidFill>
-                  <a:srgbClr val="1F2937"/>
-                </a:solidFill>
-                <a:latin typeface="Arial"/>
-              </a:rPr>
-              <a:t>/</a:t>
-            </a:r>
-            <a:r>
-              <a:rPr sz="1300" b="0" dirty="0" err="1">
-                <a:solidFill>
-                  <a:srgbClr val="1F2937"/>
-                </a:solidFill>
-                <a:latin typeface="Arial"/>
-              </a:rPr>
-              <a:t>lần</a:t>
-            </a:r>
-            <a:r>
-              <a:rPr sz="1300" b="0" dirty="0">
-                <a:solidFill>
-                  <a:srgbClr val="1F2937"/>
-                </a:solidFill>
-                <a:latin typeface="Arial"/>
-              </a:rPr>
-              <a:t>.</a:t>
+              <a:rPr sz="1300" b="0">
+                <a:solidFill>
+                  <a:srgbClr val="1F2937"/>
+                </a:solidFill>
+                <a:latin typeface="Arial"/>
+              </a:rPr>
+              <a:t>•  Dò nhiều vé, tối đa 50 vé/lần.</a:t>
             </a:r>
           </a:p>
           <a:p>
@@ -25505,67 +23706,13 @@
               </a:defRPr>
             </a:pPr>
             <a:r>
-              <a:rPr sz="1300" b="0" dirty="0">
-                <a:solidFill>
-                  <a:srgbClr val="1F2937"/>
-                </a:solidFill>
-                <a:latin typeface="Arial"/>
-              </a:rPr>
-              <a:t>•  Xem </a:t>
-            </a:r>
-            <a:r>
-              <a:rPr sz="1300" b="0" dirty="0" err="1">
-                <a:solidFill>
-                  <a:srgbClr val="1F2937"/>
-                </a:solidFill>
-                <a:latin typeface="Arial"/>
-              </a:rPr>
-              <a:t>lịch</a:t>
-            </a:r>
-            <a:r>
-              <a:rPr sz="1300" b="0" dirty="0">
-                <a:solidFill>
-                  <a:srgbClr val="1F2937"/>
-                </a:solidFill>
-                <a:latin typeface="Arial"/>
-              </a:rPr>
-              <a:t> </a:t>
-            </a:r>
-            <a:r>
-              <a:rPr sz="1300" b="0" dirty="0" err="1">
-                <a:solidFill>
-                  <a:srgbClr val="1F2937"/>
-                </a:solidFill>
-                <a:latin typeface="Arial"/>
-              </a:rPr>
-              <a:t>sử</a:t>
-            </a:r>
-            <a:r>
-              <a:rPr sz="1300" b="0" dirty="0">
-                <a:solidFill>
-                  <a:srgbClr val="1F2937"/>
-                </a:solidFill>
-                <a:latin typeface="Arial"/>
-              </a:rPr>
-              <a:t> </a:t>
-            </a:r>
-            <a:r>
-              <a:rPr sz="1300" b="0" dirty="0" err="1">
-                <a:solidFill>
-                  <a:srgbClr val="1F2937"/>
-                </a:solidFill>
-                <a:latin typeface="Arial"/>
-              </a:rPr>
-              <a:t>dò</a:t>
-            </a:r>
-            <a:r>
-              <a:rPr sz="1300" b="0" dirty="0">
-                <a:solidFill>
-                  <a:srgbClr val="1F2937"/>
-                </a:solidFill>
-                <a:latin typeface="Arial"/>
-              </a:rPr>
-              <a:t>.</a:t>
+              <a:rPr sz="1300" b="0">
+                <a:solidFill>
+                  <a:srgbClr val="1F2937"/>
+                </a:solidFill>
+                <a:latin typeface="Arial"/>
+              </a:rPr>
+              <a:t>•  Xem lịch sử dò.</a:t>
             </a:r>
           </a:p>
           <a:p>
@@ -25584,85 +23731,13 @@
               </a:defRPr>
             </a:pPr>
             <a:r>
-              <a:rPr sz="1300" b="0" dirty="0">
-                <a:solidFill>
-                  <a:srgbClr val="1F2937"/>
-                </a:solidFill>
-                <a:latin typeface="Arial"/>
-              </a:rPr>
-              <a:t>•  Xem </a:t>
-            </a:r>
-            <a:r>
-              <a:rPr sz="1300" b="0" dirty="0" err="1">
-                <a:solidFill>
-                  <a:srgbClr val="1F2937"/>
-                </a:solidFill>
-                <a:latin typeface="Arial"/>
-              </a:rPr>
-              <a:t>biểu</a:t>
-            </a:r>
-            <a:r>
-              <a:rPr sz="1300" b="0" dirty="0">
-                <a:solidFill>
-                  <a:srgbClr val="1F2937"/>
-                </a:solidFill>
-                <a:latin typeface="Arial"/>
-              </a:rPr>
-              <a:t> </a:t>
-            </a:r>
-            <a:r>
-              <a:rPr sz="1300" b="0" dirty="0" err="1">
-                <a:solidFill>
-                  <a:srgbClr val="1F2937"/>
-                </a:solidFill>
-                <a:latin typeface="Arial"/>
-              </a:rPr>
-              <a:t>đồ</a:t>
-            </a:r>
-            <a:r>
-              <a:rPr sz="1300" b="0" dirty="0">
-                <a:solidFill>
-                  <a:srgbClr val="1F2937"/>
-                </a:solidFill>
-                <a:latin typeface="Arial"/>
-              </a:rPr>
-              <a:t> </a:t>
-            </a:r>
-            <a:r>
-              <a:rPr sz="1300" b="0" dirty="0" err="1">
-                <a:solidFill>
-                  <a:srgbClr val="1F2937"/>
-                </a:solidFill>
-                <a:latin typeface="Arial"/>
-              </a:rPr>
-              <a:t>thống</a:t>
-            </a:r>
-            <a:r>
-              <a:rPr sz="1300" b="0" dirty="0">
-                <a:solidFill>
-                  <a:srgbClr val="1F2937"/>
-                </a:solidFill>
-                <a:latin typeface="Arial"/>
-              </a:rPr>
-              <a:t> </a:t>
-            </a:r>
-            <a:r>
-              <a:rPr sz="1300" b="0" dirty="0" err="1">
-                <a:solidFill>
-                  <a:srgbClr val="1F2937"/>
-                </a:solidFill>
-                <a:latin typeface="Arial"/>
-              </a:rPr>
-              <a:t>kê</a:t>
-            </a:r>
-            <a:r>
-              <a:rPr sz="1300" b="0" dirty="0">
-                <a:solidFill>
-                  <a:srgbClr val="1F2937"/>
-                </a:solidFill>
-                <a:latin typeface="Arial"/>
-              </a:rPr>
-              <a:t>.</a:t>
+              <a:rPr sz="1300" b="0">
+                <a:solidFill>
+                  <a:srgbClr val="1F2937"/>
+                </a:solidFill>
+                <a:latin typeface="Arial"/>
+              </a:rPr>
+              <a:t>•  Xem biểu đồ thống kê.</a:t>
             </a:r>
           </a:p>
           <a:p>
@@ -25681,67 +23756,13 @@
               </a:defRPr>
             </a:pPr>
             <a:r>
-              <a:rPr sz="1300" b="0" dirty="0">
-                <a:solidFill>
-                  <a:srgbClr val="1F2937"/>
-                </a:solidFill>
-                <a:latin typeface="Arial"/>
-              </a:rPr>
-              <a:t>•  </a:t>
-            </a:r>
-            <a:r>
-              <a:rPr sz="1300" b="0" dirty="0" err="1">
-                <a:solidFill>
-                  <a:srgbClr val="1F2937"/>
-                </a:solidFill>
-                <a:latin typeface="Arial"/>
-              </a:rPr>
-              <a:t>Đổi</a:t>
-            </a:r>
-            <a:r>
-              <a:rPr sz="1300" b="0" dirty="0">
-                <a:solidFill>
-                  <a:srgbClr val="1F2937"/>
-                </a:solidFill>
-                <a:latin typeface="Arial"/>
-              </a:rPr>
-              <a:t> </a:t>
-            </a:r>
-            <a:r>
-              <a:rPr sz="1300" b="0" dirty="0" err="1">
-                <a:solidFill>
-                  <a:srgbClr val="1F2937"/>
-                </a:solidFill>
-                <a:latin typeface="Arial"/>
-              </a:rPr>
-              <a:t>mật</a:t>
-            </a:r>
-            <a:r>
-              <a:rPr sz="1300" b="0" dirty="0">
-                <a:solidFill>
-                  <a:srgbClr val="1F2937"/>
-                </a:solidFill>
-                <a:latin typeface="Arial"/>
-              </a:rPr>
-              <a:t> </a:t>
-            </a:r>
-            <a:r>
-              <a:rPr sz="1300" b="0" dirty="0" err="1">
-                <a:solidFill>
-                  <a:srgbClr val="1F2937"/>
-                </a:solidFill>
-                <a:latin typeface="Arial"/>
-              </a:rPr>
-              <a:t>khẩu</a:t>
-            </a:r>
-            <a:r>
-              <a:rPr sz="1300" b="0" dirty="0">
-                <a:solidFill>
-                  <a:srgbClr val="1F2937"/>
-                </a:solidFill>
-                <a:latin typeface="Arial"/>
-              </a:rPr>
-              <a:t>.</a:t>
+              <a:rPr sz="1300" b="0">
+                <a:solidFill>
+                  <a:srgbClr val="1F2937"/>
+                </a:solidFill>
+                <a:latin typeface="Arial"/>
+              </a:rPr>
+              <a:t>•  Đổi mật khẩu.</a:t>
             </a:r>
           </a:p>
           <a:p>
@@ -25760,31 +23781,13 @@
               </a:defRPr>
             </a:pPr>
             <a:r>
-              <a:rPr sz="1300" b="0" dirty="0">
-                <a:solidFill>
-                  <a:srgbClr val="1F2937"/>
-                </a:solidFill>
-                <a:latin typeface="Arial"/>
-              </a:rPr>
-              <a:t>•  Liên </a:t>
-            </a:r>
-            <a:r>
-              <a:rPr sz="1300" b="0" dirty="0" err="1">
-                <a:solidFill>
-                  <a:srgbClr val="1F2937"/>
-                </a:solidFill>
-                <a:latin typeface="Arial"/>
-              </a:rPr>
-              <a:t>kết</a:t>
-            </a:r>
-            <a:r>
-              <a:rPr sz="1300" b="0" dirty="0">
-                <a:solidFill>
-                  <a:srgbClr val="1F2937"/>
-                </a:solidFill>
-                <a:latin typeface="Arial"/>
-              </a:rPr>
-              <a:t> Google/Facebook.</a:t>
+              <a:rPr sz="1300" b="0">
+                <a:solidFill>
+                  <a:srgbClr val="1F2937"/>
+                </a:solidFill>
+                <a:latin typeface="Arial"/>
+              </a:rPr>
+              <a:t>•  Liên kết Google/Facebook.</a:t>
             </a:r>
           </a:p>
         </p:txBody>
@@ -25968,103 +23971,13 @@
               </a:defRPr>
             </a:pPr>
             <a:r>
-              <a:rPr sz="1300" b="0" dirty="0">
-                <a:solidFill>
-                  <a:srgbClr val="1F2937"/>
-                </a:solidFill>
-                <a:latin typeface="Arial"/>
-              </a:rPr>
-              <a:t>•  </a:t>
-            </a:r>
-            <a:r>
-              <a:rPr sz="1300" b="0" dirty="0" err="1">
-                <a:solidFill>
-                  <a:srgbClr val="1F2937"/>
-                </a:solidFill>
-                <a:latin typeface="Arial"/>
-              </a:rPr>
-              <a:t>Kế</a:t>
-            </a:r>
-            <a:r>
-              <a:rPr sz="1300" b="0" dirty="0">
-                <a:solidFill>
-                  <a:srgbClr val="1F2937"/>
-                </a:solidFill>
-                <a:latin typeface="Arial"/>
-              </a:rPr>
-              <a:t> </a:t>
-            </a:r>
-            <a:r>
-              <a:rPr sz="1300" b="0" dirty="0" err="1">
-                <a:solidFill>
-                  <a:srgbClr val="1F2937"/>
-                </a:solidFill>
-                <a:latin typeface="Arial"/>
-              </a:rPr>
-              <a:t>thừa</a:t>
-            </a:r>
-            <a:r>
-              <a:rPr sz="1300" b="0" dirty="0">
-                <a:solidFill>
-                  <a:srgbClr val="1F2937"/>
-                </a:solidFill>
-                <a:latin typeface="Arial"/>
-              </a:rPr>
-              <a:t> </a:t>
-            </a:r>
-            <a:r>
-              <a:rPr sz="1300" b="0" dirty="0" err="1">
-                <a:solidFill>
-                  <a:srgbClr val="1F2937"/>
-                </a:solidFill>
-                <a:latin typeface="Arial"/>
-              </a:rPr>
-              <a:t>quyền</a:t>
-            </a:r>
-            <a:r>
-              <a:rPr sz="1300" b="0" dirty="0">
-                <a:solidFill>
-                  <a:srgbClr val="1F2937"/>
-                </a:solidFill>
-                <a:latin typeface="Arial"/>
-              </a:rPr>
-              <a:t> </a:t>
-            </a:r>
-            <a:r>
-              <a:rPr sz="1300" b="0" dirty="0" err="1">
-                <a:solidFill>
-                  <a:srgbClr val="1F2937"/>
-                </a:solidFill>
-                <a:latin typeface="Arial"/>
-              </a:rPr>
-              <a:t>thành</a:t>
-            </a:r>
-            <a:r>
-              <a:rPr sz="1300" b="0" dirty="0">
-                <a:solidFill>
-                  <a:srgbClr val="1F2937"/>
-                </a:solidFill>
-                <a:latin typeface="Arial"/>
-              </a:rPr>
-              <a:t> </a:t>
-            </a:r>
-            <a:r>
-              <a:rPr sz="1300" b="0" dirty="0" err="1">
-                <a:solidFill>
-                  <a:srgbClr val="1F2937"/>
-                </a:solidFill>
-                <a:latin typeface="Arial"/>
-              </a:rPr>
-              <a:t>viên</a:t>
-            </a:r>
-            <a:r>
-              <a:rPr sz="1300" b="0" dirty="0">
-                <a:solidFill>
-                  <a:srgbClr val="1F2937"/>
-                </a:solidFill>
-                <a:latin typeface="Arial"/>
-              </a:rPr>
-              <a:t>.</a:t>
+              <a:rPr sz="1300" b="0">
+                <a:solidFill>
+                  <a:srgbClr val="1F2937"/>
+                </a:solidFill>
+                <a:latin typeface="Arial"/>
+              </a:rPr>
+              <a:t>•  Kế thừa quyền thành viên.</a:t>
             </a:r>
           </a:p>
           <a:p>
@@ -26083,67 +23996,13 @@
               </a:defRPr>
             </a:pPr>
             <a:r>
-              <a:rPr sz="1300" b="0" dirty="0">
-                <a:solidFill>
-                  <a:srgbClr val="1F2937"/>
-                </a:solidFill>
-                <a:latin typeface="Arial"/>
-              </a:rPr>
-              <a:t>•  Quản </a:t>
-            </a:r>
-            <a:r>
-              <a:rPr sz="1300" b="0" dirty="0" err="1">
-                <a:solidFill>
-                  <a:srgbClr val="1F2937"/>
-                </a:solidFill>
-                <a:latin typeface="Arial"/>
-              </a:rPr>
-              <a:t>lý</a:t>
-            </a:r>
-            <a:r>
-              <a:rPr sz="1300" b="0" dirty="0">
-                <a:solidFill>
-                  <a:srgbClr val="1F2937"/>
-                </a:solidFill>
-                <a:latin typeface="Arial"/>
-              </a:rPr>
-              <a:t> </a:t>
-            </a:r>
-            <a:r>
-              <a:rPr sz="1300" b="0" dirty="0" err="1">
-                <a:solidFill>
-                  <a:srgbClr val="1F2937"/>
-                </a:solidFill>
-                <a:latin typeface="Arial"/>
-              </a:rPr>
-              <a:t>người</a:t>
-            </a:r>
-            <a:r>
-              <a:rPr sz="1300" b="0" dirty="0">
-                <a:solidFill>
-                  <a:srgbClr val="1F2937"/>
-                </a:solidFill>
-                <a:latin typeface="Arial"/>
-              </a:rPr>
-              <a:t> </a:t>
-            </a:r>
-            <a:r>
-              <a:rPr sz="1300" b="0" dirty="0" err="1">
-                <a:solidFill>
-                  <a:srgbClr val="1F2937"/>
-                </a:solidFill>
-                <a:latin typeface="Arial"/>
-              </a:rPr>
-              <a:t>dùng</a:t>
-            </a:r>
-            <a:r>
-              <a:rPr sz="1300" b="0" dirty="0">
-                <a:solidFill>
-                  <a:srgbClr val="1F2937"/>
-                </a:solidFill>
-                <a:latin typeface="Arial"/>
-              </a:rPr>
-              <a:t>.</a:t>
+              <a:rPr sz="1300" b="0">
+                <a:solidFill>
+                  <a:srgbClr val="1F2937"/>
+                </a:solidFill>
+                <a:latin typeface="Arial"/>
+              </a:rPr>
+              <a:t>•  Quản lý người dùng.</a:t>
             </a:r>
           </a:p>
           <a:p>
@@ -26162,103 +24021,13 @@
               </a:defRPr>
             </a:pPr>
             <a:r>
-              <a:rPr sz="1300" b="0" dirty="0">
-                <a:solidFill>
-                  <a:srgbClr val="1F2937"/>
-                </a:solidFill>
-                <a:latin typeface="Arial"/>
-              </a:rPr>
-              <a:t>•  Quản </a:t>
-            </a:r>
-            <a:r>
-              <a:rPr sz="1300" b="0" dirty="0" err="1">
-                <a:solidFill>
-                  <a:srgbClr val="1F2937"/>
-                </a:solidFill>
-                <a:latin typeface="Arial"/>
-              </a:rPr>
-              <a:t>lý</a:t>
-            </a:r>
-            <a:r>
-              <a:rPr sz="1300" b="0" dirty="0">
-                <a:solidFill>
-                  <a:srgbClr val="1F2937"/>
-                </a:solidFill>
-                <a:latin typeface="Arial"/>
-              </a:rPr>
-              <a:t> </a:t>
-            </a:r>
-            <a:r>
-              <a:rPr sz="1300" b="0" dirty="0" err="1">
-                <a:solidFill>
-                  <a:srgbClr val="1F2937"/>
-                </a:solidFill>
-                <a:latin typeface="Arial"/>
-              </a:rPr>
-              <a:t>kết</a:t>
-            </a:r>
-            <a:r>
-              <a:rPr sz="1300" b="0" dirty="0">
-                <a:solidFill>
-                  <a:srgbClr val="1F2937"/>
-                </a:solidFill>
-                <a:latin typeface="Arial"/>
-              </a:rPr>
-              <a:t> </a:t>
-            </a:r>
-            <a:r>
-              <a:rPr sz="1300" b="0" dirty="0" err="1">
-                <a:solidFill>
-                  <a:srgbClr val="1F2937"/>
-                </a:solidFill>
-                <a:latin typeface="Arial"/>
-              </a:rPr>
-              <a:t>quả</a:t>
-            </a:r>
-            <a:r>
-              <a:rPr sz="1300" b="0" dirty="0">
-                <a:solidFill>
-                  <a:srgbClr val="1F2937"/>
-                </a:solidFill>
-                <a:latin typeface="Arial"/>
-              </a:rPr>
-              <a:t> </a:t>
-            </a:r>
-            <a:r>
-              <a:rPr sz="1300" b="0" dirty="0" err="1">
-                <a:solidFill>
-                  <a:srgbClr val="1F2937"/>
-                </a:solidFill>
-                <a:latin typeface="Arial"/>
-              </a:rPr>
-              <a:t>xổ</a:t>
-            </a:r>
-            <a:r>
-              <a:rPr sz="1300" b="0" dirty="0">
-                <a:solidFill>
-                  <a:srgbClr val="1F2937"/>
-                </a:solidFill>
-                <a:latin typeface="Arial"/>
-              </a:rPr>
-              <a:t> </a:t>
-            </a:r>
-            <a:r>
-              <a:rPr sz="1300" b="0" dirty="0" err="1">
-                <a:solidFill>
-                  <a:srgbClr val="1F2937"/>
-                </a:solidFill>
-                <a:latin typeface="Arial"/>
-              </a:rPr>
-              <a:t>số</a:t>
-            </a:r>
-            <a:r>
-              <a:rPr sz="1300" b="0" dirty="0">
-                <a:solidFill>
-                  <a:srgbClr val="1F2937"/>
-                </a:solidFill>
-                <a:latin typeface="Arial"/>
-              </a:rPr>
-              <a:t>.</a:t>
+              <a:rPr sz="1300" b="0">
+                <a:solidFill>
+                  <a:srgbClr val="1F2937"/>
+                </a:solidFill>
+                <a:latin typeface="Arial"/>
+              </a:rPr>
+              <a:t>•  Quản lý kết quả xổ số.</a:t>
             </a:r>
           </a:p>
           <a:p>
@@ -26277,49 +24046,13 @@
               </a:defRPr>
             </a:pPr>
             <a:r>
-              <a:rPr sz="1300" b="0" dirty="0">
-                <a:solidFill>
-                  <a:srgbClr val="1F2937"/>
-                </a:solidFill>
-                <a:latin typeface="Arial"/>
-              </a:rPr>
-              <a:t>•  Publish/unpublish </a:t>
-            </a:r>
-            <a:r>
-              <a:rPr sz="1300" b="0" dirty="0" err="1">
-                <a:solidFill>
-                  <a:srgbClr val="1F2937"/>
-                </a:solidFill>
-                <a:latin typeface="Arial"/>
-              </a:rPr>
-              <a:t>kết</a:t>
-            </a:r>
-            <a:r>
-              <a:rPr sz="1300" b="0" dirty="0">
-                <a:solidFill>
-                  <a:srgbClr val="1F2937"/>
-                </a:solidFill>
-                <a:latin typeface="Arial"/>
-              </a:rPr>
-              <a:t> </a:t>
-            </a:r>
-            <a:r>
-              <a:rPr sz="1300" b="0" dirty="0" err="1">
-                <a:solidFill>
-                  <a:srgbClr val="1F2937"/>
-                </a:solidFill>
-                <a:latin typeface="Arial"/>
-              </a:rPr>
-              <a:t>quả</a:t>
-            </a:r>
-            <a:r>
-              <a:rPr sz="1300" b="0" dirty="0">
-                <a:solidFill>
-                  <a:srgbClr val="1F2937"/>
-                </a:solidFill>
-                <a:latin typeface="Arial"/>
-              </a:rPr>
-              <a:t>.</a:t>
+              <a:rPr sz="1300" b="0">
+                <a:solidFill>
+                  <a:srgbClr val="1F2937"/>
+                </a:solidFill>
+                <a:latin typeface="Arial"/>
+              </a:rPr>
+              <a:t>•  Publish/unpublish kết quả.</a:t>
             </a:r>
           </a:p>
           <a:p>
@@ -26338,49 +24071,13 @@
               </a:defRPr>
             </a:pPr>
             <a:r>
-              <a:rPr sz="1300" b="0" dirty="0">
-                <a:solidFill>
-                  <a:srgbClr val="1F2937"/>
-                </a:solidFill>
-                <a:latin typeface="Arial"/>
-              </a:rPr>
-              <a:t>•  </a:t>
-            </a:r>
-            <a:r>
-              <a:rPr sz="1300" b="0" dirty="0" err="1">
-                <a:solidFill>
-                  <a:srgbClr val="1F2937"/>
-                </a:solidFill>
-                <a:latin typeface="Arial"/>
-              </a:rPr>
-              <a:t>Gửi</a:t>
-            </a:r>
-            <a:r>
-              <a:rPr sz="1300" b="0" dirty="0">
-                <a:solidFill>
-                  <a:srgbClr val="1F2937"/>
-                </a:solidFill>
-                <a:latin typeface="Arial"/>
-              </a:rPr>
-              <a:t> email, </a:t>
-            </a:r>
-            <a:r>
-              <a:rPr sz="1300" b="0" dirty="0" err="1">
-                <a:solidFill>
-                  <a:srgbClr val="1F2937"/>
-                </a:solidFill>
-                <a:latin typeface="Arial"/>
-              </a:rPr>
-              <a:t>xuất</a:t>
-            </a:r>
-            <a:r>
-              <a:rPr sz="1300" b="0" dirty="0">
-                <a:solidFill>
-                  <a:srgbClr val="1F2937"/>
-                </a:solidFill>
-                <a:latin typeface="Arial"/>
-              </a:rPr>
-              <a:t> Excel/CSV/JSON.</a:t>
+              <a:rPr sz="1300" b="0">
+                <a:solidFill>
+                  <a:srgbClr val="1F2937"/>
+                </a:solidFill>
+                <a:latin typeface="Arial"/>
+              </a:rPr>
+              <a:t>•  Gửi email, xuất Excel/CSV/JSON.</a:t>
             </a:r>
           </a:p>
         </p:txBody>
@@ -26535,7 +24232,7 @@
         </p:nvSpPr>
         <p:spPr>
           <a:xfrm>
-            <a:off x="1014984" y="5239512"/>
+            <a:off x="963168" y="5212080"/>
             <a:ext cx="10222992" cy="621792"/>
           </a:xfrm>
           <a:prstGeom prst="rect">
@@ -27725,7 +25422,7 @@
         </p:nvSpPr>
         <p:spPr>
           <a:xfrm>
-            <a:off x="777240" y="6419088"/>
+            <a:off x="336546" y="6627706"/>
             <a:ext cx="7315200" cy="274320"/>
           </a:xfrm>
           <a:prstGeom prst="rect">
@@ -27754,13 +25451,76 @@
               </a:defRPr>
             </a:pPr>
             <a:r>
-              <a:rPr sz="900" b="0">
+              <a:rPr sz="900" b="0" dirty="0" err="1">
                 <a:solidFill>
                   <a:srgbClr val="6B7280"/>
                 </a:solidFill>
                 <a:latin typeface="Arial"/>
               </a:rPr>
-              <a:t>Dò Vé Số – Báo cáo Lab3</a:t>
+              <a:t>Dò</a:t>
+            </a:r>
+            <a:r>
+              <a:rPr sz="900" b="0" dirty="0">
+                <a:solidFill>
+                  <a:srgbClr val="6B7280"/>
+                </a:solidFill>
+                <a:latin typeface="Arial"/>
+              </a:rPr>
+              <a:t> </a:t>
+            </a:r>
+            <a:r>
+              <a:rPr sz="900" b="0" dirty="0" err="1">
+                <a:solidFill>
+                  <a:srgbClr val="6B7280"/>
+                </a:solidFill>
+                <a:latin typeface="Arial"/>
+              </a:rPr>
+              <a:t>Vé</a:t>
+            </a:r>
+            <a:r>
+              <a:rPr sz="900" b="0" dirty="0">
+                <a:solidFill>
+                  <a:srgbClr val="6B7280"/>
+                </a:solidFill>
+                <a:latin typeface="Arial"/>
+              </a:rPr>
+              <a:t> </a:t>
+            </a:r>
+            <a:r>
+              <a:rPr sz="900" b="0" dirty="0" err="1">
+                <a:solidFill>
+                  <a:srgbClr val="6B7280"/>
+                </a:solidFill>
+                <a:latin typeface="Arial"/>
+              </a:rPr>
+              <a:t>Số</a:t>
+            </a:r>
+            <a:r>
+              <a:rPr sz="900" b="0" dirty="0">
+                <a:solidFill>
+                  <a:srgbClr val="6B7280"/>
+                </a:solidFill>
+                <a:latin typeface="Arial"/>
+              </a:rPr>
+              <a:t> – Báo </a:t>
+            </a:r>
+            <a:r>
+              <a:rPr sz="900" b="0" dirty="0" err="1">
+                <a:solidFill>
+                  <a:srgbClr val="6B7280"/>
+                </a:solidFill>
+                <a:latin typeface="Arial"/>
+              </a:rPr>
+              <a:t>cáo</a:t>
+            </a:r>
+            <a:r>
+              <a:rPr sz="900" b="0" dirty="0">
+                <a:solidFill>
+                  <a:srgbClr val="6B7280"/>
+                </a:solidFill>
+                <a:latin typeface="Arial"/>
+              </a:rPr>
+              <a:t> Lab3</a:t>
             </a:r>
           </a:p>
         </p:txBody>
@@ -27821,8 +25581,8 @@
         </p:nvSpPr>
         <p:spPr>
           <a:xfrm>
-            <a:off x="722376" y="1499616"/>
-            <a:ext cx="10744200" cy="5243262"/>
+            <a:off x="950976" y="1499616"/>
+            <a:ext cx="10515599" cy="5053584"/>
           </a:xfrm>
           <a:prstGeom prst="roundRect">
             <a:avLst>
@@ -27862,6 +25622,30 @@
           </a:p>
         </p:txBody>
       </p:sp>
+      <p:pic>
+        <p:nvPicPr>
+          <p:cNvPr id="10" name="Picture 9" descr="usecase-diagram.png"/>
+          <p:cNvPicPr>
+            <a:picLocks noChangeAspect="1"/>
+          </p:cNvPicPr>
+          <p:nvPr/>
+        </p:nvPicPr>
+        <p:blipFill>
+          <a:blip r:embed="rId2"/>
+          <a:stretch>
+            <a:fillRect/>
+          </a:stretch>
+        </p:blipFill>
+        <p:spPr>
+          <a:xfrm>
+            <a:off x="4075047" y="1554480"/>
+            <a:ext cx="3576699" cy="4882896"/>
+          </a:xfrm>
+          <a:prstGeom prst="rect">
+            <a:avLst/>
+          </a:prstGeom>
+        </p:spPr>
+      </p:pic>
       <p:sp>
         <p:nvSpPr>
           <p:cNvPr id="11" name="TextBox 10"/>
@@ -27870,7 +25654,7 @@
         </p:nvSpPr>
         <p:spPr>
           <a:xfrm>
-            <a:off x="777240" y="5852160"/>
+            <a:off x="717804" y="6590453"/>
             <a:ext cx="10634472" cy="274320"/>
           </a:xfrm>
           <a:prstGeom prst="rect">
@@ -27899,47 +25683,149 @@
               </a:defRPr>
             </a:pPr>
             <a:r>
-              <a:rPr sz="1000" b="0">
+              <a:rPr sz="1000" b="0" dirty="0" err="1">
                 <a:solidFill>
                   <a:srgbClr val="6B7280"/>
                 </a:solidFill>
                 <a:latin typeface="Arial"/>
               </a:rPr>
-              <a:t>Sơ đồ use case: Guest, User, Admin với các nhóm chức năng chính</a:t>
-            </a:r>
-          </a:p>
-        </p:txBody>
-      </p:sp>
-      <p:pic>
-        <p:nvPicPr>
-          <p:cNvPr id="13" name="Picture 12">
-            <a:extLst>
-              <a:ext uri="{FF2B5EF4-FFF2-40B4-BE49-F238E27FC236}">
-                <a16:creationId xmlns:a16="http://schemas.microsoft.com/office/drawing/2014/main" id="{AE73C4A6-43FE-7E0F-12DD-DD56AA07D4A6}"/>
-              </a:ext>
-            </a:extLst>
-          </p:cNvPr>
-          <p:cNvPicPr>
-            <a:picLocks noChangeAspect="1"/>
-          </p:cNvPicPr>
-          <p:nvPr/>
-        </p:nvPicPr>
-        <p:blipFill>
-          <a:blip r:embed="rId2"/>
-          <a:stretch>
-            <a:fillRect/>
-          </a:stretch>
-        </p:blipFill>
-        <p:spPr>
-          <a:xfrm>
-            <a:off x="3522066" y="1499616"/>
-            <a:ext cx="3793676" cy="5145967"/>
-          </a:xfrm>
-          <a:prstGeom prst="rect">
-            <a:avLst/>
-          </a:prstGeom>
-        </p:spPr>
-      </p:pic>
+              <a:t>Sơ</a:t>
+            </a:r>
+            <a:r>
+              <a:rPr sz="1000" b="0" dirty="0">
+                <a:solidFill>
+                  <a:srgbClr val="6B7280"/>
+                </a:solidFill>
+                <a:latin typeface="Arial"/>
+              </a:rPr>
+              <a:t> </a:t>
+            </a:r>
+            <a:r>
+              <a:rPr sz="1000" b="0" dirty="0" err="1">
+                <a:solidFill>
+                  <a:srgbClr val="6B7280"/>
+                </a:solidFill>
+                <a:latin typeface="Arial"/>
+              </a:rPr>
+              <a:t>đồ</a:t>
+            </a:r>
+            <a:r>
+              <a:rPr sz="1000" b="0" dirty="0">
+                <a:solidFill>
+                  <a:srgbClr val="6B7280"/>
+                </a:solidFill>
+                <a:latin typeface="Arial"/>
+              </a:rPr>
+              <a:t> use case: Guest, User, Admin </a:t>
+            </a:r>
+            <a:r>
+              <a:rPr sz="1000" b="0" dirty="0" err="1">
+                <a:solidFill>
+                  <a:srgbClr val="6B7280"/>
+                </a:solidFill>
+                <a:latin typeface="Arial"/>
+              </a:rPr>
+              <a:t>với</a:t>
+            </a:r>
+            <a:r>
+              <a:rPr sz="1000" b="0" dirty="0">
+                <a:solidFill>
+                  <a:srgbClr val="6B7280"/>
+                </a:solidFill>
+                <a:latin typeface="Arial"/>
+              </a:rPr>
+              <a:t> </a:t>
+            </a:r>
+            <a:r>
+              <a:rPr sz="1000" b="0" dirty="0" err="1">
+                <a:solidFill>
+                  <a:srgbClr val="6B7280"/>
+                </a:solidFill>
+                <a:latin typeface="Arial"/>
+              </a:rPr>
+              <a:t>các</a:t>
+            </a:r>
+            <a:r>
+              <a:rPr sz="1000" b="0" dirty="0">
+                <a:solidFill>
+                  <a:srgbClr val="6B7280"/>
+                </a:solidFill>
+                <a:latin typeface="Arial"/>
+              </a:rPr>
+              <a:t> </a:t>
+            </a:r>
+            <a:r>
+              <a:rPr sz="1000" b="0" dirty="0" err="1">
+                <a:solidFill>
+                  <a:srgbClr val="6B7280"/>
+                </a:solidFill>
+                <a:latin typeface="Arial"/>
+              </a:rPr>
+              <a:t>nhóm</a:t>
+            </a:r>
+            <a:r>
+              <a:rPr sz="1000" b="0" dirty="0">
+                <a:solidFill>
+                  <a:srgbClr val="6B7280"/>
+                </a:solidFill>
+                <a:latin typeface="Arial"/>
+              </a:rPr>
+              <a:t> </a:t>
+            </a:r>
+            <a:r>
+              <a:rPr sz="1000" b="0" dirty="0" err="1">
+                <a:solidFill>
+                  <a:srgbClr val="6B7280"/>
+                </a:solidFill>
+                <a:latin typeface="Arial"/>
+              </a:rPr>
+              <a:t>chức</a:t>
+            </a:r>
+            <a:r>
+              <a:rPr sz="1000" b="0" dirty="0">
+                <a:solidFill>
+                  <a:srgbClr val="6B7280"/>
+                </a:solidFill>
+                <a:latin typeface="Arial"/>
+              </a:rPr>
+              <a:t> </a:t>
+            </a:r>
+            <a:r>
+              <a:rPr sz="1000" b="0" dirty="0" err="1">
+                <a:solidFill>
+                  <a:srgbClr val="6B7280"/>
+                </a:solidFill>
+                <a:latin typeface="Arial"/>
+              </a:rPr>
+              <a:t>năng</a:t>
+            </a:r>
+            <a:r>
+              <a:rPr sz="1000" b="0" dirty="0">
+                <a:solidFill>
+                  <a:srgbClr val="6B7280"/>
+                </a:solidFill>
+                <a:latin typeface="Arial"/>
+              </a:rPr>
+              <a:t> </a:t>
+            </a:r>
+            <a:r>
+              <a:rPr sz="1000" b="0" dirty="0" err="1">
+                <a:solidFill>
+                  <a:srgbClr val="6B7280"/>
+                </a:solidFill>
+                <a:latin typeface="Arial"/>
+              </a:rPr>
+              <a:t>chính</a:t>
+            </a:r>
+            <a:endParaRPr sz="1000" b="0" dirty="0">
+              <a:solidFill>
+                <a:srgbClr val="6B7280"/>
+              </a:solidFill>
+              <a:latin typeface="Arial"/>
+            </a:endParaRPr>
+          </a:p>
+        </p:txBody>
+      </p:sp>
     </p:spTree>
   </p:cSld>
   <p:clrMapOvr>
@@ -28479,7 +26365,7 @@
               </a:defRPr>
             </a:pPr>
             <a:r>
-              <a:rPr sz="1200" b="0" dirty="0">
+              <a:rPr sz="1200" b="0">
                 <a:solidFill>
                   <a:srgbClr val="1F2937"/>
                 </a:solidFill>
@@ -28504,7 +26390,7 @@
               </a:defRPr>
             </a:pPr>
             <a:r>
-              <a:rPr sz="1200" b="0" dirty="0">
+              <a:rPr sz="1200" b="0">
                 <a:solidFill>
                   <a:srgbClr val="1F2937"/>
                 </a:solidFill>
@@ -28529,7 +26415,7 @@
               </a:defRPr>
             </a:pPr>
             <a:r>
-              <a:rPr sz="1200" b="0" dirty="0">
+              <a:rPr sz="1200" b="0">
                 <a:solidFill>
                   <a:srgbClr val="1F2937"/>
                 </a:solidFill>
@@ -28554,7 +26440,7 @@
               </a:defRPr>
             </a:pPr>
             <a:r>
-              <a:rPr sz="1200" b="0" dirty="0">
+              <a:rPr sz="1200" b="0">
                 <a:solidFill>
                   <a:srgbClr val="1F2937"/>
                 </a:solidFill>
@@ -28579,7 +26465,7 @@
               </a:defRPr>
             </a:pPr>
             <a:r>
-              <a:rPr sz="1200" b="0" dirty="0">
+              <a:rPr sz="1200" b="0">
                 <a:solidFill>
                   <a:srgbClr val="1F2937"/>
                 </a:solidFill>
@@ -28604,7 +26490,7 @@
               </a:defRPr>
             </a:pPr>
             <a:r>
-              <a:rPr sz="1200" b="0" dirty="0">
+              <a:rPr sz="1200" b="0">
                 <a:solidFill>
                   <a:srgbClr val="1F2937"/>
                 </a:solidFill>
@@ -28629,7 +26515,7 @@
               </a:defRPr>
             </a:pPr>
             <a:r>
-              <a:rPr sz="1200" b="0" dirty="0">
+              <a:rPr sz="1200" b="0">
                 <a:solidFill>
                   <a:srgbClr val="1F2937"/>
                 </a:solidFill>
@@ -28819,7 +26705,7 @@
               </a:defRPr>
             </a:pPr>
             <a:r>
-              <a:rPr sz="1200" b="0" dirty="0">
+              <a:rPr sz="1200" b="0">
                 <a:solidFill>
                   <a:srgbClr val="1F2937"/>
                 </a:solidFill>
@@ -28844,7 +26730,7 @@
               </a:defRPr>
             </a:pPr>
             <a:r>
-              <a:rPr sz="1200" b="0" dirty="0">
+              <a:rPr sz="1200" b="0">
                 <a:solidFill>
                   <a:srgbClr val="1F2937"/>
                 </a:solidFill>
@@ -28869,7 +26755,7 @@
               </a:defRPr>
             </a:pPr>
             <a:r>
-              <a:rPr sz="1200" b="0" dirty="0">
+              <a:rPr sz="1200" b="0">
                 <a:solidFill>
                   <a:srgbClr val="1F2937"/>
                 </a:solidFill>
@@ -28894,7 +26780,7 @@
               </a:defRPr>
             </a:pPr>
             <a:r>
-              <a:rPr sz="1200" b="0" dirty="0">
+              <a:rPr sz="1200" b="0">
                 <a:solidFill>
                   <a:srgbClr val="1F2937"/>
                 </a:solidFill>
@@ -28919,7 +26805,7 @@
               </a:defRPr>
             </a:pPr>
             <a:r>
-              <a:rPr sz="1200" b="0" dirty="0">
+              <a:rPr sz="1200" b="0">
                 <a:solidFill>
                   <a:srgbClr val="1F2937"/>
                 </a:solidFill>
@@ -28944,7 +26830,7 @@
               </a:defRPr>
             </a:pPr>
             <a:r>
-              <a:rPr sz="1200" b="0" dirty="0">
+              <a:rPr sz="1200" b="0">
                 <a:solidFill>
                   <a:srgbClr val="1F2937"/>
                 </a:solidFill>
@@ -28969,7 +26855,7 @@
               </a:defRPr>
             </a:pPr>
             <a:r>
-              <a:rPr sz="1200" b="0" dirty="0">
+              <a:rPr sz="1200" b="0">
                 <a:solidFill>
                   <a:srgbClr val="1F2937"/>
                 </a:solidFill>
@@ -29190,7 +27076,7 @@
                 </a:solidFill>
                 <a:latin typeface="Arial"/>
               </a:rPr>
-              <a:t>•  Docker</a:t>
+              <a:t>•  Docker + Docker Compose</a:t>
             </a:r>
           </a:p>
           <a:p>
@@ -29215,7 +27101,7 @@
                 </a:solidFill>
                 <a:latin typeface="Arial"/>
               </a:rPr>
-              <a:t>•  Docker Compose</a:t>
+              <a:t>•  Nginx reverse proxy</a:t>
             </a:r>
           </a:p>
           <a:p>
@@ -29240,7 +27126,7 @@
                 </a:solidFill>
                 <a:latin typeface="Arial"/>
               </a:rPr>
-              <a:t>•  Nginx reverse proxy</a:t>
+              <a:t>•  Actuator health check</a:t>
             </a:r>
           </a:p>
           <a:p>
@@ -29265,7 +27151,7 @@
                 </a:solidFill>
                 <a:latin typeface="Arial"/>
               </a:rPr>
-              <a:t>•  Actuator health check</a:t>
+              <a:t>•  Multi-stage build</a:t>
             </a:r>
           </a:p>
           <a:p>
@@ -29290,7 +27176,7 @@
                 </a:solidFill>
                 <a:latin typeface="Arial"/>
               </a:rPr>
-              <a:t>•  Multi-stage build</a:t>
+              <a:t>•  JaCoCo · SpotBugs · PMD</a:t>
             </a:r>
           </a:p>
         </p:txBody>
@@ -29304,7 +27190,7 @@
         <p:spPr>
           <a:xfrm>
             <a:off x="777240" y="4754880"/>
-            <a:ext cx="10634472" cy="1664208"/>
+            <a:ext cx="10634472" cy="1991360"/>
           </a:xfrm>
           <a:prstGeom prst="roundRect">
             <a:avLst>
@@ -29353,7 +27239,7 @@
         <p:spPr>
           <a:xfrm>
             <a:off x="777240" y="4919472"/>
-            <a:ext cx="82296" cy="1042416"/>
+            <a:ext cx="82296" cy="1623568"/>
           </a:xfrm>
           <a:prstGeom prst="rect">
             <a:avLst/>
@@ -29445,7 +27331,7 @@
         </p:nvSpPr>
         <p:spPr>
           <a:xfrm>
-            <a:off x="987552" y="5106924"/>
+            <a:off x="1005840" y="5358384"/>
             <a:ext cx="10222992" cy="621792"/>
           </a:xfrm>
           <a:prstGeom prst="rect">
@@ -29474,139 +27360,13 @@
               </a:defRPr>
             </a:pPr>
             <a:r>
-              <a:rPr sz="1300" b="0" dirty="0">
-                <a:solidFill>
-                  <a:srgbClr val="1F2937"/>
-                </a:solidFill>
-                <a:latin typeface="Arial"/>
-              </a:rPr>
-              <a:t>•  Spring Boot </a:t>
-            </a:r>
-            <a:r>
-              <a:rPr sz="1300" b="0" dirty="0" err="1">
-                <a:solidFill>
-                  <a:srgbClr val="1F2937"/>
-                </a:solidFill>
-                <a:latin typeface="Arial"/>
-              </a:rPr>
-              <a:t>phù</a:t>
-            </a:r>
-            <a:r>
-              <a:rPr sz="1300" b="0" dirty="0">
-                <a:solidFill>
-                  <a:srgbClr val="1F2937"/>
-                </a:solidFill>
-                <a:latin typeface="Arial"/>
-              </a:rPr>
-              <a:t> </a:t>
-            </a:r>
-            <a:r>
-              <a:rPr sz="1300" b="0" dirty="0" err="1">
-                <a:solidFill>
-                  <a:srgbClr val="1F2937"/>
-                </a:solidFill>
-                <a:latin typeface="Arial"/>
-              </a:rPr>
-              <a:t>hợp</a:t>
-            </a:r>
-            <a:r>
-              <a:rPr sz="1300" b="0" dirty="0">
-                <a:solidFill>
-                  <a:srgbClr val="1F2937"/>
-                </a:solidFill>
-                <a:latin typeface="Arial"/>
-              </a:rPr>
-              <a:t> backend </a:t>
-            </a:r>
-            <a:r>
-              <a:rPr sz="1300" b="0" dirty="0" err="1">
-                <a:solidFill>
-                  <a:srgbClr val="1F2937"/>
-                </a:solidFill>
-                <a:latin typeface="Arial"/>
-              </a:rPr>
-              <a:t>nghiệp</a:t>
-            </a:r>
-            <a:r>
-              <a:rPr sz="1300" b="0" dirty="0">
-                <a:solidFill>
-                  <a:srgbClr val="1F2937"/>
-                </a:solidFill>
-                <a:latin typeface="Arial"/>
-              </a:rPr>
-              <a:t> </a:t>
-            </a:r>
-            <a:r>
-              <a:rPr sz="1300" b="0" dirty="0" err="1">
-                <a:solidFill>
-                  <a:srgbClr val="1F2937"/>
-                </a:solidFill>
-                <a:latin typeface="Arial"/>
-              </a:rPr>
-              <a:t>vụ</a:t>
-            </a:r>
-            <a:r>
-              <a:rPr sz="1300" b="0" dirty="0">
-                <a:solidFill>
-                  <a:srgbClr val="1F2937"/>
-                </a:solidFill>
-                <a:latin typeface="Arial"/>
-              </a:rPr>
-              <a:t>, </a:t>
-            </a:r>
-            <a:r>
-              <a:rPr sz="1300" b="0" dirty="0" err="1">
-                <a:solidFill>
-                  <a:srgbClr val="1F2937"/>
-                </a:solidFill>
-                <a:latin typeface="Arial"/>
-              </a:rPr>
-              <a:t>bảo</a:t>
-            </a:r>
-            <a:r>
-              <a:rPr sz="1300" b="0" dirty="0">
-                <a:solidFill>
-                  <a:srgbClr val="1F2937"/>
-                </a:solidFill>
-                <a:latin typeface="Arial"/>
-              </a:rPr>
-              <a:t> </a:t>
-            </a:r>
-            <a:r>
-              <a:rPr sz="1300" b="0" dirty="0" err="1">
-                <a:solidFill>
-                  <a:srgbClr val="1F2937"/>
-                </a:solidFill>
-                <a:latin typeface="Arial"/>
-              </a:rPr>
-              <a:t>mật</a:t>
-            </a:r>
-            <a:r>
-              <a:rPr sz="1300" b="0" dirty="0">
-                <a:solidFill>
-                  <a:srgbClr val="1F2937"/>
-                </a:solidFill>
-                <a:latin typeface="Arial"/>
-              </a:rPr>
-              <a:t>, validation </a:t>
-            </a:r>
-            <a:r>
-              <a:rPr sz="1300" b="0" dirty="0" err="1">
-                <a:solidFill>
-                  <a:srgbClr val="1F2937"/>
-                </a:solidFill>
-                <a:latin typeface="Arial"/>
-              </a:rPr>
-              <a:t>và</a:t>
-            </a:r>
-            <a:r>
-              <a:rPr sz="1300" b="0" dirty="0">
-                <a:solidFill>
-                  <a:srgbClr val="1F2937"/>
-                </a:solidFill>
-                <a:latin typeface="Arial"/>
-              </a:rPr>
-              <a:t> JPA.</a:t>
+              <a:rPr sz="1300" b="0">
+                <a:solidFill>
+                  <a:srgbClr val="1F2937"/>
+                </a:solidFill>
+                <a:latin typeface="Arial"/>
+              </a:rPr>
+              <a:t>•  Spring Boot phù hợp backend nghiệp vụ, bảo mật, validation và JPA.</a:t>
             </a:r>
           </a:p>
           <a:p>
@@ -29625,229 +27385,13 @@
               </a:defRPr>
             </a:pPr>
             <a:r>
-              <a:rPr sz="1300" b="0" dirty="0">
-                <a:solidFill>
-                  <a:srgbClr val="1F2937"/>
-                </a:solidFill>
-                <a:latin typeface="Arial"/>
-              </a:rPr>
-              <a:t>•  React SPA </a:t>
-            </a:r>
-            <a:r>
-              <a:rPr sz="1300" b="0" dirty="0" err="1">
-                <a:solidFill>
-                  <a:srgbClr val="1F2937"/>
-                </a:solidFill>
-                <a:latin typeface="Arial"/>
-              </a:rPr>
-              <a:t>phù</a:t>
-            </a:r>
-            <a:r>
-              <a:rPr sz="1300" b="0" dirty="0">
-                <a:solidFill>
-                  <a:srgbClr val="1F2937"/>
-                </a:solidFill>
-                <a:latin typeface="Arial"/>
-              </a:rPr>
-              <a:t> </a:t>
-            </a:r>
-            <a:r>
-              <a:rPr sz="1300" b="0" dirty="0" err="1">
-                <a:solidFill>
-                  <a:srgbClr val="1F2937"/>
-                </a:solidFill>
-                <a:latin typeface="Arial"/>
-              </a:rPr>
-              <a:t>hợp</a:t>
-            </a:r>
-            <a:r>
-              <a:rPr sz="1300" b="0" dirty="0">
-                <a:solidFill>
-                  <a:srgbClr val="1F2937"/>
-                </a:solidFill>
-                <a:latin typeface="Arial"/>
-              </a:rPr>
-              <a:t> </a:t>
-            </a:r>
-            <a:r>
-              <a:rPr sz="1300" b="0" dirty="0" err="1">
-                <a:solidFill>
-                  <a:srgbClr val="1F2937"/>
-                </a:solidFill>
-                <a:latin typeface="Arial"/>
-              </a:rPr>
-              <a:t>giao</a:t>
-            </a:r>
-            <a:r>
-              <a:rPr sz="1300" b="0" dirty="0">
-                <a:solidFill>
-                  <a:srgbClr val="1F2937"/>
-                </a:solidFill>
-                <a:latin typeface="Arial"/>
-              </a:rPr>
-              <a:t> </a:t>
-            </a:r>
-            <a:r>
-              <a:rPr sz="1300" b="0" dirty="0" err="1">
-                <a:solidFill>
-                  <a:srgbClr val="1F2937"/>
-                </a:solidFill>
-                <a:latin typeface="Arial"/>
-              </a:rPr>
-              <a:t>diện</a:t>
-            </a:r>
-            <a:r>
-              <a:rPr sz="1300" b="0" dirty="0">
-                <a:solidFill>
-                  <a:srgbClr val="1F2937"/>
-                </a:solidFill>
-                <a:latin typeface="Arial"/>
-              </a:rPr>
-              <a:t> mobile-first, </a:t>
-            </a:r>
-            <a:r>
-              <a:rPr sz="1300" b="0" dirty="0" err="1">
-                <a:solidFill>
-                  <a:srgbClr val="1F2937"/>
-                </a:solidFill>
-                <a:latin typeface="Arial"/>
-              </a:rPr>
-              <a:t>trải</a:t>
-            </a:r>
-            <a:r>
-              <a:rPr sz="1300" b="0" dirty="0">
-                <a:solidFill>
-                  <a:srgbClr val="1F2937"/>
-                </a:solidFill>
-                <a:latin typeface="Arial"/>
-              </a:rPr>
-              <a:t> </a:t>
-            </a:r>
-            <a:r>
-              <a:rPr sz="1300" b="0" dirty="0" err="1">
-                <a:solidFill>
-                  <a:srgbClr val="1F2937"/>
-                </a:solidFill>
-                <a:latin typeface="Arial"/>
-              </a:rPr>
-              <a:t>nghiệm</a:t>
-            </a:r>
-            <a:r>
-              <a:rPr sz="1300" b="0" dirty="0">
-                <a:solidFill>
-                  <a:srgbClr val="1F2937"/>
-                </a:solidFill>
-                <a:latin typeface="Arial"/>
-              </a:rPr>
-              <a:t> </a:t>
-            </a:r>
-            <a:r>
-              <a:rPr sz="1300" b="0" dirty="0" err="1">
-                <a:solidFill>
-                  <a:srgbClr val="1F2937"/>
-                </a:solidFill>
-                <a:latin typeface="Arial"/>
-              </a:rPr>
-              <a:t>dò</a:t>
-            </a:r>
-            <a:r>
-              <a:rPr sz="1300" b="0" dirty="0">
-                <a:solidFill>
-                  <a:srgbClr val="1F2937"/>
-                </a:solidFill>
-                <a:latin typeface="Arial"/>
-              </a:rPr>
-              <a:t> </a:t>
-            </a:r>
-            <a:r>
-              <a:rPr sz="1300" b="0" dirty="0" err="1">
-                <a:solidFill>
-                  <a:srgbClr val="1F2937"/>
-                </a:solidFill>
-                <a:latin typeface="Arial"/>
-              </a:rPr>
-              <a:t>vé</a:t>
-            </a:r>
-            <a:r>
-              <a:rPr sz="1300" b="0" dirty="0">
-                <a:solidFill>
-                  <a:srgbClr val="1F2937"/>
-                </a:solidFill>
-                <a:latin typeface="Arial"/>
-              </a:rPr>
-              <a:t> </a:t>
-            </a:r>
-            <a:r>
-              <a:rPr sz="1300" b="0" dirty="0" err="1">
-                <a:solidFill>
-                  <a:srgbClr val="1F2937"/>
-                </a:solidFill>
-                <a:latin typeface="Arial"/>
-              </a:rPr>
-              <a:t>số</a:t>
-            </a:r>
-            <a:r>
-              <a:rPr sz="1300" b="0" dirty="0">
-                <a:solidFill>
-                  <a:srgbClr val="1F2937"/>
-                </a:solidFill>
-                <a:latin typeface="Arial"/>
-              </a:rPr>
-              <a:t> </a:t>
-            </a:r>
-            <a:r>
-              <a:rPr sz="1300" b="0" dirty="0" err="1">
-                <a:solidFill>
-                  <a:srgbClr val="1F2937"/>
-                </a:solidFill>
-                <a:latin typeface="Arial"/>
-              </a:rPr>
-              <a:t>trên</a:t>
-            </a:r>
-            <a:r>
-              <a:rPr sz="1300" b="0" dirty="0">
-                <a:solidFill>
-                  <a:srgbClr val="1F2937"/>
-                </a:solidFill>
-                <a:latin typeface="Arial"/>
-              </a:rPr>
-              <a:t> </a:t>
-            </a:r>
-            <a:r>
-              <a:rPr sz="1300" b="0" dirty="0" err="1">
-                <a:solidFill>
-                  <a:srgbClr val="1F2937"/>
-                </a:solidFill>
-                <a:latin typeface="Arial"/>
-              </a:rPr>
-              <a:t>điện</a:t>
-            </a:r>
-            <a:r>
-              <a:rPr sz="1300" b="0" dirty="0">
-                <a:solidFill>
-                  <a:srgbClr val="1F2937"/>
-                </a:solidFill>
-                <a:latin typeface="Arial"/>
-              </a:rPr>
-              <a:t> </a:t>
-            </a:r>
-            <a:r>
-              <a:rPr sz="1300" b="0" dirty="0" err="1">
-                <a:solidFill>
-                  <a:srgbClr val="1F2937"/>
-                </a:solidFill>
-                <a:latin typeface="Arial"/>
-              </a:rPr>
-              <a:t>thoại</a:t>
-            </a:r>
-            <a:r>
-              <a:rPr sz="1300" b="0" dirty="0">
-                <a:solidFill>
-                  <a:srgbClr val="1F2937"/>
-                </a:solidFill>
-                <a:latin typeface="Arial"/>
-              </a:rPr>
-              <a:t>.</a:t>
+              <a:rPr sz="1300" b="0">
+                <a:solidFill>
+                  <a:srgbClr val="1F2937"/>
+                </a:solidFill>
+                <a:latin typeface="Arial"/>
+              </a:rPr>
+              <a:t>•  React SPA phù hợp giao diện mobile-first, trải nghiệm dò vé số trên điện thoại.</a:t>
             </a:r>
           </a:p>
           <a:p>
@@ -29866,121 +27410,13 @@
               </a:defRPr>
             </a:pPr>
             <a:r>
-              <a:rPr sz="1300" b="0" dirty="0">
-                <a:solidFill>
-                  <a:srgbClr val="1F2937"/>
-                </a:solidFill>
-                <a:latin typeface="Arial"/>
-              </a:rPr>
-              <a:t>•  React </a:t>
-            </a:r>
-            <a:r>
-              <a:rPr sz="1300" b="0" dirty="0" err="1">
-                <a:solidFill>
-                  <a:srgbClr val="1F2937"/>
-                </a:solidFill>
-                <a:latin typeface="Arial"/>
-              </a:rPr>
-              <a:t>và</a:t>
-            </a:r>
-            <a:r>
-              <a:rPr sz="1300" b="0" dirty="0">
-                <a:solidFill>
-                  <a:srgbClr val="1F2937"/>
-                </a:solidFill>
-                <a:latin typeface="Arial"/>
-              </a:rPr>
-              <a:t> Ant Design </a:t>
-            </a:r>
-            <a:r>
-              <a:rPr sz="1300" b="0" dirty="0" err="1">
-                <a:solidFill>
-                  <a:srgbClr val="1F2937"/>
-                </a:solidFill>
-                <a:latin typeface="Arial"/>
-              </a:rPr>
-              <a:t>được</a:t>
-            </a:r>
-            <a:r>
-              <a:rPr sz="1300" b="0" dirty="0">
-                <a:solidFill>
-                  <a:srgbClr val="1F2937"/>
-                </a:solidFill>
-                <a:latin typeface="Arial"/>
-              </a:rPr>
-              <a:t> mentor </a:t>
-            </a:r>
-            <a:r>
-              <a:rPr sz="1300" b="0" dirty="0" err="1">
-                <a:solidFill>
-                  <a:srgbClr val="1F2937"/>
-                </a:solidFill>
-                <a:latin typeface="Arial"/>
-              </a:rPr>
-              <a:t>chấp</a:t>
-            </a:r>
-            <a:r>
-              <a:rPr sz="1300" b="0" dirty="0">
-                <a:solidFill>
-                  <a:srgbClr val="1F2937"/>
-                </a:solidFill>
-                <a:latin typeface="Arial"/>
-              </a:rPr>
-              <a:t> </a:t>
-            </a:r>
-            <a:r>
-              <a:rPr sz="1300" b="0" dirty="0" err="1">
-                <a:solidFill>
-                  <a:srgbClr val="1F2937"/>
-                </a:solidFill>
-                <a:latin typeface="Arial"/>
-              </a:rPr>
-              <a:t>thuận</a:t>
-            </a:r>
-            <a:r>
-              <a:rPr sz="1300" b="0" dirty="0">
-                <a:solidFill>
-                  <a:srgbClr val="1F2937"/>
-                </a:solidFill>
-                <a:latin typeface="Arial"/>
-              </a:rPr>
-              <a:t> </a:t>
-            </a:r>
-            <a:r>
-              <a:rPr sz="1300" b="0" dirty="0" err="1">
-                <a:solidFill>
-                  <a:srgbClr val="1F2937"/>
-                </a:solidFill>
-                <a:latin typeface="Arial"/>
-              </a:rPr>
-              <a:t>thay</a:t>
-            </a:r>
-            <a:r>
-              <a:rPr sz="1300" b="0" dirty="0">
-                <a:solidFill>
-                  <a:srgbClr val="1F2937"/>
-                </a:solidFill>
-                <a:latin typeface="Arial"/>
-              </a:rPr>
-              <a:t> </a:t>
-            </a:r>
-            <a:r>
-              <a:rPr sz="1300" b="0" dirty="0" err="1">
-                <a:solidFill>
-                  <a:srgbClr val="1F2937"/>
-                </a:solidFill>
-                <a:latin typeface="Arial"/>
-              </a:rPr>
-              <a:t>thế</a:t>
-            </a:r>
-            <a:r>
-              <a:rPr sz="1300" b="0" dirty="0">
-                <a:solidFill>
-                  <a:srgbClr val="1F2937"/>
-                </a:solidFill>
-                <a:latin typeface="Arial"/>
-              </a:rPr>
-              <a:t> Bootstrap.</a:t>
+              <a:rPr sz="1300" b="0">
+                <a:solidFill>
+                  <a:srgbClr val="1F2937"/>
+                </a:solidFill>
+                <a:latin typeface="Arial"/>
+              </a:rPr>
+              <a:t>•  React và Ant Design được mentor chấp thuận thay thế Bootstrap.</a:t>
             </a:r>
           </a:p>
           <a:p>
@@ -29999,229 +27435,13 @@
               </a:defRPr>
             </a:pPr>
             <a:r>
-              <a:rPr sz="1300" b="0" dirty="0">
-                <a:solidFill>
-                  <a:srgbClr val="1F2937"/>
-                </a:solidFill>
-                <a:latin typeface="Arial"/>
-              </a:rPr>
-              <a:t>•  MySQL </a:t>
-            </a:r>
-            <a:r>
-              <a:rPr sz="1300" b="0" dirty="0" err="1">
-                <a:solidFill>
-                  <a:srgbClr val="1F2937"/>
-                </a:solidFill>
-                <a:latin typeface="Arial"/>
-              </a:rPr>
-              <a:t>phù</a:t>
-            </a:r>
-            <a:r>
-              <a:rPr sz="1300" b="0" dirty="0">
-                <a:solidFill>
-                  <a:srgbClr val="1F2937"/>
-                </a:solidFill>
-                <a:latin typeface="Arial"/>
-              </a:rPr>
-              <a:t> </a:t>
-            </a:r>
-            <a:r>
-              <a:rPr sz="1300" b="0" dirty="0" err="1">
-                <a:solidFill>
-                  <a:srgbClr val="1F2937"/>
-                </a:solidFill>
-                <a:latin typeface="Arial"/>
-              </a:rPr>
-              <a:t>hợp</a:t>
-            </a:r>
-            <a:r>
-              <a:rPr sz="1300" b="0" dirty="0">
-                <a:solidFill>
-                  <a:srgbClr val="1F2937"/>
-                </a:solidFill>
-                <a:latin typeface="Arial"/>
-              </a:rPr>
-              <a:t> </a:t>
-            </a:r>
-            <a:r>
-              <a:rPr sz="1300" b="0" dirty="0" err="1">
-                <a:solidFill>
-                  <a:srgbClr val="1F2937"/>
-                </a:solidFill>
-                <a:latin typeface="Arial"/>
-              </a:rPr>
-              <a:t>dữ</a:t>
-            </a:r>
-            <a:r>
-              <a:rPr sz="1300" b="0" dirty="0">
-                <a:solidFill>
-                  <a:srgbClr val="1F2937"/>
-                </a:solidFill>
-                <a:latin typeface="Arial"/>
-              </a:rPr>
-              <a:t> </a:t>
-            </a:r>
-            <a:r>
-              <a:rPr sz="1300" b="0" dirty="0" err="1">
-                <a:solidFill>
-                  <a:srgbClr val="1F2937"/>
-                </a:solidFill>
-                <a:latin typeface="Arial"/>
-              </a:rPr>
-              <a:t>liệu</a:t>
-            </a:r>
-            <a:r>
-              <a:rPr sz="1300" b="0" dirty="0">
-                <a:solidFill>
-                  <a:srgbClr val="1F2937"/>
-                </a:solidFill>
-                <a:latin typeface="Arial"/>
-              </a:rPr>
-              <a:t> </a:t>
-            </a:r>
-            <a:r>
-              <a:rPr sz="1300" b="0" dirty="0" err="1">
-                <a:solidFill>
-                  <a:srgbClr val="1F2937"/>
-                </a:solidFill>
-                <a:latin typeface="Arial"/>
-              </a:rPr>
-              <a:t>quan</a:t>
-            </a:r>
-            <a:r>
-              <a:rPr sz="1300" b="0" dirty="0">
-                <a:solidFill>
-                  <a:srgbClr val="1F2937"/>
-                </a:solidFill>
-                <a:latin typeface="Arial"/>
-              </a:rPr>
-              <a:t> </a:t>
-            </a:r>
-            <a:r>
-              <a:rPr sz="1300" b="0" dirty="0" err="1">
-                <a:solidFill>
-                  <a:srgbClr val="1F2937"/>
-                </a:solidFill>
-                <a:latin typeface="Arial"/>
-              </a:rPr>
-              <a:t>hệ</a:t>
-            </a:r>
-            <a:r>
-              <a:rPr sz="1300" b="0" dirty="0">
-                <a:solidFill>
-                  <a:srgbClr val="1F2937"/>
-                </a:solidFill>
-                <a:latin typeface="Arial"/>
-              </a:rPr>
-              <a:t>: user, </a:t>
-            </a:r>
-            <a:r>
-              <a:rPr sz="1300" b="0" dirty="0" err="1">
-                <a:solidFill>
-                  <a:srgbClr val="1F2937"/>
-                </a:solidFill>
-                <a:latin typeface="Arial"/>
-              </a:rPr>
-              <a:t>kết</a:t>
-            </a:r>
-            <a:r>
-              <a:rPr sz="1300" b="0" dirty="0">
-                <a:solidFill>
-                  <a:srgbClr val="1F2937"/>
-                </a:solidFill>
-                <a:latin typeface="Arial"/>
-              </a:rPr>
-              <a:t> </a:t>
-            </a:r>
-            <a:r>
-              <a:rPr sz="1300" b="0" dirty="0" err="1">
-                <a:solidFill>
-                  <a:srgbClr val="1F2937"/>
-                </a:solidFill>
-                <a:latin typeface="Arial"/>
-              </a:rPr>
-              <a:t>quả</a:t>
-            </a:r>
-            <a:r>
-              <a:rPr sz="1300" b="0" dirty="0">
-                <a:solidFill>
-                  <a:srgbClr val="1F2937"/>
-                </a:solidFill>
-                <a:latin typeface="Arial"/>
-              </a:rPr>
-              <a:t>, </a:t>
-            </a:r>
-            <a:r>
-              <a:rPr sz="1300" b="0" dirty="0" err="1">
-                <a:solidFill>
-                  <a:srgbClr val="1F2937"/>
-                </a:solidFill>
-                <a:latin typeface="Arial"/>
-              </a:rPr>
-              <a:t>giải</a:t>
-            </a:r>
-            <a:r>
-              <a:rPr sz="1300" b="0" dirty="0">
-                <a:solidFill>
-                  <a:srgbClr val="1F2937"/>
-                </a:solidFill>
-                <a:latin typeface="Arial"/>
-              </a:rPr>
-              <a:t> </a:t>
-            </a:r>
-            <a:r>
-              <a:rPr sz="1300" b="0" dirty="0" err="1">
-                <a:solidFill>
-                  <a:srgbClr val="1F2937"/>
-                </a:solidFill>
-                <a:latin typeface="Arial"/>
-              </a:rPr>
-              <a:t>thưởng</a:t>
-            </a:r>
-            <a:r>
-              <a:rPr sz="1300" b="0" dirty="0">
-                <a:solidFill>
-                  <a:srgbClr val="1F2937"/>
-                </a:solidFill>
-                <a:latin typeface="Arial"/>
-              </a:rPr>
-              <a:t>, </a:t>
-            </a:r>
-            <a:r>
-              <a:rPr sz="1300" b="0" dirty="0" err="1">
-                <a:solidFill>
-                  <a:srgbClr val="1F2937"/>
-                </a:solidFill>
-                <a:latin typeface="Arial"/>
-              </a:rPr>
-              <a:t>lịch</a:t>
-            </a:r>
-            <a:r>
-              <a:rPr sz="1300" b="0" dirty="0">
-                <a:solidFill>
-                  <a:srgbClr val="1F2937"/>
-                </a:solidFill>
-                <a:latin typeface="Arial"/>
-              </a:rPr>
-              <a:t> </a:t>
-            </a:r>
-            <a:r>
-              <a:rPr sz="1300" b="0" dirty="0" err="1">
-                <a:solidFill>
-                  <a:srgbClr val="1F2937"/>
-                </a:solidFill>
-                <a:latin typeface="Arial"/>
-              </a:rPr>
-              <a:t>sử</a:t>
-            </a:r>
-            <a:r>
-              <a:rPr sz="1300" b="0" dirty="0">
-                <a:solidFill>
-                  <a:srgbClr val="1F2937"/>
-                </a:solidFill>
-                <a:latin typeface="Arial"/>
-              </a:rPr>
-              <a:t>.</a:t>
+              <a:rPr sz="1300" b="0">
+                <a:solidFill>
+                  <a:srgbClr val="1F2937"/>
+                </a:solidFill>
+                <a:latin typeface="Arial"/>
+              </a:rPr>
+              <a:t>•  MySQL phù hợp dữ liệu quan hệ: user, kết quả, giải thưởng, lịch sử.</a:t>
             </a:r>
           </a:p>
           <a:p>
@@ -30240,139 +27460,13 @@
               </a:defRPr>
             </a:pPr>
             <a:r>
-              <a:rPr sz="1300" b="0" dirty="0">
-                <a:solidFill>
-                  <a:srgbClr val="1F2937"/>
-                </a:solidFill>
-                <a:latin typeface="Arial"/>
-              </a:rPr>
-              <a:t>•  Docker </a:t>
-            </a:r>
-            <a:r>
-              <a:rPr sz="1300" b="0" dirty="0" err="1">
-                <a:solidFill>
-                  <a:srgbClr val="1F2937"/>
-                </a:solidFill>
-                <a:latin typeface="Arial"/>
-              </a:rPr>
-              <a:t>giúp</a:t>
-            </a:r>
-            <a:r>
-              <a:rPr sz="1300" b="0" dirty="0">
-                <a:solidFill>
-                  <a:srgbClr val="1F2937"/>
-                </a:solidFill>
-                <a:latin typeface="Arial"/>
-              </a:rPr>
-              <a:t> </a:t>
-            </a:r>
-            <a:r>
-              <a:rPr sz="1300" b="0" dirty="0" err="1">
-                <a:solidFill>
-                  <a:srgbClr val="1F2937"/>
-                </a:solidFill>
-                <a:latin typeface="Arial"/>
-              </a:rPr>
-              <a:t>môi</a:t>
-            </a:r>
-            <a:r>
-              <a:rPr sz="1300" b="0" dirty="0">
-                <a:solidFill>
-                  <a:srgbClr val="1F2937"/>
-                </a:solidFill>
-                <a:latin typeface="Arial"/>
-              </a:rPr>
-              <a:t> </a:t>
-            </a:r>
-            <a:r>
-              <a:rPr sz="1300" b="0" dirty="0" err="1">
-                <a:solidFill>
-                  <a:srgbClr val="1F2937"/>
-                </a:solidFill>
-                <a:latin typeface="Arial"/>
-              </a:rPr>
-              <a:t>trường</a:t>
-            </a:r>
-            <a:r>
-              <a:rPr sz="1300" b="0" dirty="0">
-                <a:solidFill>
-                  <a:srgbClr val="1F2937"/>
-                </a:solidFill>
-                <a:latin typeface="Arial"/>
-              </a:rPr>
-              <a:t> dev/prod </a:t>
-            </a:r>
-            <a:r>
-              <a:rPr sz="1300" b="0" dirty="0" err="1">
-                <a:solidFill>
-                  <a:srgbClr val="1F2937"/>
-                </a:solidFill>
-                <a:latin typeface="Arial"/>
-              </a:rPr>
-              <a:t>đồng</a:t>
-            </a:r>
-            <a:r>
-              <a:rPr sz="1300" b="0" dirty="0">
-                <a:solidFill>
-                  <a:srgbClr val="1F2937"/>
-                </a:solidFill>
-                <a:latin typeface="Arial"/>
-              </a:rPr>
-              <a:t> </a:t>
-            </a:r>
-            <a:r>
-              <a:rPr sz="1300" b="0" dirty="0" err="1">
-                <a:solidFill>
-                  <a:srgbClr val="1F2937"/>
-                </a:solidFill>
-                <a:latin typeface="Arial"/>
-              </a:rPr>
-              <a:t>nhất</a:t>
-            </a:r>
-            <a:r>
-              <a:rPr sz="1300" b="0" dirty="0">
-                <a:solidFill>
-                  <a:srgbClr val="1F2937"/>
-                </a:solidFill>
-                <a:latin typeface="Arial"/>
-              </a:rPr>
-              <a:t> </a:t>
-            </a:r>
-            <a:r>
-              <a:rPr sz="1300" b="0" dirty="0" err="1">
-                <a:solidFill>
-                  <a:srgbClr val="1F2937"/>
-                </a:solidFill>
-                <a:latin typeface="Arial"/>
-              </a:rPr>
-              <a:t>và</a:t>
-            </a:r>
-            <a:r>
-              <a:rPr sz="1300" b="0" dirty="0">
-                <a:solidFill>
-                  <a:srgbClr val="1F2937"/>
-                </a:solidFill>
-                <a:latin typeface="Arial"/>
-              </a:rPr>
-              <a:t> </a:t>
-            </a:r>
-            <a:r>
-              <a:rPr sz="1300" b="0" dirty="0" err="1">
-                <a:solidFill>
-                  <a:srgbClr val="1F2937"/>
-                </a:solidFill>
-                <a:latin typeface="Arial"/>
-              </a:rPr>
-              <a:t>dễ</a:t>
-            </a:r>
-            <a:r>
-              <a:rPr sz="1300" b="0" dirty="0">
-                <a:solidFill>
-                  <a:srgbClr val="1F2937"/>
-                </a:solidFill>
-                <a:latin typeface="Arial"/>
-              </a:rPr>
-              <a:t> demo.</a:t>
+              <a:rPr sz="1300" b="0">
+                <a:solidFill>
+                  <a:srgbClr val="1F2937"/>
+                </a:solidFill>
+                <a:latin typeface="Arial"/>
+              </a:rPr>
+              <a:t>•  Docker giúp môi trường dev/prod đồng nhất và dễ demo.</a:t>
             </a:r>
           </a:p>
         </p:txBody>
@@ -31283,8 +28377,8 @@
         </p:blipFill>
         <p:spPr>
           <a:xfrm>
-            <a:off x="1922788" y="1554480"/>
-            <a:ext cx="8343376" cy="4251960"/>
+            <a:off x="1927555" y="1554480"/>
+            <a:ext cx="8333841" cy="4251960"/>
           </a:xfrm>
           <a:prstGeom prst="rect">
             <a:avLst/>
@@ -31882,83 +28976,14 @@
                         </a:defRPr>
                       </a:pPr>
                       <a:r>
-                        <a:rPr sz="1200" b="0" dirty="0">
+                        <a:rPr sz="1200" b="0">
                           <a:solidFill>
                             <a:srgbClr val="1F2937"/>
                           </a:solidFill>
                           <a:latin typeface="Arial"/>
                         </a:rPr>
-                        <a:t>Lưu varchar </a:t>
+                        <a:t>Lưu varchar cho ticket_number và winning_number</a:t>
                       </a:r>
-                      <a:r>
-                        <a:rPr sz="1200" b="0" dirty="0" err="1">
-                          <a:solidFill>
-                            <a:srgbClr val="1F2937"/>
-                          </a:solidFill>
-                          <a:latin typeface="Arial"/>
-                        </a:rPr>
-                        <a:t>cho</a:t>
-                      </a:r>
-                      <a:r>
-                        <a:rPr sz="1200" b="0" dirty="0">
-                          <a:solidFill>
-                            <a:srgbClr val="1F2937"/>
-                          </a:solidFill>
-                          <a:latin typeface="Arial"/>
-                        </a:rPr>
-                        <a:t> </a:t>
-                      </a:r>
-                      <a:r>
-                        <a:rPr sz="1200" b="0" dirty="0" err="1">
-                          <a:solidFill>
-                            <a:srgbClr val="1F2937"/>
-                          </a:solidFill>
-                          <a:latin typeface="Arial"/>
-                        </a:rPr>
-                        <a:t>ticket_number</a:t>
-                      </a:r>
-                      <a:r>
-                        <a:rPr sz="1200" b="0" dirty="0">
-                          <a:solidFill>
-                            <a:srgbClr val="1F2937"/>
-                          </a:solidFill>
-                          <a:latin typeface="Arial"/>
-                        </a:rPr>
-                        <a:t> </a:t>
-                      </a:r>
-                      <a:r>
-                        <a:rPr sz="1200" b="0" dirty="0" err="1">
-                          <a:solidFill>
-                            <a:srgbClr val="1F2937"/>
-                          </a:solidFill>
-                          <a:latin typeface="Arial"/>
-                        </a:rPr>
-                        <a:t>và</a:t>
-                      </a:r>
-                      <a:r>
-                        <a:rPr sz="1200" b="0" dirty="0">
-                          <a:solidFill>
-                            <a:srgbClr val="1F2937"/>
-                          </a:solidFill>
-                          <a:latin typeface="Arial"/>
-                        </a:rPr>
-                        <a:t> </a:t>
-                      </a:r>
-                      <a:r>
-                        <a:rPr sz="1200" b="0" dirty="0" err="1">
-                          <a:solidFill>
-                            <a:srgbClr val="1F2937"/>
-                          </a:solidFill>
-                          <a:latin typeface="Arial"/>
-                        </a:rPr>
-                        <a:t>winning_number</a:t>
-                      </a:r>
-                      <a:endParaRPr sz="1200" b="0" dirty="0">
-                        <a:solidFill>
-                          <a:srgbClr val="1F2937"/>
-                        </a:solidFill>
-                        <a:latin typeface="Arial"/>
-                      </a:endParaRPr>
                     </a:p>
                   </a:txBody>
                   <a:tcPr marL="73152" marR="73152" marT="27432" marB="27432" anchor="ctr">
@@ -32048,49 +29073,13 @@
                         </a:defRPr>
                       </a:pPr>
                       <a:r>
-                        <a:rPr sz="1200" b="0" dirty="0">
+                        <a:rPr sz="1200" b="0">
                           <a:solidFill>
                             <a:srgbClr val="1F2937"/>
                           </a:solidFill>
                           <a:latin typeface="Arial"/>
                         </a:rPr>
-                        <a:t>UNIQUE(</a:t>
-                      </a:r>
-                      <a:r>
-                        <a:rPr sz="1200" b="0" dirty="0" err="1">
-                          <a:solidFill>
-                            <a:srgbClr val="1F2937"/>
-                          </a:solidFill>
-                          <a:latin typeface="Arial"/>
-                        </a:rPr>
-                        <a:t>station_id</a:t>
-                      </a:r>
-                      <a:r>
-                        <a:rPr sz="1200" b="0" dirty="0">
-                          <a:solidFill>
-                            <a:srgbClr val="1F2937"/>
-                          </a:solidFill>
-                          <a:latin typeface="Arial"/>
-                        </a:rPr>
-                        <a:t>, </a:t>
-                      </a:r>
-                      <a:r>
-                        <a:rPr sz="1200" b="0" dirty="0" err="1">
-                          <a:solidFill>
-                            <a:srgbClr val="1F2937"/>
-                          </a:solidFill>
-                          <a:latin typeface="Arial"/>
-                        </a:rPr>
-                        <a:t>draw_date</a:t>
-                      </a:r>
-                      <a:r>
-                        <a:rPr sz="1200" b="0" dirty="0">
-                          <a:solidFill>
-                            <a:srgbClr val="1F2937"/>
-                          </a:solidFill>
-                          <a:latin typeface="Arial"/>
-                        </a:rPr>
-                        <a:t>)</a:t>
+                        <a:t>UNIQUE(station_id, draw_date)</a:t>
                       </a:r>
                     </a:p>
                   </a:txBody>
@@ -32181,67 +29170,13 @@
                         </a:defRPr>
                       </a:pPr>
                       <a:r>
-                        <a:rPr sz="1200" b="0" dirty="0">
+                        <a:rPr sz="1200" b="0">
                           <a:solidFill>
                             <a:srgbClr val="1F2937"/>
                           </a:solidFill>
                           <a:latin typeface="Arial"/>
                         </a:rPr>
-                        <a:t>UNIQUE(</a:t>
-                      </a:r>
-                      <a:r>
-                        <a:rPr sz="1200" b="0" dirty="0" err="1">
-                          <a:solidFill>
-                            <a:srgbClr val="1F2937"/>
-                          </a:solidFill>
-                          <a:latin typeface="Arial"/>
-                        </a:rPr>
-                        <a:t>result_id</a:t>
-                      </a:r>
-                      <a:r>
-                        <a:rPr sz="1200" b="0" dirty="0">
-                          <a:solidFill>
-                            <a:srgbClr val="1F2937"/>
-                          </a:solidFill>
-                          <a:latin typeface="Arial"/>
-                        </a:rPr>
-                        <a:t>, </a:t>
-                      </a:r>
-                      <a:r>
-                        <a:rPr sz="1200" b="0" dirty="0" err="1">
-                          <a:solidFill>
-                            <a:srgbClr val="1F2937"/>
-                          </a:solidFill>
-                          <a:latin typeface="Arial"/>
-                        </a:rPr>
-                        <a:t>prize_type</a:t>
-                      </a:r>
-                      <a:r>
-                        <a:rPr sz="1200" b="0" dirty="0">
-                          <a:solidFill>
-                            <a:srgbClr val="1F2937"/>
-                          </a:solidFill>
-                          <a:latin typeface="Arial"/>
-                        </a:rPr>
-                        <a:t>, </a:t>
-                      </a:r>
-                      <a:r>
-                        <a:rPr sz="1200" b="0" dirty="0" err="1">
-                          <a:solidFill>
-                            <a:srgbClr val="1F2937"/>
-                          </a:solidFill>
-                          <a:latin typeface="Arial"/>
-                        </a:rPr>
-                        <a:t>winning_number</a:t>
-                      </a:r>
-                      <a:r>
-                        <a:rPr sz="1200" b="0" dirty="0">
-                          <a:solidFill>
-                            <a:srgbClr val="1F2937"/>
-                          </a:solidFill>
-                          <a:latin typeface="Arial"/>
-                        </a:rPr>
-                        <a:t>)</a:t>
+                        <a:t>UNIQUE(result_id, prize_type, winning_number)</a:t>
                       </a:r>
                     </a:p>
                   </a:txBody>
@@ -32332,22 +29267,13 @@
                         </a:defRPr>
                       </a:pPr>
                       <a:r>
-                        <a:rPr sz="1200" b="0" dirty="0" err="1">
+                        <a:rPr sz="1200" b="0">
                           <a:solidFill>
                             <a:srgbClr val="1F2937"/>
                           </a:solidFill>
                           <a:latin typeface="Arial"/>
                         </a:rPr>
-                        <a:t>check_sessions.user_id</a:t>
-                      </a:r>
-                      <a:r>
-                        <a:rPr sz="1200" b="0" dirty="0">
-                          <a:solidFill>
-                            <a:srgbClr val="1F2937"/>
-                          </a:solidFill>
-                          <a:latin typeface="Arial"/>
-                        </a:rPr>
-                        <a:t> NULL</a:t>
+                        <a:t>check_sessions.user_id NULL</a:t>
                       </a:r>
                     </a:p>
                   </a:txBody>
@@ -32438,76 +29364,13 @@
                         </a:defRPr>
                       </a:pPr>
                       <a:r>
-                        <a:rPr sz="1200" b="0" dirty="0" err="1">
+                        <a:rPr sz="1200" b="0">
                           <a:solidFill>
                             <a:srgbClr val="1F2937"/>
                           </a:solidFill>
                           <a:latin typeface="Arial"/>
                         </a:rPr>
-                        <a:t>total_spent</a:t>
-                      </a:r>
-                      <a:r>
-                        <a:rPr sz="1200" b="0" dirty="0">
-                          <a:solidFill>
-                            <a:srgbClr val="1F2937"/>
-                          </a:solidFill>
-                          <a:latin typeface="Arial"/>
-                        </a:rPr>
-                        <a:t> </a:t>
-                      </a:r>
-                      <a:r>
-                        <a:rPr sz="1200" b="0" dirty="0" err="1">
-                          <a:solidFill>
-                            <a:srgbClr val="1F2937"/>
-                          </a:solidFill>
-                          <a:latin typeface="Arial"/>
-                        </a:rPr>
-                        <a:t>và</a:t>
-                      </a:r>
-                      <a:r>
-                        <a:rPr sz="1200" b="0" dirty="0">
-                          <a:solidFill>
-                            <a:srgbClr val="1F2937"/>
-                          </a:solidFill>
-                          <a:latin typeface="Arial"/>
-                        </a:rPr>
-                        <a:t> </a:t>
-                      </a:r>
-                      <a:r>
-                        <a:rPr sz="1200" b="0" dirty="0" err="1">
-                          <a:solidFill>
-                            <a:srgbClr val="1F2937"/>
-                          </a:solidFill>
-                          <a:latin typeface="Arial"/>
-                        </a:rPr>
-                        <a:t>total_won</a:t>
-                      </a:r>
-                      <a:r>
-                        <a:rPr sz="1200" b="0" dirty="0">
-                          <a:solidFill>
-                            <a:srgbClr val="1F2937"/>
-                          </a:solidFill>
-                          <a:latin typeface="Arial"/>
-                        </a:rPr>
-                        <a:t> </a:t>
-                      </a:r>
-                      <a:r>
-                        <a:rPr sz="1200" b="0" dirty="0" err="1">
-                          <a:solidFill>
-                            <a:srgbClr val="1F2937"/>
-                          </a:solidFill>
-                          <a:latin typeface="Arial"/>
-                        </a:rPr>
-                        <a:t>theo</a:t>
-                      </a:r>
-                      <a:r>
-                        <a:rPr sz="1200" b="0" dirty="0">
-                          <a:solidFill>
-                            <a:srgbClr val="1F2937"/>
-                          </a:solidFill>
-                          <a:latin typeface="Arial"/>
-                        </a:rPr>
-                        <a:t> session</a:t>
+                        <a:t>total_spent và total_won theo session</a:t>
                       </a:r>
                     </a:p>
                   </a:txBody>
@@ -32598,29 +29461,14 @@
                         </a:defRPr>
                       </a:pPr>
                       <a:r>
-                        <a:rPr sz="1200" b="0" dirty="0">
+                        <a:rPr sz="1200" b="0">
                           <a:solidFill>
                             <a:srgbClr val="1F2937"/>
                           </a:solidFill>
                           <a:latin typeface="Arial"/>
                         </a:rPr>
-                        <a:t>Atomic UPDATE </a:t>
+                        <a:t>Atomic UPDATE total_queries</a:t>
                       </a:r>
-                      <a:r>
-                        <a:rPr sz="1200" b="0" dirty="0" err="1">
-                          <a:solidFill>
-                            <a:srgbClr val="1F2937"/>
-                          </a:solidFill>
-                          <a:latin typeface="Arial"/>
-                        </a:rPr>
-                        <a:t>total_queries</a:t>
-                      </a:r>
-                      <a:endParaRPr sz="1200" b="0" dirty="0">
-                        <a:solidFill>
-                          <a:srgbClr val="1F2937"/>
-                        </a:solidFill>
-                        <a:latin typeface="Arial"/>
-                      </a:endParaRPr>
                     </a:p>
                   </a:txBody>
                   <a:tcPr marL="73152" marR="73152" marT="27432" marB="27432" anchor="ctr">
@@ -32643,128 +29491,14 @@
                         </a:defRPr>
                       </a:pPr>
                       <a:r>
-                        <a:rPr sz="1200" b="0" dirty="0" err="1">
+                        <a:rPr sz="1200" b="0">
                           <a:solidFill>
                             <a:srgbClr val="1F2937"/>
                           </a:solidFill>
                           <a:latin typeface="Arial"/>
                         </a:rPr>
-                        <a:t>Tránh</a:t>
+                        <a:t>Tránh race condition khi nhiều người dò cùng lúc</a:t>
                       </a:r>
-                      <a:r>
-                        <a:rPr sz="1200" b="0" dirty="0">
-                          <a:solidFill>
-                            <a:srgbClr val="1F2937"/>
-                          </a:solidFill>
-                          <a:latin typeface="Arial"/>
-                        </a:rPr>
-                        <a:t> race condition </a:t>
-                      </a:r>
-                      <a:r>
-                        <a:rPr sz="1200" b="0" dirty="0" err="1">
-                          <a:solidFill>
-                            <a:srgbClr val="1F2937"/>
-                          </a:solidFill>
-                          <a:latin typeface="Arial"/>
-                        </a:rPr>
-                        <a:t>khi</a:t>
-                      </a:r>
-                      <a:r>
-                        <a:rPr sz="1200" b="0" dirty="0">
-                          <a:solidFill>
-                            <a:srgbClr val="1F2937"/>
-                          </a:solidFill>
-                          <a:latin typeface="Arial"/>
-                        </a:rPr>
-                        <a:t> </a:t>
-                      </a:r>
-                      <a:r>
-                        <a:rPr sz="1200" b="0" dirty="0" err="1">
-                          <a:solidFill>
-                            <a:srgbClr val="1F2937"/>
-                          </a:solidFill>
-                          <a:latin typeface="Arial"/>
-                        </a:rPr>
-                        <a:t>nhiều</a:t>
-                      </a:r>
-                      <a:r>
-                        <a:rPr sz="1200" b="0" dirty="0">
-                          <a:solidFill>
-                            <a:srgbClr val="1F2937"/>
-                          </a:solidFill>
-                          <a:latin typeface="Arial"/>
-                        </a:rPr>
-                        <a:t> </a:t>
-                      </a:r>
-                      <a:r>
-                        <a:rPr sz="1200" b="0" dirty="0" err="1">
-                          <a:solidFill>
-                            <a:srgbClr val="1F2937"/>
-                          </a:solidFill>
-                          <a:latin typeface="Arial"/>
-                        </a:rPr>
-                        <a:t>người</a:t>
-                      </a:r>
-                      <a:r>
-                        <a:rPr sz="1200" b="0" dirty="0">
-                          <a:solidFill>
-                            <a:srgbClr val="1F2937"/>
-                          </a:solidFill>
-                          <a:latin typeface="Arial"/>
-                        </a:rPr>
-                        <a:t> </a:t>
-                      </a:r>
-                      <a:r>
-                        <a:rPr sz="1200" b="0" dirty="0" err="1">
-                          <a:solidFill>
-                            <a:srgbClr val="1F2937"/>
-                          </a:solidFill>
-                          <a:latin typeface="Arial"/>
-                        </a:rPr>
-                        <a:t>dò</a:t>
-                      </a:r>
-                      <a:r>
-                        <a:rPr sz="1200" b="0" dirty="0">
-                          <a:solidFill>
-                            <a:srgbClr val="1F2937"/>
-                          </a:solidFill>
-                          <a:latin typeface="Arial"/>
-                        </a:rPr>
-                        <a:t> </a:t>
-                      </a:r>
-                      <a:r>
-                        <a:rPr sz="1200" b="0" dirty="0" err="1">
-                          <a:solidFill>
-                            <a:srgbClr val="1F2937"/>
-                          </a:solidFill>
-                          <a:latin typeface="Arial"/>
-                        </a:rPr>
-                        <a:t>cùng</a:t>
-                      </a:r>
-                      <a:r>
-                        <a:rPr sz="1200" b="0" dirty="0">
-                          <a:solidFill>
-                            <a:srgbClr val="1F2937"/>
-                          </a:solidFill>
-                          <a:latin typeface="Arial"/>
-                        </a:rPr>
-                        <a:t> </a:t>
-                      </a:r>
-                      <a:r>
-                        <a:rPr sz="1200" b="0" dirty="0" err="1">
-                          <a:solidFill>
-                            <a:srgbClr val="1F2937"/>
-                          </a:solidFill>
-                          <a:latin typeface="Arial"/>
-                        </a:rPr>
-                        <a:t>lúc</a:t>
-                      </a:r>
-                      <a:endParaRPr sz="1200" b="0" dirty="0">
-                        <a:solidFill>
-                          <a:srgbClr val="1F2937"/>
-                        </a:solidFill>
-                        <a:latin typeface="Arial"/>
-                      </a:endParaRPr>
                     </a:p>
                   </a:txBody>
                   <a:tcPr marL="73152" marR="73152" marT="27432" marB="27432" anchor="ctr">
@@ -33225,7 +29959,7 @@
         <p:spPr>
           <a:xfrm>
             <a:off x="777240" y="5760720"/>
-            <a:ext cx="10634472" cy="548640"/>
+            <a:ext cx="10634472" cy="561949"/>
           </a:xfrm>
           <a:prstGeom prst="rect">
             <a:avLst/>
@@ -33253,13 +29987,139 @@
               </a:defRPr>
             </a:pPr>
             <a:r>
-              <a:rPr sz="1050" b="0">
-                <a:solidFill>
-                  <a:srgbClr val="1F2937"/>
-                </a:solidFill>
-                <a:latin typeface="Arial"/>
-              </a:rPr>
-              <a:t>•  Đăng ký: validate → BCrypt → user_code → ROLE_USER · Social: Google JWKS / Facebook debug_token.</a:t>
+              <a:rPr sz="1050" b="0" dirty="0">
+                <a:solidFill>
+                  <a:srgbClr val="1F2937"/>
+                </a:solidFill>
+                <a:latin typeface="Arial"/>
+              </a:rPr>
+              <a:t>•  </a:t>
+            </a:r>
+            <a:r>
+              <a:rPr sz="1050" b="0" dirty="0" err="1">
+                <a:solidFill>
+                  <a:srgbClr val="1F2937"/>
+                </a:solidFill>
+                <a:latin typeface="Arial"/>
+              </a:rPr>
+              <a:t>Đăng</a:t>
+            </a:r>
+            <a:r>
+              <a:rPr sz="1050" b="0" dirty="0">
+                <a:solidFill>
+                  <a:srgbClr val="1F2937"/>
+                </a:solidFill>
+                <a:latin typeface="Arial"/>
+              </a:rPr>
+              <a:t> </a:t>
+            </a:r>
+            <a:r>
+              <a:rPr sz="1050" b="0" dirty="0" err="1">
+                <a:solidFill>
+                  <a:srgbClr val="1F2937"/>
+                </a:solidFill>
+                <a:latin typeface="Arial"/>
+              </a:rPr>
+              <a:t>ký</a:t>
+            </a:r>
+            <a:r>
+              <a:rPr sz="1050" b="0" dirty="0">
+                <a:solidFill>
+                  <a:srgbClr val="1F2937"/>
+                </a:solidFill>
+                <a:latin typeface="Arial"/>
+              </a:rPr>
+              <a:t>: validate → </a:t>
+            </a:r>
+            <a:r>
+              <a:rPr sz="1050" b="0" dirty="0" err="1">
+                <a:solidFill>
+                  <a:srgbClr val="1F2937"/>
+                </a:solidFill>
+                <a:latin typeface="Arial"/>
+              </a:rPr>
+              <a:t>BCrypt</a:t>
+            </a:r>
+            <a:r>
+              <a:rPr sz="1050" b="0" dirty="0">
+                <a:solidFill>
+                  <a:srgbClr val="1F2937"/>
+                </a:solidFill>
+                <a:latin typeface="Arial"/>
+              </a:rPr>
+              <a:t> → </a:t>
+            </a:r>
+            <a:r>
+              <a:rPr sz="1050" b="0" dirty="0" err="1">
+                <a:solidFill>
+                  <a:srgbClr val="1F2937"/>
+                </a:solidFill>
+                <a:latin typeface="Arial"/>
+              </a:rPr>
+              <a:t>user_code</a:t>
+            </a:r>
+            <a:r>
+              <a:rPr sz="1050" b="0" dirty="0">
+                <a:solidFill>
+                  <a:srgbClr val="1F2937"/>
+                </a:solidFill>
+                <a:latin typeface="Arial"/>
+              </a:rPr>
+              <a:t> → ROLE_USER · Social: Google JWKS / Facebook </a:t>
+            </a:r>
+            <a:r>
+              <a:rPr sz="1050" b="0" dirty="0" err="1">
+                <a:solidFill>
+                  <a:srgbClr val="1F2937"/>
+                </a:solidFill>
+                <a:latin typeface="Arial"/>
+              </a:rPr>
+              <a:t>debug_token</a:t>
+            </a:r>
+            <a:r>
+              <a:rPr sz="1050" b="0" dirty="0">
+                <a:solidFill>
+                  <a:srgbClr val="1F2937"/>
+                </a:solidFill>
+                <a:latin typeface="Arial"/>
+              </a:rPr>
+              <a:t> (</a:t>
+            </a:r>
+            <a:r>
+              <a:rPr sz="1050" b="0" dirty="0" err="1">
+                <a:solidFill>
+                  <a:srgbClr val="1F2937"/>
+                </a:solidFill>
+                <a:latin typeface="Arial"/>
+              </a:rPr>
+              <a:t>không</a:t>
+            </a:r>
+            <a:r>
+              <a:rPr sz="1050" b="0" dirty="0">
+                <a:solidFill>
+                  <a:srgbClr val="1F2937"/>
+                </a:solidFill>
+                <a:latin typeface="Arial"/>
+              </a:rPr>
+              <a:t> </a:t>
+            </a:r>
+            <a:r>
+              <a:rPr sz="1050" b="0" dirty="0" err="1">
+                <a:solidFill>
+                  <a:srgbClr val="1F2937"/>
+                </a:solidFill>
+                <a:latin typeface="Arial"/>
+              </a:rPr>
+              <a:t>dùng</a:t>
+            </a:r>
+            <a:r>
+              <a:rPr sz="1050" b="0" dirty="0">
+                <a:solidFill>
+                  <a:srgbClr val="1F2937"/>
+                </a:solidFill>
+                <a:latin typeface="Arial"/>
+              </a:rPr>
+              <a:t> SDK).</a:t>
             </a:r>
           </a:p>
           <a:p>
@@ -33278,13 +30138,434 @@
               </a:defRPr>
             </a:pPr>
             <a:r>
-              <a:rPr sz="1050" b="0">
-                <a:solidFill>
-                  <a:srgbClr val="1F2937"/>
-                </a:solidFill>
-                <a:latin typeface="Arial"/>
-              </a:rPr>
-              <a:t>•  Admin: tìm kiếm · phân trang · khóa/mở khóa · đổi role · gửi email · xuất Excel/CSV/JSON.</a:t>
+              <a:rPr sz="1050" b="0" dirty="0">
+                <a:solidFill>
+                  <a:srgbClr val="1F2937"/>
+                </a:solidFill>
+                <a:latin typeface="Arial"/>
+              </a:rPr>
+              <a:t>•  </a:t>
+            </a:r>
+            <a:r>
+              <a:rPr sz="1050" b="0" dirty="0" err="1">
+                <a:solidFill>
+                  <a:srgbClr val="1F2937"/>
+                </a:solidFill>
+                <a:latin typeface="Arial"/>
+              </a:rPr>
+              <a:t>Đổi</a:t>
+            </a:r>
+            <a:r>
+              <a:rPr sz="1050" b="0" dirty="0">
+                <a:solidFill>
+                  <a:srgbClr val="1F2937"/>
+                </a:solidFill>
+                <a:latin typeface="Arial"/>
+              </a:rPr>
+              <a:t> role / </a:t>
+            </a:r>
+            <a:r>
+              <a:rPr sz="1050" b="0" dirty="0" err="1">
+                <a:solidFill>
+                  <a:srgbClr val="1F2937"/>
+                </a:solidFill>
+                <a:latin typeface="Arial"/>
+              </a:rPr>
+              <a:t>khóa</a:t>
+            </a:r>
+            <a:r>
+              <a:rPr sz="1050" b="0" dirty="0">
+                <a:solidFill>
+                  <a:srgbClr val="1F2937"/>
+                </a:solidFill>
+                <a:latin typeface="Arial"/>
+              </a:rPr>
+              <a:t> user </a:t>
+            </a:r>
+            <a:r>
+              <a:rPr sz="1050" b="0" dirty="0" err="1">
+                <a:solidFill>
+                  <a:srgbClr val="1F2937"/>
+                </a:solidFill>
+                <a:latin typeface="Arial"/>
+              </a:rPr>
+              <a:t>có</a:t>
+            </a:r>
+            <a:r>
+              <a:rPr sz="1050" b="0" dirty="0">
+                <a:solidFill>
+                  <a:srgbClr val="1F2937"/>
+                </a:solidFill>
+                <a:latin typeface="Arial"/>
+              </a:rPr>
+              <a:t> </a:t>
+            </a:r>
+            <a:r>
+              <a:rPr sz="1050" b="0" dirty="0" err="1">
+                <a:solidFill>
+                  <a:srgbClr val="1F2937"/>
+                </a:solidFill>
+                <a:latin typeface="Arial"/>
+              </a:rPr>
+              <a:t>hiệu</a:t>
+            </a:r>
+            <a:r>
+              <a:rPr sz="1050" b="0" dirty="0">
+                <a:solidFill>
+                  <a:srgbClr val="1F2937"/>
+                </a:solidFill>
+                <a:latin typeface="Arial"/>
+              </a:rPr>
+              <a:t> </a:t>
+            </a:r>
+            <a:r>
+              <a:rPr sz="1050" b="0" dirty="0" err="1">
+                <a:solidFill>
+                  <a:srgbClr val="1F2937"/>
+                </a:solidFill>
+                <a:latin typeface="Arial"/>
+              </a:rPr>
+              <a:t>lực</a:t>
+            </a:r>
+            <a:r>
+              <a:rPr sz="1050" b="0" dirty="0">
+                <a:solidFill>
+                  <a:srgbClr val="1F2937"/>
+                </a:solidFill>
+                <a:latin typeface="Arial"/>
+              </a:rPr>
+              <a:t> </a:t>
+            </a:r>
+            <a:r>
+              <a:rPr sz="1050" b="0" dirty="0" err="1">
+                <a:solidFill>
+                  <a:srgbClr val="1F2937"/>
+                </a:solidFill>
+                <a:latin typeface="Arial"/>
+              </a:rPr>
+              <a:t>ngay</a:t>
+            </a:r>
+            <a:r>
+              <a:rPr sz="1050" b="0" dirty="0">
+                <a:solidFill>
+                  <a:srgbClr val="1F2937"/>
+                </a:solidFill>
+                <a:latin typeface="Arial"/>
+              </a:rPr>
+              <a:t> request </a:t>
+            </a:r>
+            <a:r>
+              <a:rPr sz="1050" b="0" dirty="0" err="1">
+                <a:solidFill>
+                  <a:srgbClr val="1F2937"/>
+                </a:solidFill>
+                <a:latin typeface="Arial"/>
+              </a:rPr>
+              <a:t>kế</a:t>
+            </a:r>
+            <a:r>
+              <a:rPr sz="1050" b="0" dirty="0">
+                <a:solidFill>
+                  <a:srgbClr val="1F2937"/>
+                </a:solidFill>
+                <a:latin typeface="Arial"/>
+              </a:rPr>
+              <a:t> </a:t>
+            </a:r>
+            <a:r>
+              <a:rPr sz="1050" b="0" dirty="0" err="1">
+                <a:solidFill>
+                  <a:srgbClr val="1F2937"/>
+                </a:solidFill>
+                <a:latin typeface="Arial"/>
+              </a:rPr>
+              <a:t>tiếp</a:t>
+            </a:r>
+            <a:r>
+              <a:rPr sz="1050" b="0" dirty="0">
+                <a:solidFill>
+                  <a:srgbClr val="1F2937"/>
+                </a:solidFill>
+                <a:latin typeface="Arial"/>
+              </a:rPr>
+              <a:t> (filter </a:t>
+            </a:r>
+            <a:r>
+              <a:rPr sz="1050" b="0" dirty="0" err="1">
+                <a:solidFill>
+                  <a:srgbClr val="1F2937"/>
+                </a:solidFill>
+                <a:latin typeface="Arial"/>
+              </a:rPr>
+              <a:t>đọc</a:t>
+            </a:r>
+            <a:r>
+              <a:rPr sz="1050" b="0" dirty="0">
+                <a:solidFill>
+                  <a:srgbClr val="1F2937"/>
+                </a:solidFill>
+                <a:latin typeface="Arial"/>
+              </a:rPr>
+              <a:t> DB) — </a:t>
+            </a:r>
+            <a:r>
+              <a:rPr sz="1050" b="0" dirty="0" err="1">
+                <a:solidFill>
+                  <a:srgbClr val="1F2937"/>
+                </a:solidFill>
+                <a:latin typeface="Arial"/>
+              </a:rPr>
+              <a:t>không</a:t>
+            </a:r>
+            <a:r>
+              <a:rPr sz="1050" b="0" dirty="0">
+                <a:solidFill>
+                  <a:srgbClr val="1F2937"/>
+                </a:solidFill>
+                <a:latin typeface="Arial"/>
+              </a:rPr>
+              <a:t> </a:t>
+            </a:r>
+            <a:r>
+              <a:rPr sz="1050" b="0" dirty="0" err="1">
+                <a:solidFill>
+                  <a:srgbClr val="1F2937"/>
+                </a:solidFill>
+                <a:latin typeface="Arial"/>
+              </a:rPr>
+              <a:t>cần</a:t>
+            </a:r>
+            <a:r>
+              <a:rPr sz="1050" b="0" dirty="0">
+                <a:solidFill>
+                  <a:srgbClr val="1F2937"/>
+                </a:solidFill>
+                <a:latin typeface="Arial"/>
+              </a:rPr>
+              <a:t> </a:t>
+            </a:r>
+            <a:r>
+              <a:rPr sz="1050" b="0" dirty="0" err="1">
+                <a:solidFill>
+                  <a:srgbClr val="1F2937"/>
+                </a:solidFill>
+                <a:latin typeface="Arial"/>
+              </a:rPr>
+              <a:t>đăng</a:t>
+            </a:r>
+            <a:r>
+              <a:rPr sz="1050" b="0" dirty="0">
+                <a:solidFill>
+                  <a:srgbClr val="1F2937"/>
+                </a:solidFill>
+                <a:latin typeface="Arial"/>
+              </a:rPr>
+              <a:t> </a:t>
+            </a:r>
+            <a:r>
+              <a:rPr sz="1050" b="0" dirty="0" err="1">
+                <a:solidFill>
+                  <a:srgbClr val="1F2937"/>
+                </a:solidFill>
+                <a:latin typeface="Arial"/>
+              </a:rPr>
+              <a:t>nhập</a:t>
+            </a:r>
+            <a:r>
+              <a:rPr sz="1050" b="0" dirty="0">
+                <a:solidFill>
+                  <a:srgbClr val="1F2937"/>
+                </a:solidFill>
+                <a:latin typeface="Arial"/>
+              </a:rPr>
+              <a:t> </a:t>
+            </a:r>
+            <a:r>
+              <a:rPr sz="1050" b="0" dirty="0" err="1">
+                <a:solidFill>
+                  <a:srgbClr val="1F2937"/>
+                </a:solidFill>
+                <a:latin typeface="Arial"/>
+              </a:rPr>
+              <a:t>lại</a:t>
+            </a:r>
+            <a:r>
+              <a:rPr sz="1050" b="0" dirty="0">
+                <a:solidFill>
+                  <a:srgbClr val="1F2937"/>
+                </a:solidFill>
+                <a:latin typeface="Arial"/>
+              </a:rPr>
+              <a:t>.</a:t>
+            </a:r>
+          </a:p>
+          <a:p>
+            <a:pPr algn="l">
+              <a:lnSpc>
+                <a:spcPct val="108000"/>
+              </a:lnSpc>
+              <a:spcAft>
+                <a:spcPts val="200"/>
+              </a:spcAft>
+              <a:defRPr sz="1050" b="0">
+                <a:solidFill>
+                  <a:srgbClr val="1F2937"/>
+                </a:solidFill>
+                <a:latin typeface="Arial"/>
+              </a:defRPr>
+            </a:pPr>
+            <a:r>
+              <a:rPr sz="1050" b="0" dirty="0">
+                <a:solidFill>
+                  <a:srgbClr val="1F2937"/>
+                </a:solidFill>
+                <a:latin typeface="Arial"/>
+              </a:rPr>
+              <a:t>•  Admin: </a:t>
+            </a:r>
+            <a:r>
+              <a:rPr sz="1050" b="0" dirty="0" err="1">
+                <a:solidFill>
+                  <a:srgbClr val="1F2937"/>
+                </a:solidFill>
+                <a:latin typeface="Arial"/>
+              </a:rPr>
+              <a:t>tìm</a:t>
+            </a:r>
+            <a:r>
+              <a:rPr sz="1050" b="0" dirty="0">
+                <a:solidFill>
+                  <a:srgbClr val="1F2937"/>
+                </a:solidFill>
+                <a:latin typeface="Arial"/>
+              </a:rPr>
+              <a:t> </a:t>
+            </a:r>
+            <a:r>
+              <a:rPr sz="1050" b="0" dirty="0" err="1">
+                <a:solidFill>
+                  <a:srgbClr val="1F2937"/>
+                </a:solidFill>
+                <a:latin typeface="Arial"/>
+              </a:rPr>
+              <a:t>kiếm</a:t>
+            </a:r>
+            <a:r>
+              <a:rPr sz="1050" b="0" dirty="0">
+                <a:solidFill>
+                  <a:srgbClr val="1F2937"/>
+                </a:solidFill>
+                <a:latin typeface="Arial"/>
+              </a:rPr>
+              <a:t> · </a:t>
+            </a:r>
+            <a:r>
+              <a:rPr sz="1050" b="0" dirty="0" err="1">
+                <a:solidFill>
+                  <a:srgbClr val="1F2937"/>
+                </a:solidFill>
+                <a:latin typeface="Arial"/>
+              </a:rPr>
+              <a:t>khóa</a:t>
+            </a:r>
+            <a:r>
+              <a:rPr sz="1050" b="0" dirty="0">
+                <a:solidFill>
+                  <a:srgbClr val="1F2937"/>
+                </a:solidFill>
+                <a:latin typeface="Arial"/>
+              </a:rPr>
+              <a:t>/</a:t>
+            </a:r>
+            <a:r>
+              <a:rPr sz="1050" b="0" dirty="0" err="1">
+                <a:solidFill>
+                  <a:srgbClr val="1F2937"/>
+                </a:solidFill>
+                <a:latin typeface="Arial"/>
+              </a:rPr>
+              <a:t>mở</a:t>
+            </a:r>
+            <a:r>
+              <a:rPr sz="1050" b="0" dirty="0">
+                <a:solidFill>
+                  <a:srgbClr val="1F2937"/>
+                </a:solidFill>
+                <a:latin typeface="Arial"/>
+              </a:rPr>
+              <a:t> </a:t>
+            </a:r>
+            <a:r>
+              <a:rPr sz="1050" b="0" dirty="0" err="1">
+                <a:solidFill>
+                  <a:srgbClr val="1F2937"/>
+                </a:solidFill>
+                <a:latin typeface="Arial"/>
+              </a:rPr>
+              <a:t>khóa</a:t>
+            </a:r>
+            <a:r>
+              <a:rPr sz="1050" b="0" dirty="0">
+                <a:solidFill>
+                  <a:srgbClr val="1F2937"/>
+                </a:solidFill>
+                <a:latin typeface="Arial"/>
+              </a:rPr>
+              <a:t> · </a:t>
+            </a:r>
+            <a:r>
+              <a:rPr sz="1050" b="0" dirty="0" err="1">
+                <a:solidFill>
+                  <a:srgbClr val="1F2937"/>
+                </a:solidFill>
+                <a:latin typeface="Arial"/>
+              </a:rPr>
+              <a:t>đổi</a:t>
+            </a:r>
+            <a:r>
+              <a:rPr sz="1050" b="0" dirty="0">
+                <a:solidFill>
+                  <a:srgbClr val="1F2937"/>
+                </a:solidFill>
+                <a:latin typeface="Arial"/>
+              </a:rPr>
+              <a:t> role · </a:t>
+            </a:r>
+            <a:r>
+              <a:rPr sz="1050" b="0" dirty="0" err="1">
+                <a:solidFill>
+                  <a:srgbClr val="1F2937"/>
+                </a:solidFill>
+                <a:latin typeface="Arial"/>
+              </a:rPr>
+              <a:t>gửi</a:t>
+            </a:r>
+            <a:r>
+              <a:rPr sz="1050" b="0" dirty="0">
+                <a:solidFill>
+                  <a:srgbClr val="1F2937"/>
+                </a:solidFill>
+                <a:latin typeface="Arial"/>
+              </a:rPr>
+              <a:t> email · </a:t>
+            </a:r>
+            <a:r>
+              <a:rPr sz="1050" b="0" dirty="0" err="1">
+                <a:solidFill>
+                  <a:srgbClr val="1F2937"/>
+                </a:solidFill>
+                <a:latin typeface="Arial"/>
+              </a:rPr>
+              <a:t>xuất</a:t>
+            </a:r>
+            <a:r>
+              <a:rPr sz="1050" b="0" dirty="0">
+                <a:solidFill>
+                  <a:srgbClr val="1F2937"/>
+                </a:solidFill>
+                <a:latin typeface="Arial"/>
+              </a:rPr>
+              <a:t> Excel/CSV/JSON.</a:t>
             </a:r>
           </a:p>
         </p:txBody>

--- a/Task 9/Presentation/DoVeSo_BaoCao_Lab3.pptx
+++ b/Task 9/Presentation/DoVeSo_BaoCao_Lab3.pptx
@@ -327,7 +327,7 @@
           <a:p>
             <a:fld id="{5BCAD085-E8A6-8845-BD4E-CB4CCA059FC4}" type="datetimeFigureOut">
               <a:rPr lang="en-US" smtClean="0"/>
-              <a:t>8/3/2026</a:t>
+              <a:t>8/4/2026</a:t>
             </a:fld>
             <a:endParaRPr lang="en-US"/>
           </a:p>
@@ -495,7 +495,7 @@
           <a:p>
             <a:fld id="{5BCAD085-E8A6-8845-BD4E-CB4CCA059FC4}" type="datetimeFigureOut">
               <a:rPr lang="en-US" smtClean="0"/>
-              <a:t>8/3/2026</a:t>
+              <a:t>8/4/2026</a:t>
             </a:fld>
             <a:endParaRPr lang="en-US"/>
           </a:p>
@@ -673,7 +673,7 @@
           <a:p>
             <a:fld id="{5BCAD085-E8A6-8845-BD4E-CB4CCA059FC4}" type="datetimeFigureOut">
               <a:rPr lang="en-US" smtClean="0"/>
-              <a:t>8/3/2026</a:t>
+              <a:t>8/4/2026</a:t>
             </a:fld>
             <a:endParaRPr lang="en-US"/>
           </a:p>
@@ -841,7 +841,7 @@
           <a:p>
             <a:fld id="{5BCAD085-E8A6-8845-BD4E-CB4CCA059FC4}" type="datetimeFigureOut">
               <a:rPr lang="en-US" smtClean="0"/>
-              <a:t>8/3/2026</a:t>
+              <a:t>8/4/2026</a:t>
             </a:fld>
             <a:endParaRPr lang="en-US"/>
           </a:p>
@@ -1086,7 +1086,7 @@
           <a:p>
             <a:fld id="{5BCAD085-E8A6-8845-BD4E-CB4CCA059FC4}" type="datetimeFigureOut">
               <a:rPr lang="en-US" smtClean="0"/>
-              <a:t>8/3/2026</a:t>
+              <a:t>8/4/2026</a:t>
             </a:fld>
             <a:endParaRPr lang="en-US"/>
           </a:p>
@@ -1371,7 +1371,7 @@
           <a:p>
             <a:fld id="{5BCAD085-E8A6-8845-BD4E-CB4CCA059FC4}" type="datetimeFigureOut">
               <a:rPr lang="en-US" smtClean="0"/>
-              <a:t>8/3/2026</a:t>
+              <a:t>8/4/2026</a:t>
             </a:fld>
             <a:endParaRPr lang="en-US"/>
           </a:p>
@@ -1790,7 +1790,7 @@
           <a:p>
             <a:fld id="{5BCAD085-E8A6-8845-BD4E-CB4CCA059FC4}" type="datetimeFigureOut">
               <a:rPr lang="en-US" smtClean="0"/>
-              <a:t>8/3/2026</a:t>
+              <a:t>8/4/2026</a:t>
             </a:fld>
             <a:endParaRPr lang="en-US"/>
           </a:p>
@@ -1907,7 +1907,7 @@
           <a:p>
             <a:fld id="{5BCAD085-E8A6-8845-BD4E-CB4CCA059FC4}" type="datetimeFigureOut">
               <a:rPr lang="en-US" smtClean="0"/>
-              <a:t>8/3/2026</a:t>
+              <a:t>8/4/2026</a:t>
             </a:fld>
             <a:endParaRPr lang="en-US"/>
           </a:p>
@@ -2002,7 +2002,7 @@
           <a:p>
             <a:fld id="{5BCAD085-E8A6-8845-BD4E-CB4CCA059FC4}" type="datetimeFigureOut">
               <a:rPr lang="en-US" smtClean="0"/>
-              <a:t>8/3/2026</a:t>
+              <a:t>8/4/2026</a:t>
             </a:fld>
             <a:endParaRPr lang="en-US"/>
           </a:p>
@@ -2277,7 +2277,7 @@
           <a:p>
             <a:fld id="{5BCAD085-E8A6-8845-BD4E-CB4CCA059FC4}" type="datetimeFigureOut">
               <a:rPr lang="en-US" smtClean="0"/>
-              <a:t>8/3/2026</a:t>
+              <a:t>8/4/2026</a:t>
             </a:fld>
             <a:endParaRPr lang="en-US"/>
           </a:p>
@@ -2529,7 +2529,7 @@
           <a:p>
             <a:fld id="{5BCAD085-E8A6-8845-BD4E-CB4CCA059FC4}" type="datetimeFigureOut">
               <a:rPr lang="en-US" smtClean="0"/>
-              <a:t>8/3/2026</a:t>
+              <a:t>8/4/2026</a:t>
             </a:fld>
             <a:endParaRPr lang="en-US"/>
           </a:p>
@@ -2740,7 +2740,7 @@
           <a:p>
             <a:fld id="{5BCAD085-E8A6-8845-BD4E-CB4CCA059FC4}" type="datetimeFigureOut">
               <a:rPr lang="en-US" smtClean="0"/>
-              <a:t>8/3/2026</a:t>
+              <a:t>8/4/2026</a:t>
             </a:fld>
             <a:endParaRPr lang="en-US"/>
           </a:p>
@@ -25622,30 +25622,6 @@
           </a:p>
         </p:txBody>
       </p:sp>
-      <p:pic>
-        <p:nvPicPr>
-          <p:cNvPr id="10" name="Picture 9" descr="usecase-diagram.png"/>
-          <p:cNvPicPr>
-            <a:picLocks noChangeAspect="1"/>
-          </p:cNvPicPr>
-          <p:nvPr/>
-        </p:nvPicPr>
-        <p:blipFill>
-          <a:blip r:embed="rId2"/>
-          <a:stretch>
-            <a:fillRect/>
-          </a:stretch>
-        </p:blipFill>
-        <p:spPr>
-          <a:xfrm>
-            <a:off x="4075047" y="1554480"/>
-            <a:ext cx="3576699" cy="4882896"/>
-          </a:xfrm>
-          <a:prstGeom prst="rect">
-            <a:avLst/>
-          </a:prstGeom>
-        </p:spPr>
-      </p:pic>
       <p:sp>
         <p:nvSpPr>
           <p:cNvPr id="11" name="TextBox 10"/>
@@ -25826,6 +25802,36 @@
           </a:p>
         </p:txBody>
       </p:sp>
+      <p:pic>
+        <p:nvPicPr>
+          <p:cNvPr id="12" name="Picture 11">
+            <a:extLst>
+              <a:ext uri="{FF2B5EF4-FFF2-40B4-BE49-F238E27FC236}">
+                <a16:creationId xmlns:a16="http://schemas.microsoft.com/office/drawing/2014/main" id="{CC3F49B6-3576-21D4-4ABF-73BCDCEE03D1}"/>
+              </a:ext>
+            </a:extLst>
+          </p:cNvPr>
+          <p:cNvPicPr>
+            <a:picLocks noChangeAspect="1"/>
+          </p:cNvPicPr>
+          <p:nvPr/>
+        </p:nvPicPr>
+        <p:blipFill>
+          <a:blip r:embed="rId2"/>
+          <a:stretch>
+            <a:fillRect/>
+          </a:stretch>
+        </p:blipFill>
+        <p:spPr>
+          <a:xfrm>
+            <a:off x="3405211" y="1487424"/>
+            <a:ext cx="4473275" cy="5024121"/>
+          </a:xfrm>
+          <a:prstGeom prst="rect">
+            <a:avLst/>
+          </a:prstGeom>
+        </p:spPr>
+      </p:pic>
     </p:spTree>
   </p:cSld>
   <p:clrMapOvr>
